--- a/docs/pptx/whole/jx-cox-linear-ratio-death.pptx
+++ b/docs/pptx/whole/jx-cox-linear-ratio-death.pptx
@@ -2271,7 +2271,7 @@
           </p:nvSpPr>
           <p:spPr>
             <a:xfrm>
-              <a:off x="817517" y="5114368"/>
+              <a:off x="817517" y="5142518"/>
               <a:ext cx="7799693" cy="0"/>
             </a:xfrm>
             <a:custGeom>
@@ -2314,7 +2314,7 @@
           </p:nvSpPr>
           <p:spPr>
             <a:xfrm>
-              <a:off x="817517" y="4244691"/>
+              <a:off x="817517" y="4313054"/>
               <a:ext cx="7799693" cy="0"/>
             </a:xfrm>
             <a:custGeom>
@@ -2357,7 +2357,7 @@
           </p:nvSpPr>
           <p:spPr>
             <a:xfrm>
-              <a:off x="817517" y="3375014"/>
+              <a:off x="817517" y="3483591"/>
               <a:ext cx="7799693" cy="0"/>
             </a:xfrm>
             <a:custGeom>
@@ -2400,7 +2400,7 @@
           </p:nvSpPr>
           <p:spPr>
             <a:xfrm>
-              <a:off x="817517" y="2505337"/>
+              <a:off x="817517" y="2654127"/>
               <a:ext cx="7799693" cy="0"/>
             </a:xfrm>
             <a:custGeom>
@@ -2443,15 +2443,15 @@
           </p:nvSpPr>
           <p:spPr>
             <a:xfrm>
-              <a:off x="1615213" y="1896563"/>
-              <a:ext cx="0" cy="3826579"/>
+              <a:off x="1615213" y="2073503"/>
+              <a:ext cx="0" cy="3649639"/>
             </a:xfrm>
             <a:custGeom>
               <a:avLst/>
               <a:pathLst>
-                <a:path w="0" h="3826579">
+                <a:path w="0" h="3649639">
                   <a:moveTo>
-                    <a:pt x="0" y="3826579"/>
+                    <a:pt x="0" y="3649639"/>
                   </a:moveTo>
                   <a:lnTo>
                     <a:pt x="0" y="0"/>
@@ -2486,15 +2486,15 @@
           </p:nvSpPr>
           <p:spPr>
             <a:xfrm>
-              <a:off x="3387871" y="1896563"/>
-              <a:ext cx="0" cy="3826579"/>
+              <a:off x="3387871" y="2073503"/>
+              <a:ext cx="0" cy="3649639"/>
             </a:xfrm>
             <a:custGeom>
               <a:avLst/>
               <a:pathLst>
-                <a:path w="0" h="3826579">
+                <a:path w="0" h="3649639">
                   <a:moveTo>
-                    <a:pt x="0" y="3826579"/>
+                    <a:pt x="0" y="3649639"/>
                   </a:moveTo>
                   <a:lnTo>
                     <a:pt x="0" y="0"/>
@@ -2529,15 +2529,15 @@
           </p:nvSpPr>
           <p:spPr>
             <a:xfrm>
-              <a:off x="5160528" y="1896563"/>
-              <a:ext cx="0" cy="3826579"/>
+              <a:off x="5160528" y="2073503"/>
+              <a:ext cx="0" cy="3649639"/>
             </a:xfrm>
             <a:custGeom>
               <a:avLst/>
               <a:pathLst>
-                <a:path w="0" h="3826579">
+                <a:path w="0" h="3649639">
                   <a:moveTo>
-                    <a:pt x="0" y="3826579"/>
+                    <a:pt x="0" y="3649639"/>
                   </a:moveTo>
                   <a:lnTo>
                     <a:pt x="0" y="0"/>
@@ -2572,15 +2572,15 @@
           </p:nvSpPr>
           <p:spPr>
             <a:xfrm>
-              <a:off x="6933186" y="1896563"/>
-              <a:ext cx="0" cy="3826579"/>
+              <a:off x="6933186" y="2073503"/>
+              <a:ext cx="0" cy="3649639"/>
             </a:xfrm>
             <a:custGeom>
               <a:avLst/>
               <a:pathLst>
-                <a:path w="0" h="3826579">
+                <a:path w="0" h="3649639">
                   <a:moveTo>
-                    <a:pt x="0" y="3826579"/>
+                    <a:pt x="0" y="3649639"/>
                   </a:moveTo>
                   <a:lnTo>
                     <a:pt x="0" y="0"/>
@@ -2615,7 +2615,7 @@
           </p:nvSpPr>
           <p:spPr>
             <a:xfrm>
-              <a:off x="817517" y="5549207"/>
+              <a:off x="817517" y="5557249"/>
               <a:ext cx="7799693" cy="0"/>
             </a:xfrm>
             <a:custGeom>
@@ -2658,7 +2658,7 @@
           </p:nvSpPr>
           <p:spPr>
             <a:xfrm>
-              <a:off x="817517" y="4679530"/>
+              <a:off x="817517" y="4727786"/>
               <a:ext cx="7799693" cy="0"/>
             </a:xfrm>
             <a:custGeom>
@@ -2701,7 +2701,7 @@
           </p:nvSpPr>
           <p:spPr>
             <a:xfrm>
-              <a:off x="817517" y="3809853"/>
+              <a:off x="817517" y="3898322"/>
               <a:ext cx="7799693" cy="0"/>
             </a:xfrm>
             <a:custGeom>
@@ -2744,7 +2744,7 @@
           </p:nvSpPr>
           <p:spPr>
             <a:xfrm>
-              <a:off x="817517" y="2940175"/>
+              <a:off x="817517" y="3068859"/>
               <a:ext cx="7799693" cy="0"/>
             </a:xfrm>
             <a:custGeom>
@@ -2787,7 +2787,7 @@
           </p:nvSpPr>
           <p:spPr>
             <a:xfrm>
-              <a:off x="817517" y="2070498"/>
+              <a:off x="817517" y="2239395"/>
               <a:ext cx="7799693" cy="0"/>
             </a:xfrm>
             <a:custGeom>
@@ -2830,15 +2830,15 @@
           </p:nvSpPr>
           <p:spPr>
             <a:xfrm>
-              <a:off x="2501542" y="1896563"/>
-              <a:ext cx="0" cy="3826579"/>
+              <a:off x="2501542" y="2073503"/>
+              <a:ext cx="0" cy="3649639"/>
             </a:xfrm>
             <a:custGeom>
               <a:avLst/>
               <a:pathLst>
-                <a:path w="0" h="3826579">
+                <a:path w="0" h="3649639">
                   <a:moveTo>
-                    <a:pt x="0" y="3826579"/>
+                    <a:pt x="0" y="3649639"/>
                   </a:moveTo>
                   <a:lnTo>
                     <a:pt x="0" y="0"/>
@@ -2873,15 +2873,15 @@
           </p:nvSpPr>
           <p:spPr>
             <a:xfrm>
-              <a:off x="4274200" y="1896563"/>
-              <a:ext cx="0" cy="3826579"/>
+              <a:off x="4274200" y="2073503"/>
+              <a:ext cx="0" cy="3649639"/>
             </a:xfrm>
             <a:custGeom>
               <a:avLst/>
               <a:pathLst>
-                <a:path w="0" h="3826579">
+                <a:path w="0" h="3649639">
                   <a:moveTo>
-                    <a:pt x="0" y="3826579"/>
+                    <a:pt x="0" y="3649639"/>
                   </a:moveTo>
                   <a:lnTo>
                     <a:pt x="0" y="0"/>
@@ -2916,15 +2916,15 @@
           </p:nvSpPr>
           <p:spPr>
             <a:xfrm>
-              <a:off x="6046857" y="1896563"/>
-              <a:ext cx="0" cy="3826579"/>
+              <a:off x="6046857" y="2073503"/>
+              <a:ext cx="0" cy="3649639"/>
             </a:xfrm>
             <a:custGeom>
               <a:avLst/>
               <a:pathLst>
-                <a:path w="0" h="3826579">
+                <a:path w="0" h="3649639">
                   <a:moveTo>
-                    <a:pt x="0" y="3826579"/>
+                    <a:pt x="0" y="3649639"/>
                   </a:moveTo>
                   <a:lnTo>
                     <a:pt x="0" y="0"/>
@@ -2959,15 +2959,15 @@
           </p:nvSpPr>
           <p:spPr>
             <a:xfrm>
-              <a:off x="7819515" y="1896563"/>
-              <a:ext cx="0" cy="3826579"/>
+              <a:off x="7819515" y="2073503"/>
+              <a:ext cx="0" cy="3649639"/>
             </a:xfrm>
             <a:custGeom>
               <a:avLst/>
               <a:pathLst>
-                <a:path w="0" h="3826579">
+                <a:path w="0" h="3649639">
                   <a:moveTo>
-                    <a:pt x="0" y="3826579"/>
+                    <a:pt x="0" y="3649639"/>
                   </a:moveTo>
                   <a:lnTo>
                     <a:pt x="0" y="0"/>
@@ -3002,540 +3002,540 @@
           </p:nvSpPr>
           <p:spPr>
             <a:xfrm>
-              <a:off x="817517" y="1896563"/>
-              <a:ext cx="7235830" cy="3618261"/>
+              <a:off x="817517" y="2073503"/>
+              <a:ext cx="7235830" cy="3450954"/>
             </a:xfrm>
             <a:custGeom>
               <a:avLst/>
               <a:pathLst>
-                <a:path w="7235830" h="3618261">
+                <a:path w="7235830" h="3450954">
                   <a:moveTo>
                     <a:pt x="1770827" y="0"/>
                   </a:moveTo>
                   <a:lnTo>
-                    <a:pt x="1777588" y="21630"/>
-                  </a:lnTo>
-                  <a:lnTo>
-                    <a:pt x="1851348" y="243222"/>
-                  </a:lnTo>
-                  <a:lnTo>
-                    <a:pt x="1925108" y="451291"/>
-                  </a:lnTo>
-                  <a:lnTo>
-                    <a:pt x="1998868" y="646662"/>
-                  </a:lnTo>
-                  <a:lnTo>
-                    <a:pt x="2072628" y="830110"/>
-                  </a:lnTo>
-                  <a:lnTo>
-                    <a:pt x="2146388" y="1002363"/>
-                  </a:lnTo>
-                  <a:lnTo>
-                    <a:pt x="2220148" y="1164103"/>
-                  </a:lnTo>
-                  <a:lnTo>
-                    <a:pt x="2293908" y="1315973"/>
-                  </a:lnTo>
-                  <a:lnTo>
-                    <a:pt x="2367668" y="1458574"/>
-                  </a:lnTo>
-                  <a:lnTo>
-                    <a:pt x="2441428" y="1592473"/>
-                  </a:lnTo>
-                  <a:lnTo>
-                    <a:pt x="2515188" y="1718201"/>
-                  </a:lnTo>
-                  <a:lnTo>
-                    <a:pt x="2588948" y="1836255"/>
-                  </a:lnTo>
-                  <a:lnTo>
-                    <a:pt x="2662708" y="1947105"/>
-                  </a:lnTo>
-                  <a:lnTo>
-                    <a:pt x="2736468" y="2051190"/>
-                  </a:lnTo>
-                  <a:lnTo>
-                    <a:pt x="2810228" y="2148923"/>
-                  </a:lnTo>
-                  <a:lnTo>
-                    <a:pt x="2883988" y="2240692"/>
-                  </a:lnTo>
-                  <a:lnTo>
-                    <a:pt x="2957748" y="2326860"/>
-                  </a:lnTo>
-                  <a:lnTo>
-                    <a:pt x="3031508" y="2407769"/>
-                  </a:lnTo>
-                  <a:lnTo>
-                    <a:pt x="3105268" y="2483741"/>
-                  </a:lnTo>
-                  <a:lnTo>
-                    <a:pt x="3179028" y="2555076"/>
-                  </a:lnTo>
-                  <a:lnTo>
-                    <a:pt x="3252788" y="2622058"/>
-                  </a:lnTo>
-                  <a:lnTo>
-                    <a:pt x="3326548" y="2684952"/>
-                  </a:lnTo>
-                  <a:lnTo>
-                    <a:pt x="3400308" y="2744008"/>
-                  </a:lnTo>
-                  <a:lnTo>
-                    <a:pt x="3474068" y="2789613"/>
-                  </a:lnTo>
-                  <a:lnTo>
-                    <a:pt x="3547828" y="2811115"/>
-                  </a:lnTo>
-                  <a:lnTo>
-                    <a:pt x="3621588" y="2832082"/>
-                  </a:lnTo>
-                  <a:lnTo>
-                    <a:pt x="3695348" y="2852526"/>
-                  </a:lnTo>
-                  <a:lnTo>
-                    <a:pt x="3769108" y="2872461"/>
-                  </a:lnTo>
-                  <a:lnTo>
-                    <a:pt x="3842868" y="2891899"/>
-                  </a:lnTo>
-                  <a:lnTo>
-                    <a:pt x="3916628" y="2910853"/>
-                  </a:lnTo>
-                  <a:lnTo>
-                    <a:pt x="3990388" y="2929335"/>
-                  </a:lnTo>
-                  <a:lnTo>
-                    <a:pt x="4064149" y="2947356"/>
-                  </a:lnTo>
-                  <a:lnTo>
-                    <a:pt x="4137909" y="2964928"/>
-                  </a:lnTo>
-                  <a:lnTo>
-                    <a:pt x="4211669" y="2982063"/>
-                  </a:lnTo>
-                  <a:lnTo>
-                    <a:pt x="4285429" y="2998770"/>
-                  </a:lnTo>
-                  <a:lnTo>
-                    <a:pt x="4359189" y="3015062"/>
-                  </a:lnTo>
-                  <a:lnTo>
-                    <a:pt x="4432949" y="3030947"/>
-                  </a:lnTo>
-                  <a:lnTo>
-                    <a:pt x="4506709" y="3046436"/>
-                  </a:lnTo>
-                  <a:lnTo>
-                    <a:pt x="4580469" y="3061540"/>
-                  </a:lnTo>
-                  <a:lnTo>
-                    <a:pt x="4654229" y="3076267"/>
-                  </a:lnTo>
-                  <a:lnTo>
-                    <a:pt x="4727989" y="3090628"/>
-                  </a:lnTo>
-                  <a:lnTo>
-                    <a:pt x="4801749" y="3104630"/>
-                  </a:lnTo>
-                  <a:lnTo>
-                    <a:pt x="4875509" y="3118284"/>
-                  </a:lnTo>
-                  <a:lnTo>
-                    <a:pt x="4949269" y="3131598"/>
-                  </a:lnTo>
-                  <a:lnTo>
-                    <a:pt x="5023029" y="3144580"/>
-                  </a:lnTo>
-                  <a:lnTo>
-                    <a:pt x="5096789" y="3157238"/>
-                  </a:lnTo>
-                  <a:lnTo>
-                    <a:pt x="5170549" y="3169581"/>
-                  </a:lnTo>
-                  <a:lnTo>
-                    <a:pt x="5244309" y="3181616"/>
-                  </a:lnTo>
-                  <a:lnTo>
-                    <a:pt x="5318069" y="3193352"/>
-                  </a:lnTo>
-                  <a:lnTo>
-                    <a:pt x="5391829" y="3204795"/>
-                  </a:lnTo>
-                  <a:lnTo>
-                    <a:pt x="5465589" y="3215953"/>
-                  </a:lnTo>
-                  <a:lnTo>
-                    <a:pt x="5539349" y="3226834"/>
-                  </a:lnTo>
-                  <a:lnTo>
-                    <a:pt x="5613109" y="3237443"/>
-                  </a:lnTo>
-                  <a:lnTo>
-                    <a:pt x="5686869" y="3247787"/>
-                  </a:lnTo>
-                  <a:lnTo>
-                    <a:pt x="5760629" y="3257874"/>
-                  </a:lnTo>
-                  <a:lnTo>
-                    <a:pt x="5834389" y="3267710"/>
-                  </a:lnTo>
-                  <a:lnTo>
-                    <a:pt x="5908149" y="3277301"/>
-                  </a:lnTo>
-                  <a:lnTo>
-                    <a:pt x="5981909" y="3286652"/>
-                  </a:lnTo>
-                  <a:lnTo>
-                    <a:pt x="6055669" y="3295771"/>
-                  </a:lnTo>
-                  <a:lnTo>
-                    <a:pt x="6129429" y="3304662"/>
-                  </a:lnTo>
-                  <a:lnTo>
-                    <a:pt x="6203189" y="3313332"/>
-                  </a:lnTo>
-                  <a:lnTo>
-                    <a:pt x="6276949" y="3321786"/>
-                  </a:lnTo>
-                  <a:lnTo>
-                    <a:pt x="6350709" y="3330030"/>
-                  </a:lnTo>
-                  <a:lnTo>
-                    <a:pt x="6424469" y="3338067"/>
-                  </a:lnTo>
-                  <a:lnTo>
-                    <a:pt x="6498229" y="3345905"/>
-                  </a:lnTo>
-                  <a:lnTo>
-                    <a:pt x="6571989" y="3353547"/>
-                  </a:lnTo>
-                  <a:lnTo>
-                    <a:pt x="6645749" y="3360999"/>
-                  </a:lnTo>
-                  <a:lnTo>
-                    <a:pt x="6719509" y="3368266"/>
-                  </a:lnTo>
-                  <a:lnTo>
-                    <a:pt x="6793269" y="3375351"/>
-                  </a:lnTo>
-                  <a:lnTo>
-                    <a:pt x="6867029" y="3382260"/>
-                  </a:lnTo>
-                  <a:lnTo>
-                    <a:pt x="6940789" y="3388996"/>
-                  </a:lnTo>
-                  <a:lnTo>
-                    <a:pt x="7014550" y="3395565"/>
-                  </a:lnTo>
-                  <a:lnTo>
-                    <a:pt x="7088310" y="3401970"/>
-                  </a:lnTo>
-                  <a:lnTo>
-                    <a:pt x="7162070" y="3408216"/>
-                  </a:lnTo>
-                  <a:lnTo>
-                    <a:pt x="7235830" y="3414306"/>
-                  </a:lnTo>
-                  <a:lnTo>
-                    <a:pt x="7235830" y="3618261"/>
-                  </a:lnTo>
-                  <a:lnTo>
-                    <a:pt x="7162070" y="3616026"/>
-                  </a:lnTo>
-                  <a:lnTo>
-                    <a:pt x="7088310" y="3613646"/>
-                  </a:lnTo>
-                  <a:lnTo>
-                    <a:pt x="7014550" y="3611112"/>
-                  </a:lnTo>
-                  <a:lnTo>
-                    <a:pt x="6940789" y="3608413"/>
-                  </a:lnTo>
-                  <a:lnTo>
-                    <a:pt x="6867029" y="3605538"/>
-                  </a:lnTo>
-                  <a:lnTo>
-                    <a:pt x="6793269" y="3602476"/>
-                  </a:lnTo>
-                  <a:lnTo>
-                    <a:pt x="6719509" y="3599216"/>
-                  </a:lnTo>
-                  <a:lnTo>
-                    <a:pt x="6645749" y="3595743"/>
-                  </a:lnTo>
-                  <a:lnTo>
-                    <a:pt x="6571989" y="3592045"/>
-                  </a:lnTo>
-                  <a:lnTo>
-                    <a:pt x="6498229" y="3588107"/>
-                  </a:lnTo>
-                  <a:lnTo>
-                    <a:pt x="6424469" y="3583912"/>
-                  </a:lnTo>
-                  <a:lnTo>
-                    <a:pt x="6350709" y="3579445"/>
-                  </a:lnTo>
-                  <a:lnTo>
-                    <a:pt x="6276949" y="3574687"/>
-                  </a:lnTo>
-                  <a:lnTo>
-                    <a:pt x="6203189" y="3569621"/>
-                  </a:lnTo>
-                  <a:lnTo>
-                    <a:pt x="6129429" y="3564225"/>
-                  </a:lnTo>
-                  <a:lnTo>
-                    <a:pt x="6055669" y="3558478"/>
-                  </a:lnTo>
-                  <a:lnTo>
-                    <a:pt x="5981909" y="3552358"/>
-                  </a:lnTo>
-                  <a:lnTo>
-                    <a:pt x="5908149" y="3545840"/>
-                  </a:lnTo>
-                  <a:lnTo>
-                    <a:pt x="5834389" y="3538898"/>
-                  </a:lnTo>
-                  <a:lnTo>
-                    <a:pt x="5760629" y="3531506"/>
-                  </a:lnTo>
-                  <a:lnTo>
-                    <a:pt x="5686869" y="3523632"/>
-                  </a:lnTo>
-                  <a:lnTo>
-                    <a:pt x="5613109" y="3515247"/>
-                  </a:lnTo>
-                  <a:lnTo>
-                    <a:pt x="5539349" y="3506318"/>
-                  </a:lnTo>
-                  <a:lnTo>
-                    <a:pt x="5465589" y="3496807"/>
-                  </a:lnTo>
-                  <a:lnTo>
-                    <a:pt x="5391829" y="3486679"/>
-                  </a:lnTo>
-                  <a:lnTo>
-                    <a:pt x="5318069" y="3475892"/>
-                  </a:lnTo>
-                  <a:lnTo>
-                    <a:pt x="5244309" y="3464404"/>
-                  </a:lnTo>
-                  <a:lnTo>
-                    <a:pt x="5170549" y="3452170"/>
-                  </a:lnTo>
-                  <a:lnTo>
-                    <a:pt x="5096789" y="3439140"/>
-                  </a:lnTo>
-                  <a:lnTo>
-                    <a:pt x="5023029" y="3425264"/>
-                  </a:lnTo>
-                  <a:lnTo>
-                    <a:pt x="4949269" y="3410486"/>
-                  </a:lnTo>
-                  <a:lnTo>
-                    <a:pt x="4875509" y="3394747"/>
-                  </a:lnTo>
-                  <a:lnTo>
-                    <a:pt x="4801749" y="3377985"/>
-                  </a:lnTo>
-                  <a:lnTo>
-                    <a:pt x="4727989" y="3360134"/>
-                  </a:lnTo>
-                  <a:lnTo>
-                    <a:pt x="4654229" y="3341122"/>
-                  </a:lnTo>
-                  <a:lnTo>
-                    <a:pt x="4580469" y="3320875"/>
-                  </a:lnTo>
-                  <a:lnTo>
-                    <a:pt x="4506709" y="3299312"/>
-                  </a:lnTo>
-                  <a:lnTo>
-                    <a:pt x="4432949" y="3276348"/>
-                  </a:lnTo>
-                  <a:lnTo>
-                    <a:pt x="4359189" y="3251891"/>
-                  </a:lnTo>
-                  <a:lnTo>
-                    <a:pt x="4285429" y="3225845"/>
-                  </a:lnTo>
-                  <a:lnTo>
-                    <a:pt x="4211669" y="3198105"/>
-                  </a:lnTo>
-                  <a:lnTo>
-                    <a:pt x="4137909" y="3168563"/>
-                  </a:lnTo>
-                  <a:lnTo>
-                    <a:pt x="4064149" y="3137101"/>
-                  </a:lnTo>
-                  <a:lnTo>
-                    <a:pt x="3990388" y="3103593"/>
-                  </a:lnTo>
-                  <a:lnTo>
-                    <a:pt x="3916628" y="3067908"/>
-                  </a:lnTo>
-                  <a:lnTo>
-                    <a:pt x="3842868" y="3029904"/>
-                  </a:lnTo>
-                  <a:lnTo>
-                    <a:pt x="3769108" y="2989430"/>
-                  </a:lnTo>
-                  <a:lnTo>
-                    <a:pt x="3695348" y="2946325"/>
-                  </a:lnTo>
-                  <a:lnTo>
-                    <a:pt x="3621588" y="2900418"/>
-                  </a:lnTo>
-                  <a:lnTo>
-                    <a:pt x="3547828" y="2851528"/>
-                  </a:lnTo>
-                  <a:lnTo>
-                    <a:pt x="3474068" y="2799460"/>
-                  </a:lnTo>
-                  <a:lnTo>
-                    <a:pt x="3400308" y="2767561"/>
-                  </a:lnTo>
-                  <a:lnTo>
-                    <a:pt x="3326548" y="2744946"/>
-                  </a:lnTo>
-                  <a:lnTo>
-                    <a:pt x="3252788" y="2721753"/>
-                  </a:lnTo>
-                  <a:lnTo>
-                    <a:pt x="3179028" y="2697967"/>
-                  </a:lnTo>
-                  <a:lnTo>
-                    <a:pt x="3105268" y="2673574"/>
-                  </a:lnTo>
-                  <a:lnTo>
-                    <a:pt x="3031508" y="2648557"/>
-                  </a:lnTo>
-                  <a:lnTo>
-                    <a:pt x="2957748" y="2622901"/>
-                  </a:lnTo>
-                  <a:lnTo>
-                    <a:pt x="2883988" y="2596589"/>
-                  </a:lnTo>
-                  <a:lnTo>
-                    <a:pt x="2810228" y="2569605"/>
-                  </a:lnTo>
-                  <a:lnTo>
-                    <a:pt x="2736468" y="2541932"/>
-                  </a:lnTo>
-                  <a:lnTo>
-                    <a:pt x="2662708" y="2513551"/>
-                  </a:lnTo>
-                  <a:lnTo>
-                    <a:pt x="2588948" y="2484446"/>
-                  </a:lnTo>
-                  <a:lnTo>
-                    <a:pt x="2515188" y="2454597"/>
-                  </a:lnTo>
-                  <a:lnTo>
-                    <a:pt x="2441428" y="2423985"/>
-                  </a:lnTo>
-                  <a:lnTo>
-                    <a:pt x="2367668" y="2392590"/>
-                  </a:lnTo>
-                  <a:lnTo>
-                    <a:pt x="2293908" y="2360394"/>
-                  </a:lnTo>
-                  <a:lnTo>
-                    <a:pt x="2220148" y="2327375"/>
-                  </a:lnTo>
-                  <a:lnTo>
-                    <a:pt x="2146388" y="2293512"/>
-                  </a:lnTo>
-                  <a:lnTo>
-                    <a:pt x="2072628" y="2258784"/>
-                  </a:lnTo>
-                  <a:lnTo>
-                    <a:pt x="1998868" y="2223169"/>
-                  </a:lnTo>
-                  <a:lnTo>
-                    <a:pt x="1925108" y="2186644"/>
-                  </a:lnTo>
-                  <a:lnTo>
-                    <a:pt x="1851348" y="2149185"/>
-                  </a:lnTo>
-                  <a:lnTo>
-                    <a:pt x="1777588" y="2110769"/>
-                  </a:lnTo>
-                  <a:lnTo>
-                    <a:pt x="1703828" y="2071372"/>
-                  </a:lnTo>
-                  <a:lnTo>
-                    <a:pt x="1630068" y="2030968"/>
-                  </a:lnTo>
-                  <a:lnTo>
-                    <a:pt x="1556308" y="1989531"/>
-                  </a:lnTo>
-                  <a:lnTo>
-                    <a:pt x="1482548" y="1947036"/>
-                  </a:lnTo>
-                  <a:lnTo>
-                    <a:pt x="1408788" y="1903455"/>
-                  </a:lnTo>
-                  <a:lnTo>
-                    <a:pt x="1335028" y="1858761"/>
-                  </a:lnTo>
-                  <a:lnTo>
-                    <a:pt x="1261268" y="1812924"/>
-                  </a:lnTo>
-                  <a:lnTo>
-                    <a:pt x="1187508" y="1765916"/>
-                  </a:lnTo>
-                  <a:lnTo>
-                    <a:pt x="1113747" y="1717707"/>
-                  </a:lnTo>
-                  <a:lnTo>
-                    <a:pt x="1039987" y="1668267"/>
-                  </a:lnTo>
-                  <a:lnTo>
-                    <a:pt x="966227" y="1617563"/>
-                  </a:lnTo>
-                  <a:lnTo>
-                    <a:pt x="892467" y="1565563"/>
-                  </a:lnTo>
-                  <a:lnTo>
-                    <a:pt x="818707" y="1512235"/>
-                  </a:lnTo>
-                  <a:lnTo>
-                    <a:pt x="744947" y="1457544"/>
-                  </a:lnTo>
-                  <a:lnTo>
-                    <a:pt x="671187" y="1401456"/>
-                  </a:lnTo>
-                  <a:lnTo>
-                    <a:pt x="597427" y="1343934"/>
-                  </a:lnTo>
-                  <a:lnTo>
-                    <a:pt x="523667" y="1284943"/>
-                  </a:lnTo>
-                  <a:lnTo>
-                    <a:pt x="449907" y="1224445"/>
-                  </a:lnTo>
-                  <a:lnTo>
-                    <a:pt x="376147" y="1162400"/>
-                  </a:lnTo>
-                  <a:lnTo>
-                    <a:pt x="302387" y="1098771"/>
-                  </a:lnTo>
-                  <a:lnTo>
-                    <a:pt x="228627" y="1033515"/>
-                  </a:lnTo>
-                  <a:lnTo>
-                    <a:pt x="154867" y="966592"/>
-                  </a:lnTo>
-                  <a:lnTo>
-                    <a:pt x="81107" y="897959"/>
-                  </a:lnTo>
-                  <a:lnTo>
-                    <a:pt x="7347" y="827573"/>
-                  </a:lnTo>
-                  <a:lnTo>
-                    <a:pt x="0" y="820382"/>
+                    <a:pt x="1777588" y="20630"/>
+                  </a:lnTo>
+                  <a:lnTo>
+                    <a:pt x="1851348" y="231976"/>
+                  </a:lnTo>
+                  <a:lnTo>
+                    <a:pt x="1925108" y="430424"/>
+                  </a:lnTo>
+                  <a:lnTo>
+                    <a:pt x="1998868" y="616761"/>
+                  </a:lnTo>
+                  <a:lnTo>
+                    <a:pt x="2072628" y="791726"/>
+                  </a:lnTo>
+                  <a:lnTo>
+                    <a:pt x="2146388" y="956014"/>
+                  </a:lnTo>
+                  <a:lnTo>
+                    <a:pt x="2220148" y="1110275"/>
+                  </a:lnTo>
+                  <a:lnTo>
+                    <a:pt x="2293908" y="1255123"/>
+                  </a:lnTo>
+                  <a:lnTo>
+                    <a:pt x="2367668" y="1391131"/>
+                  </a:lnTo>
+                  <a:lnTo>
+                    <a:pt x="2441428" y="1518838"/>
+                  </a:lnTo>
+                  <a:lnTo>
+                    <a:pt x="2515188" y="1638752"/>
+                  </a:lnTo>
+                  <a:lnTo>
+                    <a:pt x="2588948" y="1751347"/>
+                  </a:lnTo>
+                  <a:lnTo>
+                    <a:pt x="2662708" y="1857072"/>
+                  </a:lnTo>
+                  <a:lnTo>
+                    <a:pt x="2736468" y="1956344"/>
+                  </a:lnTo>
+                  <a:lnTo>
+                    <a:pt x="2810228" y="2049558"/>
+                  </a:lnTo>
+                  <a:lnTo>
+                    <a:pt x="2883988" y="2137083"/>
+                  </a:lnTo>
+                  <a:lnTo>
+                    <a:pt x="2957748" y="2219266"/>
+                  </a:lnTo>
+                  <a:lnTo>
+                    <a:pt x="3031508" y="2296435"/>
+                  </a:lnTo>
+                  <a:lnTo>
+                    <a:pt x="3105268" y="2368894"/>
+                  </a:lnTo>
+                  <a:lnTo>
+                    <a:pt x="3179028" y="2436930"/>
+                  </a:lnTo>
+                  <a:lnTo>
+                    <a:pt x="3252788" y="2500815"/>
+                  </a:lnTo>
+                  <a:lnTo>
+                    <a:pt x="3326548" y="2560801"/>
+                  </a:lnTo>
+                  <a:lnTo>
+                    <a:pt x="3400308" y="2617126"/>
+                  </a:lnTo>
+                  <a:lnTo>
+                    <a:pt x="3474068" y="2660622"/>
+                  </a:lnTo>
+                  <a:lnTo>
+                    <a:pt x="3547828" y="2681130"/>
+                  </a:lnTo>
+                  <a:lnTo>
+                    <a:pt x="3621588" y="2701128"/>
+                  </a:lnTo>
+                  <a:lnTo>
+                    <a:pt x="3695348" y="2720626"/>
+                  </a:lnTo>
+                  <a:lnTo>
+                    <a:pt x="3769108" y="2739640"/>
+                  </a:lnTo>
+                  <a:lnTo>
+                    <a:pt x="3842868" y="2758179"/>
+                  </a:lnTo>
+                  <a:lnTo>
+                    <a:pt x="3916628" y="2776257"/>
+                  </a:lnTo>
+                  <a:lnTo>
+                    <a:pt x="3990388" y="2793884"/>
+                  </a:lnTo>
+                  <a:lnTo>
+                    <a:pt x="4064149" y="2811072"/>
+                  </a:lnTo>
+                  <a:lnTo>
+                    <a:pt x="4137909" y="2827831"/>
+                  </a:lnTo>
+                  <a:lnTo>
+                    <a:pt x="4211669" y="2844173"/>
+                  </a:lnTo>
+                  <a:lnTo>
+                    <a:pt x="4285429" y="2860108"/>
+                  </a:lnTo>
+                  <a:lnTo>
+                    <a:pt x="4359189" y="2875646"/>
+                  </a:lnTo>
+                  <a:lnTo>
+                    <a:pt x="4432949" y="2890797"/>
+                  </a:lnTo>
+                  <a:lnTo>
+                    <a:pt x="4506709" y="2905570"/>
+                  </a:lnTo>
+                  <a:lnTo>
+                    <a:pt x="4580469" y="2919976"/>
+                  </a:lnTo>
+                  <a:lnTo>
+                    <a:pt x="4654229" y="2934022"/>
+                  </a:lnTo>
+                  <a:lnTo>
+                    <a:pt x="4727989" y="2947718"/>
+                  </a:lnTo>
+                  <a:lnTo>
+                    <a:pt x="4801749" y="2961073"/>
+                  </a:lnTo>
+                  <a:lnTo>
+                    <a:pt x="4875509" y="2974096"/>
+                  </a:lnTo>
+                  <a:lnTo>
+                    <a:pt x="4949269" y="2986794"/>
+                  </a:lnTo>
+                  <a:lnTo>
+                    <a:pt x="5023029" y="2999175"/>
+                  </a:lnTo>
+                  <a:lnTo>
+                    <a:pt x="5096789" y="3011248"/>
+                  </a:lnTo>
+                  <a:lnTo>
+                    <a:pt x="5170549" y="3023021"/>
+                  </a:lnTo>
+                  <a:lnTo>
+                    <a:pt x="5244309" y="3034500"/>
+                  </a:lnTo>
+                  <a:lnTo>
+                    <a:pt x="5318069" y="3045693"/>
+                  </a:lnTo>
+                  <a:lnTo>
+                    <a:pt x="5391829" y="3056607"/>
+                  </a:lnTo>
+                  <a:lnTo>
+                    <a:pt x="5465589" y="3067249"/>
+                  </a:lnTo>
+                  <a:lnTo>
+                    <a:pt x="5539349" y="3077626"/>
+                  </a:lnTo>
+                  <a:lnTo>
+                    <a:pt x="5613109" y="3087744"/>
+                  </a:lnTo>
+                  <a:lnTo>
+                    <a:pt x="5686869" y="3097611"/>
+                  </a:lnTo>
+                  <a:lnTo>
+                    <a:pt x="5760629" y="3107231"/>
+                  </a:lnTo>
+                  <a:lnTo>
+                    <a:pt x="5834389" y="3116612"/>
+                  </a:lnTo>
+                  <a:lnTo>
+                    <a:pt x="5908149" y="3125759"/>
+                  </a:lnTo>
+                  <a:lnTo>
+                    <a:pt x="5981909" y="3134679"/>
+                  </a:lnTo>
+                  <a:lnTo>
+                    <a:pt x="6055669" y="3143376"/>
+                  </a:lnTo>
+                  <a:lnTo>
+                    <a:pt x="6129429" y="3151856"/>
+                  </a:lnTo>
+                  <a:lnTo>
+                    <a:pt x="6203189" y="3160125"/>
+                  </a:lnTo>
+                  <a:lnTo>
+                    <a:pt x="6276949" y="3168188"/>
+                  </a:lnTo>
+                  <a:lnTo>
+                    <a:pt x="6350709" y="3176050"/>
+                  </a:lnTo>
+                  <a:lnTo>
+                    <a:pt x="6424469" y="3183716"/>
+                  </a:lnTo>
+                  <a:lnTo>
+                    <a:pt x="6498229" y="3191192"/>
+                  </a:lnTo>
+                  <a:lnTo>
+                    <a:pt x="6571989" y="3198481"/>
+                  </a:lnTo>
+                  <a:lnTo>
+                    <a:pt x="6645749" y="3205588"/>
+                  </a:lnTo>
+                  <a:lnTo>
+                    <a:pt x="6719509" y="3212518"/>
+                  </a:lnTo>
+                  <a:lnTo>
+                    <a:pt x="6793269" y="3219276"/>
+                  </a:lnTo>
+                  <a:lnTo>
+                    <a:pt x="6867029" y="3225865"/>
+                  </a:lnTo>
+                  <a:lnTo>
+                    <a:pt x="6940789" y="3232290"/>
+                  </a:lnTo>
+                  <a:lnTo>
+                    <a:pt x="7014550" y="3238555"/>
+                  </a:lnTo>
+                  <a:lnTo>
+                    <a:pt x="7088310" y="3244664"/>
+                  </a:lnTo>
+                  <a:lnTo>
+                    <a:pt x="7162070" y="3250621"/>
+                  </a:lnTo>
+                  <a:lnTo>
+                    <a:pt x="7235830" y="3256429"/>
+                  </a:lnTo>
+                  <a:lnTo>
+                    <a:pt x="7235830" y="3450954"/>
+                  </a:lnTo>
+                  <a:lnTo>
+                    <a:pt x="7162070" y="3448823"/>
+                  </a:lnTo>
+                  <a:lnTo>
+                    <a:pt x="7088310" y="3446553"/>
+                  </a:lnTo>
+                  <a:lnTo>
+                    <a:pt x="7014550" y="3444135"/>
+                  </a:lnTo>
+                  <a:lnTo>
+                    <a:pt x="6940789" y="3441561"/>
+                  </a:lnTo>
+                  <a:lnTo>
+                    <a:pt x="6867029" y="3438819"/>
+                  </a:lnTo>
+                  <a:lnTo>
+                    <a:pt x="6793269" y="3435899"/>
+                  </a:lnTo>
+                  <a:lnTo>
+                    <a:pt x="6719509" y="3432789"/>
+                  </a:lnTo>
+                  <a:lnTo>
+                    <a:pt x="6645749" y="3429477"/>
+                  </a:lnTo>
+                  <a:lnTo>
+                    <a:pt x="6571989" y="3425950"/>
+                  </a:lnTo>
+                  <a:lnTo>
+                    <a:pt x="6498229" y="3422194"/>
+                  </a:lnTo>
+                  <a:lnTo>
+                    <a:pt x="6424469" y="3418193"/>
+                  </a:lnTo>
+                  <a:lnTo>
+                    <a:pt x="6350709" y="3413933"/>
+                  </a:lnTo>
+                  <a:lnTo>
+                    <a:pt x="6276949" y="3409395"/>
+                  </a:lnTo>
+                  <a:lnTo>
+                    <a:pt x="6203189" y="3404563"/>
+                  </a:lnTo>
+                  <a:lnTo>
+                    <a:pt x="6129429" y="3399416"/>
+                  </a:lnTo>
+                  <a:lnTo>
+                    <a:pt x="6055669" y="3393935"/>
+                  </a:lnTo>
+                  <a:lnTo>
+                    <a:pt x="5981909" y="3388098"/>
+                  </a:lnTo>
+                  <a:lnTo>
+                    <a:pt x="5908149" y="3381882"/>
+                  </a:lnTo>
+                  <a:lnTo>
+                    <a:pt x="5834389" y="3375261"/>
+                  </a:lnTo>
+                  <a:lnTo>
+                    <a:pt x="5760629" y="3368210"/>
+                  </a:lnTo>
+                  <a:lnTo>
+                    <a:pt x="5686869" y="3360701"/>
+                  </a:lnTo>
+                  <a:lnTo>
+                    <a:pt x="5613109" y="3352704"/>
+                  </a:lnTo>
+                  <a:lnTo>
+                    <a:pt x="5539349" y="3344187"/>
+                  </a:lnTo>
+                  <a:lnTo>
+                    <a:pt x="5465589" y="3335116"/>
+                  </a:lnTo>
+                  <a:lnTo>
+                    <a:pt x="5391829" y="3325456"/>
+                  </a:lnTo>
+                  <a:lnTo>
+                    <a:pt x="5318069" y="3315168"/>
+                  </a:lnTo>
+                  <a:lnTo>
+                    <a:pt x="5244309" y="3304212"/>
+                  </a:lnTo>
+                  <a:lnTo>
+                    <a:pt x="5170549" y="3292543"/>
+                  </a:lnTo>
+                  <a:lnTo>
+                    <a:pt x="5096789" y="3280116"/>
+                  </a:lnTo>
+                  <a:lnTo>
+                    <a:pt x="5023029" y="3266881"/>
+                  </a:lnTo>
+                  <a:lnTo>
+                    <a:pt x="4949269" y="3252786"/>
+                  </a:lnTo>
+                  <a:lnTo>
+                    <a:pt x="4875509" y="3237775"/>
+                  </a:lnTo>
+                  <a:lnTo>
+                    <a:pt x="4801749" y="3221788"/>
+                  </a:lnTo>
+                  <a:lnTo>
+                    <a:pt x="4727989" y="3204762"/>
+                  </a:lnTo>
+                  <a:lnTo>
+                    <a:pt x="4654229" y="3186630"/>
+                  </a:lnTo>
+                  <a:lnTo>
+                    <a:pt x="4580469" y="3167319"/>
+                  </a:lnTo>
+                  <a:lnTo>
+                    <a:pt x="4506709" y="3146753"/>
+                  </a:lnTo>
+                  <a:lnTo>
+                    <a:pt x="4432949" y="3124851"/>
+                  </a:lnTo>
+                  <a:lnTo>
+                    <a:pt x="4359189" y="3101525"/>
+                  </a:lnTo>
+                  <a:lnTo>
+                    <a:pt x="4285429" y="3076683"/>
+                  </a:lnTo>
+                  <a:lnTo>
+                    <a:pt x="4211669" y="3050226"/>
+                  </a:lnTo>
+                  <a:lnTo>
+                    <a:pt x="4137909" y="3022050"/>
+                  </a:lnTo>
+                  <a:lnTo>
+                    <a:pt x="4064149" y="2992042"/>
+                  </a:lnTo>
+                  <a:lnTo>
+                    <a:pt x="3990388" y="2960084"/>
+                  </a:lnTo>
+                  <a:lnTo>
+                    <a:pt x="3916628" y="2926049"/>
+                  </a:lnTo>
+                  <a:lnTo>
+                    <a:pt x="3842868" y="2889802"/>
+                  </a:lnTo>
+                  <a:lnTo>
+                    <a:pt x="3769108" y="2851199"/>
+                  </a:lnTo>
+                  <a:lnTo>
+                    <a:pt x="3695348" y="2810088"/>
+                  </a:lnTo>
+                  <a:lnTo>
+                    <a:pt x="3621588" y="2766304"/>
+                  </a:lnTo>
+                  <a:lnTo>
+                    <a:pt x="3547828" y="2719674"/>
+                  </a:lnTo>
+                  <a:lnTo>
+                    <a:pt x="3474068" y="2670014"/>
+                  </a:lnTo>
+                  <a:lnTo>
+                    <a:pt x="3400308" y="2639590"/>
+                  </a:lnTo>
+                  <a:lnTo>
+                    <a:pt x="3326548" y="2618021"/>
+                  </a:lnTo>
+                  <a:lnTo>
+                    <a:pt x="3252788" y="2595900"/>
+                  </a:lnTo>
+                  <a:lnTo>
+                    <a:pt x="3179028" y="2573214"/>
+                  </a:lnTo>
+                  <a:lnTo>
+                    <a:pt x="3105268" y="2549948"/>
+                  </a:lnTo>
+                  <a:lnTo>
+                    <a:pt x="3031508" y="2526088"/>
+                  </a:lnTo>
+                  <a:lnTo>
+                    <a:pt x="2957748" y="2501619"/>
+                  </a:lnTo>
+                  <a:lnTo>
+                    <a:pt x="2883988" y="2476524"/>
+                  </a:lnTo>
+                  <a:lnTo>
+                    <a:pt x="2810228" y="2450788"/>
+                  </a:lnTo>
+                  <a:lnTo>
+                    <a:pt x="2736468" y="2424394"/>
+                  </a:lnTo>
+                  <a:lnTo>
+                    <a:pt x="2662708" y="2397326"/>
+                  </a:lnTo>
+                  <a:lnTo>
+                    <a:pt x="2588948" y="2369566"/>
+                  </a:lnTo>
+                  <a:lnTo>
+                    <a:pt x="2515188" y="2341097"/>
+                  </a:lnTo>
+                  <a:lnTo>
+                    <a:pt x="2441428" y="2311900"/>
+                  </a:lnTo>
+                  <a:lnTo>
+                    <a:pt x="2367668" y="2281958"/>
+                  </a:lnTo>
+                  <a:lnTo>
+                    <a:pt x="2293908" y="2251250"/>
+                  </a:lnTo>
+                  <a:lnTo>
+                    <a:pt x="2220148" y="2219758"/>
+                  </a:lnTo>
+                  <a:lnTo>
+                    <a:pt x="2146388" y="2187461"/>
+                  </a:lnTo>
+                  <a:lnTo>
+                    <a:pt x="2072628" y="2154339"/>
+                  </a:lnTo>
+                  <a:lnTo>
+                    <a:pt x="1998868" y="2120370"/>
+                  </a:lnTo>
+                  <a:lnTo>
+                    <a:pt x="1925108" y="2085534"/>
+                  </a:lnTo>
+                  <a:lnTo>
+                    <a:pt x="1851348" y="2049807"/>
+                  </a:lnTo>
+                  <a:lnTo>
+                    <a:pt x="1777588" y="2013168"/>
+                  </a:lnTo>
+                  <a:lnTo>
+                    <a:pt x="1703828" y="1975592"/>
+                  </a:lnTo>
+                  <a:lnTo>
+                    <a:pt x="1630068" y="1937057"/>
+                  </a:lnTo>
+                  <a:lnTo>
+                    <a:pt x="1556308" y="1897536"/>
+                  </a:lnTo>
+                  <a:lnTo>
+                    <a:pt x="1482548" y="1857006"/>
+                  </a:lnTo>
+                  <a:lnTo>
+                    <a:pt x="1408788" y="1815440"/>
+                  </a:lnTo>
+                  <a:lnTo>
+                    <a:pt x="1335028" y="1772812"/>
+                  </a:lnTo>
+                  <a:lnTo>
+                    <a:pt x="1261268" y="1729095"/>
+                  </a:lnTo>
+                  <a:lnTo>
+                    <a:pt x="1187508" y="1684261"/>
+                  </a:lnTo>
+                  <a:lnTo>
+                    <a:pt x="1113747" y="1638281"/>
+                  </a:lnTo>
+                  <a:lnTo>
+                    <a:pt x="1039987" y="1591127"/>
+                  </a:lnTo>
+                  <a:lnTo>
+                    <a:pt x="966227" y="1542767"/>
+                  </a:lnTo>
+                  <a:lnTo>
+                    <a:pt x="892467" y="1493172"/>
+                  </a:lnTo>
+                  <a:lnTo>
+                    <a:pt x="818707" y="1442310"/>
+                  </a:lnTo>
+                  <a:lnTo>
+                    <a:pt x="744947" y="1390148"/>
+                  </a:lnTo>
+                  <a:lnTo>
+                    <a:pt x="671187" y="1336653"/>
+                  </a:lnTo>
+                  <a:lnTo>
+                    <a:pt x="597427" y="1281791"/>
+                  </a:lnTo>
+                  <a:lnTo>
+                    <a:pt x="523667" y="1225528"/>
+                  </a:lnTo>
+                  <a:lnTo>
+                    <a:pt x="449907" y="1167827"/>
+                  </a:lnTo>
+                  <a:lnTo>
+                    <a:pt x="376147" y="1108651"/>
+                  </a:lnTo>
+                  <a:lnTo>
+                    <a:pt x="302387" y="1047964"/>
+                  </a:lnTo>
+                  <a:lnTo>
+                    <a:pt x="228627" y="985726"/>
+                  </a:lnTo>
+                  <a:lnTo>
+                    <a:pt x="154867" y="921897"/>
+                  </a:lnTo>
+                  <a:lnTo>
+                    <a:pt x="81107" y="856438"/>
+                  </a:lnTo>
+                  <a:lnTo>
+                    <a:pt x="7347" y="789306"/>
+                  </a:lnTo>
+                  <a:lnTo>
+                    <a:pt x="0" y="782448"/>
                   </a:lnTo>
                   <a:close/>
                 </a:path>
@@ -3561,240 +3561,240 @@
           </p:nvSpPr>
           <p:spPr>
             <a:xfrm>
-              <a:off x="2588345" y="1896563"/>
-              <a:ext cx="5465002" cy="3414306"/>
+              <a:off x="2588345" y="2073503"/>
+              <a:ext cx="5465002" cy="3256429"/>
             </a:xfrm>
             <a:custGeom>
               <a:avLst/>
               <a:pathLst>
-                <a:path w="5465002" h="3414306">
+                <a:path w="5465002" h="3256429">
                   <a:moveTo>
                     <a:pt x="0" y="0"/>
                   </a:moveTo>
                   <a:lnTo>
-                    <a:pt x="6760" y="21630"/>
-                  </a:lnTo>
-                  <a:lnTo>
-                    <a:pt x="80520" y="243222"/>
-                  </a:lnTo>
-                  <a:lnTo>
-                    <a:pt x="154280" y="451291"/>
-                  </a:lnTo>
-                  <a:lnTo>
-                    <a:pt x="228040" y="646662"/>
-                  </a:lnTo>
-                  <a:lnTo>
-                    <a:pt x="301800" y="830110"/>
-                  </a:lnTo>
-                  <a:lnTo>
-                    <a:pt x="375560" y="1002363"/>
-                  </a:lnTo>
-                  <a:lnTo>
-                    <a:pt x="449320" y="1164103"/>
-                  </a:lnTo>
-                  <a:lnTo>
-                    <a:pt x="523080" y="1315973"/>
-                  </a:lnTo>
-                  <a:lnTo>
-                    <a:pt x="596840" y="1458574"/>
-                  </a:lnTo>
-                  <a:lnTo>
-                    <a:pt x="670600" y="1592473"/>
-                  </a:lnTo>
-                  <a:lnTo>
-                    <a:pt x="744360" y="1718201"/>
-                  </a:lnTo>
-                  <a:lnTo>
-                    <a:pt x="818120" y="1836255"/>
-                  </a:lnTo>
-                  <a:lnTo>
-                    <a:pt x="891880" y="1947105"/>
-                  </a:lnTo>
-                  <a:lnTo>
-                    <a:pt x="965640" y="2051190"/>
-                  </a:lnTo>
-                  <a:lnTo>
-                    <a:pt x="1039401" y="2148923"/>
-                  </a:lnTo>
-                  <a:lnTo>
-                    <a:pt x="1113161" y="2240692"/>
-                  </a:lnTo>
-                  <a:lnTo>
-                    <a:pt x="1186921" y="2326860"/>
-                  </a:lnTo>
-                  <a:lnTo>
-                    <a:pt x="1260681" y="2407769"/>
-                  </a:lnTo>
-                  <a:lnTo>
-                    <a:pt x="1334441" y="2483741"/>
-                  </a:lnTo>
-                  <a:lnTo>
-                    <a:pt x="1408201" y="2555076"/>
-                  </a:lnTo>
-                  <a:lnTo>
-                    <a:pt x="1481961" y="2622058"/>
-                  </a:lnTo>
-                  <a:lnTo>
-                    <a:pt x="1555721" y="2684952"/>
-                  </a:lnTo>
-                  <a:lnTo>
-                    <a:pt x="1629481" y="2744008"/>
-                  </a:lnTo>
-                  <a:lnTo>
-                    <a:pt x="1703241" y="2789613"/>
-                  </a:lnTo>
-                  <a:lnTo>
-                    <a:pt x="1777001" y="2811115"/>
-                  </a:lnTo>
-                  <a:lnTo>
-                    <a:pt x="1850761" y="2832082"/>
-                  </a:lnTo>
-                  <a:lnTo>
-                    <a:pt x="1924521" y="2852526"/>
-                  </a:lnTo>
-                  <a:lnTo>
-                    <a:pt x="1998281" y="2872461"/>
-                  </a:lnTo>
-                  <a:lnTo>
-                    <a:pt x="2072041" y="2891899"/>
-                  </a:lnTo>
-                  <a:lnTo>
-                    <a:pt x="2145801" y="2910853"/>
-                  </a:lnTo>
-                  <a:lnTo>
-                    <a:pt x="2219561" y="2929335"/>
-                  </a:lnTo>
-                  <a:lnTo>
-                    <a:pt x="2293321" y="2947356"/>
-                  </a:lnTo>
-                  <a:lnTo>
-                    <a:pt x="2367081" y="2964928"/>
-                  </a:lnTo>
-                  <a:lnTo>
-                    <a:pt x="2440841" y="2982063"/>
-                  </a:lnTo>
-                  <a:lnTo>
-                    <a:pt x="2514601" y="2998770"/>
-                  </a:lnTo>
-                  <a:lnTo>
-                    <a:pt x="2588361" y="3015062"/>
-                  </a:lnTo>
-                  <a:lnTo>
-                    <a:pt x="2662121" y="3030947"/>
-                  </a:lnTo>
-                  <a:lnTo>
-                    <a:pt x="2735881" y="3046436"/>
-                  </a:lnTo>
-                  <a:lnTo>
-                    <a:pt x="2809641" y="3061540"/>
-                  </a:lnTo>
-                  <a:lnTo>
-                    <a:pt x="2883401" y="3076267"/>
-                  </a:lnTo>
-                  <a:lnTo>
-                    <a:pt x="2957161" y="3090628"/>
-                  </a:lnTo>
-                  <a:lnTo>
-                    <a:pt x="3030921" y="3104630"/>
-                  </a:lnTo>
-                  <a:lnTo>
-                    <a:pt x="3104681" y="3118284"/>
-                  </a:lnTo>
-                  <a:lnTo>
-                    <a:pt x="3178441" y="3131598"/>
-                  </a:lnTo>
-                  <a:lnTo>
-                    <a:pt x="3252201" y="3144580"/>
-                  </a:lnTo>
-                  <a:lnTo>
-                    <a:pt x="3325961" y="3157238"/>
-                  </a:lnTo>
-                  <a:lnTo>
-                    <a:pt x="3399721" y="3169581"/>
-                  </a:lnTo>
-                  <a:lnTo>
-                    <a:pt x="3473481" y="3181616"/>
-                  </a:lnTo>
-                  <a:lnTo>
-                    <a:pt x="3547241" y="3193352"/>
-                  </a:lnTo>
-                  <a:lnTo>
-                    <a:pt x="3621001" y="3204795"/>
-                  </a:lnTo>
-                  <a:lnTo>
-                    <a:pt x="3694761" y="3215953"/>
-                  </a:lnTo>
-                  <a:lnTo>
-                    <a:pt x="3768521" y="3226834"/>
-                  </a:lnTo>
-                  <a:lnTo>
-                    <a:pt x="3842281" y="3237443"/>
-                  </a:lnTo>
-                  <a:lnTo>
-                    <a:pt x="3916041" y="3247787"/>
-                  </a:lnTo>
-                  <a:lnTo>
-                    <a:pt x="3989802" y="3257874"/>
-                  </a:lnTo>
-                  <a:lnTo>
-                    <a:pt x="4063562" y="3267710"/>
-                  </a:lnTo>
-                  <a:lnTo>
-                    <a:pt x="4137322" y="3277301"/>
-                  </a:lnTo>
-                  <a:lnTo>
-                    <a:pt x="4211082" y="3286652"/>
-                  </a:lnTo>
-                  <a:lnTo>
-                    <a:pt x="4284842" y="3295771"/>
-                  </a:lnTo>
-                  <a:lnTo>
-                    <a:pt x="4358602" y="3304662"/>
-                  </a:lnTo>
-                  <a:lnTo>
-                    <a:pt x="4432362" y="3313332"/>
-                  </a:lnTo>
-                  <a:lnTo>
-                    <a:pt x="4506122" y="3321786"/>
-                  </a:lnTo>
-                  <a:lnTo>
-                    <a:pt x="4579882" y="3330030"/>
-                  </a:lnTo>
-                  <a:lnTo>
-                    <a:pt x="4653642" y="3338067"/>
-                  </a:lnTo>
-                  <a:lnTo>
-                    <a:pt x="4727402" y="3345905"/>
-                  </a:lnTo>
-                  <a:lnTo>
-                    <a:pt x="4801162" y="3353547"/>
-                  </a:lnTo>
-                  <a:lnTo>
-                    <a:pt x="4874922" y="3360999"/>
-                  </a:lnTo>
-                  <a:lnTo>
-                    <a:pt x="4948682" y="3368266"/>
-                  </a:lnTo>
-                  <a:lnTo>
-                    <a:pt x="5022442" y="3375351"/>
-                  </a:lnTo>
-                  <a:lnTo>
-                    <a:pt x="5096202" y="3382260"/>
-                  </a:lnTo>
-                  <a:lnTo>
-                    <a:pt x="5169962" y="3388996"/>
-                  </a:lnTo>
-                  <a:lnTo>
-                    <a:pt x="5243722" y="3395565"/>
-                  </a:lnTo>
-                  <a:lnTo>
-                    <a:pt x="5317482" y="3401970"/>
-                  </a:lnTo>
-                  <a:lnTo>
-                    <a:pt x="5391242" y="3408216"/>
-                  </a:lnTo>
-                  <a:lnTo>
-                    <a:pt x="5465002" y="3414306"/>
+                    <a:pt x="6760" y="20630"/>
+                  </a:lnTo>
+                  <a:lnTo>
+                    <a:pt x="80520" y="231976"/>
+                  </a:lnTo>
+                  <a:lnTo>
+                    <a:pt x="154280" y="430424"/>
+                  </a:lnTo>
+                  <a:lnTo>
+                    <a:pt x="228040" y="616761"/>
+                  </a:lnTo>
+                  <a:lnTo>
+                    <a:pt x="301800" y="791726"/>
+                  </a:lnTo>
+                  <a:lnTo>
+                    <a:pt x="375560" y="956014"/>
+                  </a:lnTo>
+                  <a:lnTo>
+                    <a:pt x="449320" y="1110275"/>
+                  </a:lnTo>
+                  <a:lnTo>
+                    <a:pt x="523080" y="1255123"/>
+                  </a:lnTo>
+                  <a:lnTo>
+                    <a:pt x="596840" y="1391131"/>
+                  </a:lnTo>
+                  <a:lnTo>
+                    <a:pt x="670600" y="1518838"/>
+                  </a:lnTo>
+                  <a:lnTo>
+                    <a:pt x="744360" y="1638752"/>
+                  </a:lnTo>
+                  <a:lnTo>
+                    <a:pt x="818120" y="1751347"/>
+                  </a:lnTo>
+                  <a:lnTo>
+                    <a:pt x="891880" y="1857072"/>
+                  </a:lnTo>
+                  <a:lnTo>
+                    <a:pt x="965640" y="1956344"/>
+                  </a:lnTo>
+                  <a:lnTo>
+                    <a:pt x="1039401" y="2049558"/>
+                  </a:lnTo>
+                  <a:lnTo>
+                    <a:pt x="1113161" y="2137083"/>
+                  </a:lnTo>
+                  <a:lnTo>
+                    <a:pt x="1186921" y="2219266"/>
+                  </a:lnTo>
+                  <a:lnTo>
+                    <a:pt x="1260681" y="2296435"/>
+                  </a:lnTo>
+                  <a:lnTo>
+                    <a:pt x="1334441" y="2368894"/>
+                  </a:lnTo>
+                  <a:lnTo>
+                    <a:pt x="1408201" y="2436930"/>
+                  </a:lnTo>
+                  <a:lnTo>
+                    <a:pt x="1481961" y="2500815"/>
+                  </a:lnTo>
+                  <a:lnTo>
+                    <a:pt x="1555721" y="2560801"/>
+                  </a:lnTo>
+                  <a:lnTo>
+                    <a:pt x="1629481" y="2617126"/>
+                  </a:lnTo>
+                  <a:lnTo>
+                    <a:pt x="1703241" y="2660622"/>
+                  </a:lnTo>
+                  <a:lnTo>
+                    <a:pt x="1777001" y="2681130"/>
+                  </a:lnTo>
+                  <a:lnTo>
+                    <a:pt x="1850761" y="2701128"/>
+                  </a:lnTo>
+                  <a:lnTo>
+                    <a:pt x="1924521" y="2720626"/>
+                  </a:lnTo>
+                  <a:lnTo>
+                    <a:pt x="1998281" y="2739640"/>
+                  </a:lnTo>
+                  <a:lnTo>
+                    <a:pt x="2072041" y="2758179"/>
+                  </a:lnTo>
+                  <a:lnTo>
+                    <a:pt x="2145801" y="2776257"/>
+                  </a:lnTo>
+                  <a:lnTo>
+                    <a:pt x="2219561" y="2793884"/>
+                  </a:lnTo>
+                  <a:lnTo>
+                    <a:pt x="2293321" y="2811072"/>
+                  </a:lnTo>
+                  <a:lnTo>
+                    <a:pt x="2367081" y="2827831"/>
+                  </a:lnTo>
+                  <a:lnTo>
+                    <a:pt x="2440841" y="2844173"/>
+                  </a:lnTo>
+                  <a:lnTo>
+                    <a:pt x="2514601" y="2860108"/>
+                  </a:lnTo>
+                  <a:lnTo>
+                    <a:pt x="2588361" y="2875646"/>
+                  </a:lnTo>
+                  <a:lnTo>
+                    <a:pt x="2662121" y="2890797"/>
+                  </a:lnTo>
+                  <a:lnTo>
+                    <a:pt x="2735881" y="2905570"/>
+                  </a:lnTo>
+                  <a:lnTo>
+                    <a:pt x="2809641" y="2919976"/>
+                  </a:lnTo>
+                  <a:lnTo>
+                    <a:pt x="2883401" y="2934022"/>
+                  </a:lnTo>
+                  <a:lnTo>
+                    <a:pt x="2957161" y="2947718"/>
+                  </a:lnTo>
+                  <a:lnTo>
+                    <a:pt x="3030921" y="2961073"/>
+                  </a:lnTo>
+                  <a:lnTo>
+                    <a:pt x="3104681" y="2974096"/>
+                  </a:lnTo>
+                  <a:lnTo>
+                    <a:pt x="3178441" y="2986794"/>
+                  </a:lnTo>
+                  <a:lnTo>
+                    <a:pt x="3252201" y="2999175"/>
+                  </a:lnTo>
+                  <a:lnTo>
+                    <a:pt x="3325961" y="3011248"/>
+                  </a:lnTo>
+                  <a:lnTo>
+                    <a:pt x="3399721" y="3023021"/>
+                  </a:lnTo>
+                  <a:lnTo>
+                    <a:pt x="3473481" y="3034500"/>
+                  </a:lnTo>
+                  <a:lnTo>
+                    <a:pt x="3547241" y="3045693"/>
+                  </a:lnTo>
+                  <a:lnTo>
+                    <a:pt x="3621001" y="3056607"/>
+                  </a:lnTo>
+                  <a:lnTo>
+                    <a:pt x="3694761" y="3067249"/>
+                  </a:lnTo>
+                  <a:lnTo>
+                    <a:pt x="3768521" y="3077626"/>
+                  </a:lnTo>
+                  <a:lnTo>
+                    <a:pt x="3842281" y="3087744"/>
+                  </a:lnTo>
+                  <a:lnTo>
+                    <a:pt x="3916041" y="3097611"/>
+                  </a:lnTo>
+                  <a:lnTo>
+                    <a:pt x="3989802" y="3107231"/>
+                  </a:lnTo>
+                  <a:lnTo>
+                    <a:pt x="4063562" y="3116612"/>
+                  </a:lnTo>
+                  <a:lnTo>
+                    <a:pt x="4137322" y="3125759"/>
+                  </a:lnTo>
+                  <a:lnTo>
+                    <a:pt x="4211082" y="3134679"/>
+                  </a:lnTo>
+                  <a:lnTo>
+                    <a:pt x="4284842" y="3143376"/>
+                  </a:lnTo>
+                  <a:lnTo>
+                    <a:pt x="4358602" y="3151856"/>
+                  </a:lnTo>
+                  <a:lnTo>
+                    <a:pt x="4432362" y="3160125"/>
+                  </a:lnTo>
+                  <a:lnTo>
+                    <a:pt x="4506122" y="3168188"/>
+                  </a:lnTo>
+                  <a:lnTo>
+                    <a:pt x="4579882" y="3176050"/>
+                  </a:lnTo>
+                  <a:lnTo>
+                    <a:pt x="4653642" y="3183716"/>
+                  </a:lnTo>
+                  <a:lnTo>
+                    <a:pt x="4727402" y="3191192"/>
+                  </a:lnTo>
+                  <a:lnTo>
+                    <a:pt x="4801162" y="3198481"/>
+                  </a:lnTo>
+                  <a:lnTo>
+                    <a:pt x="4874922" y="3205588"/>
+                  </a:lnTo>
+                  <a:lnTo>
+                    <a:pt x="4948682" y="3212518"/>
+                  </a:lnTo>
+                  <a:lnTo>
+                    <a:pt x="5022442" y="3219276"/>
+                  </a:lnTo>
+                  <a:lnTo>
+                    <a:pt x="5096202" y="3225865"/>
+                  </a:lnTo>
+                  <a:lnTo>
+                    <a:pt x="5169962" y="3232290"/>
+                  </a:lnTo>
+                  <a:lnTo>
+                    <a:pt x="5243722" y="3238555"/>
+                  </a:lnTo>
+                  <a:lnTo>
+                    <a:pt x="5317482" y="3244664"/>
+                  </a:lnTo>
+                  <a:lnTo>
+                    <a:pt x="5391242" y="3250621"/>
+                  </a:lnTo>
+                  <a:lnTo>
+                    <a:pt x="5465002" y="3256429"/>
                   </a:lnTo>
                 </a:path>
               </a:pathLst>
@@ -3814,309 +3814,309 @@
           </p:nvSpPr>
           <p:spPr>
             <a:xfrm>
-              <a:off x="817517" y="2716945"/>
-              <a:ext cx="7235830" cy="2797879"/>
+              <a:off x="817517" y="2855951"/>
+              <a:ext cx="7235830" cy="2668506"/>
             </a:xfrm>
             <a:custGeom>
               <a:avLst/>
               <a:pathLst>
-                <a:path w="7235830" h="2797879">
+                <a:path w="7235830" h="2668506">
                   <a:moveTo>
-                    <a:pt x="7235830" y="2797879"/>
+                    <a:pt x="7235830" y="2668506"/>
                   </a:moveTo>
                   <a:lnTo>
-                    <a:pt x="7162070" y="2795644"/>
-                  </a:lnTo>
-                  <a:lnTo>
-                    <a:pt x="7088310" y="2793264"/>
-                  </a:lnTo>
-                  <a:lnTo>
-                    <a:pt x="7014550" y="2790730"/>
-                  </a:lnTo>
-                  <a:lnTo>
-                    <a:pt x="6940789" y="2788030"/>
-                  </a:lnTo>
-                  <a:lnTo>
-                    <a:pt x="6867029" y="2785156"/>
-                  </a:lnTo>
-                  <a:lnTo>
-                    <a:pt x="6793269" y="2782094"/>
-                  </a:lnTo>
-                  <a:lnTo>
-                    <a:pt x="6719509" y="2778833"/>
-                  </a:lnTo>
-                  <a:lnTo>
-                    <a:pt x="6645749" y="2775361"/>
-                  </a:lnTo>
-                  <a:lnTo>
-                    <a:pt x="6571989" y="2771663"/>
-                  </a:lnTo>
-                  <a:lnTo>
-                    <a:pt x="6498229" y="2767724"/>
-                  </a:lnTo>
-                  <a:lnTo>
-                    <a:pt x="6424469" y="2763530"/>
-                  </a:lnTo>
-                  <a:lnTo>
-                    <a:pt x="6350709" y="2759063"/>
-                  </a:lnTo>
-                  <a:lnTo>
-                    <a:pt x="6276949" y="2754305"/>
-                  </a:lnTo>
-                  <a:lnTo>
-                    <a:pt x="6203189" y="2749238"/>
-                  </a:lnTo>
-                  <a:lnTo>
-                    <a:pt x="6129429" y="2743842"/>
-                  </a:lnTo>
-                  <a:lnTo>
-                    <a:pt x="6055669" y="2738096"/>
-                  </a:lnTo>
-                  <a:lnTo>
-                    <a:pt x="5981909" y="2731976"/>
-                  </a:lnTo>
-                  <a:lnTo>
-                    <a:pt x="5908149" y="2725458"/>
-                  </a:lnTo>
-                  <a:lnTo>
-                    <a:pt x="5834389" y="2718516"/>
-                  </a:lnTo>
-                  <a:lnTo>
-                    <a:pt x="5760629" y="2711123"/>
-                  </a:lnTo>
-                  <a:lnTo>
-                    <a:pt x="5686869" y="2703250"/>
-                  </a:lnTo>
-                  <a:lnTo>
-                    <a:pt x="5613109" y="2694865"/>
-                  </a:lnTo>
-                  <a:lnTo>
-                    <a:pt x="5539349" y="2685935"/>
-                  </a:lnTo>
-                  <a:lnTo>
-                    <a:pt x="5465589" y="2676425"/>
-                  </a:lnTo>
-                  <a:lnTo>
-                    <a:pt x="5391829" y="2666296"/>
-                  </a:lnTo>
-                  <a:lnTo>
-                    <a:pt x="5318069" y="2655510"/>
-                  </a:lnTo>
-                  <a:lnTo>
-                    <a:pt x="5244309" y="2644022"/>
-                  </a:lnTo>
-                  <a:lnTo>
-                    <a:pt x="5170549" y="2631788"/>
-                  </a:lnTo>
-                  <a:lnTo>
-                    <a:pt x="5096789" y="2618758"/>
-                  </a:lnTo>
-                  <a:lnTo>
-                    <a:pt x="5023029" y="2604882"/>
-                  </a:lnTo>
-                  <a:lnTo>
-                    <a:pt x="4949269" y="2590103"/>
-                  </a:lnTo>
-                  <a:lnTo>
-                    <a:pt x="4875509" y="2574364"/>
-                  </a:lnTo>
-                  <a:lnTo>
-                    <a:pt x="4801749" y="2557603"/>
-                  </a:lnTo>
-                  <a:lnTo>
-                    <a:pt x="4727989" y="2539751"/>
-                  </a:lnTo>
-                  <a:lnTo>
-                    <a:pt x="4654229" y="2520740"/>
-                  </a:lnTo>
-                  <a:lnTo>
-                    <a:pt x="4580469" y="2500493"/>
-                  </a:lnTo>
-                  <a:lnTo>
-                    <a:pt x="4506709" y="2478930"/>
-                  </a:lnTo>
-                  <a:lnTo>
-                    <a:pt x="4432949" y="2455966"/>
-                  </a:lnTo>
-                  <a:lnTo>
-                    <a:pt x="4359189" y="2431509"/>
-                  </a:lnTo>
-                  <a:lnTo>
-                    <a:pt x="4285429" y="2405462"/>
-                  </a:lnTo>
-                  <a:lnTo>
-                    <a:pt x="4211669" y="2377723"/>
-                  </a:lnTo>
-                  <a:lnTo>
-                    <a:pt x="4137909" y="2348181"/>
-                  </a:lnTo>
-                  <a:lnTo>
-                    <a:pt x="4064149" y="2316718"/>
-                  </a:lnTo>
-                  <a:lnTo>
-                    <a:pt x="3990388" y="2283211"/>
-                  </a:lnTo>
-                  <a:lnTo>
-                    <a:pt x="3916628" y="2247526"/>
-                  </a:lnTo>
-                  <a:lnTo>
-                    <a:pt x="3842868" y="2209522"/>
-                  </a:lnTo>
-                  <a:lnTo>
-                    <a:pt x="3769108" y="2169047"/>
-                  </a:lnTo>
-                  <a:lnTo>
-                    <a:pt x="3695348" y="2125942"/>
-                  </a:lnTo>
-                  <a:lnTo>
-                    <a:pt x="3621588" y="2080036"/>
-                  </a:lnTo>
-                  <a:lnTo>
-                    <a:pt x="3547828" y="2031146"/>
-                  </a:lnTo>
-                  <a:lnTo>
-                    <a:pt x="3474068" y="1979078"/>
-                  </a:lnTo>
-                  <a:lnTo>
-                    <a:pt x="3400308" y="1947179"/>
-                  </a:lnTo>
-                  <a:lnTo>
-                    <a:pt x="3326548" y="1924564"/>
-                  </a:lnTo>
-                  <a:lnTo>
-                    <a:pt x="3252788" y="1901370"/>
-                  </a:lnTo>
-                  <a:lnTo>
-                    <a:pt x="3179028" y="1877585"/>
-                  </a:lnTo>
-                  <a:lnTo>
-                    <a:pt x="3105268" y="1853191"/>
-                  </a:lnTo>
-                  <a:lnTo>
-                    <a:pt x="3031508" y="1828174"/>
-                  </a:lnTo>
-                  <a:lnTo>
-                    <a:pt x="2957748" y="1802518"/>
-                  </a:lnTo>
-                  <a:lnTo>
-                    <a:pt x="2883988" y="1776207"/>
-                  </a:lnTo>
-                  <a:lnTo>
-                    <a:pt x="2810228" y="1749223"/>
-                  </a:lnTo>
-                  <a:lnTo>
-                    <a:pt x="2736468" y="1721550"/>
-                  </a:lnTo>
-                  <a:lnTo>
-                    <a:pt x="2662708" y="1693169"/>
-                  </a:lnTo>
-                  <a:lnTo>
-                    <a:pt x="2588948" y="1664063"/>
-                  </a:lnTo>
-                  <a:lnTo>
-                    <a:pt x="2515188" y="1634214"/>
-                  </a:lnTo>
-                  <a:lnTo>
-                    <a:pt x="2441428" y="1603602"/>
-                  </a:lnTo>
-                  <a:lnTo>
-                    <a:pt x="2367668" y="1572208"/>
-                  </a:lnTo>
-                  <a:lnTo>
-                    <a:pt x="2293908" y="1540012"/>
-                  </a:lnTo>
-                  <a:lnTo>
-                    <a:pt x="2220148" y="1506993"/>
-                  </a:lnTo>
-                  <a:lnTo>
-                    <a:pt x="2146388" y="1473130"/>
-                  </a:lnTo>
-                  <a:lnTo>
-                    <a:pt x="2072628" y="1438402"/>
-                  </a:lnTo>
-                  <a:lnTo>
-                    <a:pt x="1998868" y="1402787"/>
-                  </a:lnTo>
-                  <a:lnTo>
-                    <a:pt x="1925108" y="1366261"/>
-                  </a:lnTo>
-                  <a:lnTo>
-                    <a:pt x="1851348" y="1328803"/>
-                  </a:lnTo>
-                  <a:lnTo>
-                    <a:pt x="1777588" y="1290387"/>
-                  </a:lnTo>
-                  <a:lnTo>
-                    <a:pt x="1703828" y="1250989"/>
-                  </a:lnTo>
-                  <a:lnTo>
-                    <a:pt x="1630068" y="1210585"/>
-                  </a:lnTo>
-                  <a:lnTo>
-                    <a:pt x="1556308" y="1169149"/>
-                  </a:lnTo>
-                  <a:lnTo>
-                    <a:pt x="1482548" y="1126654"/>
-                  </a:lnTo>
-                  <a:lnTo>
-                    <a:pt x="1408788" y="1083073"/>
-                  </a:lnTo>
-                  <a:lnTo>
-                    <a:pt x="1335028" y="1038378"/>
-                  </a:lnTo>
-                  <a:lnTo>
-                    <a:pt x="1261268" y="992542"/>
-                  </a:lnTo>
-                  <a:lnTo>
-                    <a:pt x="1187508" y="945534"/>
-                  </a:lnTo>
-                  <a:lnTo>
-                    <a:pt x="1113747" y="897325"/>
-                  </a:lnTo>
-                  <a:lnTo>
-                    <a:pt x="1039987" y="847884"/>
-                  </a:lnTo>
-                  <a:lnTo>
-                    <a:pt x="966227" y="797180"/>
-                  </a:lnTo>
-                  <a:lnTo>
-                    <a:pt x="892467" y="745181"/>
-                  </a:lnTo>
-                  <a:lnTo>
-                    <a:pt x="818707" y="691853"/>
-                  </a:lnTo>
-                  <a:lnTo>
-                    <a:pt x="744947" y="637162"/>
-                  </a:lnTo>
-                  <a:lnTo>
-                    <a:pt x="671187" y="581073"/>
-                  </a:lnTo>
-                  <a:lnTo>
-                    <a:pt x="597427" y="523552"/>
-                  </a:lnTo>
-                  <a:lnTo>
-                    <a:pt x="523667" y="464561"/>
-                  </a:lnTo>
-                  <a:lnTo>
-                    <a:pt x="449907" y="404062"/>
-                  </a:lnTo>
-                  <a:lnTo>
-                    <a:pt x="376147" y="342018"/>
-                  </a:lnTo>
-                  <a:lnTo>
-                    <a:pt x="302387" y="278388"/>
-                  </a:lnTo>
-                  <a:lnTo>
-                    <a:pt x="228627" y="213133"/>
-                  </a:lnTo>
-                  <a:lnTo>
-                    <a:pt x="154867" y="146210"/>
-                  </a:lnTo>
-                  <a:lnTo>
-                    <a:pt x="81107" y="77577"/>
-                  </a:lnTo>
-                  <a:lnTo>
-                    <a:pt x="7347" y="7190"/>
+                    <a:pt x="7162070" y="2666374"/>
+                  </a:lnTo>
+                  <a:lnTo>
+                    <a:pt x="7088310" y="2664105"/>
+                  </a:lnTo>
+                  <a:lnTo>
+                    <a:pt x="7014550" y="2661687"/>
+                  </a:lnTo>
+                  <a:lnTo>
+                    <a:pt x="6940789" y="2659113"/>
+                  </a:lnTo>
+                  <a:lnTo>
+                    <a:pt x="6867029" y="2656371"/>
+                  </a:lnTo>
+                  <a:lnTo>
+                    <a:pt x="6793269" y="2653451"/>
+                  </a:lnTo>
+                  <a:lnTo>
+                    <a:pt x="6719509" y="2650341"/>
+                  </a:lnTo>
+                  <a:lnTo>
+                    <a:pt x="6645749" y="2647029"/>
+                  </a:lnTo>
+                  <a:lnTo>
+                    <a:pt x="6571989" y="2643502"/>
+                  </a:lnTo>
+                  <a:lnTo>
+                    <a:pt x="6498229" y="2639746"/>
+                  </a:lnTo>
+                  <a:lnTo>
+                    <a:pt x="6424469" y="2635745"/>
+                  </a:lnTo>
+                  <a:lnTo>
+                    <a:pt x="6350709" y="2631485"/>
+                  </a:lnTo>
+                  <a:lnTo>
+                    <a:pt x="6276949" y="2626947"/>
+                  </a:lnTo>
+                  <a:lnTo>
+                    <a:pt x="6203189" y="2622115"/>
+                  </a:lnTo>
+                  <a:lnTo>
+                    <a:pt x="6129429" y="2616968"/>
+                  </a:lnTo>
+                  <a:lnTo>
+                    <a:pt x="6055669" y="2611487"/>
+                  </a:lnTo>
+                  <a:lnTo>
+                    <a:pt x="5981909" y="2605650"/>
+                  </a:lnTo>
+                  <a:lnTo>
+                    <a:pt x="5908149" y="2599433"/>
+                  </a:lnTo>
+                  <a:lnTo>
+                    <a:pt x="5834389" y="2592813"/>
+                  </a:lnTo>
+                  <a:lnTo>
+                    <a:pt x="5760629" y="2585762"/>
+                  </a:lnTo>
+                  <a:lnTo>
+                    <a:pt x="5686869" y="2578253"/>
+                  </a:lnTo>
+                  <a:lnTo>
+                    <a:pt x="5613109" y="2570256"/>
+                  </a:lnTo>
+                  <a:lnTo>
+                    <a:pt x="5539349" y="2561739"/>
+                  </a:lnTo>
+                  <a:lnTo>
+                    <a:pt x="5465589" y="2552668"/>
+                  </a:lnTo>
+                  <a:lnTo>
+                    <a:pt x="5391829" y="2543008"/>
+                  </a:lnTo>
+                  <a:lnTo>
+                    <a:pt x="5318069" y="2532720"/>
+                  </a:lnTo>
+                  <a:lnTo>
+                    <a:pt x="5244309" y="2521763"/>
+                  </a:lnTo>
+                  <a:lnTo>
+                    <a:pt x="5170549" y="2510095"/>
+                  </a:lnTo>
+                  <a:lnTo>
+                    <a:pt x="5096789" y="2497668"/>
+                  </a:lnTo>
+                  <a:lnTo>
+                    <a:pt x="5023029" y="2484433"/>
+                  </a:lnTo>
+                  <a:lnTo>
+                    <a:pt x="4949269" y="2470338"/>
+                  </a:lnTo>
+                  <a:lnTo>
+                    <a:pt x="4875509" y="2455327"/>
+                  </a:lnTo>
+                  <a:lnTo>
+                    <a:pt x="4801749" y="2439340"/>
+                  </a:lnTo>
+                  <a:lnTo>
+                    <a:pt x="4727989" y="2422314"/>
+                  </a:lnTo>
+                  <a:lnTo>
+                    <a:pt x="4654229" y="2404182"/>
+                  </a:lnTo>
+                  <a:lnTo>
+                    <a:pt x="4580469" y="2384871"/>
+                  </a:lnTo>
+                  <a:lnTo>
+                    <a:pt x="4506709" y="2364305"/>
+                  </a:lnTo>
+                  <a:lnTo>
+                    <a:pt x="4432949" y="2342403"/>
+                  </a:lnTo>
+                  <a:lnTo>
+                    <a:pt x="4359189" y="2319077"/>
+                  </a:lnTo>
+                  <a:lnTo>
+                    <a:pt x="4285429" y="2294235"/>
+                  </a:lnTo>
+                  <a:lnTo>
+                    <a:pt x="4211669" y="2267778"/>
+                  </a:lnTo>
+                  <a:lnTo>
+                    <a:pt x="4137909" y="2239602"/>
+                  </a:lnTo>
+                  <a:lnTo>
+                    <a:pt x="4064149" y="2209594"/>
+                  </a:lnTo>
+                  <a:lnTo>
+                    <a:pt x="3990388" y="2177636"/>
+                  </a:lnTo>
+                  <a:lnTo>
+                    <a:pt x="3916628" y="2143601"/>
+                  </a:lnTo>
+                  <a:lnTo>
+                    <a:pt x="3842868" y="2107354"/>
+                  </a:lnTo>
+                  <a:lnTo>
+                    <a:pt x="3769108" y="2068751"/>
+                  </a:lnTo>
+                  <a:lnTo>
+                    <a:pt x="3695348" y="2027639"/>
+                  </a:lnTo>
+                  <a:lnTo>
+                    <a:pt x="3621588" y="1983856"/>
+                  </a:lnTo>
+                  <a:lnTo>
+                    <a:pt x="3547828" y="1937226"/>
+                  </a:lnTo>
+                  <a:lnTo>
+                    <a:pt x="3474068" y="1887566"/>
+                  </a:lnTo>
+                  <a:lnTo>
+                    <a:pt x="3400308" y="1857142"/>
+                  </a:lnTo>
+                  <a:lnTo>
+                    <a:pt x="3326548" y="1835572"/>
+                  </a:lnTo>
+                  <a:lnTo>
+                    <a:pt x="3252788" y="1813452"/>
+                  </a:lnTo>
+                  <a:lnTo>
+                    <a:pt x="3179028" y="1790766"/>
+                  </a:lnTo>
+                  <a:lnTo>
+                    <a:pt x="3105268" y="1767500"/>
+                  </a:lnTo>
+                  <a:lnTo>
+                    <a:pt x="3031508" y="1743640"/>
+                  </a:lnTo>
+                  <a:lnTo>
+                    <a:pt x="2957748" y="1719171"/>
+                  </a:lnTo>
+                  <a:lnTo>
+                    <a:pt x="2883988" y="1694076"/>
+                  </a:lnTo>
+                  <a:lnTo>
+                    <a:pt x="2810228" y="1668339"/>
+                  </a:lnTo>
+                  <a:lnTo>
+                    <a:pt x="2736468" y="1641946"/>
+                  </a:lnTo>
+                  <a:lnTo>
+                    <a:pt x="2662708" y="1614878"/>
+                  </a:lnTo>
+                  <a:lnTo>
+                    <a:pt x="2588948" y="1587118"/>
+                  </a:lnTo>
+                  <a:lnTo>
+                    <a:pt x="2515188" y="1558649"/>
+                  </a:lnTo>
+                  <a:lnTo>
+                    <a:pt x="2441428" y="1529452"/>
+                  </a:lnTo>
+                  <a:lnTo>
+                    <a:pt x="2367668" y="1499510"/>
+                  </a:lnTo>
+                  <a:lnTo>
+                    <a:pt x="2293908" y="1468802"/>
+                  </a:lnTo>
+                  <a:lnTo>
+                    <a:pt x="2220148" y="1437310"/>
+                  </a:lnTo>
+                  <a:lnTo>
+                    <a:pt x="2146388" y="1405013"/>
+                  </a:lnTo>
+                  <a:lnTo>
+                    <a:pt x="2072628" y="1371891"/>
+                  </a:lnTo>
+                  <a:lnTo>
+                    <a:pt x="1998868" y="1337922"/>
+                  </a:lnTo>
+                  <a:lnTo>
+                    <a:pt x="1925108" y="1303086"/>
+                  </a:lnTo>
+                  <a:lnTo>
+                    <a:pt x="1851348" y="1267359"/>
+                  </a:lnTo>
+                  <a:lnTo>
+                    <a:pt x="1777588" y="1230720"/>
+                  </a:lnTo>
+                  <a:lnTo>
+                    <a:pt x="1703828" y="1193144"/>
+                  </a:lnTo>
+                  <a:lnTo>
+                    <a:pt x="1630068" y="1154608"/>
+                  </a:lnTo>
+                  <a:lnTo>
+                    <a:pt x="1556308" y="1115088"/>
+                  </a:lnTo>
+                  <a:lnTo>
+                    <a:pt x="1482548" y="1074558"/>
+                  </a:lnTo>
+                  <a:lnTo>
+                    <a:pt x="1408788" y="1032992"/>
+                  </a:lnTo>
+                  <a:lnTo>
+                    <a:pt x="1335028" y="990364"/>
+                  </a:lnTo>
+                  <a:lnTo>
+                    <a:pt x="1261268" y="946647"/>
+                  </a:lnTo>
+                  <a:lnTo>
+                    <a:pt x="1187508" y="901813"/>
+                  </a:lnTo>
+                  <a:lnTo>
+                    <a:pt x="1113747" y="855833"/>
+                  </a:lnTo>
+                  <a:lnTo>
+                    <a:pt x="1039987" y="808678"/>
+                  </a:lnTo>
+                  <a:lnTo>
+                    <a:pt x="966227" y="760319"/>
+                  </a:lnTo>
+                  <a:lnTo>
+                    <a:pt x="892467" y="710724"/>
+                  </a:lnTo>
+                  <a:lnTo>
+                    <a:pt x="818707" y="659862"/>
+                  </a:lnTo>
+                  <a:lnTo>
+                    <a:pt x="744947" y="607700"/>
+                  </a:lnTo>
+                  <a:lnTo>
+                    <a:pt x="671187" y="554205"/>
+                  </a:lnTo>
+                  <a:lnTo>
+                    <a:pt x="597427" y="499343"/>
+                  </a:lnTo>
+                  <a:lnTo>
+                    <a:pt x="523667" y="443080"/>
+                  </a:lnTo>
+                  <a:lnTo>
+                    <a:pt x="449907" y="385379"/>
+                  </a:lnTo>
+                  <a:lnTo>
+                    <a:pt x="376147" y="326203"/>
+                  </a:lnTo>
+                  <a:lnTo>
+                    <a:pt x="302387" y="265516"/>
+                  </a:lnTo>
+                  <a:lnTo>
+                    <a:pt x="228627" y="203277"/>
+                  </a:lnTo>
+                  <a:lnTo>
+                    <a:pt x="154867" y="139449"/>
+                  </a:lnTo>
+                  <a:lnTo>
+                    <a:pt x="81107" y="73990"/>
+                  </a:lnTo>
+                  <a:lnTo>
+                    <a:pt x="7347" y="6858"/>
                   </a:lnTo>
                   <a:lnTo>
                     <a:pt x="0" y="0"/>
@@ -4139,267 +4139,267 @@
           </p:nvSpPr>
           <p:spPr>
             <a:xfrm>
-              <a:off x="1869098" y="1896563"/>
-              <a:ext cx="6184249" cy="3562119"/>
+              <a:off x="1869098" y="2073503"/>
+              <a:ext cx="6184249" cy="3397408"/>
             </a:xfrm>
             <a:custGeom>
               <a:avLst/>
               <a:pathLst>
-                <a:path w="6184249" h="3562119">
+                <a:path w="6184249" h="3397408">
                   <a:moveTo>
                     <a:pt x="0" y="0"/>
                   </a:moveTo>
                   <a:lnTo>
-                    <a:pt x="62167" y="133722"/>
-                  </a:lnTo>
-                  <a:lnTo>
-                    <a:pt x="135927" y="285534"/>
-                  </a:lnTo>
-                  <a:lnTo>
-                    <a:pt x="209687" y="430797"/>
-                  </a:lnTo>
-                  <a:lnTo>
-                    <a:pt x="283447" y="569792"/>
-                  </a:lnTo>
-                  <a:lnTo>
-                    <a:pt x="357207" y="702792"/>
-                  </a:lnTo>
-                  <a:lnTo>
-                    <a:pt x="430967" y="830053"/>
-                  </a:lnTo>
-                  <a:lnTo>
-                    <a:pt x="504727" y="951824"/>
-                  </a:lnTo>
-                  <a:lnTo>
-                    <a:pt x="578488" y="1068342"/>
-                  </a:lnTo>
-                  <a:lnTo>
-                    <a:pt x="652248" y="1179833"/>
-                  </a:lnTo>
-                  <a:lnTo>
-                    <a:pt x="726008" y="1286514"/>
-                  </a:lnTo>
-                  <a:lnTo>
-                    <a:pt x="799768" y="1388593"/>
-                  </a:lnTo>
-                  <a:lnTo>
-                    <a:pt x="873528" y="1486268"/>
-                  </a:lnTo>
-                  <a:lnTo>
-                    <a:pt x="947288" y="1579729"/>
-                  </a:lnTo>
-                  <a:lnTo>
-                    <a:pt x="1021048" y="1669158"/>
-                  </a:lnTo>
-                  <a:lnTo>
-                    <a:pt x="1094808" y="1754729"/>
-                  </a:lnTo>
-                  <a:lnTo>
-                    <a:pt x="1168568" y="1836608"/>
-                  </a:lnTo>
-                  <a:lnTo>
-                    <a:pt x="1242328" y="1914955"/>
-                  </a:lnTo>
-                  <a:lnTo>
-                    <a:pt x="1316088" y="1989922"/>
-                  </a:lnTo>
-                  <a:lnTo>
-                    <a:pt x="1389848" y="2061654"/>
-                  </a:lnTo>
-                  <a:lnTo>
-                    <a:pt x="1463608" y="2130292"/>
-                  </a:lnTo>
-                  <a:lnTo>
-                    <a:pt x="1537368" y="2195969"/>
-                  </a:lnTo>
-                  <a:lnTo>
-                    <a:pt x="1611128" y="2258812"/>
-                  </a:lnTo>
-                  <a:lnTo>
-                    <a:pt x="1684888" y="2318945"/>
-                  </a:lnTo>
-                  <a:lnTo>
-                    <a:pt x="1758648" y="2376483"/>
-                  </a:lnTo>
-                  <a:lnTo>
-                    <a:pt x="1832408" y="2431538"/>
-                  </a:lnTo>
-                  <a:lnTo>
-                    <a:pt x="1906168" y="2484219"/>
-                  </a:lnTo>
-                  <a:lnTo>
-                    <a:pt x="1979928" y="2534627"/>
-                  </a:lnTo>
-                  <a:lnTo>
-                    <a:pt x="2053688" y="2582860"/>
-                  </a:lnTo>
-                  <a:lnTo>
-                    <a:pt x="2127448" y="2629012"/>
-                  </a:lnTo>
-                  <a:lnTo>
-                    <a:pt x="2201208" y="2673173"/>
-                  </a:lnTo>
-                  <a:lnTo>
-                    <a:pt x="2274968" y="2715429"/>
-                  </a:lnTo>
-                  <a:lnTo>
-                    <a:pt x="2348728" y="2755862"/>
-                  </a:lnTo>
-                  <a:lnTo>
-                    <a:pt x="2422488" y="2794551"/>
-                  </a:lnTo>
-                  <a:lnTo>
-                    <a:pt x="2496248" y="2831570"/>
-                  </a:lnTo>
-                  <a:lnTo>
-                    <a:pt x="2570008" y="2866993"/>
-                  </a:lnTo>
-                  <a:lnTo>
-                    <a:pt x="2643768" y="2900887"/>
-                  </a:lnTo>
-                  <a:lnTo>
-                    <a:pt x="2717528" y="2933319"/>
-                  </a:lnTo>
-                  <a:lnTo>
-                    <a:pt x="2791288" y="2964352"/>
-                  </a:lnTo>
-                  <a:lnTo>
-                    <a:pt x="2865048" y="2994046"/>
-                  </a:lnTo>
-                  <a:lnTo>
-                    <a:pt x="2938808" y="3022459"/>
-                  </a:lnTo>
-                  <a:lnTo>
-                    <a:pt x="3012568" y="3049646"/>
-                  </a:lnTo>
-                  <a:lnTo>
-                    <a:pt x="3086328" y="3075660"/>
-                  </a:lnTo>
-                  <a:lnTo>
-                    <a:pt x="3160088" y="3100552"/>
-                  </a:lnTo>
-                  <a:lnTo>
-                    <a:pt x="3233848" y="3124370"/>
-                  </a:lnTo>
-                  <a:lnTo>
-                    <a:pt x="3307608" y="3147161"/>
-                  </a:lnTo>
-                  <a:lnTo>
-                    <a:pt x="3381368" y="3168968"/>
-                  </a:lnTo>
-                  <a:lnTo>
-                    <a:pt x="3455128" y="3189835"/>
-                  </a:lnTo>
-                  <a:lnTo>
-                    <a:pt x="3528889" y="3209801"/>
-                  </a:lnTo>
-                  <a:lnTo>
-                    <a:pt x="3602649" y="3228906"/>
-                  </a:lnTo>
-                  <a:lnTo>
-                    <a:pt x="3676409" y="3247187"/>
-                  </a:lnTo>
-                  <a:lnTo>
-                    <a:pt x="3750169" y="3264679"/>
-                  </a:lnTo>
-                  <a:lnTo>
-                    <a:pt x="3823929" y="3281416"/>
-                  </a:lnTo>
-                  <a:lnTo>
-                    <a:pt x="3897689" y="3297432"/>
-                  </a:lnTo>
-                  <a:lnTo>
-                    <a:pt x="3971449" y="3312756"/>
-                  </a:lnTo>
-                  <a:lnTo>
-                    <a:pt x="4045209" y="3327419"/>
-                  </a:lnTo>
-                  <a:lnTo>
-                    <a:pt x="4118969" y="3341450"/>
-                  </a:lnTo>
-                  <a:lnTo>
-                    <a:pt x="4192729" y="3354876"/>
-                  </a:lnTo>
-                  <a:lnTo>
-                    <a:pt x="4266489" y="3367722"/>
-                  </a:lnTo>
-                  <a:lnTo>
-                    <a:pt x="4340249" y="3380014"/>
-                  </a:lnTo>
-                  <a:lnTo>
-                    <a:pt x="4414009" y="3391775"/>
-                  </a:lnTo>
-                  <a:lnTo>
-                    <a:pt x="4487769" y="3403030"/>
-                  </a:lnTo>
-                  <a:lnTo>
-                    <a:pt x="4561529" y="3413798"/>
-                  </a:lnTo>
-                  <a:lnTo>
-                    <a:pt x="4635289" y="3424103"/>
-                  </a:lnTo>
-                  <a:lnTo>
-                    <a:pt x="4709049" y="3433962"/>
-                  </a:lnTo>
-                  <a:lnTo>
-                    <a:pt x="4782809" y="3443397"/>
-                  </a:lnTo>
-                  <a:lnTo>
-                    <a:pt x="4856569" y="3452424"/>
-                  </a:lnTo>
-                  <a:lnTo>
-                    <a:pt x="4930329" y="3461062"/>
-                  </a:lnTo>
-                  <a:lnTo>
-                    <a:pt x="5004089" y="3469327"/>
-                  </a:lnTo>
-                  <a:lnTo>
-                    <a:pt x="5077849" y="3477235"/>
-                  </a:lnTo>
-                  <a:lnTo>
-                    <a:pt x="5151609" y="3484803"/>
-                  </a:lnTo>
-                  <a:lnTo>
-                    <a:pt x="5225369" y="3492044"/>
-                  </a:lnTo>
-                  <a:lnTo>
-                    <a:pt x="5299129" y="3498972"/>
-                  </a:lnTo>
-                  <a:lnTo>
-                    <a:pt x="5372889" y="3505602"/>
-                  </a:lnTo>
-                  <a:lnTo>
-                    <a:pt x="5446649" y="3511945"/>
-                  </a:lnTo>
-                  <a:lnTo>
-                    <a:pt x="5520409" y="3518015"/>
-                  </a:lnTo>
-                  <a:lnTo>
-                    <a:pt x="5594169" y="3523823"/>
-                  </a:lnTo>
-                  <a:lnTo>
-                    <a:pt x="5667929" y="3529381"/>
-                  </a:lnTo>
-                  <a:lnTo>
-                    <a:pt x="5741689" y="3534699"/>
-                  </a:lnTo>
-                  <a:lnTo>
-                    <a:pt x="5815449" y="3539787"/>
-                  </a:lnTo>
-                  <a:lnTo>
-                    <a:pt x="5889209" y="3544656"/>
-                  </a:lnTo>
-                  <a:lnTo>
-                    <a:pt x="5962969" y="3549315"/>
-                  </a:lnTo>
-                  <a:lnTo>
-                    <a:pt x="6036729" y="3553772"/>
-                  </a:lnTo>
-                  <a:lnTo>
-                    <a:pt x="6110489" y="3558038"/>
-                  </a:lnTo>
-                  <a:lnTo>
-                    <a:pt x="6184249" y="3562119"/>
+                    <a:pt x="62167" y="127538"/>
+                  </a:lnTo>
+                  <a:lnTo>
+                    <a:pt x="135927" y="272331"/>
+                  </a:lnTo>
+                  <a:lnTo>
+                    <a:pt x="209687" y="410877"/>
+                  </a:lnTo>
+                  <a:lnTo>
+                    <a:pt x="283447" y="543445"/>
+                  </a:lnTo>
+                  <a:lnTo>
+                    <a:pt x="357207" y="670295"/>
+                  </a:lnTo>
+                  <a:lnTo>
+                    <a:pt x="430967" y="791672"/>
+                  </a:lnTo>
+                  <a:lnTo>
+                    <a:pt x="504727" y="907812"/>
+                  </a:lnTo>
+                  <a:lnTo>
+                    <a:pt x="578488" y="1018943"/>
+                  </a:lnTo>
+                  <a:lnTo>
+                    <a:pt x="652248" y="1125278"/>
+                  </a:lnTo>
+                  <a:lnTo>
+                    <a:pt x="726008" y="1227027"/>
+                  </a:lnTo>
+                  <a:lnTo>
+                    <a:pt x="799768" y="1324385"/>
+                  </a:lnTo>
+                  <a:lnTo>
+                    <a:pt x="873528" y="1417544"/>
+                  </a:lnTo>
+                  <a:lnTo>
+                    <a:pt x="947288" y="1506683"/>
+                  </a:lnTo>
+                  <a:lnTo>
+                    <a:pt x="1021048" y="1591977"/>
+                  </a:lnTo>
+                  <a:lnTo>
+                    <a:pt x="1094808" y="1673591"/>
+                  </a:lnTo>
+                  <a:lnTo>
+                    <a:pt x="1168568" y="1751684"/>
+                  </a:lnTo>
+                  <a:lnTo>
+                    <a:pt x="1242328" y="1826408"/>
+                  </a:lnTo>
+                  <a:lnTo>
+                    <a:pt x="1316088" y="1897908"/>
+                  </a:lnTo>
+                  <a:lnTo>
+                    <a:pt x="1389848" y="1966324"/>
+                  </a:lnTo>
+                  <a:lnTo>
+                    <a:pt x="1463608" y="2031788"/>
+                  </a:lnTo>
+                  <a:lnTo>
+                    <a:pt x="1537368" y="2094428"/>
+                  </a:lnTo>
+                  <a:lnTo>
+                    <a:pt x="1611128" y="2154366"/>
+                  </a:lnTo>
+                  <a:lnTo>
+                    <a:pt x="1684888" y="2211717"/>
+                  </a:lnTo>
+                  <a:lnTo>
+                    <a:pt x="1758648" y="2266595"/>
+                  </a:lnTo>
+                  <a:lnTo>
+                    <a:pt x="1832408" y="2319105"/>
+                  </a:lnTo>
+                  <a:lnTo>
+                    <a:pt x="1906168" y="2369349"/>
+                  </a:lnTo>
+                  <a:lnTo>
+                    <a:pt x="1979928" y="2417426"/>
+                  </a:lnTo>
+                  <a:lnTo>
+                    <a:pt x="2053688" y="2463429"/>
+                  </a:lnTo>
+                  <a:lnTo>
+                    <a:pt x="2127448" y="2507447"/>
+                  </a:lnTo>
+                  <a:lnTo>
+                    <a:pt x="2201208" y="2549566"/>
+                  </a:lnTo>
+                  <a:lnTo>
+                    <a:pt x="2274968" y="2589869"/>
+                  </a:lnTo>
+                  <a:lnTo>
+                    <a:pt x="2348728" y="2628432"/>
+                  </a:lnTo>
+                  <a:lnTo>
+                    <a:pt x="2422488" y="2665332"/>
+                  </a:lnTo>
+                  <a:lnTo>
+                    <a:pt x="2496248" y="2700639"/>
+                  </a:lnTo>
+                  <a:lnTo>
+                    <a:pt x="2570008" y="2734424"/>
+                  </a:lnTo>
+                  <a:lnTo>
+                    <a:pt x="2643768" y="2766751"/>
+                  </a:lnTo>
+                  <a:lnTo>
+                    <a:pt x="2717528" y="2797683"/>
+                  </a:lnTo>
+                  <a:lnTo>
+                    <a:pt x="2791288" y="2827281"/>
+                  </a:lnTo>
+                  <a:lnTo>
+                    <a:pt x="2865048" y="2855602"/>
+                  </a:lnTo>
+                  <a:lnTo>
+                    <a:pt x="2938808" y="2882701"/>
+                  </a:lnTo>
+                  <a:lnTo>
+                    <a:pt x="3012568" y="2908632"/>
+                  </a:lnTo>
+                  <a:lnTo>
+                    <a:pt x="3086328" y="2933443"/>
+                  </a:lnTo>
+                  <a:lnTo>
+                    <a:pt x="3160088" y="2957184"/>
+                  </a:lnTo>
+                  <a:lnTo>
+                    <a:pt x="3233848" y="2979901"/>
+                  </a:lnTo>
+                  <a:lnTo>
+                    <a:pt x="3307608" y="3001637"/>
+                  </a:lnTo>
+                  <a:lnTo>
+                    <a:pt x="3381368" y="3022436"/>
+                  </a:lnTo>
+                  <a:lnTo>
+                    <a:pt x="3455128" y="3042338"/>
+                  </a:lnTo>
+                  <a:lnTo>
+                    <a:pt x="3528889" y="3061381"/>
+                  </a:lnTo>
+                  <a:lnTo>
+                    <a:pt x="3602649" y="3079603"/>
+                  </a:lnTo>
+                  <a:lnTo>
+                    <a:pt x="3676409" y="3097038"/>
+                  </a:lnTo>
+                  <a:lnTo>
+                    <a:pt x="3750169" y="3113721"/>
+                  </a:lnTo>
+                  <a:lnTo>
+                    <a:pt x="3823929" y="3129685"/>
+                  </a:lnTo>
+                  <a:lnTo>
+                    <a:pt x="3897689" y="3144960"/>
+                  </a:lnTo>
+                  <a:lnTo>
+                    <a:pt x="3971449" y="3159576"/>
+                  </a:lnTo>
+                  <a:lnTo>
+                    <a:pt x="4045209" y="3173561"/>
+                  </a:lnTo>
+                  <a:lnTo>
+                    <a:pt x="4118969" y="3186943"/>
+                  </a:lnTo>
+                  <a:lnTo>
+                    <a:pt x="4192729" y="3199747"/>
+                  </a:lnTo>
+                  <a:lnTo>
+                    <a:pt x="4266489" y="3212000"/>
+                  </a:lnTo>
+                  <a:lnTo>
+                    <a:pt x="4340249" y="3223723"/>
+                  </a:lnTo>
+                  <a:lnTo>
+                    <a:pt x="4414009" y="3234941"/>
+                  </a:lnTo>
+                  <a:lnTo>
+                    <a:pt x="4487769" y="3245675"/>
+                  </a:lnTo>
+                  <a:lnTo>
+                    <a:pt x="4561529" y="3255946"/>
+                  </a:lnTo>
+                  <a:lnTo>
+                    <a:pt x="4635289" y="3265773"/>
+                  </a:lnTo>
+                  <a:lnTo>
+                    <a:pt x="4709049" y="3275177"/>
+                  </a:lnTo>
+                  <a:lnTo>
+                    <a:pt x="4782809" y="3284175"/>
+                  </a:lnTo>
+                  <a:lnTo>
+                    <a:pt x="4856569" y="3292785"/>
+                  </a:lnTo>
+                  <a:lnTo>
+                    <a:pt x="4930329" y="3301023"/>
+                  </a:lnTo>
+                  <a:lnTo>
+                    <a:pt x="5004089" y="3308906"/>
+                  </a:lnTo>
+                  <a:lnTo>
+                    <a:pt x="5077849" y="3316449"/>
+                  </a:lnTo>
+                  <a:lnTo>
+                    <a:pt x="5151609" y="3323667"/>
+                  </a:lnTo>
+                  <a:lnTo>
+                    <a:pt x="5225369" y="3330573"/>
+                  </a:lnTo>
+                  <a:lnTo>
+                    <a:pt x="5299129" y="3337181"/>
+                  </a:lnTo>
+                  <a:lnTo>
+                    <a:pt x="5372889" y="3343504"/>
+                  </a:lnTo>
+                  <a:lnTo>
+                    <a:pt x="5446649" y="3349554"/>
+                  </a:lnTo>
+                  <a:lnTo>
+                    <a:pt x="5520409" y="3355344"/>
+                  </a:lnTo>
+                  <a:lnTo>
+                    <a:pt x="5594169" y="3360883"/>
+                  </a:lnTo>
+                  <a:lnTo>
+                    <a:pt x="5667929" y="3366184"/>
+                  </a:lnTo>
+                  <a:lnTo>
+                    <a:pt x="5741689" y="3371256"/>
+                  </a:lnTo>
+                  <a:lnTo>
+                    <a:pt x="5815449" y="3376109"/>
+                  </a:lnTo>
+                  <a:lnTo>
+                    <a:pt x="5889209" y="3380752"/>
+                  </a:lnTo>
+                  <a:lnTo>
+                    <a:pt x="5962969" y="3385196"/>
+                  </a:lnTo>
+                  <a:lnTo>
+                    <a:pt x="6036729" y="3389447"/>
+                  </a:lnTo>
+                  <a:lnTo>
+                    <a:pt x="6110489" y="3393515"/>
+                  </a:lnTo>
+                  <a:lnTo>
+                    <a:pt x="6184249" y="3397408"/>
                   </a:lnTo>
                 </a:path>
               </a:pathLst>
@@ -4428,7 +4428,7 @@
           </p:nvSpPr>
           <p:spPr>
             <a:xfrm>
-              <a:off x="817517" y="4679530"/>
+              <a:off x="817517" y="4727786"/>
               <a:ext cx="7799693" cy="0"/>
             </a:xfrm>
             <a:custGeom>
@@ -4471,15 +4471,15 @@
           </p:nvSpPr>
           <p:spPr>
             <a:xfrm>
-              <a:off x="4269157" y="1896563"/>
-              <a:ext cx="0" cy="3826579"/>
+              <a:off x="4269157" y="2073503"/>
+              <a:ext cx="0" cy="3649639"/>
             </a:xfrm>
             <a:custGeom>
               <a:avLst/>
               <a:pathLst>
-                <a:path w="0" h="3826579">
+                <a:path w="0" h="3649639">
                   <a:moveTo>
-                    <a:pt x="0" y="3826579"/>
+                    <a:pt x="0" y="3649639"/>
                   </a:moveTo>
                   <a:lnTo>
                     <a:pt x="0" y="0"/>
@@ -4514,7 +4514,7 @@
           </p:nvSpPr>
           <p:spPr>
             <a:xfrm>
-              <a:off x="692708" y="5509156"/>
+              <a:off x="692708" y="5517199"/>
               <a:ext cx="62179" cy="80101"/>
             </a:xfrm>
             <a:prstGeom prst="rect">
@@ -4560,7 +4560,7 @@
           </p:nvSpPr>
           <p:spPr>
             <a:xfrm>
-              <a:off x="692708" y="4639479"/>
+              <a:off x="692708" y="4687735"/>
               <a:ext cx="62179" cy="80101"/>
             </a:xfrm>
             <a:prstGeom prst="rect">
@@ -4606,7 +4606,7 @@
           </p:nvSpPr>
           <p:spPr>
             <a:xfrm>
-              <a:off x="692708" y="3769802"/>
+              <a:off x="692708" y="3858272"/>
               <a:ext cx="62179" cy="80101"/>
             </a:xfrm>
             <a:prstGeom prst="rect">
@@ -4652,7 +4652,7 @@
           </p:nvSpPr>
           <p:spPr>
             <a:xfrm>
-              <a:off x="692708" y="2900125"/>
+              <a:off x="692708" y="3028808"/>
               <a:ext cx="62179" cy="80101"/>
             </a:xfrm>
             <a:prstGeom prst="rect">
@@ -4698,7 +4698,7 @@
           </p:nvSpPr>
           <p:spPr>
             <a:xfrm>
-              <a:off x="692708" y="2030448"/>
+              <a:off x="692708" y="2199345"/>
               <a:ext cx="62179" cy="80101"/>
             </a:xfrm>
             <a:prstGeom prst="rect">
@@ -4974,7 +4974,7 @@
           </p:nvSpPr>
           <p:spPr>
             <a:xfrm rot="-5400000">
-              <a:off x="181100" y="3759743"/>
+              <a:off x="181100" y="3848213"/>
               <a:ext cx="791596" cy="100218"/>
             </a:xfrm>
             <a:prstGeom prst="rect">
@@ -5015,6 +5015,52 @@
         <p:sp>
           <p:nvSpPr>
             <p:cNvPr id="38" name="tx38"/>
+            <p:cNvSpPr/>
+            <p:nvPr/>
+          </p:nvSpPr>
+          <p:spPr>
+            <a:xfrm>
+              <a:off x="817517" y="1896563"/>
+              <a:ext cx="5441960" cy="82021"/>
+            </a:xfrm>
+            <a:prstGeom prst="rect">
+              <a:avLst/>
+            </a:prstGeom>
+            <a:noFill/>
+          </p:spPr>
+          <p:txBody>
+            <a:bodyPr lIns="0" rIns="0" tIns="0" bIns="0" anchorCtr="1" anchor="ctr" wrap="none"/>
+            <a:lstStyle/>
+            <a:p>
+              <a:pPr algn="l" marL="0" marR="0" indent="0">
+                <a:lnSpc>
+                  <a:spcPts val="900"/>
+                </a:lnSpc>
+                <a:spcBef>
+                  <a:spcPts val="0"/>
+                </a:spcBef>
+                <a:spcAft>
+                  <a:spcPts val="0"/>
+                </a:spcAft>
+              </a:pPr>
+              <a:r>
+                <a:rPr sz="900">
+                  <a:solidFill>
+                    <a:srgbClr val="404040">
+                      <a:alpha val="100000"/>
+                    </a:srgbClr>
+                  </a:solidFill>
+                  <a:latin typeface="Helvetica"/>
+                  <a:cs typeface="Helvetica"/>
+                </a:rPr>
+                <a:t>HR per 0.1 ratio decline: 1.70 (1.35-2.13)  |  per IQR decline (Δ = 0.29): 4.72 (2.43-9.16)  |  IQR: [0.85, 1.15]</a:t>
+              </a:r>
+            </a:p>
+          </p:txBody>
+        </p:sp>
+        <p:sp>
+          <p:nvSpPr>
+            <p:cNvPr id="39" name="tx39"/>
             <p:cNvSpPr/>
             <p:nvPr/>
           </p:nvSpPr>

--- a/docs/pptx/whole/jx-cox-linear-ratio-death.pptx
+++ b/docs/pptx/whole/jx-cox-linear-ratio-death.pptx
@@ -5021,7 +5021,7 @@
           <p:spPr>
             <a:xfrm>
               <a:off x="817517" y="1896563"/>
-              <a:ext cx="5441960" cy="82021"/>
+              <a:ext cx="6051864" cy="82021"/>
             </a:xfrm>
             <a:prstGeom prst="rect">
               <a:avLst/>
@@ -5053,7 +5053,7 @@
                   <a:latin typeface="Helvetica"/>
                   <a:cs typeface="Helvetica"/>
                 </a:rPr>
-                <a:t>HR per 0.1 ratio decline: 1.70 (1.35-2.13)  |  per IQR decline (Δ = 0.29): 4.72 (2.43-9.16)  |  IQR: [0.85, 1.15]</a:t>
+                <a:t>HR per 0.1 ratio decline: 1.70 (1.35-2.13), p = &lt;0.001  |  per IQR decline (Δ = 0.29): 4.72 (2.43-9.16)  |  IQR: [0.85, 1.15]</a:t>
               </a:r>
             </a:p>
           </p:txBody>

--- a/docs/pptx/whole/jx-cox-linear-ratio-death.pptx
+++ b/docs/pptx/whole/jx-cox-linear-ratio-death.pptx
@@ -5021,7 +5021,7 @@
           <p:spPr>
             <a:xfrm>
               <a:off x="817517" y="1896563"/>
-              <a:ext cx="6051864" cy="82021"/>
+              <a:ext cx="6715627" cy="82021"/>
             </a:xfrm>
             <a:prstGeom prst="rect">
               <a:avLst/>
@@ -5053,7 +5053,7 @@
                   <a:latin typeface="Helvetica"/>
                   <a:cs typeface="Helvetica"/>
                 </a:rPr>
-                <a:t>HR per 0.1 ratio decline: 1.70 (1.35-2.13), p = &lt;0.001  |  per IQR decline (Δ = 0.29): 4.72 (2.43-9.16)  |  IQR: [0.85, 1.15]</a:t>
+                <a:t>HR per 0.1 ratio decline: 1.70 (1.35-2.13), p_Bonf = &lt;0.001 (n = 6)  |  per IQR decline (Δ = 0.29): 4.72 (2.43-9.16)  |  IQR: [0.85, 1.15]</a:t>
               </a:r>
             </a:p>
           </p:txBody>

--- a/docs/pptx/whole/jx-cox-linear-ratio-death.pptx
+++ b/docs/pptx/whole/jx-cox-linear-ratio-death.pptx
@@ -2443,7 +2443,7 @@
           </p:nvSpPr>
           <p:spPr>
             <a:xfrm>
-              <a:off x="1615213" y="2073503"/>
+              <a:off x="1365633" y="2073503"/>
               <a:ext cx="0" cy="3649639"/>
             </a:xfrm>
             <a:custGeom>
@@ -2486,7 +2486,7 @@
           </p:nvSpPr>
           <p:spPr>
             <a:xfrm>
-              <a:off x="3387871" y="2073503"/>
+              <a:off x="3517243" y="2073503"/>
               <a:ext cx="0" cy="3649639"/>
             </a:xfrm>
             <a:custGeom>
@@ -2529,7 +2529,7 @@
           </p:nvSpPr>
           <p:spPr>
             <a:xfrm>
-              <a:off x="5160528" y="2073503"/>
+              <a:off x="5668852" y="2073503"/>
               <a:ext cx="0" cy="3649639"/>
             </a:xfrm>
             <a:custGeom>
@@ -2572,7 +2572,7 @@
           </p:nvSpPr>
           <p:spPr>
             <a:xfrm>
-              <a:off x="6933186" y="2073503"/>
+              <a:off x="7820461" y="2073503"/>
               <a:ext cx="0" cy="3649639"/>
             </a:xfrm>
             <a:custGeom>
@@ -2830,7 +2830,7 @@
           </p:nvSpPr>
           <p:spPr>
             <a:xfrm>
-              <a:off x="2501542" y="2073503"/>
+              <a:off x="2441438" y="2073503"/>
               <a:ext cx="0" cy="3649639"/>
             </a:xfrm>
             <a:custGeom>
@@ -2873,7 +2873,7 @@
           </p:nvSpPr>
           <p:spPr>
             <a:xfrm>
-              <a:off x="4274200" y="2073503"/>
+              <a:off x="4593047" y="2073503"/>
               <a:ext cx="0" cy="3649639"/>
             </a:xfrm>
             <a:custGeom>
@@ -2916,7 +2916,7 @@
           </p:nvSpPr>
           <p:spPr>
             <a:xfrm>
-              <a:off x="6046857" y="2073503"/>
+              <a:off x="6744657" y="2073503"/>
               <a:ext cx="0" cy="3649639"/>
             </a:xfrm>
             <a:custGeom>
@@ -2953,589 +2953,546 @@
         </p:sp>
         <p:sp>
           <p:nvSpPr>
-            <p:cNvPr id="20" name="pl20"/>
+            <p:cNvPr id="20" name="pg20"/>
             <p:cNvSpPr/>
             <p:nvPr/>
           </p:nvSpPr>
           <p:spPr>
             <a:xfrm>
-              <a:off x="7819515" y="2073503"/>
-              <a:ext cx="0" cy="3649639"/>
+              <a:off x="1172049" y="2073503"/>
+              <a:ext cx="7090630" cy="3450954"/>
             </a:xfrm>
             <a:custGeom>
               <a:avLst/>
               <a:pathLst>
-                <a:path w="0" h="3649639">
+                <a:path w="7090630" h="3450954">
                   <a:moveTo>
-                    <a:pt x="0" y="3649639"/>
+                    <a:pt x="1783998" y="0"/>
                   </a:moveTo>
                   <a:lnTo>
-                    <a:pt x="0" y="0"/>
-                  </a:lnTo>
-                  <a:lnTo>
-                    <a:pt x="0" y="0"/>
-                  </a:lnTo>
-                </a:path>
-              </a:pathLst>
-            </a:custGeom>
-            <a:ln w="13550" cap="flat">
-              <a:solidFill>
-                <a:srgbClr val="EBEBEB">
-                  <a:alpha val="100000"/>
-                </a:srgbClr>
-              </a:solidFill>
-              <a:prstDash val="solid"/>
-              <a:round/>
-            </a:ln>
-          </p:spPr>
-          <p:txBody>
-            <a:bodyPr/>
-            <a:lstStyle/>
-            <a:p/>
-          </p:txBody>
-        </p:sp>
-        <p:sp>
-          <p:nvSpPr>
-            <p:cNvPr id="21" name="pg21"/>
-            <p:cNvSpPr/>
-            <p:nvPr/>
-          </p:nvSpPr>
-          <p:spPr>
-            <a:xfrm>
-              <a:off x="817517" y="2073503"/>
-              <a:ext cx="7235830" cy="3450954"/>
-            </a:xfrm>
-            <a:custGeom>
-              <a:avLst/>
-              <a:pathLst>
-                <a:path w="7235830" h="3450954">
-                  <a:moveTo>
-                    <a:pt x="1770827" y="0"/>
-                  </a:moveTo>
-                  <a:lnTo>
-                    <a:pt x="1777588" y="20630"/>
-                  </a:lnTo>
-                  <a:lnTo>
-                    <a:pt x="1851348" y="231976"/>
-                  </a:lnTo>
-                  <a:lnTo>
-                    <a:pt x="1925108" y="430424"/>
-                  </a:lnTo>
-                  <a:lnTo>
-                    <a:pt x="1998868" y="616761"/>
-                  </a:lnTo>
-                  <a:lnTo>
-                    <a:pt x="2072628" y="791726"/>
-                  </a:lnTo>
-                  <a:lnTo>
-                    <a:pt x="2146388" y="956014"/>
-                  </a:lnTo>
-                  <a:lnTo>
-                    <a:pt x="2220148" y="1110275"/>
-                  </a:lnTo>
-                  <a:lnTo>
-                    <a:pt x="2293908" y="1255123"/>
-                  </a:lnTo>
-                  <a:lnTo>
-                    <a:pt x="2367668" y="1391131"/>
-                  </a:lnTo>
-                  <a:lnTo>
-                    <a:pt x="2441428" y="1518838"/>
-                  </a:lnTo>
-                  <a:lnTo>
-                    <a:pt x="2515188" y="1638752"/>
-                  </a:lnTo>
-                  <a:lnTo>
-                    <a:pt x="2588948" y="1751347"/>
-                  </a:lnTo>
-                  <a:lnTo>
-                    <a:pt x="2662708" y="1857072"/>
-                  </a:lnTo>
-                  <a:lnTo>
-                    <a:pt x="2736468" y="1956344"/>
-                  </a:lnTo>
-                  <a:lnTo>
-                    <a:pt x="2810228" y="2049558"/>
-                  </a:lnTo>
-                  <a:lnTo>
-                    <a:pt x="2883988" y="2137083"/>
-                  </a:lnTo>
-                  <a:lnTo>
-                    <a:pt x="2957748" y="2219266"/>
-                  </a:lnTo>
-                  <a:lnTo>
-                    <a:pt x="3031508" y="2296435"/>
-                  </a:lnTo>
-                  <a:lnTo>
-                    <a:pt x="3105268" y="2368894"/>
-                  </a:lnTo>
-                  <a:lnTo>
-                    <a:pt x="3179028" y="2436930"/>
-                  </a:lnTo>
-                  <a:lnTo>
-                    <a:pt x="3252788" y="2500815"/>
-                  </a:lnTo>
-                  <a:lnTo>
-                    <a:pt x="3326548" y="2560801"/>
-                  </a:lnTo>
-                  <a:lnTo>
-                    <a:pt x="3400308" y="2617126"/>
-                  </a:lnTo>
-                  <a:lnTo>
-                    <a:pt x="3474068" y="2660622"/>
-                  </a:lnTo>
-                  <a:lnTo>
-                    <a:pt x="3547828" y="2681130"/>
-                  </a:lnTo>
-                  <a:lnTo>
-                    <a:pt x="3621588" y="2701128"/>
-                  </a:lnTo>
-                  <a:lnTo>
-                    <a:pt x="3695348" y="2720626"/>
-                  </a:lnTo>
-                  <a:lnTo>
-                    <a:pt x="3769108" y="2739640"/>
-                  </a:lnTo>
-                  <a:lnTo>
-                    <a:pt x="3842868" y="2758179"/>
-                  </a:lnTo>
-                  <a:lnTo>
-                    <a:pt x="3916628" y="2776257"/>
-                  </a:lnTo>
-                  <a:lnTo>
-                    <a:pt x="3990388" y="2793884"/>
-                  </a:lnTo>
-                  <a:lnTo>
-                    <a:pt x="4064149" y="2811072"/>
-                  </a:lnTo>
-                  <a:lnTo>
-                    <a:pt x="4137909" y="2827831"/>
-                  </a:lnTo>
-                  <a:lnTo>
-                    <a:pt x="4211669" y="2844173"/>
-                  </a:lnTo>
-                  <a:lnTo>
-                    <a:pt x="4285429" y="2860108"/>
-                  </a:lnTo>
-                  <a:lnTo>
-                    <a:pt x="4359189" y="2875646"/>
-                  </a:lnTo>
-                  <a:lnTo>
-                    <a:pt x="4432949" y="2890797"/>
-                  </a:lnTo>
-                  <a:lnTo>
-                    <a:pt x="4506709" y="2905570"/>
-                  </a:lnTo>
-                  <a:lnTo>
-                    <a:pt x="4580469" y="2919976"/>
-                  </a:lnTo>
-                  <a:lnTo>
-                    <a:pt x="4654229" y="2934022"/>
-                  </a:lnTo>
-                  <a:lnTo>
-                    <a:pt x="4727989" y="2947718"/>
-                  </a:lnTo>
-                  <a:lnTo>
-                    <a:pt x="4801749" y="2961073"/>
-                  </a:lnTo>
-                  <a:lnTo>
-                    <a:pt x="4875509" y="2974096"/>
-                  </a:lnTo>
-                  <a:lnTo>
-                    <a:pt x="4949269" y="2986794"/>
-                  </a:lnTo>
-                  <a:lnTo>
-                    <a:pt x="5023029" y="2999175"/>
-                  </a:lnTo>
-                  <a:lnTo>
-                    <a:pt x="5096789" y="3011248"/>
-                  </a:lnTo>
-                  <a:lnTo>
-                    <a:pt x="5170549" y="3023021"/>
-                  </a:lnTo>
-                  <a:lnTo>
-                    <a:pt x="5244309" y="3034500"/>
-                  </a:lnTo>
-                  <a:lnTo>
-                    <a:pt x="5318069" y="3045693"/>
-                  </a:lnTo>
-                  <a:lnTo>
-                    <a:pt x="5391829" y="3056607"/>
-                  </a:lnTo>
-                  <a:lnTo>
-                    <a:pt x="5465589" y="3067249"/>
-                  </a:lnTo>
-                  <a:lnTo>
-                    <a:pt x="5539349" y="3077626"/>
-                  </a:lnTo>
-                  <a:lnTo>
-                    <a:pt x="5613109" y="3087744"/>
-                  </a:lnTo>
-                  <a:lnTo>
-                    <a:pt x="5686869" y="3097611"/>
-                  </a:lnTo>
-                  <a:lnTo>
-                    <a:pt x="5760629" y="3107231"/>
-                  </a:lnTo>
-                  <a:lnTo>
-                    <a:pt x="5834389" y="3116612"/>
-                  </a:lnTo>
-                  <a:lnTo>
-                    <a:pt x="5908149" y="3125759"/>
-                  </a:lnTo>
-                  <a:lnTo>
-                    <a:pt x="5981909" y="3134679"/>
-                  </a:lnTo>
-                  <a:lnTo>
-                    <a:pt x="6055669" y="3143376"/>
-                  </a:lnTo>
-                  <a:lnTo>
-                    <a:pt x="6129429" y="3151856"/>
-                  </a:lnTo>
-                  <a:lnTo>
-                    <a:pt x="6203189" y="3160125"/>
-                  </a:lnTo>
-                  <a:lnTo>
-                    <a:pt x="6276949" y="3168188"/>
-                  </a:lnTo>
-                  <a:lnTo>
-                    <a:pt x="6350709" y="3176050"/>
-                  </a:lnTo>
-                  <a:lnTo>
-                    <a:pt x="6424469" y="3183716"/>
-                  </a:lnTo>
-                  <a:lnTo>
-                    <a:pt x="6498229" y="3191192"/>
-                  </a:lnTo>
-                  <a:lnTo>
-                    <a:pt x="6571989" y="3198481"/>
-                  </a:lnTo>
-                  <a:lnTo>
-                    <a:pt x="6645749" y="3205588"/>
-                  </a:lnTo>
-                  <a:lnTo>
-                    <a:pt x="6719509" y="3212518"/>
-                  </a:lnTo>
-                  <a:lnTo>
-                    <a:pt x="6793269" y="3219276"/>
-                  </a:lnTo>
-                  <a:lnTo>
-                    <a:pt x="6867029" y="3225865"/>
-                  </a:lnTo>
-                  <a:lnTo>
-                    <a:pt x="6940789" y="3232290"/>
-                  </a:lnTo>
-                  <a:lnTo>
-                    <a:pt x="7014550" y="3238555"/>
-                  </a:lnTo>
-                  <a:lnTo>
-                    <a:pt x="7088310" y="3244664"/>
-                  </a:lnTo>
-                  <a:lnTo>
-                    <a:pt x="7162070" y="3250621"/>
-                  </a:lnTo>
-                  <a:lnTo>
-                    <a:pt x="7235830" y="3256429"/>
-                  </a:lnTo>
-                  <a:lnTo>
-                    <a:pt x="7235830" y="3450954"/>
-                  </a:lnTo>
-                  <a:lnTo>
-                    <a:pt x="7162070" y="3448823"/>
-                  </a:lnTo>
-                  <a:lnTo>
-                    <a:pt x="7088310" y="3446553"/>
-                  </a:lnTo>
-                  <a:lnTo>
-                    <a:pt x="7014550" y="3444135"/>
-                  </a:lnTo>
-                  <a:lnTo>
-                    <a:pt x="6940789" y="3441561"/>
-                  </a:lnTo>
-                  <a:lnTo>
-                    <a:pt x="6867029" y="3438819"/>
-                  </a:lnTo>
-                  <a:lnTo>
-                    <a:pt x="6793269" y="3435899"/>
-                  </a:lnTo>
-                  <a:lnTo>
-                    <a:pt x="6719509" y="3432789"/>
-                  </a:lnTo>
-                  <a:lnTo>
-                    <a:pt x="6645749" y="3429477"/>
-                  </a:lnTo>
-                  <a:lnTo>
-                    <a:pt x="6571989" y="3425950"/>
-                  </a:lnTo>
-                  <a:lnTo>
-                    <a:pt x="6498229" y="3422194"/>
-                  </a:lnTo>
-                  <a:lnTo>
-                    <a:pt x="6424469" y="3418193"/>
-                  </a:lnTo>
-                  <a:lnTo>
-                    <a:pt x="6350709" y="3413933"/>
-                  </a:lnTo>
-                  <a:lnTo>
-                    <a:pt x="6276949" y="3409395"/>
-                  </a:lnTo>
-                  <a:lnTo>
-                    <a:pt x="6203189" y="3404563"/>
-                  </a:lnTo>
-                  <a:lnTo>
-                    <a:pt x="6129429" y="3399416"/>
-                  </a:lnTo>
-                  <a:lnTo>
-                    <a:pt x="6055669" y="3393935"/>
-                  </a:lnTo>
-                  <a:lnTo>
-                    <a:pt x="5981909" y="3388098"/>
-                  </a:lnTo>
-                  <a:lnTo>
-                    <a:pt x="5908149" y="3381882"/>
-                  </a:lnTo>
-                  <a:lnTo>
-                    <a:pt x="5834389" y="3375261"/>
-                  </a:lnTo>
-                  <a:lnTo>
-                    <a:pt x="5760629" y="3368210"/>
-                  </a:lnTo>
-                  <a:lnTo>
-                    <a:pt x="5686869" y="3360701"/>
-                  </a:lnTo>
-                  <a:lnTo>
-                    <a:pt x="5613109" y="3352704"/>
-                  </a:lnTo>
-                  <a:lnTo>
-                    <a:pt x="5539349" y="3344187"/>
-                  </a:lnTo>
-                  <a:lnTo>
-                    <a:pt x="5465589" y="3335116"/>
-                  </a:lnTo>
-                  <a:lnTo>
-                    <a:pt x="5391829" y="3325456"/>
-                  </a:lnTo>
-                  <a:lnTo>
-                    <a:pt x="5318069" y="3315168"/>
-                  </a:lnTo>
-                  <a:lnTo>
-                    <a:pt x="5244309" y="3304212"/>
-                  </a:lnTo>
-                  <a:lnTo>
-                    <a:pt x="5170549" y="3292543"/>
-                  </a:lnTo>
-                  <a:lnTo>
-                    <a:pt x="5096789" y="3280116"/>
-                  </a:lnTo>
-                  <a:lnTo>
-                    <a:pt x="5023029" y="3266881"/>
-                  </a:lnTo>
-                  <a:lnTo>
-                    <a:pt x="4949269" y="3252786"/>
-                  </a:lnTo>
-                  <a:lnTo>
-                    <a:pt x="4875509" y="3237775"/>
-                  </a:lnTo>
-                  <a:lnTo>
-                    <a:pt x="4801749" y="3221788"/>
-                  </a:lnTo>
-                  <a:lnTo>
-                    <a:pt x="4727989" y="3204762"/>
-                  </a:lnTo>
-                  <a:lnTo>
-                    <a:pt x="4654229" y="3186630"/>
-                  </a:lnTo>
-                  <a:lnTo>
-                    <a:pt x="4580469" y="3167319"/>
-                  </a:lnTo>
-                  <a:lnTo>
-                    <a:pt x="4506709" y="3146753"/>
-                  </a:lnTo>
-                  <a:lnTo>
-                    <a:pt x="4432949" y="3124851"/>
-                  </a:lnTo>
-                  <a:lnTo>
-                    <a:pt x="4359189" y="3101525"/>
-                  </a:lnTo>
-                  <a:lnTo>
-                    <a:pt x="4285429" y="3076683"/>
-                  </a:lnTo>
-                  <a:lnTo>
-                    <a:pt x="4211669" y="3050226"/>
-                  </a:lnTo>
-                  <a:lnTo>
-                    <a:pt x="4137909" y="3022050"/>
-                  </a:lnTo>
-                  <a:lnTo>
-                    <a:pt x="4064149" y="2992042"/>
-                  </a:lnTo>
-                  <a:lnTo>
-                    <a:pt x="3990388" y="2960084"/>
-                  </a:lnTo>
-                  <a:lnTo>
-                    <a:pt x="3916628" y="2926049"/>
-                  </a:lnTo>
-                  <a:lnTo>
-                    <a:pt x="3842868" y="2889802"/>
-                  </a:lnTo>
-                  <a:lnTo>
-                    <a:pt x="3769108" y="2851199"/>
-                  </a:lnTo>
-                  <a:lnTo>
-                    <a:pt x="3695348" y="2810088"/>
-                  </a:lnTo>
-                  <a:lnTo>
-                    <a:pt x="3621588" y="2766304"/>
-                  </a:lnTo>
-                  <a:lnTo>
-                    <a:pt x="3547828" y="2719674"/>
-                  </a:lnTo>
-                  <a:lnTo>
-                    <a:pt x="3474068" y="2670014"/>
-                  </a:lnTo>
-                  <a:lnTo>
-                    <a:pt x="3400308" y="2639590"/>
-                  </a:lnTo>
-                  <a:lnTo>
-                    <a:pt x="3326548" y="2618021"/>
-                  </a:lnTo>
-                  <a:lnTo>
-                    <a:pt x="3252788" y="2595900"/>
-                  </a:lnTo>
-                  <a:lnTo>
-                    <a:pt x="3179028" y="2573214"/>
-                  </a:lnTo>
-                  <a:lnTo>
-                    <a:pt x="3105268" y="2549948"/>
-                  </a:lnTo>
-                  <a:lnTo>
-                    <a:pt x="3031508" y="2526088"/>
-                  </a:lnTo>
-                  <a:lnTo>
-                    <a:pt x="2957748" y="2501619"/>
-                  </a:lnTo>
-                  <a:lnTo>
-                    <a:pt x="2883988" y="2476524"/>
-                  </a:lnTo>
-                  <a:lnTo>
-                    <a:pt x="2810228" y="2450788"/>
-                  </a:lnTo>
-                  <a:lnTo>
-                    <a:pt x="2736468" y="2424394"/>
-                  </a:lnTo>
-                  <a:lnTo>
-                    <a:pt x="2662708" y="2397326"/>
-                  </a:lnTo>
-                  <a:lnTo>
-                    <a:pt x="2588948" y="2369566"/>
-                  </a:lnTo>
-                  <a:lnTo>
-                    <a:pt x="2515188" y="2341097"/>
-                  </a:lnTo>
-                  <a:lnTo>
-                    <a:pt x="2441428" y="2311900"/>
-                  </a:lnTo>
-                  <a:lnTo>
-                    <a:pt x="2367668" y="2281958"/>
-                  </a:lnTo>
-                  <a:lnTo>
-                    <a:pt x="2293908" y="2251250"/>
-                  </a:lnTo>
-                  <a:lnTo>
-                    <a:pt x="2220148" y="2219758"/>
-                  </a:lnTo>
-                  <a:lnTo>
-                    <a:pt x="2146388" y="2187461"/>
-                  </a:lnTo>
-                  <a:lnTo>
-                    <a:pt x="2072628" y="2154339"/>
-                  </a:lnTo>
-                  <a:lnTo>
-                    <a:pt x="1998868" y="2120370"/>
-                  </a:lnTo>
-                  <a:lnTo>
-                    <a:pt x="1925108" y="2085534"/>
-                  </a:lnTo>
-                  <a:lnTo>
-                    <a:pt x="1851348" y="2049807"/>
-                  </a:lnTo>
-                  <a:lnTo>
-                    <a:pt x="1777588" y="2013168"/>
-                  </a:lnTo>
-                  <a:lnTo>
-                    <a:pt x="1703828" y="1975592"/>
-                  </a:lnTo>
-                  <a:lnTo>
-                    <a:pt x="1630068" y="1937057"/>
-                  </a:lnTo>
-                  <a:lnTo>
-                    <a:pt x="1556308" y="1897536"/>
-                  </a:lnTo>
-                  <a:lnTo>
-                    <a:pt x="1482548" y="1857006"/>
-                  </a:lnTo>
-                  <a:lnTo>
-                    <a:pt x="1408788" y="1815440"/>
-                  </a:lnTo>
-                  <a:lnTo>
-                    <a:pt x="1335028" y="1772812"/>
-                  </a:lnTo>
-                  <a:lnTo>
-                    <a:pt x="1261268" y="1729095"/>
-                  </a:lnTo>
-                  <a:lnTo>
-                    <a:pt x="1187508" y="1684261"/>
-                  </a:lnTo>
-                  <a:lnTo>
-                    <a:pt x="1113747" y="1638281"/>
-                  </a:lnTo>
-                  <a:lnTo>
-                    <a:pt x="1039987" y="1591127"/>
-                  </a:lnTo>
-                  <a:lnTo>
-                    <a:pt x="966227" y="1542767"/>
-                  </a:lnTo>
-                  <a:lnTo>
-                    <a:pt x="892467" y="1493172"/>
-                  </a:lnTo>
-                  <a:lnTo>
-                    <a:pt x="818707" y="1442310"/>
-                  </a:lnTo>
-                  <a:lnTo>
-                    <a:pt x="744947" y="1390148"/>
-                  </a:lnTo>
-                  <a:lnTo>
-                    <a:pt x="671187" y="1336653"/>
-                  </a:lnTo>
-                  <a:lnTo>
-                    <a:pt x="597427" y="1281791"/>
-                  </a:lnTo>
-                  <a:lnTo>
-                    <a:pt x="523667" y="1225528"/>
-                  </a:lnTo>
-                  <a:lnTo>
-                    <a:pt x="449907" y="1167827"/>
-                  </a:lnTo>
-                  <a:lnTo>
-                    <a:pt x="376147" y="1108651"/>
-                  </a:lnTo>
-                  <a:lnTo>
-                    <a:pt x="302387" y="1047964"/>
-                  </a:lnTo>
-                  <a:lnTo>
-                    <a:pt x="228627" y="985726"/>
-                  </a:lnTo>
-                  <a:lnTo>
-                    <a:pt x="154867" y="921897"/>
-                  </a:lnTo>
-                  <a:lnTo>
-                    <a:pt x="81107" y="856438"/>
-                  </a:lnTo>
-                  <a:lnTo>
-                    <a:pt x="7347" y="789306"/>
-                  </a:lnTo>
-                  <a:lnTo>
-                    <a:pt x="0" y="782448"/>
+                    <a:pt x="1790563" y="20630"/>
+                  </a:lnTo>
+                  <a:lnTo>
+                    <a:pt x="1862185" y="231976"/>
+                  </a:lnTo>
+                  <a:lnTo>
+                    <a:pt x="1933808" y="430424"/>
+                  </a:lnTo>
+                  <a:lnTo>
+                    <a:pt x="2005430" y="616761"/>
+                  </a:lnTo>
+                  <a:lnTo>
+                    <a:pt x="2077053" y="791726"/>
+                  </a:lnTo>
+                  <a:lnTo>
+                    <a:pt x="2148675" y="956014"/>
+                  </a:lnTo>
+                  <a:lnTo>
+                    <a:pt x="2220298" y="1110275"/>
+                  </a:lnTo>
+                  <a:lnTo>
+                    <a:pt x="2291920" y="1255123"/>
+                  </a:lnTo>
+                  <a:lnTo>
+                    <a:pt x="2363543" y="1391131"/>
+                  </a:lnTo>
+                  <a:lnTo>
+                    <a:pt x="2435165" y="1518838"/>
+                  </a:lnTo>
+                  <a:lnTo>
+                    <a:pt x="2506788" y="1638752"/>
+                  </a:lnTo>
+                  <a:lnTo>
+                    <a:pt x="2578410" y="1751347"/>
+                  </a:lnTo>
+                  <a:lnTo>
+                    <a:pt x="2650033" y="1857072"/>
+                  </a:lnTo>
+                  <a:lnTo>
+                    <a:pt x="2721655" y="1956344"/>
+                  </a:lnTo>
+                  <a:lnTo>
+                    <a:pt x="2793278" y="2049558"/>
+                  </a:lnTo>
+                  <a:lnTo>
+                    <a:pt x="2864901" y="2137083"/>
+                  </a:lnTo>
+                  <a:lnTo>
+                    <a:pt x="2936523" y="2219266"/>
+                  </a:lnTo>
+                  <a:lnTo>
+                    <a:pt x="3008146" y="2296435"/>
+                  </a:lnTo>
+                  <a:lnTo>
+                    <a:pt x="3079768" y="2368894"/>
+                  </a:lnTo>
+                  <a:lnTo>
+                    <a:pt x="3151391" y="2436930"/>
+                  </a:lnTo>
+                  <a:lnTo>
+                    <a:pt x="3223013" y="2500815"/>
+                  </a:lnTo>
+                  <a:lnTo>
+                    <a:pt x="3294636" y="2560801"/>
+                  </a:lnTo>
+                  <a:lnTo>
+                    <a:pt x="3366258" y="2617126"/>
+                  </a:lnTo>
+                  <a:lnTo>
+                    <a:pt x="3437881" y="2660622"/>
+                  </a:lnTo>
+                  <a:lnTo>
+                    <a:pt x="3509503" y="2681130"/>
+                  </a:lnTo>
+                  <a:lnTo>
+                    <a:pt x="3581126" y="2701128"/>
+                  </a:lnTo>
+                  <a:lnTo>
+                    <a:pt x="3652748" y="2720626"/>
+                  </a:lnTo>
+                  <a:lnTo>
+                    <a:pt x="3724371" y="2739640"/>
+                  </a:lnTo>
+                  <a:lnTo>
+                    <a:pt x="3795993" y="2758179"/>
+                  </a:lnTo>
+                  <a:lnTo>
+                    <a:pt x="3867616" y="2776257"/>
+                  </a:lnTo>
+                  <a:lnTo>
+                    <a:pt x="3939238" y="2793884"/>
+                  </a:lnTo>
+                  <a:lnTo>
+                    <a:pt x="4010861" y="2811072"/>
+                  </a:lnTo>
+                  <a:lnTo>
+                    <a:pt x="4082483" y="2827831"/>
+                  </a:lnTo>
+                  <a:lnTo>
+                    <a:pt x="4154106" y="2844173"/>
+                  </a:lnTo>
+                  <a:lnTo>
+                    <a:pt x="4225729" y="2860108"/>
+                  </a:lnTo>
+                  <a:lnTo>
+                    <a:pt x="4297351" y="2875646"/>
+                  </a:lnTo>
+                  <a:lnTo>
+                    <a:pt x="4368974" y="2890797"/>
+                  </a:lnTo>
+                  <a:lnTo>
+                    <a:pt x="4440596" y="2905570"/>
+                  </a:lnTo>
+                  <a:lnTo>
+                    <a:pt x="4512219" y="2919976"/>
+                  </a:lnTo>
+                  <a:lnTo>
+                    <a:pt x="4583841" y="2934022"/>
+                  </a:lnTo>
+                  <a:lnTo>
+                    <a:pt x="4655464" y="2947718"/>
+                  </a:lnTo>
+                  <a:lnTo>
+                    <a:pt x="4727086" y="2961073"/>
+                  </a:lnTo>
+                  <a:lnTo>
+                    <a:pt x="4798709" y="2974096"/>
+                  </a:lnTo>
+                  <a:lnTo>
+                    <a:pt x="4870331" y="2986794"/>
+                  </a:lnTo>
+                  <a:lnTo>
+                    <a:pt x="4941954" y="2999175"/>
+                  </a:lnTo>
+                  <a:lnTo>
+                    <a:pt x="5013576" y="3011248"/>
+                  </a:lnTo>
+                  <a:lnTo>
+                    <a:pt x="5085199" y="3023021"/>
+                  </a:lnTo>
+                  <a:lnTo>
+                    <a:pt x="5156821" y="3034500"/>
+                  </a:lnTo>
+                  <a:lnTo>
+                    <a:pt x="5228444" y="3045693"/>
+                  </a:lnTo>
+                  <a:lnTo>
+                    <a:pt x="5300066" y="3056607"/>
+                  </a:lnTo>
+                  <a:lnTo>
+                    <a:pt x="5371689" y="3067249"/>
+                  </a:lnTo>
+                  <a:lnTo>
+                    <a:pt x="5443311" y="3077626"/>
+                  </a:lnTo>
+                  <a:lnTo>
+                    <a:pt x="5514934" y="3087744"/>
+                  </a:lnTo>
+                  <a:lnTo>
+                    <a:pt x="5586557" y="3097611"/>
+                  </a:lnTo>
+                  <a:lnTo>
+                    <a:pt x="5658179" y="3107231"/>
+                  </a:lnTo>
+                  <a:lnTo>
+                    <a:pt x="5729802" y="3116612"/>
+                  </a:lnTo>
+                  <a:lnTo>
+                    <a:pt x="5801424" y="3125759"/>
+                  </a:lnTo>
+                  <a:lnTo>
+                    <a:pt x="5873047" y="3134679"/>
+                  </a:lnTo>
+                  <a:lnTo>
+                    <a:pt x="5944669" y="3143376"/>
+                  </a:lnTo>
+                  <a:lnTo>
+                    <a:pt x="6016292" y="3151856"/>
+                  </a:lnTo>
+                  <a:lnTo>
+                    <a:pt x="6087914" y="3160125"/>
+                  </a:lnTo>
+                  <a:lnTo>
+                    <a:pt x="6159537" y="3168188"/>
+                  </a:lnTo>
+                  <a:lnTo>
+                    <a:pt x="6231159" y="3176050"/>
+                  </a:lnTo>
+                  <a:lnTo>
+                    <a:pt x="6302782" y="3183716"/>
+                  </a:lnTo>
+                  <a:lnTo>
+                    <a:pt x="6374404" y="3191192"/>
+                  </a:lnTo>
+                  <a:lnTo>
+                    <a:pt x="6446027" y="3198481"/>
+                  </a:lnTo>
+                  <a:lnTo>
+                    <a:pt x="6517649" y="3205588"/>
+                  </a:lnTo>
+                  <a:lnTo>
+                    <a:pt x="6589272" y="3212518"/>
+                  </a:lnTo>
+                  <a:lnTo>
+                    <a:pt x="6660894" y="3219276"/>
+                  </a:lnTo>
+                  <a:lnTo>
+                    <a:pt x="6732517" y="3225865"/>
+                  </a:lnTo>
+                  <a:lnTo>
+                    <a:pt x="6804139" y="3232290"/>
+                  </a:lnTo>
+                  <a:lnTo>
+                    <a:pt x="6875762" y="3238555"/>
+                  </a:lnTo>
+                  <a:lnTo>
+                    <a:pt x="6947385" y="3244664"/>
+                  </a:lnTo>
+                  <a:lnTo>
+                    <a:pt x="7019007" y="3250621"/>
+                  </a:lnTo>
+                  <a:lnTo>
+                    <a:pt x="7090630" y="3256429"/>
+                  </a:lnTo>
+                  <a:lnTo>
+                    <a:pt x="7090630" y="3450954"/>
+                  </a:lnTo>
+                  <a:lnTo>
+                    <a:pt x="7019007" y="3448823"/>
+                  </a:lnTo>
+                  <a:lnTo>
+                    <a:pt x="6947385" y="3446553"/>
+                  </a:lnTo>
+                  <a:lnTo>
+                    <a:pt x="6875762" y="3444135"/>
+                  </a:lnTo>
+                  <a:lnTo>
+                    <a:pt x="6804139" y="3441561"/>
+                  </a:lnTo>
+                  <a:lnTo>
+                    <a:pt x="6732517" y="3438819"/>
+                  </a:lnTo>
+                  <a:lnTo>
+                    <a:pt x="6660894" y="3435899"/>
+                  </a:lnTo>
+                  <a:lnTo>
+                    <a:pt x="6589272" y="3432789"/>
+                  </a:lnTo>
+                  <a:lnTo>
+                    <a:pt x="6517649" y="3429477"/>
+                  </a:lnTo>
+                  <a:lnTo>
+                    <a:pt x="6446027" y="3425950"/>
+                  </a:lnTo>
+                  <a:lnTo>
+                    <a:pt x="6374404" y="3422194"/>
+                  </a:lnTo>
+                  <a:lnTo>
+                    <a:pt x="6302782" y="3418193"/>
+                  </a:lnTo>
+                  <a:lnTo>
+                    <a:pt x="6231159" y="3413933"/>
+                  </a:lnTo>
+                  <a:lnTo>
+                    <a:pt x="6159537" y="3409395"/>
+                  </a:lnTo>
+                  <a:lnTo>
+                    <a:pt x="6087914" y="3404563"/>
+                  </a:lnTo>
+                  <a:lnTo>
+                    <a:pt x="6016292" y="3399416"/>
+                  </a:lnTo>
+                  <a:lnTo>
+                    <a:pt x="5944669" y="3393935"/>
+                  </a:lnTo>
+                  <a:lnTo>
+                    <a:pt x="5873047" y="3388098"/>
+                  </a:lnTo>
+                  <a:lnTo>
+                    <a:pt x="5801424" y="3381882"/>
+                  </a:lnTo>
+                  <a:lnTo>
+                    <a:pt x="5729802" y="3375261"/>
+                  </a:lnTo>
+                  <a:lnTo>
+                    <a:pt x="5658179" y="3368210"/>
+                  </a:lnTo>
+                  <a:lnTo>
+                    <a:pt x="5586557" y="3360701"/>
+                  </a:lnTo>
+                  <a:lnTo>
+                    <a:pt x="5514934" y="3352704"/>
+                  </a:lnTo>
+                  <a:lnTo>
+                    <a:pt x="5443311" y="3344187"/>
+                  </a:lnTo>
+                  <a:lnTo>
+                    <a:pt x="5371689" y="3335116"/>
+                  </a:lnTo>
+                  <a:lnTo>
+                    <a:pt x="5300066" y="3325456"/>
+                  </a:lnTo>
+                  <a:lnTo>
+                    <a:pt x="5228444" y="3315168"/>
+                  </a:lnTo>
+                  <a:lnTo>
+                    <a:pt x="5156821" y="3304212"/>
+                  </a:lnTo>
+                  <a:lnTo>
+                    <a:pt x="5085199" y="3292543"/>
+                  </a:lnTo>
+                  <a:lnTo>
+                    <a:pt x="5013576" y="3280116"/>
+                  </a:lnTo>
+                  <a:lnTo>
+                    <a:pt x="4941954" y="3266881"/>
+                  </a:lnTo>
+                  <a:lnTo>
+                    <a:pt x="4870331" y="3252786"/>
+                  </a:lnTo>
+                  <a:lnTo>
+                    <a:pt x="4798709" y="3237775"/>
+                  </a:lnTo>
+                  <a:lnTo>
+                    <a:pt x="4727086" y="3221788"/>
+                  </a:lnTo>
+                  <a:lnTo>
+                    <a:pt x="4655464" y="3204762"/>
+                  </a:lnTo>
+                  <a:lnTo>
+                    <a:pt x="4583841" y="3186630"/>
+                  </a:lnTo>
+                  <a:lnTo>
+                    <a:pt x="4512219" y="3167319"/>
+                  </a:lnTo>
+                  <a:lnTo>
+                    <a:pt x="4440596" y="3146753"/>
+                  </a:lnTo>
+                  <a:lnTo>
+                    <a:pt x="4368974" y="3124851"/>
+                  </a:lnTo>
+                  <a:lnTo>
+                    <a:pt x="4297351" y="3101525"/>
+                  </a:lnTo>
+                  <a:lnTo>
+                    <a:pt x="4225729" y="3076683"/>
+                  </a:lnTo>
+                  <a:lnTo>
+                    <a:pt x="4154106" y="3050226"/>
+                  </a:lnTo>
+                  <a:lnTo>
+                    <a:pt x="4082483" y="3022050"/>
+                  </a:lnTo>
+                  <a:lnTo>
+                    <a:pt x="4010861" y="2992042"/>
+                  </a:lnTo>
+                  <a:lnTo>
+                    <a:pt x="3939238" y="2960084"/>
+                  </a:lnTo>
+                  <a:lnTo>
+                    <a:pt x="3867616" y="2926049"/>
+                  </a:lnTo>
+                  <a:lnTo>
+                    <a:pt x="3795993" y="2889802"/>
+                  </a:lnTo>
+                  <a:lnTo>
+                    <a:pt x="3724371" y="2851199"/>
+                  </a:lnTo>
+                  <a:lnTo>
+                    <a:pt x="3652748" y="2810088"/>
+                  </a:lnTo>
+                  <a:lnTo>
+                    <a:pt x="3581126" y="2766304"/>
+                  </a:lnTo>
+                  <a:lnTo>
+                    <a:pt x="3509503" y="2719674"/>
+                  </a:lnTo>
+                  <a:lnTo>
+                    <a:pt x="3437881" y="2670014"/>
+                  </a:lnTo>
+                  <a:lnTo>
+                    <a:pt x="3366258" y="2639590"/>
+                  </a:lnTo>
+                  <a:lnTo>
+                    <a:pt x="3294636" y="2618021"/>
+                  </a:lnTo>
+                  <a:lnTo>
+                    <a:pt x="3223013" y="2595900"/>
+                  </a:lnTo>
+                  <a:lnTo>
+                    <a:pt x="3151391" y="2573214"/>
+                  </a:lnTo>
+                  <a:lnTo>
+                    <a:pt x="3079768" y="2549948"/>
+                  </a:lnTo>
+                  <a:lnTo>
+                    <a:pt x="3008146" y="2526088"/>
+                  </a:lnTo>
+                  <a:lnTo>
+                    <a:pt x="2936523" y="2501619"/>
+                  </a:lnTo>
+                  <a:lnTo>
+                    <a:pt x="2864901" y="2476524"/>
+                  </a:lnTo>
+                  <a:lnTo>
+                    <a:pt x="2793278" y="2450788"/>
+                  </a:lnTo>
+                  <a:lnTo>
+                    <a:pt x="2721655" y="2424394"/>
+                  </a:lnTo>
+                  <a:lnTo>
+                    <a:pt x="2650033" y="2397326"/>
+                  </a:lnTo>
+                  <a:lnTo>
+                    <a:pt x="2578410" y="2369566"/>
+                  </a:lnTo>
+                  <a:lnTo>
+                    <a:pt x="2506788" y="2341097"/>
+                  </a:lnTo>
+                  <a:lnTo>
+                    <a:pt x="2435165" y="2311900"/>
+                  </a:lnTo>
+                  <a:lnTo>
+                    <a:pt x="2363543" y="2281958"/>
+                  </a:lnTo>
+                  <a:lnTo>
+                    <a:pt x="2291920" y="2251250"/>
+                  </a:lnTo>
+                  <a:lnTo>
+                    <a:pt x="2220298" y="2219758"/>
+                  </a:lnTo>
+                  <a:lnTo>
+                    <a:pt x="2148675" y="2187461"/>
+                  </a:lnTo>
+                  <a:lnTo>
+                    <a:pt x="2077053" y="2154339"/>
+                  </a:lnTo>
+                  <a:lnTo>
+                    <a:pt x="2005430" y="2120370"/>
+                  </a:lnTo>
+                  <a:lnTo>
+                    <a:pt x="1933808" y="2085534"/>
+                  </a:lnTo>
+                  <a:lnTo>
+                    <a:pt x="1862185" y="2049807"/>
+                  </a:lnTo>
+                  <a:lnTo>
+                    <a:pt x="1790563" y="2013168"/>
+                  </a:lnTo>
+                  <a:lnTo>
+                    <a:pt x="1718940" y="1975592"/>
+                  </a:lnTo>
+                  <a:lnTo>
+                    <a:pt x="1647318" y="1937057"/>
+                  </a:lnTo>
+                  <a:lnTo>
+                    <a:pt x="1575695" y="1897536"/>
+                  </a:lnTo>
+                  <a:lnTo>
+                    <a:pt x="1504073" y="1857006"/>
+                  </a:lnTo>
+                  <a:lnTo>
+                    <a:pt x="1432450" y="1815440"/>
+                  </a:lnTo>
+                  <a:lnTo>
+                    <a:pt x="1360827" y="1772812"/>
+                  </a:lnTo>
+                  <a:lnTo>
+                    <a:pt x="1289205" y="1729095"/>
+                  </a:lnTo>
+                  <a:lnTo>
+                    <a:pt x="1217582" y="1684261"/>
+                  </a:lnTo>
+                  <a:lnTo>
+                    <a:pt x="1145960" y="1638281"/>
+                  </a:lnTo>
+                  <a:lnTo>
+                    <a:pt x="1074337" y="1591127"/>
+                  </a:lnTo>
+                  <a:lnTo>
+                    <a:pt x="1002715" y="1542767"/>
+                  </a:lnTo>
+                  <a:lnTo>
+                    <a:pt x="931092" y="1493172"/>
+                  </a:lnTo>
+                  <a:lnTo>
+                    <a:pt x="859470" y="1442310"/>
+                  </a:lnTo>
+                  <a:lnTo>
+                    <a:pt x="787847" y="1390148"/>
+                  </a:lnTo>
+                  <a:lnTo>
+                    <a:pt x="716225" y="1336653"/>
+                  </a:lnTo>
+                  <a:lnTo>
+                    <a:pt x="644602" y="1281791"/>
+                  </a:lnTo>
+                  <a:lnTo>
+                    <a:pt x="572980" y="1225528"/>
+                  </a:lnTo>
+                  <a:lnTo>
+                    <a:pt x="501357" y="1167827"/>
+                  </a:lnTo>
+                  <a:lnTo>
+                    <a:pt x="429735" y="1108651"/>
+                  </a:lnTo>
+                  <a:lnTo>
+                    <a:pt x="358112" y="1047964"/>
+                  </a:lnTo>
+                  <a:lnTo>
+                    <a:pt x="286490" y="985726"/>
+                  </a:lnTo>
+                  <a:lnTo>
+                    <a:pt x="214867" y="921897"/>
+                  </a:lnTo>
+                  <a:lnTo>
+                    <a:pt x="143245" y="856438"/>
+                  </a:lnTo>
+                  <a:lnTo>
+                    <a:pt x="71622" y="789306"/>
+                  </a:lnTo>
+                  <a:lnTo>
+                    <a:pt x="0" y="720459"/>
                   </a:lnTo>
                   <a:close/>
                 </a:path>
@@ -3555,246 +3512,571 @@
         </p:sp>
         <p:sp>
           <p:nvSpPr>
+            <p:cNvPr id="21" name="pl21"/>
+            <p:cNvSpPr/>
+            <p:nvPr/>
+          </p:nvSpPr>
+          <p:spPr>
+            <a:xfrm>
+              <a:off x="2956047" y="2073503"/>
+              <a:ext cx="5306631" cy="3256429"/>
+            </a:xfrm>
+            <a:custGeom>
+              <a:avLst/>
+              <a:pathLst>
+                <a:path w="5306631" h="3256429">
+                  <a:moveTo>
+                    <a:pt x="0" y="0"/>
+                  </a:moveTo>
+                  <a:lnTo>
+                    <a:pt x="6564" y="20630"/>
+                  </a:lnTo>
+                  <a:lnTo>
+                    <a:pt x="78187" y="231976"/>
+                  </a:lnTo>
+                  <a:lnTo>
+                    <a:pt x="149809" y="430424"/>
+                  </a:lnTo>
+                  <a:lnTo>
+                    <a:pt x="221432" y="616761"/>
+                  </a:lnTo>
+                  <a:lnTo>
+                    <a:pt x="293054" y="791726"/>
+                  </a:lnTo>
+                  <a:lnTo>
+                    <a:pt x="364677" y="956014"/>
+                  </a:lnTo>
+                  <a:lnTo>
+                    <a:pt x="436299" y="1110275"/>
+                  </a:lnTo>
+                  <a:lnTo>
+                    <a:pt x="507922" y="1255123"/>
+                  </a:lnTo>
+                  <a:lnTo>
+                    <a:pt x="579544" y="1391131"/>
+                  </a:lnTo>
+                  <a:lnTo>
+                    <a:pt x="651167" y="1518838"/>
+                  </a:lnTo>
+                  <a:lnTo>
+                    <a:pt x="722789" y="1638752"/>
+                  </a:lnTo>
+                  <a:lnTo>
+                    <a:pt x="794412" y="1751347"/>
+                  </a:lnTo>
+                  <a:lnTo>
+                    <a:pt x="866035" y="1857072"/>
+                  </a:lnTo>
+                  <a:lnTo>
+                    <a:pt x="937657" y="1956344"/>
+                  </a:lnTo>
+                  <a:lnTo>
+                    <a:pt x="1009280" y="2049558"/>
+                  </a:lnTo>
+                  <a:lnTo>
+                    <a:pt x="1080902" y="2137083"/>
+                  </a:lnTo>
+                  <a:lnTo>
+                    <a:pt x="1152525" y="2219266"/>
+                  </a:lnTo>
+                  <a:lnTo>
+                    <a:pt x="1224147" y="2296435"/>
+                  </a:lnTo>
+                  <a:lnTo>
+                    <a:pt x="1295770" y="2368894"/>
+                  </a:lnTo>
+                  <a:lnTo>
+                    <a:pt x="1367392" y="2436930"/>
+                  </a:lnTo>
+                  <a:lnTo>
+                    <a:pt x="1439015" y="2500815"/>
+                  </a:lnTo>
+                  <a:lnTo>
+                    <a:pt x="1510637" y="2560801"/>
+                  </a:lnTo>
+                  <a:lnTo>
+                    <a:pt x="1582260" y="2617126"/>
+                  </a:lnTo>
+                  <a:lnTo>
+                    <a:pt x="1653882" y="2660622"/>
+                  </a:lnTo>
+                  <a:lnTo>
+                    <a:pt x="1725505" y="2681130"/>
+                  </a:lnTo>
+                  <a:lnTo>
+                    <a:pt x="1797127" y="2701128"/>
+                  </a:lnTo>
+                  <a:lnTo>
+                    <a:pt x="1868750" y="2720626"/>
+                  </a:lnTo>
+                  <a:lnTo>
+                    <a:pt x="1940372" y="2739640"/>
+                  </a:lnTo>
+                  <a:lnTo>
+                    <a:pt x="2011995" y="2758179"/>
+                  </a:lnTo>
+                  <a:lnTo>
+                    <a:pt x="2083617" y="2776257"/>
+                  </a:lnTo>
+                  <a:lnTo>
+                    <a:pt x="2155240" y="2793884"/>
+                  </a:lnTo>
+                  <a:lnTo>
+                    <a:pt x="2226863" y="2811072"/>
+                  </a:lnTo>
+                  <a:lnTo>
+                    <a:pt x="2298485" y="2827831"/>
+                  </a:lnTo>
+                  <a:lnTo>
+                    <a:pt x="2370108" y="2844173"/>
+                  </a:lnTo>
+                  <a:lnTo>
+                    <a:pt x="2441730" y="2860108"/>
+                  </a:lnTo>
+                  <a:lnTo>
+                    <a:pt x="2513353" y="2875646"/>
+                  </a:lnTo>
+                  <a:lnTo>
+                    <a:pt x="2584975" y="2890797"/>
+                  </a:lnTo>
+                  <a:lnTo>
+                    <a:pt x="2656598" y="2905570"/>
+                  </a:lnTo>
+                  <a:lnTo>
+                    <a:pt x="2728220" y="2919976"/>
+                  </a:lnTo>
+                  <a:lnTo>
+                    <a:pt x="2799843" y="2934022"/>
+                  </a:lnTo>
+                  <a:lnTo>
+                    <a:pt x="2871465" y="2947718"/>
+                  </a:lnTo>
+                  <a:lnTo>
+                    <a:pt x="2943088" y="2961073"/>
+                  </a:lnTo>
+                  <a:lnTo>
+                    <a:pt x="3014710" y="2974096"/>
+                  </a:lnTo>
+                  <a:lnTo>
+                    <a:pt x="3086333" y="2986794"/>
+                  </a:lnTo>
+                  <a:lnTo>
+                    <a:pt x="3157955" y="2999175"/>
+                  </a:lnTo>
+                  <a:lnTo>
+                    <a:pt x="3229578" y="3011248"/>
+                  </a:lnTo>
+                  <a:lnTo>
+                    <a:pt x="3301200" y="3023021"/>
+                  </a:lnTo>
+                  <a:lnTo>
+                    <a:pt x="3372823" y="3034500"/>
+                  </a:lnTo>
+                  <a:lnTo>
+                    <a:pt x="3444445" y="3045693"/>
+                  </a:lnTo>
+                  <a:lnTo>
+                    <a:pt x="3516068" y="3056607"/>
+                  </a:lnTo>
+                  <a:lnTo>
+                    <a:pt x="3587691" y="3067249"/>
+                  </a:lnTo>
+                  <a:lnTo>
+                    <a:pt x="3659313" y="3077626"/>
+                  </a:lnTo>
+                  <a:lnTo>
+                    <a:pt x="3730936" y="3087744"/>
+                  </a:lnTo>
+                  <a:lnTo>
+                    <a:pt x="3802558" y="3097611"/>
+                  </a:lnTo>
+                  <a:lnTo>
+                    <a:pt x="3874181" y="3107231"/>
+                  </a:lnTo>
+                  <a:lnTo>
+                    <a:pt x="3945803" y="3116612"/>
+                  </a:lnTo>
+                  <a:lnTo>
+                    <a:pt x="4017426" y="3125759"/>
+                  </a:lnTo>
+                  <a:lnTo>
+                    <a:pt x="4089048" y="3134679"/>
+                  </a:lnTo>
+                  <a:lnTo>
+                    <a:pt x="4160671" y="3143376"/>
+                  </a:lnTo>
+                  <a:lnTo>
+                    <a:pt x="4232293" y="3151856"/>
+                  </a:lnTo>
+                  <a:lnTo>
+                    <a:pt x="4303916" y="3160125"/>
+                  </a:lnTo>
+                  <a:lnTo>
+                    <a:pt x="4375538" y="3168188"/>
+                  </a:lnTo>
+                  <a:lnTo>
+                    <a:pt x="4447161" y="3176050"/>
+                  </a:lnTo>
+                  <a:lnTo>
+                    <a:pt x="4518783" y="3183716"/>
+                  </a:lnTo>
+                  <a:lnTo>
+                    <a:pt x="4590406" y="3191192"/>
+                  </a:lnTo>
+                  <a:lnTo>
+                    <a:pt x="4662028" y="3198481"/>
+                  </a:lnTo>
+                  <a:lnTo>
+                    <a:pt x="4733651" y="3205588"/>
+                  </a:lnTo>
+                  <a:lnTo>
+                    <a:pt x="4805273" y="3212518"/>
+                  </a:lnTo>
+                  <a:lnTo>
+                    <a:pt x="4876896" y="3219276"/>
+                  </a:lnTo>
+                  <a:lnTo>
+                    <a:pt x="4948519" y="3225865"/>
+                  </a:lnTo>
+                  <a:lnTo>
+                    <a:pt x="5020141" y="3232290"/>
+                  </a:lnTo>
+                  <a:lnTo>
+                    <a:pt x="5091764" y="3238555"/>
+                  </a:lnTo>
+                  <a:lnTo>
+                    <a:pt x="5163386" y="3244664"/>
+                  </a:lnTo>
+                  <a:lnTo>
+                    <a:pt x="5235009" y="3250621"/>
+                  </a:lnTo>
+                  <a:lnTo>
+                    <a:pt x="5306631" y="3256429"/>
+                  </a:lnTo>
+                </a:path>
+              </a:pathLst>
+            </a:custGeom>
+          </p:spPr>
+          <p:txBody>
+            <a:bodyPr/>
+            <a:lstStyle/>
+            <a:p/>
+          </p:txBody>
+        </p:sp>
+        <p:sp>
+          <p:nvSpPr>
             <p:cNvPr id="22" name="pl22"/>
             <p:cNvSpPr/>
             <p:nvPr/>
           </p:nvSpPr>
           <p:spPr>
             <a:xfrm>
-              <a:off x="2588345" y="2073503"/>
-              <a:ext cx="5465002" cy="3256429"/>
+              <a:off x="1172049" y="2793962"/>
+              <a:ext cx="7090630" cy="2730495"/>
             </a:xfrm>
             <a:custGeom>
               <a:avLst/>
               <a:pathLst>
-                <a:path w="5465002" h="3256429">
+                <a:path w="7090630" h="2730495">
                   <a:moveTo>
+                    <a:pt x="7090630" y="2730495"/>
+                  </a:moveTo>
+                  <a:lnTo>
+                    <a:pt x="7019007" y="2728363"/>
+                  </a:lnTo>
+                  <a:lnTo>
+                    <a:pt x="6947385" y="2726094"/>
+                  </a:lnTo>
+                  <a:lnTo>
+                    <a:pt x="6875762" y="2723676"/>
+                  </a:lnTo>
+                  <a:lnTo>
+                    <a:pt x="6804139" y="2721102"/>
+                  </a:lnTo>
+                  <a:lnTo>
+                    <a:pt x="6732517" y="2718360"/>
+                  </a:lnTo>
+                  <a:lnTo>
+                    <a:pt x="6660894" y="2715440"/>
+                  </a:lnTo>
+                  <a:lnTo>
+                    <a:pt x="6589272" y="2712330"/>
+                  </a:lnTo>
+                  <a:lnTo>
+                    <a:pt x="6517649" y="2709018"/>
+                  </a:lnTo>
+                  <a:lnTo>
+                    <a:pt x="6446027" y="2705491"/>
+                  </a:lnTo>
+                  <a:lnTo>
+                    <a:pt x="6374404" y="2701735"/>
+                  </a:lnTo>
+                  <a:lnTo>
+                    <a:pt x="6302782" y="2697734"/>
+                  </a:lnTo>
+                  <a:lnTo>
+                    <a:pt x="6231159" y="2693474"/>
+                  </a:lnTo>
+                  <a:lnTo>
+                    <a:pt x="6159537" y="2688936"/>
+                  </a:lnTo>
+                  <a:lnTo>
+                    <a:pt x="6087914" y="2684104"/>
+                  </a:lnTo>
+                  <a:lnTo>
+                    <a:pt x="6016292" y="2678957"/>
+                  </a:lnTo>
+                  <a:lnTo>
+                    <a:pt x="5944669" y="2673476"/>
+                  </a:lnTo>
+                  <a:lnTo>
+                    <a:pt x="5873047" y="2667639"/>
+                  </a:lnTo>
+                  <a:lnTo>
+                    <a:pt x="5801424" y="2661422"/>
+                  </a:lnTo>
+                  <a:lnTo>
+                    <a:pt x="5729802" y="2654802"/>
+                  </a:lnTo>
+                  <a:lnTo>
+                    <a:pt x="5658179" y="2647751"/>
+                  </a:lnTo>
+                  <a:lnTo>
+                    <a:pt x="5586557" y="2640242"/>
+                  </a:lnTo>
+                  <a:lnTo>
+                    <a:pt x="5514934" y="2632245"/>
+                  </a:lnTo>
+                  <a:lnTo>
+                    <a:pt x="5443311" y="2623728"/>
+                  </a:lnTo>
+                  <a:lnTo>
+                    <a:pt x="5371689" y="2614657"/>
+                  </a:lnTo>
+                  <a:lnTo>
+                    <a:pt x="5300066" y="2604997"/>
+                  </a:lnTo>
+                  <a:lnTo>
+                    <a:pt x="5228444" y="2594709"/>
+                  </a:lnTo>
+                  <a:lnTo>
+                    <a:pt x="5156821" y="2583752"/>
+                  </a:lnTo>
+                  <a:lnTo>
+                    <a:pt x="5085199" y="2572084"/>
+                  </a:lnTo>
+                  <a:lnTo>
+                    <a:pt x="5013576" y="2559657"/>
+                  </a:lnTo>
+                  <a:lnTo>
+                    <a:pt x="4941954" y="2546422"/>
+                  </a:lnTo>
+                  <a:lnTo>
+                    <a:pt x="4870331" y="2532327"/>
+                  </a:lnTo>
+                  <a:lnTo>
+                    <a:pt x="4798709" y="2517316"/>
+                  </a:lnTo>
+                  <a:lnTo>
+                    <a:pt x="4727086" y="2501329"/>
+                  </a:lnTo>
+                  <a:lnTo>
+                    <a:pt x="4655464" y="2484303"/>
+                  </a:lnTo>
+                  <a:lnTo>
+                    <a:pt x="4583841" y="2466171"/>
+                  </a:lnTo>
+                  <a:lnTo>
+                    <a:pt x="4512219" y="2446860"/>
+                  </a:lnTo>
+                  <a:lnTo>
+                    <a:pt x="4440596" y="2426294"/>
+                  </a:lnTo>
+                  <a:lnTo>
+                    <a:pt x="4368974" y="2404392"/>
+                  </a:lnTo>
+                  <a:lnTo>
+                    <a:pt x="4297351" y="2381066"/>
+                  </a:lnTo>
+                  <a:lnTo>
+                    <a:pt x="4225729" y="2356224"/>
+                  </a:lnTo>
+                  <a:lnTo>
+                    <a:pt x="4154106" y="2329767"/>
+                  </a:lnTo>
+                  <a:lnTo>
+                    <a:pt x="4082483" y="2301591"/>
+                  </a:lnTo>
+                  <a:lnTo>
+                    <a:pt x="4010861" y="2271583"/>
+                  </a:lnTo>
+                  <a:lnTo>
+                    <a:pt x="3939238" y="2239625"/>
+                  </a:lnTo>
+                  <a:lnTo>
+                    <a:pt x="3867616" y="2205590"/>
+                  </a:lnTo>
+                  <a:lnTo>
+                    <a:pt x="3795993" y="2169343"/>
+                  </a:lnTo>
+                  <a:lnTo>
+                    <a:pt x="3724371" y="2130740"/>
+                  </a:lnTo>
+                  <a:lnTo>
+                    <a:pt x="3652748" y="2089629"/>
+                  </a:lnTo>
+                  <a:lnTo>
+                    <a:pt x="3581126" y="2045845"/>
+                  </a:lnTo>
+                  <a:lnTo>
+                    <a:pt x="3509503" y="1999215"/>
+                  </a:lnTo>
+                  <a:lnTo>
+                    <a:pt x="3437881" y="1949555"/>
+                  </a:lnTo>
+                  <a:lnTo>
+                    <a:pt x="3366258" y="1919131"/>
+                  </a:lnTo>
+                  <a:lnTo>
+                    <a:pt x="3294636" y="1897561"/>
+                  </a:lnTo>
+                  <a:lnTo>
+                    <a:pt x="3223013" y="1875441"/>
+                  </a:lnTo>
+                  <a:lnTo>
+                    <a:pt x="3151391" y="1852755"/>
+                  </a:lnTo>
+                  <a:lnTo>
+                    <a:pt x="3079768" y="1829489"/>
+                  </a:lnTo>
+                  <a:lnTo>
+                    <a:pt x="3008146" y="1805629"/>
+                  </a:lnTo>
+                  <a:lnTo>
+                    <a:pt x="2936523" y="1781160"/>
+                  </a:lnTo>
+                  <a:lnTo>
+                    <a:pt x="2864901" y="1756065"/>
+                  </a:lnTo>
+                  <a:lnTo>
+                    <a:pt x="2793278" y="1730329"/>
+                  </a:lnTo>
+                  <a:lnTo>
+                    <a:pt x="2721655" y="1703935"/>
+                  </a:lnTo>
+                  <a:lnTo>
+                    <a:pt x="2650033" y="1676867"/>
+                  </a:lnTo>
+                  <a:lnTo>
+                    <a:pt x="2578410" y="1649107"/>
+                  </a:lnTo>
+                  <a:lnTo>
+                    <a:pt x="2506788" y="1620638"/>
+                  </a:lnTo>
+                  <a:lnTo>
+                    <a:pt x="2435165" y="1591441"/>
+                  </a:lnTo>
+                  <a:lnTo>
+                    <a:pt x="2363543" y="1561499"/>
+                  </a:lnTo>
+                  <a:lnTo>
+                    <a:pt x="2291920" y="1530791"/>
+                  </a:lnTo>
+                  <a:lnTo>
+                    <a:pt x="2220298" y="1499299"/>
+                  </a:lnTo>
+                  <a:lnTo>
+                    <a:pt x="2148675" y="1467002"/>
+                  </a:lnTo>
+                  <a:lnTo>
+                    <a:pt x="2077053" y="1433880"/>
+                  </a:lnTo>
+                  <a:lnTo>
+                    <a:pt x="2005430" y="1399911"/>
+                  </a:lnTo>
+                  <a:lnTo>
+                    <a:pt x="1933808" y="1365075"/>
+                  </a:lnTo>
+                  <a:lnTo>
+                    <a:pt x="1862185" y="1329348"/>
+                  </a:lnTo>
+                  <a:lnTo>
+                    <a:pt x="1790563" y="1292709"/>
+                  </a:lnTo>
+                  <a:lnTo>
+                    <a:pt x="1718940" y="1255133"/>
+                  </a:lnTo>
+                  <a:lnTo>
+                    <a:pt x="1647318" y="1216597"/>
+                  </a:lnTo>
+                  <a:lnTo>
+                    <a:pt x="1575695" y="1177077"/>
+                  </a:lnTo>
+                  <a:lnTo>
+                    <a:pt x="1504073" y="1136547"/>
+                  </a:lnTo>
+                  <a:lnTo>
+                    <a:pt x="1432450" y="1094981"/>
+                  </a:lnTo>
+                  <a:lnTo>
+                    <a:pt x="1360827" y="1052353"/>
+                  </a:lnTo>
+                  <a:lnTo>
+                    <a:pt x="1289205" y="1008636"/>
+                  </a:lnTo>
+                  <a:lnTo>
+                    <a:pt x="1217582" y="963802"/>
+                  </a:lnTo>
+                  <a:lnTo>
+                    <a:pt x="1145960" y="917822"/>
+                  </a:lnTo>
+                  <a:lnTo>
+                    <a:pt x="1074337" y="870668"/>
+                  </a:lnTo>
+                  <a:lnTo>
+                    <a:pt x="1002715" y="822308"/>
+                  </a:lnTo>
+                  <a:lnTo>
+                    <a:pt x="931092" y="772713"/>
+                  </a:lnTo>
+                  <a:lnTo>
+                    <a:pt x="859470" y="721851"/>
+                  </a:lnTo>
+                  <a:lnTo>
+                    <a:pt x="787847" y="669689"/>
+                  </a:lnTo>
+                  <a:lnTo>
+                    <a:pt x="716225" y="616194"/>
+                  </a:lnTo>
+                  <a:lnTo>
+                    <a:pt x="644602" y="561332"/>
+                  </a:lnTo>
+                  <a:lnTo>
+                    <a:pt x="572980" y="505069"/>
+                  </a:lnTo>
+                  <a:lnTo>
+                    <a:pt x="501357" y="447368"/>
+                  </a:lnTo>
+                  <a:lnTo>
+                    <a:pt x="429735" y="388192"/>
+                  </a:lnTo>
+                  <a:lnTo>
+                    <a:pt x="358112" y="327505"/>
+                  </a:lnTo>
+                  <a:lnTo>
+                    <a:pt x="286490" y="265266"/>
+                  </a:lnTo>
+                  <a:lnTo>
+                    <a:pt x="214867" y="201438"/>
+                  </a:lnTo>
+                  <a:lnTo>
+                    <a:pt x="143245" y="135979"/>
+                  </a:lnTo>
+                  <a:lnTo>
+                    <a:pt x="71622" y="68847"/>
+                  </a:lnTo>
+                  <a:lnTo>
                     <a:pt x="0" y="0"/>
-                  </a:moveTo>
-                  <a:lnTo>
-                    <a:pt x="6760" y="20630"/>
-                  </a:lnTo>
-                  <a:lnTo>
-                    <a:pt x="80520" y="231976"/>
-                  </a:lnTo>
-                  <a:lnTo>
-                    <a:pt x="154280" y="430424"/>
-                  </a:lnTo>
-                  <a:lnTo>
-                    <a:pt x="228040" y="616761"/>
-                  </a:lnTo>
-                  <a:lnTo>
-                    <a:pt x="301800" y="791726"/>
-                  </a:lnTo>
-                  <a:lnTo>
-                    <a:pt x="375560" y="956014"/>
-                  </a:lnTo>
-                  <a:lnTo>
-                    <a:pt x="449320" y="1110275"/>
-                  </a:lnTo>
-                  <a:lnTo>
-                    <a:pt x="523080" y="1255123"/>
-                  </a:lnTo>
-                  <a:lnTo>
-                    <a:pt x="596840" y="1391131"/>
-                  </a:lnTo>
-                  <a:lnTo>
-                    <a:pt x="670600" y="1518838"/>
-                  </a:lnTo>
-                  <a:lnTo>
-                    <a:pt x="744360" y="1638752"/>
-                  </a:lnTo>
-                  <a:lnTo>
-                    <a:pt x="818120" y="1751347"/>
-                  </a:lnTo>
-                  <a:lnTo>
-                    <a:pt x="891880" y="1857072"/>
-                  </a:lnTo>
-                  <a:lnTo>
-                    <a:pt x="965640" y="1956344"/>
-                  </a:lnTo>
-                  <a:lnTo>
-                    <a:pt x="1039401" y="2049558"/>
-                  </a:lnTo>
-                  <a:lnTo>
-                    <a:pt x="1113161" y="2137083"/>
-                  </a:lnTo>
-                  <a:lnTo>
-                    <a:pt x="1186921" y="2219266"/>
-                  </a:lnTo>
-                  <a:lnTo>
-                    <a:pt x="1260681" y="2296435"/>
-                  </a:lnTo>
-                  <a:lnTo>
-                    <a:pt x="1334441" y="2368894"/>
-                  </a:lnTo>
-                  <a:lnTo>
-                    <a:pt x="1408201" y="2436930"/>
-                  </a:lnTo>
-                  <a:lnTo>
-                    <a:pt x="1481961" y="2500815"/>
-                  </a:lnTo>
-                  <a:lnTo>
-                    <a:pt x="1555721" y="2560801"/>
-                  </a:lnTo>
-                  <a:lnTo>
-                    <a:pt x="1629481" y="2617126"/>
-                  </a:lnTo>
-                  <a:lnTo>
-                    <a:pt x="1703241" y="2660622"/>
-                  </a:lnTo>
-                  <a:lnTo>
-                    <a:pt x="1777001" y="2681130"/>
-                  </a:lnTo>
-                  <a:lnTo>
-                    <a:pt x="1850761" y="2701128"/>
-                  </a:lnTo>
-                  <a:lnTo>
-                    <a:pt x="1924521" y="2720626"/>
-                  </a:lnTo>
-                  <a:lnTo>
-                    <a:pt x="1998281" y="2739640"/>
-                  </a:lnTo>
-                  <a:lnTo>
-                    <a:pt x="2072041" y="2758179"/>
-                  </a:lnTo>
-                  <a:lnTo>
-                    <a:pt x="2145801" y="2776257"/>
-                  </a:lnTo>
-                  <a:lnTo>
-                    <a:pt x="2219561" y="2793884"/>
-                  </a:lnTo>
-                  <a:lnTo>
-                    <a:pt x="2293321" y="2811072"/>
-                  </a:lnTo>
-                  <a:lnTo>
-                    <a:pt x="2367081" y="2827831"/>
-                  </a:lnTo>
-                  <a:lnTo>
-                    <a:pt x="2440841" y="2844173"/>
-                  </a:lnTo>
-                  <a:lnTo>
-                    <a:pt x="2514601" y="2860108"/>
-                  </a:lnTo>
-                  <a:lnTo>
-                    <a:pt x="2588361" y="2875646"/>
-                  </a:lnTo>
-                  <a:lnTo>
-                    <a:pt x="2662121" y="2890797"/>
-                  </a:lnTo>
-                  <a:lnTo>
-                    <a:pt x="2735881" y="2905570"/>
-                  </a:lnTo>
-                  <a:lnTo>
-                    <a:pt x="2809641" y="2919976"/>
-                  </a:lnTo>
-                  <a:lnTo>
-                    <a:pt x="2883401" y="2934022"/>
-                  </a:lnTo>
-                  <a:lnTo>
-                    <a:pt x="2957161" y="2947718"/>
-                  </a:lnTo>
-                  <a:lnTo>
-                    <a:pt x="3030921" y="2961073"/>
-                  </a:lnTo>
-                  <a:lnTo>
-                    <a:pt x="3104681" y="2974096"/>
-                  </a:lnTo>
-                  <a:lnTo>
-                    <a:pt x="3178441" y="2986794"/>
-                  </a:lnTo>
-                  <a:lnTo>
-                    <a:pt x="3252201" y="2999175"/>
-                  </a:lnTo>
-                  <a:lnTo>
-                    <a:pt x="3325961" y="3011248"/>
-                  </a:lnTo>
-                  <a:lnTo>
-                    <a:pt x="3399721" y="3023021"/>
-                  </a:lnTo>
-                  <a:lnTo>
-                    <a:pt x="3473481" y="3034500"/>
-                  </a:lnTo>
-                  <a:lnTo>
-                    <a:pt x="3547241" y="3045693"/>
-                  </a:lnTo>
-                  <a:lnTo>
-                    <a:pt x="3621001" y="3056607"/>
-                  </a:lnTo>
-                  <a:lnTo>
-                    <a:pt x="3694761" y="3067249"/>
-                  </a:lnTo>
-                  <a:lnTo>
-                    <a:pt x="3768521" y="3077626"/>
-                  </a:lnTo>
-                  <a:lnTo>
-                    <a:pt x="3842281" y="3087744"/>
-                  </a:lnTo>
-                  <a:lnTo>
-                    <a:pt x="3916041" y="3097611"/>
-                  </a:lnTo>
-                  <a:lnTo>
-                    <a:pt x="3989802" y="3107231"/>
-                  </a:lnTo>
-                  <a:lnTo>
-                    <a:pt x="4063562" y="3116612"/>
-                  </a:lnTo>
-                  <a:lnTo>
-                    <a:pt x="4137322" y="3125759"/>
-                  </a:lnTo>
-                  <a:lnTo>
-                    <a:pt x="4211082" y="3134679"/>
-                  </a:lnTo>
-                  <a:lnTo>
-                    <a:pt x="4284842" y="3143376"/>
-                  </a:lnTo>
-                  <a:lnTo>
-                    <a:pt x="4358602" y="3151856"/>
-                  </a:lnTo>
-                  <a:lnTo>
-                    <a:pt x="4432362" y="3160125"/>
-                  </a:lnTo>
-                  <a:lnTo>
-                    <a:pt x="4506122" y="3168188"/>
-                  </a:lnTo>
-                  <a:lnTo>
-                    <a:pt x="4579882" y="3176050"/>
-                  </a:lnTo>
-                  <a:lnTo>
-                    <a:pt x="4653642" y="3183716"/>
-                  </a:lnTo>
-                  <a:lnTo>
-                    <a:pt x="4727402" y="3191192"/>
-                  </a:lnTo>
-                  <a:lnTo>
-                    <a:pt x="4801162" y="3198481"/>
-                  </a:lnTo>
-                  <a:lnTo>
-                    <a:pt x="4874922" y="3205588"/>
-                  </a:lnTo>
-                  <a:lnTo>
-                    <a:pt x="4948682" y="3212518"/>
-                  </a:lnTo>
-                  <a:lnTo>
-                    <a:pt x="5022442" y="3219276"/>
-                  </a:lnTo>
-                  <a:lnTo>
-                    <a:pt x="5096202" y="3225865"/>
-                  </a:lnTo>
-                  <a:lnTo>
-                    <a:pt x="5169962" y="3232290"/>
-                  </a:lnTo>
-                  <a:lnTo>
-                    <a:pt x="5243722" y="3238555"/>
-                  </a:lnTo>
-                  <a:lnTo>
-                    <a:pt x="5317482" y="3244664"/>
-                  </a:lnTo>
-                  <a:lnTo>
-                    <a:pt x="5391242" y="3250621"/>
-                  </a:lnTo>
-                  <a:lnTo>
-                    <a:pt x="5465002" y="3256429"/>
                   </a:lnTo>
                 </a:path>
               </a:pathLst>
@@ -3814,592 +4096,267 @@
           </p:nvSpPr>
           <p:spPr>
             <a:xfrm>
-              <a:off x="817517" y="2855951"/>
-              <a:ext cx="7235830" cy="2668506"/>
+              <a:off x="2257643" y="2073503"/>
+              <a:ext cx="6005035" cy="3397408"/>
             </a:xfrm>
             <a:custGeom>
               <a:avLst/>
               <a:pathLst>
-                <a:path w="7235830" h="2668506">
-                  <a:moveTo>
-                    <a:pt x="7235830" y="2668506"/>
-                  </a:moveTo>
-                  <a:lnTo>
-                    <a:pt x="7162070" y="2666374"/>
-                  </a:lnTo>
-                  <a:lnTo>
-                    <a:pt x="7088310" y="2664105"/>
-                  </a:lnTo>
-                  <a:lnTo>
-                    <a:pt x="7014550" y="2661687"/>
-                  </a:lnTo>
-                  <a:lnTo>
-                    <a:pt x="6940789" y="2659113"/>
-                  </a:lnTo>
-                  <a:lnTo>
-                    <a:pt x="6867029" y="2656371"/>
-                  </a:lnTo>
-                  <a:lnTo>
-                    <a:pt x="6793269" y="2653451"/>
-                  </a:lnTo>
-                  <a:lnTo>
-                    <a:pt x="6719509" y="2650341"/>
-                  </a:lnTo>
-                  <a:lnTo>
-                    <a:pt x="6645749" y="2647029"/>
-                  </a:lnTo>
-                  <a:lnTo>
-                    <a:pt x="6571989" y="2643502"/>
-                  </a:lnTo>
-                  <a:lnTo>
-                    <a:pt x="6498229" y="2639746"/>
-                  </a:lnTo>
-                  <a:lnTo>
-                    <a:pt x="6424469" y="2635745"/>
-                  </a:lnTo>
-                  <a:lnTo>
-                    <a:pt x="6350709" y="2631485"/>
-                  </a:lnTo>
-                  <a:lnTo>
-                    <a:pt x="6276949" y="2626947"/>
-                  </a:lnTo>
-                  <a:lnTo>
-                    <a:pt x="6203189" y="2622115"/>
-                  </a:lnTo>
-                  <a:lnTo>
-                    <a:pt x="6129429" y="2616968"/>
-                  </a:lnTo>
-                  <a:lnTo>
-                    <a:pt x="6055669" y="2611487"/>
-                  </a:lnTo>
-                  <a:lnTo>
-                    <a:pt x="5981909" y="2605650"/>
-                  </a:lnTo>
-                  <a:lnTo>
-                    <a:pt x="5908149" y="2599433"/>
-                  </a:lnTo>
-                  <a:lnTo>
-                    <a:pt x="5834389" y="2592813"/>
-                  </a:lnTo>
-                  <a:lnTo>
-                    <a:pt x="5760629" y="2585762"/>
-                  </a:lnTo>
-                  <a:lnTo>
-                    <a:pt x="5686869" y="2578253"/>
-                  </a:lnTo>
-                  <a:lnTo>
-                    <a:pt x="5613109" y="2570256"/>
-                  </a:lnTo>
-                  <a:lnTo>
-                    <a:pt x="5539349" y="2561739"/>
-                  </a:lnTo>
-                  <a:lnTo>
-                    <a:pt x="5465589" y="2552668"/>
-                  </a:lnTo>
-                  <a:lnTo>
-                    <a:pt x="5391829" y="2543008"/>
-                  </a:lnTo>
-                  <a:lnTo>
-                    <a:pt x="5318069" y="2532720"/>
-                  </a:lnTo>
-                  <a:lnTo>
-                    <a:pt x="5244309" y="2521763"/>
-                  </a:lnTo>
-                  <a:lnTo>
-                    <a:pt x="5170549" y="2510095"/>
-                  </a:lnTo>
-                  <a:lnTo>
-                    <a:pt x="5096789" y="2497668"/>
-                  </a:lnTo>
-                  <a:lnTo>
-                    <a:pt x="5023029" y="2484433"/>
-                  </a:lnTo>
-                  <a:lnTo>
-                    <a:pt x="4949269" y="2470338"/>
-                  </a:lnTo>
-                  <a:lnTo>
-                    <a:pt x="4875509" y="2455327"/>
-                  </a:lnTo>
-                  <a:lnTo>
-                    <a:pt x="4801749" y="2439340"/>
-                  </a:lnTo>
-                  <a:lnTo>
-                    <a:pt x="4727989" y="2422314"/>
-                  </a:lnTo>
-                  <a:lnTo>
-                    <a:pt x="4654229" y="2404182"/>
-                  </a:lnTo>
-                  <a:lnTo>
-                    <a:pt x="4580469" y="2384871"/>
-                  </a:lnTo>
-                  <a:lnTo>
-                    <a:pt x="4506709" y="2364305"/>
-                  </a:lnTo>
-                  <a:lnTo>
-                    <a:pt x="4432949" y="2342403"/>
-                  </a:lnTo>
-                  <a:lnTo>
-                    <a:pt x="4359189" y="2319077"/>
-                  </a:lnTo>
-                  <a:lnTo>
-                    <a:pt x="4285429" y="2294235"/>
-                  </a:lnTo>
-                  <a:lnTo>
-                    <a:pt x="4211669" y="2267778"/>
-                  </a:lnTo>
-                  <a:lnTo>
-                    <a:pt x="4137909" y="2239602"/>
-                  </a:lnTo>
-                  <a:lnTo>
-                    <a:pt x="4064149" y="2209594"/>
-                  </a:lnTo>
-                  <a:lnTo>
-                    <a:pt x="3990388" y="2177636"/>
-                  </a:lnTo>
-                  <a:lnTo>
-                    <a:pt x="3916628" y="2143601"/>
-                  </a:lnTo>
-                  <a:lnTo>
-                    <a:pt x="3842868" y="2107354"/>
-                  </a:lnTo>
-                  <a:lnTo>
-                    <a:pt x="3769108" y="2068751"/>
-                  </a:lnTo>
-                  <a:lnTo>
-                    <a:pt x="3695348" y="2027639"/>
-                  </a:lnTo>
-                  <a:lnTo>
-                    <a:pt x="3621588" y="1983856"/>
-                  </a:lnTo>
-                  <a:lnTo>
-                    <a:pt x="3547828" y="1937226"/>
-                  </a:lnTo>
-                  <a:lnTo>
-                    <a:pt x="3474068" y="1887566"/>
-                  </a:lnTo>
-                  <a:lnTo>
-                    <a:pt x="3400308" y="1857142"/>
-                  </a:lnTo>
-                  <a:lnTo>
-                    <a:pt x="3326548" y="1835572"/>
-                  </a:lnTo>
-                  <a:lnTo>
-                    <a:pt x="3252788" y="1813452"/>
-                  </a:lnTo>
-                  <a:lnTo>
-                    <a:pt x="3179028" y="1790766"/>
-                  </a:lnTo>
-                  <a:lnTo>
-                    <a:pt x="3105268" y="1767500"/>
-                  </a:lnTo>
-                  <a:lnTo>
-                    <a:pt x="3031508" y="1743640"/>
-                  </a:lnTo>
-                  <a:lnTo>
-                    <a:pt x="2957748" y="1719171"/>
-                  </a:lnTo>
-                  <a:lnTo>
-                    <a:pt x="2883988" y="1694076"/>
-                  </a:lnTo>
-                  <a:lnTo>
-                    <a:pt x="2810228" y="1668339"/>
-                  </a:lnTo>
-                  <a:lnTo>
-                    <a:pt x="2736468" y="1641946"/>
-                  </a:lnTo>
-                  <a:lnTo>
-                    <a:pt x="2662708" y="1614878"/>
-                  </a:lnTo>
-                  <a:lnTo>
-                    <a:pt x="2588948" y="1587118"/>
-                  </a:lnTo>
-                  <a:lnTo>
-                    <a:pt x="2515188" y="1558649"/>
-                  </a:lnTo>
-                  <a:lnTo>
-                    <a:pt x="2441428" y="1529452"/>
-                  </a:lnTo>
-                  <a:lnTo>
-                    <a:pt x="2367668" y="1499510"/>
-                  </a:lnTo>
-                  <a:lnTo>
-                    <a:pt x="2293908" y="1468802"/>
-                  </a:lnTo>
-                  <a:lnTo>
-                    <a:pt x="2220148" y="1437310"/>
-                  </a:lnTo>
-                  <a:lnTo>
-                    <a:pt x="2146388" y="1405013"/>
-                  </a:lnTo>
-                  <a:lnTo>
-                    <a:pt x="2072628" y="1371891"/>
-                  </a:lnTo>
-                  <a:lnTo>
-                    <a:pt x="1998868" y="1337922"/>
-                  </a:lnTo>
-                  <a:lnTo>
-                    <a:pt x="1925108" y="1303086"/>
-                  </a:lnTo>
-                  <a:lnTo>
-                    <a:pt x="1851348" y="1267359"/>
-                  </a:lnTo>
-                  <a:lnTo>
-                    <a:pt x="1777588" y="1230720"/>
-                  </a:lnTo>
-                  <a:lnTo>
-                    <a:pt x="1703828" y="1193144"/>
-                  </a:lnTo>
-                  <a:lnTo>
-                    <a:pt x="1630068" y="1154608"/>
-                  </a:lnTo>
-                  <a:lnTo>
-                    <a:pt x="1556308" y="1115088"/>
-                  </a:lnTo>
-                  <a:lnTo>
-                    <a:pt x="1482548" y="1074558"/>
-                  </a:lnTo>
-                  <a:lnTo>
-                    <a:pt x="1408788" y="1032992"/>
-                  </a:lnTo>
-                  <a:lnTo>
-                    <a:pt x="1335028" y="990364"/>
-                  </a:lnTo>
-                  <a:lnTo>
-                    <a:pt x="1261268" y="946647"/>
-                  </a:lnTo>
-                  <a:lnTo>
-                    <a:pt x="1187508" y="901813"/>
-                  </a:lnTo>
-                  <a:lnTo>
-                    <a:pt x="1113747" y="855833"/>
-                  </a:lnTo>
-                  <a:lnTo>
-                    <a:pt x="1039987" y="808678"/>
-                  </a:lnTo>
-                  <a:lnTo>
-                    <a:pt x="966227" y="760319"/>
-                  </a:lnTo>
-                  <a:lnTo>
-                    <a:pt x="892467" y="710724"/>
-                  </a:lnTo>
-                  <a:lnTo>
-                    <a:pt x="818707" y="659862"/>
-                  </a:lnTo>
-                  <a:lnTo>
-                    <a:pt x="744947" y="607700"/>
-                  </a:lnTo>
-                  <a:lnTo>
-                    <a:pt x="671187" y="554205"/>
-                  </a:lnTo>
-                  <a:lnTo>
-                    <a:pt x="597427" y="499343"/>
-                  </a:lnTo>
-                  <a:lnTo>
-                    <a:pt x="523667" y="443080"/>
-                  </a:lnTo>
-                  <a:lnTo>
-                    <a:pt x="449907" y="385379"/>
-                  </a:lnTo>
-                  <a:lnTo>
-                    <a:pt x="376147" y="326203"/>
-                  </a:lnTo>
-                  <a:lnTo>
-                    <a:pt x="302387" y="265516"/>
-                  </a:lnTo>
-                  <a:lnTo>
-                    <a:pt x="228627" y="203277"/>
-                  </a:lnTo>
-                  <a:lnTo>
-                    <a:pt x="154867" y="139449"/>
-                  </a:lnTo>
-                  <a:lnTo>
-                    <a:pt x="81107" y="73990"/>
-                  </a:lnTo>
-                  <a:lnTo>
-                    <a:pt x="7347" y="6858"/>
-                  </a:lnTo>
-                  <a:lnTo>
-                    <a:pt x="0" y="0"/>
-                  </a:lnTo>
-                </a:path>
-              </a:pathLst>
-            </a:custGeom>
-          </p:spPr>
-          <p:txBody>
-            <a:bodyPr/>
-            <a:lstStyle/>
-            <a:p/>
-          </p:txBody>
-        </p:sp>
-        <p:sp>
-          <p:nvSpPr>
-            <p:cNvPr id="24" name="pl24"/>
-            <p:cNvSpPr/>
-            <p:nvPr/>
-          </p:nvSpPr>
-          <p:spPr>
-            <a:xfrm>
-              <a:off x="1869098" y="2073503"/>
-              <a:ext cx="6184249" cy="3397408"/>
-            </a:xfrm>
-            <a:custGeom>
-              <a:avLst/>
-              <a:pathLst>
-                <a:path w="6184249" h="3397408">
+                <a:path w="6005035" h="3397408">
                   <a:moveTo>
                     <a:pt x="0" y="0"/>
                   </a:moveTo>
                   <a:lnTo>
-                    <a:pt x="62167" y="127538"/>
-                  </a:lnTo>
-                  <a:lnTo>
-                    <a:pt x="135927" y="272331"/>
-                  </a:lnTo>
-                  <a:lnTo>
-                    <a:pt x="209687" y="410877"/>
-                  </a:lnTo>
-                  <a:lnTo>
-                    <a:pt x="283447" y="543445"/>
-                  </a:lnTo>
-                  <a:lnTo>
-                    <a:pt x="357207" y="670295"/>
-                  </a:lnTo>
-                  <a:lnTo>
-                    <a:pt x="430967" y="791672"/>
-                  </a:lnTo>
-                  <a:lnTo>
-                    <a:pt x="504727" y="907812"/>
-                  </a:lnTo>
-                  <a:lnTo>
-                    <a:pt x="578488" y="1018943"/>
-                  </a:lnTo>
-                  <a:lnTo>
-                    <a:pt x="652248" y="1125278"/>
-                  </a:lnTo>
-                  <a:lnTo>
-                    <a:pt x="726008" y="1227027"/>
-                  </a:lnTo>
-                  <a:lnTo>
-                    <a:pt x="799768" y="1324385"/>
-                  </a:lnTo>
-                  <a:lnTo>
-                    <a:pt x="873528" y="1417544"/>
-                  </a:lnTo>
-                  <a:lnTo>
-                    <a:pt x="947288" y="1506683"/>
-                  </a:lnTo>
-                  <a:lnTo>
-                    <a:pt x="1021048" y="1591977"/>
-                  </a:lnTo>
-                  <a:lnTo>
-                    <a:pt x="1094808" y="1673591"/>
-                  </a:lnTo>
-                  <a:lnTo>
-                    <a:pt x="1168568" y="1751684"/>
-                  </a:lnTo>
-                  <a:lnTo>
-                    <a:pt x="1242328" y="1826408"/>
-                  </a:lnTo>
-                  <a:lnTo>
-                    <a:pt x="1316088" y="1897908"/>
-                  </a:lnTo>
-                  <a:lnTo>
-                    <a:pt x="1389848" y="1966324"/>
-                  </a:lnTo>
-                  <a:lnTo>
-                    <a:pt x="1463608" y="2031788"/>
-                  </a:lnTo>
-                  <a:lnTo>
-                    <a:pt x="1537368" y="2094428"/>
-                  </a:lnTo>
-                  <a:lnTo>
-                    <a:pt x="1611128" y="2154366"/>
-                  </a:lnTo>
-                  <a:lnTo>
-                    <a:pt x="1684888" y="2211717"/>
-                  </a:lnTo>
-                  <a:lnTo>
-                    <a:pt x="1758648" y="2266595"/>
-                  </a:lnTo>
-                  <a:lnTo>
-                    <a:pt x="1832408" y="2319105"/>
-                  </a:lnTo>
-                  <a:lnTo>
-                    <a:pt x="1906168" y="2369349"/>
-                  </a:lnTo>
-                  <a:lnTo>
-                    <a:pt x="1979928" y="2417426"/>
-                  </a:lnTo>
-                  <a:lnTo>
-                    <a:pt x="2053688" y="2463429"/>
-                  </a:lnTo>
-                  <a:lnTo>
-                    <a:pt x="2127448" y="2507447"/>
-                  </a:lnTo>
-                  <a:lnTo>
-                    <a:pt x="2201208" y="2549566"/>
-                  </a:lnTo>
-                  <a:lnTo>
-                    <a:pt x="2274968" y="2589869"/>
-                  </a:lnTo>
-                  <a:lnTo>
-                    <a:pt x="2348728" y="2628432"/>
-                  </a:lnTo>
-                  <a:lnTo>
-                    <a:pt x="2422488" y="2665332"/>
-                  </a:lnTo>
-                  <a:lnTo>
-                    <a:pt x="2496248" y="2700639"/>
-                  </a:lnTo>
-                  <a:lnTo>
-                    <a:pt x="2570008" y="2734424"/>
-                  </a:lnTo>
-                  <a:lnTo>
-                    <a:pt x="2643768" y="2766751"/>
-                  </a:lnTo>
-                  <a:lnTo>
-                    <a:pt x="2717528" y="2797683"/>
-                  </a:lnTo>
-                  <a:lnTo>
-                    <a:pt x="2791288" y="2827281"/>
-                  </a:lnTo>
-                  <a:lnTo>
-                    <a:pt x="2865048" y="2855602"/>
-                  </a:lnTo>
-                  <a:lnTo>
-                    <a:pt x="2938808" y="2882701"/>
-                  </a:lnTo>
-                  <a:lnTo>
-                    <a:pt x="3012568" y="2908632"/>
-                  </a:lnTo>
-                  <a:lnTo>
-                    <a:pt x="3086328" y="2933443"/>
-                  </a:lnTo>
-                  <a:lnTo>
-                    <a:pt x="3160088" y="2957184"/>
-                  </a:lnTo>
-                  <a:lnTo>
-                    <a:pt x="3233848" y="2979901"/>
-                  </a:lnTo>
-                  <a:lnTo>
-                    <a:pt x="3307608" y="3001637"/>
-                  </a:lnTo>
-                  <a:lnTo>
-                    <a:pt x="3381368" y="3022436"/>
-                  </a:lnTo>
-                  <a:lnTo>
-                    <a:pt x="3455128" y="3042338"/>
-                  </a:lnTo>
-                  <a:lnTo>
-                    <a:pt x="3528889" y="3061381"/>
-                  </a:lnTo>
-                  <a:lnTo>
-                    <a:pt x="3602649" y="3079603"/>
-                  </a:lnTo>
-                  <a:lnTo>
-                    <a:pt x="3676409" y="3097038"/>
-                  </a:lnTo>
-                  <a:lnTo>
-                    <a:pt x="3750169" y="3113721"/>
-                  </a:lnTo>
-                  <a:lnTo>
-                    <a:pt x="3823929" y="3129685"/>
-                  </a:lnTo>
-                  <a:lnTo>
-                    <a:pt x="3897689" y="3144960"/>
-                  </a:lnTo>
-                  <a:lnTo>
-                    <a:pt x="3971449" y="3159576"/>
-                  </a:lnTo>
-                  <a:lnTo>
-                    <a:pt x="4045209" y="3173561"/>
-                  </a:lnTo>
-                  <a:lnTo>
-                    <a:pt x="4118969" y="3186943"/>
-                  </a:lnTo>
-                  <a:lnTo>
-                    <a:pt x="4192729" y="3199747"/>
-                  </a:lnTo>
-                  <a:lnTo>
-                    <a:pt x="4266489" y="3212000"/>
-                  </a:lnTo>
-                  <a:lnTo>
-                    <a:pt x="4340249" y="3223723"/>
-                  </a:lnTo>
-                  <a:lnTo>
-                    <a:pt x="4414009" y="3234941"/>
-                  </a:lnTo>
-                  <a:lnTo>
-                    <a:pt x="4487769" y="3245675"/>
-                  </a:lnTo>
-                  <a:lnTo>
-                    <a:pt x="4561529" y="3255946"/>
-                  </a:lnTo>
-                  <a:lnTo>
-                    <a:pt x="4635289" y="3265773"/>
-                  </a:lnTo>
-                  <a:lnTo>
-                    <a:pt x="4709049" y="3275177"/>
-                  </a:lnTo>
-                  <a:lnTo>
-                    <a:pt x="4782809" y="3284175"/>
-                  </a:lnTo>
-                  <a:lnTo>
-                    <a:pt x="4856569" y="3292785"/>
-                  </a:lnTo>
-                  <a:lnTo>
-                    <a:pt x="4930329" y="3301023"/>
-                  </a:lnTo>
-                  <a:lnTo>
-                    <a:pt x="5004089" y="3308906"/>
-                  </a:lnTo>
-                  <a:lnTo>
-                    <a:pt x="5077849" y="3316449"/>
-                  </a:lnTo>
-                  <a:lnTo>
-                    <a:pt x="5151609" y="3323667"/>
-                  </a:lnTo>
-                  <a:lnTo>
-                    <a:pt x="5225369" y="3330573"/>
-                  </a:lnTo>
-                  <a:lnTo>
-                    <a:pt x="5299129" y="3337181"/>
-                  </a:lnTo>
-                  <a:lnTo>
-                    <a:pt x="5372889" y="3343504"/>
-                  </a:lnTo>
-                  <a:lnTo>
-                    <a:pt x="5446649" y="3349554"/>
-                  </a:lnTo>
-                  <a:lnTo>
-                    <a:pt x="5520409" y="3355344"/>
-                  </a:lnTo>
-                  <a:lnTo>
-                    <a:pt x="5594169" y="3360883"/>
-                  </a:lnTo>
-                  <a:lnTo>
-                    <a:pt x="5667929" y="3366184"/>
-                  </a:lnTo>
-                  <a:lnTo>
-                    <a:pt x="5741689" y="3371256"/>
-                  </a:lnTo>
-                  <a:lnTo>
-                    <a:pt x="5815449" y="3376109"/>
-                  </a:lnTo>
-                  <a:lnTo>
-                    <a:pt x="5889209" y="3380752"/>
-                  </a:lnTo>
-                  <a:lnTo>
-                    <a:pt x="5962969" y="3385196"/>
-                  </a:lnTo>
-                  <a:lnTo>
-                    <a:pt x="6036729" y="3389447"/>
-                  </a:lnTo>
-                  <a:lnTo>
-                    <a:pt x="6110489" y="3393515"/>
-                  </a:lnTo>
-                  <a:lnTo>
-                    <a:pt x="6184249" y="3397408"/>
+                    <a:pt x="60366" y="127538"/>
+                  </a:lnTo>
+                  <a:lnTo>
+                    <a:pt x="131988" y="272331"/>
+                  </a:lnTo>
+                  <a:lnTo>
+                    <a:pt x="203611" y="410877"/>
+                  </a:lnTo>
+                  <a:lnTo>
+                    <a:pt x="275233" y="543445"/>
+                  </a:lnTo>
+                  <a:lnTo>
+                    <a:pt x="346856" y="670295"/>
+                  </a:lnTo>
+                  <a:lnTo>
+                    <a:pt x="418478" y="791672"/>
+                  </a:lnTo>
+                  <a:lnTo>
+                    <a:pt x="490101" y="907812"/>
+                  </a:lnTo>
+                  <a:lnTo>
+                    <a:pt x="561723" y="1018943"/>
+                  </a:lnTo>
+                  <a:lnTo>
+                    <a:pt x="633346" y="1125278"/>
+                  </a:lnTo>
+                  <a:lnTo>
+                    <a:pt x="704968" y="1227027"/>
+                  </a:lnTo>
+                  <a:lnTo>
+                    <a:pt x="776591" y="1324385"/>
+                  </a:lnTo>
+                  <a:lnTo>
+                    <a:pt x="848214" y="1417544"/>
+                  </a:lnTo>
+                  <a:lnTo>
+                    <a:pt x="919836" y="1506683"/>
+                  </a:lnTo>
+                  <a:lnTo>
+                    <a:pt x="991459" y="1591977"/>
+                  </a:lnTo>
+                  <a:lnTo>
+                    <a:pt x="1063081" y="1673591"/>
+                  </a:lnTo>
+                  <a:lnTo>
+                    <a:pt x="1134704" y="1751684"/>
+                  </a:lnTo>
+                  <a:lnTo>
+                    <a:pt x="1206326" y="1826408"/>
+                  </a:lnTo>
+                  <a:lnTo>
+                    <a:pt x="1277949" y="1897908"/>
+                  </a:lnTo>
+                  <a:lnTo>
+                    <a:pt x="1349571" y="1966324"/>
+                  </a:lnTo>
+                  <a:lnTo>
+                    <a:pt x="1421194" y="2031788"/>
+                  </a:lnTo>
+                  <a:lnTo>
+                    <a:pt x="1492816" y="2094428"/>
+                  </a:lnTo>
+                  <a:lnTo>
+                    <a:pt x="1564439" y="2154366"/>
+                  </a:lnTo>
+                  <a:lnTo>
+                    <a:pt x="1636061" y="2211717"/>
+                  </a:lnTo>
+                  <a:lnTo>
+                    <a:pt x="1707684" y="2266595"/>
+                  </a:lnTo>
+                  <a:lnTo>
+                    <a:pt x="1779306" y="2319105"/>
+                  </a:lnTo>
+                  <a:lnTo>
+                    <a:pt x="1850929" y="2369349"/>
+                  </a:lnTo>
+                  <a:lnTo>
+                    <a:pt x="1922551" y="2417426"/>
+                  </a:lnTo>
+                  <a:lnTo>
+                    <a:pt x="1994174" y="2463429"/>
+                  </a:lnTo>
+                  <a:lnTo>
+                    <a:pt x="2065796" y="2507447"/>
+                  </a:lnTo>
+                  <a:lnTo>
+                    <a:pt x="2137419" y="2549566"/>
+                  </a:lnTo>
+                  <a:lnTo>
+                    <a:pt x="2209042" y="2589869"/>
+                  </a:lnTo>
+                  <a:lnTo>
+                    <a:pt x="2280664" y="2628432"/>
+                  </a:lnTo>
+                  <a:lnTo>
+                    <a:pt x="2352287" y="2665332"/>
+                  </a:lnTo>
+                  <a:lnTo>
+                    <a:pt x="2423909" y="2700639"/>
+                  </a:lnTo>
+                  <a:lnTo>
+                    <a:pt x="2495532" y="2734424"/>
+                  </a:lnTo>
+                  <a:lnTo>
+                    <a:pt x="2567154" y="2766751"/>
+                  </a:lnTo>
+                  <a:lnTo>
+                    <a:pt x="2638777" y="2797683"/>
+                  </a:lnTo>
+                  <a:lnTo>
+                    <a:pt x="2710399" y="2827281"/>
+                  </a:lnTo>
+                  <a:lnTo>
+                    <a:pt x="2782022" y="2855602"/>
+                  </a:lnTo>
+                  <a:lnTo>
+                    <a:pt x="2853644" y="2882701"/>
+                  </a:lnTo>
+                  <a:lnTo>
+                    <a:pt x="2925267" y="2908632"/>
+                  </a:lnTo>
+                  <a:lnTo>
+                    <a:pt x="2996889" y="2933443"/>
+                  </a:lnTo>
+                  <a:lnTo>
+                    <a:pt x="3068512" y="2957184"/>
+                  </a:lnTo>
+                  <a:lnTo>
+                    <a:pt x="3140134" y="2979901"/>
+                  </a:lnTo>
+                  <a:lnTo>
+                    <a:pt x="3211757" y="3001637"/>
+                  </a:lnTo>
+                  <a:lnTo>
+                    <a:pt x="3283379" y="3022436"/>
+                  </a:lnTo>
+                  <a:lnTo>
+                    <a:pt x="3355002" y="3042338"/>
+                  </a:lnTo>
+                  <a:lnTo>
+                    <a:pt x="3426624" y="3061381"/>
+                  </a:lnTo>
+                  <a:lnTo>
+                    <a:pt x="3498247" y="3079603"/>
+                  </a:lnTo>
+                  <a:lnTo>
+                    <a:pt x="3569870" y="3097038"/>
+                  </a:lnTo>
+                  <a:lnTo>
+                    <a:pt x="3641492" y="3113721"/>
+                  </a:lnTo>
+                  <a:lnTo>
+                    <a:pt x="3713115" y="3129685"/>
+                  </a:lnTo>
+                  <a:lnTo>
+                    <a:pt x="3784737" y="3144960"/>
+                  </a:lnTo>
+                  <a:lnTo>
+                    <a:pt x="3856360" y="3159576"/>
+                  </a:lnTo>
+                  <a:lnTo>
+                    <a:pt x="3927982" y="3173561"/>
+                  </a:lnTo>
+                  <a:lnTo>
+                    <a:pt x="3999605" y="3186943"/>
+                  </a:lnTo>
+                  <a:lnTo>
+                    <a:pt x="4071227" y="3199747"/>
+                  </a:lnTo>
+                  <a:lnTo>
+                    <a:pt x="4142850" y="3212000"/>
+                  </a:lnTo>
+                  <a:lnTo>
+                    <a:pt x="4214472" y="3223723"/>
+                  </a:lnTo>
+                  <a:lnTo>
+                    <a:pt x="4286095" y="3234941"/>
+                  </a:lnTo>
+                  <a:lnTo>
+                    <a:pt x="4357717" y="3245675"/>
+                  </a:lnTo>
+                  <a:lnTo>
+                    <a:pt x="4429340" y="3255946"/>
+                  </a:lnTo>
+                  <a:lnTo>
+                    <a:pt x="4500962" y="3265773"/>
+                  </a:lnTo>
+                  <a:lnTo>
+                    <a:pt x="4572585" y="3275177"/>
+                  </a:lnTo>
+                  <a:lnTo>
+                    <a:pt x="4644207" y="3284175"/>
+                  </a:lnTo>
+                  <a:lnTo>
+                    <a:pt x="4715830" y="3292785"/>
+                  </a:lnTo>
+                  <a:lnTo>
+                    <a:pt x="4787452" y="3301023"/>
+                  </a:lnTo>
+                  <a:lnTo>
+                    <a:pt x="4859075" y="3308906"/>
+                  </a:lnTo>
+                  <a:lnTo>
+                    <a:pt x="4930698" y="3316449"/>
+                  </a:lnTo>
+                  <a:lnTo>
+                    <a:pt x="5002320" y="3323667"/>
+                  </a:lnTo>
+                  <a:lnTo>
+                    <a:pt x="5073943" y="3330573"/>
+                  </a:lnTo>
+                  <a:lnTo>
+                    <a:pt x="5145565" y="3337181"/>
+                  </a:lnTo>
+                  <a:lnTo>
+                    <a:pt x="5217188" y="3343504"/>
+                  </a:lnTo>
+                  <a:lnTo>
+                    <a:pt x="5288810" y="3349554"/>
+                  </a:lnTo>
+                  <a:lnTo>
+                    <a:pt x="5360433" y="3355344"/>
+                  </a:lnTo>
+                  <a:lnTo>
+                    <a:pt x="5432055" y="3360883"/>
+                  </a:lnTo>
+                  <a:lnTo>
+                    <a:pt x="5503678" y="3366184"/>
+                  </a:lnTo>
+                  <a:lnTo>
+                    <a:pt x="5575300" y="3371256"/>
+                  </a:lnTo>
+                  <a:lnTo>
+                    <a:pt x="5646923" y="3376109"/>
+                  </a:lnTo>
+                  <a:lnTo>
+                    <a:pt x="5718545" y="3380752"/>
+                  </a:lnTo>
+                  <a:lnTo>
+                    <a:pt x="5790168" y="3385196"/>
+                  </a:lnTo>
+                  <a:lnTo>
+                    <a:pt x="5861790" y="3389447"/>
+                  </a:lnTo>
+                  <a:lnTo>
+                    <a:pt x="5933413" y="3393515"/>
+                  </a:lnTo>
+                  <a:lnTo>
+                    <a:pt x="6005035" y="3397408"/>
                   </a:lnTo>
                 </a:path>
               </a:pathLst>
@@ -4422,7 +4379,7 @@
         </p:sp>
         <p:sp>
           <p:nvSpPr>
-            <p:cNvPr id="25" name="pl25"/>
+            <p:cNvPr id="24" name="pl24"/>
             <p:cNvSpPr/>
             <p:nvPr/>
           </p:nvSpPr>
@@ -4465,13 +4422,13 @@
         </p:sp>
         <p:sp>
           <p:nvSpPr>
-            <p:cNvPr id="26" name="pl26"/>
+            <p:cNvPr id="25" name="pl25"/>
             <p:cNvSpPr/>
             <p:nvPr/>
           </p:nvSpPr>
           <p:spPr>
             <a:xfrm>
-              <a:off x="4269157" y="2073503"/>
+              <a:off x="4588151" y="2073503"/>
               <a:ext cx="0" cy="3649639"/>
             </a:xfrm>
             <a:custGeom>
@@ -4508,7 +4465,7 @@
         </p:sp>
         <p:sp>
           <p:nvSpPr>
-            <p:cNvPr id="27" name="tx27"/>
+            <p:cNvPr id="26" name="tx26"/>
             <p:cNvSpPr/>
             <p:nvPr/>
           </p:nvSpPr>
@@ -4554,7 +4511,7 @@
         </p:sp>
         <p:sp>
           <p:nvSpPr>
-            <p:cNvPr id="28" name="tx28"/>
+            <p:cNvPr id="27" name="tx27"/>
             <p:cNvSpPr/>
             <p:nvPr/>
           </p:nvSpPr>
@@ -4600,7 +4557,7 @@
         </p:sp>
         <p:sp>
           <p:nvSpPr>
-            <p:cNvPr id="29" name="tx29"/>
+            <p:cNvPr id="28" name="tx28"/>
             <p:cNvSpPr/>
             <p:nvPr/>
           </p:nvSpPr>
@@ -4646,7 +4603,7 @@
         </p:sp>
         <p:sp>
           <p:nvSpPr>
-            <p:cNvPr id="30" name="tx30"/>
+            <p:cNvPr id="29" name="tx29"/>
             <p:cNvSpPr/>
             <p:nvPr/>
           </p:nvSpPr>
@@ -4692,7 +4649,7 @@
         </p:sp>
         <p:sp>
           <p:nvSpPr>
-            <p:cNvPr id="31" name="tx31"/>
+            <p:cNvPr id="30" name="tx30"/>
             <p:cNvSpPr/>
             <p:nvPr/>
           </p:nvSpPr>
@@ -4738,14 +4695,14 @@
         </p:sp>
         <p:sp>
           <p:nvSpPr>
-            <p:cNvPr id="32" name="tx32"/>
+            <p:cNvPr id="31" name="tx31"/>
             <p:cNvSpPr/>
             <p:nvPr/>
           </p:nvSpPr>
           <p:spPr>
             <a:xfrm>
-              <a:off x="2423864" y="5785772"/>
-              <a:ext cx="155356" cy="80101"/>
+              <a:off x="2360651" y="5785772"/>
+              <a:ext cx="161574" cy="80101"/>
             </a:xfrm>
             <a:prstGeom prst="rect">
               <a:avLst/>
@@ -4777,21 +4734,21 @@
                   <a:latin typeface="Helvetica"/>
                   <a:cs typeface="Helvetica"/>
                 </a:rPr>
-                <a:t>0.8</a:t>
+                <a:t>-25</a:t>
               </a:r>
             </a:p>
           </p:txBody>
         </p:sp>
         <p:sp>
           <p:nvSpPr>
-            <p:cNvPr id="33" name="tx33"/>
+            <p:cNvPr id="32" name="tx32"/>
             <p:cNvSpPr/>
             <p:nvPr/>
           </p:nvSpPr>
           <p:spPr>
             <a:xfrm>
-              <a:off x="4196521" y="5785772"/>
-              <a:ext cx="155356" cy="80101"/>
+              <a:off x="4561958" y="5785772"/>
+              <a:ext cx="62179" cy="80101"/>
             </a:xfrm>
             <a:prstGeom prst="rect">
               <a:avLst/>
@@ -4823,21 +4780,21 @@
                   <a:latin typeface="Helvetica"/>
                   <a:cs typeface="Helvetica"/>
                 </a:rPr>
-                <a:t>1.0</a:t>
+                <a:t>0</a:t>
               </a:r>
             </a:p>
           </p:txBody>
         </p:sp>
         <p:sp>
           <p:nvSpPr>
-            <p:cNvPr id="34" name="tx34"/>
+            <p:cNvPr id="33" name="tx33"/>
             <p:cNvSpPr/>
             <p:nvPr/>
           </p:nvSpPr>
           <p:spPr>
             <a:xfrm>
-              <a:off x="5969179" y="5785772"/>
-              <a:ext cx="155356" cy="80101"/>
+              <a:off x="6682478" y="5785772"/>
+              <a:ext cx="124358" cy="80101"/>
             </a:xfrm>
             <a:prstGeom prst="rect">
               <a:avLst/>
@@ -4869,67 +4826,21 @@
                   <a:latin typeface="Helvetica"/>
                   <a:cs typeface="Helvetica"/>
                 </a:rPr>
-                <a:t>1.2</a:t>
+                <a:t>25</a:t>
               </a:r>
             </a:p>
           </p:txBody>
         </p:sp>
         <p:sp>
           <p:nvSpPr>
-            <p:cNvPr id="35" name="tx35"/>
+            <p:cNvPr id="34" name="tx34"/>
             <p:cNvSpPr/>
             <p:nvPr/>
           </p:nvSpPr>
           <p:spPr>
             <a:xfrm>
-              <a:off x="7741836" y="5785772"/>
-              <a:ext cx="155356" cy="80101"/>
-            </a:xfrm>
-            <a:prstGeom prst="rect">
-              <a:avLst/>
-            </a:prstGeom>
-            <a:noFill/>
-          </p:spPr>
-          <p:txBody>
-            <a:bodyPr lIns="0" rIns="0" tIns="0" bIns="0" anchorCtr="1" anchor="ctr" wrap="none"/>
-            <a:lstStyle/>
-            <a:p>
-              <a:pPr algn="l" marL="0" marR="0" indent="0">
-                <a:lnSpc>
-                  <a:spcPts val="880"/>
-                </a:lnSpc>
-                <a:spcBef>
-                  <a:spcPts val="0"/>
-                </a:spcBef>
-                <a:spcAft>
-                  <a:spcPts val="0"/>
-                </a:spcAft>
-              </a:pPr>
-              <a:r>
-                <a:rPr sz="880">
-                  <a:solidFill>
-                    <a:srgbClr val="4D4D4D">
-                      <a:alpha val="100000"/>
-                    </a:srgbClr>
-                  </a:solidFill>
-                  <a:latin typeface="Helvetica"/>
-                  <a:cs typeface="Helvetica"/>
-                </a:rPr>
-                <a:t>1.4</a:t>
-              </a:r>
-            </a:p>
-          </p:txBody>
-        </p:sp>
-        <p:sp>
-          <p:nvSpPr>
-            <p:cNvPr id="36" name="tx36"/>
-            <p:cNvSpPr/>
-            <p:nvPr/>
-          </p:nvSpPr>
-          <p:spPr>
-            <a:xfrm>
-              <a:off x="3879271" y="5925448"/>
-              <a:ext cx="1676186" cy="100218"/>
+              <a:off x="2928340" y="5925448"/>
+              <a:ext cx="3578047" cy="100218"/>
             </a:xfrm>
             <a:prstGeom prst="rect">
               <a:avLst/>
@@ -4961,14 +4872,14 @@
                   <a:latin typeface="Helvetica"/>
                   <a:cs typeface="Helvetica"/>
                 </a:rPr>
-                <a:t>CKD-EPI Cr-Cys / CG ratio</a:t>
+                <a:t>eGFR difference (%): 100 × (CKD-EPI Cr-Cys − CG) / CG</a:t>
               </a:r>
             </a:p>
           </p:txBody>
         </p:sp>
         <p:sp>
           <p:nvSpPr>
-            <p:cNvPr id="37" name="tx37"/>
+            <p:cNvPr id="35" name="tx35"/>
             <p:cNvSpPr/>
             <p:nvPr/>
           </p:nvSpPr>
@@ -5014,14 +4925,14 @@
         </p:sp>
         <p:sp>
           <p:nvSpPr>
-            <p:cNvPr id="38" name="tx38"/>
+            <p:cNvPr id="36" name="tx36"/>
             <p:cNvSpPr/>
             <p:nvPr/>
           </p:nvSpPr>
           <p:spPr>
             <a:xfrm>
               <a:off x="817517" y="1896563"/>
-              <a:ext cx="6715627" cy="82021"/>
+              <a:ext cx="6867875" cy="82021"/>
             </a:xfrm>
             <a:prstGeom prst="rect">
               <a:avLst/>
@@ -5053,14 +4964,14 @@
                   <a:latin typeface="Helvetica"/>
                   <a:cs typeface="Helvetica"/>
                 </a:rPr>
-                <a:t>HR per 0.1 ratio decline: 1.70 (1.35-2.13), p_Bonf = &lt;0.001 (n = 6)  |  per IQR decline (Δ = 0.29): 4.72 (2.43-9.16)  |  IQR: [0.85, 1.15]</a:t>
+                <a:t>HR per 10 % decline: 1.70 (1.35-2.13), p_Bonf = &lt;0.001 (n = 6)  |  per IQR decline (Δ = 29.3 %): 4.72 (2.43-9.16)  |  IQR: [-14.6, 14.7] %</a:t>
               </a:r>
             </a:p>
           </p:txBody>
         </p:sp>
         <p:sp>
           <p:nvSpPr>
-            <p:cNvPr id="39" name="tx39"/>
+            <p:cNvPr id="37" name="tx37"/>
             <p:cNvSpPr/>
             <p:nvPr/>
           </p:nvSpPr>

--- a/docs/pptx/whole/jx-cox-linear-ratio-death.pptx
+++ b/docs/pptx/whole/jx-cox-linear-ratio-death.pptx
@@ -2265,34 +2265,26 @@
         </p:sp>
         <p:sp>
           <p:nvSpPr>
-            <p:cNvPr id="4" name="pl4"/>
+            <p:cNvPr id="4" name="rc4"/>
             <p:cNvSpPr/>
             <p:nvPr/>
           </p:nvSpPr>
           <p:spPr>
             <a:xfrm>
-              <a:off x="817517" y="5142518"/>
-              <a:ext cx="7799693" cy="0"/>
+              <a:off x="457200" y="1600200"/>
+              <a:ext cx="8229600" cy="4525962"/>
             </a:xfrm>
-            <a:custGeom>
+            <a:prstGeom prst="rect">
               <a:avLst/>
-              <a:pathLst>
-                <a:path w="7799693" h="0">
-                  <a:moveTo>
-                    <a:pt x="0" y="0"/>
-                  </a:moveTo>
-                  <a:lnTo>
-                    <a:pt x="7799693" y="0"/>
-                  </a:lnTo>
-                  <a:lnTo>
-                    <a:pt x="7799693" y="0"/>
-                  </a:lnTo>
-                </a:path>
-              </a:pathLst>
-            </a:custGeom>
-            <a:ln w="6775" cap="flat">
+            </a:prstGeom>
+            <a:solidFill>
+              <a:srgbClr val="FFFFFF">
+                <a:alpha val="100000"/>
+              </a:srgbClr>
+            </a:solidFill>
+            <a:ln w="13550" cap="rnd">
               <a:solidFill>
-                <a:srgbClr val="EBEBEB">
+                <a:srgbClr val="FFFFFF">
                   <a:alpha val="100000"/>
                 </a:srgbClr>
               </a:solidFill>
@@ -2314,21 +2306,21 @@
           </p:nvSpPr>
           <p:spPr>
             <a:xfrm>
-              <a:off x="817517" y="4313054"/>
-              <a:ext cx="7799693" cy="0"/>
+              <a:off x="887106" y="3250627"/>
+              <a:ext cx="7660515" cy="0"/>
             </a:xfrm>
             <a:custGeom>
               <a:avLst/>
               <a:pathLst>
-                <a:path w="7799693" h="0">
+                <a:path w="7660515" h="0">
                   <a:moveTo>
                     <a:pt x="0" y="0"/>
                   </a:moveTo>
                   <a:lnTo>
-                    <a:pt x="7799693" y="0"/>
-                  </a:lnTo>
-                  <a:lnTo>
-                    <a:pt x="7799693" y="0"/>
+                    <a:pt x="7660515" y="0"/>
+                  </a:lnTo>
+                  <a:lnTo>
+                    <a:pt x="7660515" y="0"/>
                   </a:lnTo>
                 </a:path>
               </a:pathLst>
@@ -2357,21 +2349,21 @@
           </p:nvSpPr>
           <p:spPr>
             <a:xfrm>
-              <a:off x="817517" y="3483591"/>
-              <a:ext cx="7799693" cy="0"/>
+              <a:off x="887106" y="2951293"/>
+              <a:ext cx="7660515" cy="0"/>
             </a:xfrm>
             <a:custGeom>
               <a:avLst/>
               <a:pathLst>
-                <a:path w="7799693" h="0">
+                <a:path w="7660515" h="0">
                   <a:moveTo>
                     <a:pt x="0" y="0"/>
                   </a:moveTo>
                   <a:lnTo>
-                    <a:pt x="7799693" y="0"/>
-                  </a:lnTo>
-                  <a:lnTo>
-                    <a:pt x="7799693" y="0"/>
+                    <a:pt x="7660515" y="0"/>
+                  </a:lnTo>
+                  <a:lnTo>
+                    <a:pt x="7660515" y="0"/>
                   </a:lnTo>
                 </a:path>
               </a:pathLst>
@@ -2400,21 +2392,21 @@
           </p:nvSpPr>
           <p:spPr>
             <a:xfrm>
-              <a:off x="817517" y="2654127"/>
-              <a:ext cx="7799693" cy="0"/>
+              <a:off x="887106" y="2651959"/>
+              <a:ext cx="7660515" cy="0"/>
             </a:xfrm>
             <a:custGeom>
               <a:avLst/>
               <a:pathLst>
-                <a:path w="7799693" h="0">
+                <a:path w="7660515" h="0">
                   <a:moveTo>
                     <a:pt x="0" y="0"/>
                   </a:moveTo>
                   <a:lnTo>
-                    <a:pt x="7799693" y="0"/>
-                  </a:lnTo>
-                  <a:lnTo>
-                    <a:pt x="7799693" y="0"/>
+                    <a:pt x="7660515" y="0"/>
+                  </a:lnTo>
+                  <a:lnTo>
+                    <a:pt x="7660515" y="0"/>
                   </a:lnTo>
                 </a:path>
               </a:pathLst>
@@ -2443,21 +2435,21 @@
           </p:nvSpPr>
           <p:spPr>
             <a:xfrm>
-              <a:off x="1365633" y="2073503"/>
-              <a:ext cx="0" cy="3649639"/>
+              <a:off x="887106" y="2352625"/>
+              <a:ext cx="7660515" cy="0"/>
             </a:xfrm>
             <a:custGeom>
               <a:avLst/>
               <a:pathLst>
-                <a:path w="0" h="3649639">
+                <a:path w="7660515" h="0">
                   <a:moveTo>
-                    <a:pt x="0" y="3649639"/>
+                    <a:pt x="0" y="0"/>
                   </a:moveTo>
                   <a:lnTo>
-                    <a:pt x="0" y="0"/>
-                  </a:lnTo>
-                  <a:lnTo>
-                    <a:pt x="0" y="0"/>
+                    <a:pt x="7660515" y="0"/>
+                  </a:lnTo>
+                  <a:lnTo>
+                    <a:pt x="7660515" y="0"/>
                   </a:lnTo>
                 </a:path>
               </a:pathLst>
@@ -2486,15 +2478,15 @@
           </p:nvSpPr>
           <p:spPr>
             <a:xfrm>
-              <a:off x="3517243" y="2073503"/>
-              <a:ext cx="0" cy="3649639"/>
+              <a:off x="1425442" y="2143092"/>
+              <a:ext cx="0" cy="1317069"/>
             </a:xfrm>
             <a:custGeom>
               <a:avLst/>
               <a:pathLst>
-                <a:path w="0" h="3649639">
+                <a:path w="0" h="1317069">
                   <a:moveTo>
-                    <a:pt x="0" y="3649639"/>
+                    <a:pt x="0" y="1317069"/>
                   </a:moveTo>
                   <a:lnTo>
                     <a:pt x="0" y="0"/>
@@ -2529,15 +2521,15 @@
           </p:nvSpPr>
           <p:spPr>
             <a:xfrm>
-              <a:off x="5668852" y="2073503"/>
-              <a:ext cx="0" cy="3649639"/>
+              <a:off x="3538658" y="2143092"/>
+              <a:ext cx="0" cy="1317069"/>
             </a:xfrm>
             <a:custGeom>
               <a:avLst/>
               <a:pathLst>
-                <a:path w="0" h="3649639">
+                <a:path w="0" h="1317069">
                   <a:moveTo>
-                    <a:pt x="0" y="3649639"/>
+                    <a:pt x="0" y="1317069"/>
                   </a:moveTo>
                   <a:lnTo>
                     <a:pt x="0" y="0"/>
@@ -2572,15 +2564,15 @@
           </p:nvSpPr>
           <p:spPr>
             <a:xfrm>
-              <a:off x="7820461" y="2073503"/>
-              <a:ext cx="0" cy="3649639"/>
+              <a:off x="5651874" y="2143092"/>
+              <a:ext cx="0" cy="1317069"/>
             </a:xfrm>
             <a:custGeom>
               <a:avLst/>
               <a:pathLst>
-                <a:path w="0" h="3649639">
+                <a:path w="0" h="1317069">
                   <a:moveTo>
-                    <a:pt x="0" y="3649639"/>
+                    <a:pt x="0" y="1317069"/>
                   </a:moveTo>
                   <a:lnTo>
                     <a:pt x="0" y="0"/>
@@ -2615,26 +2607,26 @@
           </p:nvSpPr>
           <p:spPr>
             <a:xfrm>
-              <a:off x="817517" y="5557249"/>
-              <a:ext cx="7799693" cy="0"/>
+              <a:off x="7765090" y="2143092"/>
+              <a:ext cx="0" cy="1317069"/>
             </a:xfrm>
             <a:custGeom>
               <a:avLst/>
               <a:pathLst>
-                <a:path w="7799693" h="0">
+                <a:path w="0" h="1317069">
                   <a:moveTo>
+                    <a:pt x="0" y="1317069"/>
+                  </a:moveTo>
+                  <a:lnTo>
                     <a:pt x="0" y="0"/>
-                  </a:moveTo>
-                  <a:lnTo>
-                    <a:pt x="7799693" y="0"/>
-                  </a:lnTo>
-                  <a:lnTo>
-                    <a:pt x="7799693" y="0"/>
+                  </a:lnTo>
+                  <a:lnTo>
+                    <a:pt x="0" y="0"/>
                   </a:lnTo>
                 </a:path>
               </a:pathLst>
             </a:custGeom>
-            <a:ln w="13550" cap="flat">
+            <a:ln w="6775" cap="flat">
               <a:solidFill>
                 <a:srgbClr val="EBEBEB">
                   <a:alpha val="100000"/>
@@ -2658,21 +2650,21 @@
           </p:nvSpPr>
           <p:spPr>
             <a:xfrm>
-              <a:off x="817517" y="4727786"/>
-              <a:ext cx="7799693" cy="0"/>
+              <a:off x="887106" y="3400294"/>
+              <a:ext cx="7660515" cy="0"/>
             </a:xfrm>
             <a:custGeom>
               <a:avLst/>
               <a:pathLst>
-                <a:path w="7799693" h="0">
+                <a:path w="7660515" h="0">
                   <a:moveTo>
                     <a:pt x="0" y="0"/>
                   </a:moveTo>
                   <a:lnTo>
-                    <a:pt x="7799693" y="0"/>
-                  </a:lnTo>
-                  <a:lnTo>
-                    <a:pt x="7799693" y="0"/>
+                    <a:pt x="7660515" y="0"/>
+                  </a:lnTo>
+                  <a:lnTo>
+                    <a:pt x="7660515" y="0"/>
                   </a:lnTo>
                 </a:path>
               </a:pathLst>
@@ -2701,21 +2693,21 @@
           </p:nvSpPr>
           <p:spPr>
             <a:xfrm>
-              <a:off x="817517" y="3898322"/>
-              <a:ext cx="7799693" cy="0"/>
+              <a:off x="887106" y="3100960"/>
+              <a:ext cx="7660515" cy="0"/>
             </a:xfrm>
             <a:custGeom>
               <a:avLst/>
               <a:pathLst>
-                <a:path w="7799693" h="0">
+                <a:path w="7660515" h="0">
                   <a:moveTo>
                     <a:pt x="0" y="0"/>
                   </a:moveTo>
                   <a:lnTo>
-                    <a:pt x="7799693" y="0"/>
-                  </a:lnTo>
-                  <a:lnTo>
-                    <a:pt x="7799693" y="0"/>
+                    <a:pt x="7660515" y="0"/>
+                  </a:lnTo>
+                  <a:lnTo>
+                    <a:pt x="7660515" y="0"/>
                   </a:lnTo>
                 </a:path>
               </a:pathLst>
@@ -2744,21 +2736,21 @@
           </p:nvSpPr>
           <p:spPr>
             <a:xfrm>
-              <a:off x="817517" y="3068859"/>
-              <a:ext cx="7799693" cy="0"/>
+              <a:off x="887106" y="2801626"/>
+              <a:ext cx="7660515" cy="0"/>
             </a:xfrm>
             <a:custGeom>
               <a:avLst/>
               <a:pathLst>
-                <a:path w="7799693" h="0">
+                <a:path w="7660515" h="0">
                   <a:moveTo>
                     <a:pt x="0" y="0"/>
                   </a:moveTo>
                   <a:lnTo>
-                    <a:pt x="7799693" y="0"/>
-                  </a:lnTo>
-                  <a:lnTo>
-                    <a:pt x="7799693" y="0"/>
+                    <a:pt x="7660515" y="0"/>
+                  </a:lnTo>
+                  <a:lnTo>
+                    <a:pt x="7660515" y="0"/>
                   </a:lnTo>
                 </a:path>
               </a:pathLst>
@@ -2787,21 +2779,21 @@
           </p:nvSpPr>
           <p:spPr>
             <a:xfrm>
-              <a:off x="817517" y="2239395"/>
-              <a:ext cx="7799693" cy="0"/>
+              <a:off x="887106" y="2502292"/>
+              <a:ext cx="7660515" cy="0"/>
             </a:xfrm>
             <a:custGeom>
               <a:avLst/>
               <a:pathLst>
-                <a:path w="7799693" h="0">
+                <a:path w="7660515" h="0">
                   <a:moveTo>
                     <a:pt x="0" y="0"/>
                   </a:moveTo>
                   <a:lnTo>
-                    <a:pt x="7799693" y="0"/>
-                  </a:lnTo>
-                  <a:lnTo>
-                    <a:pt x="7799693" y="0"/>
+                    <a:pt x="7660515" y="0"/>
+                  </a:lnTo>
+                  <a:lnTo>
+                    <a:pt x="7660515" y="0"/>
                   </a:lnTo>
                 </a:path>
               </a:pathLst>
@@ -2830,21 +2822,21 @@
           </p:nvSpPr>
           <p:spPr>
             <a:xfrm>
-              <a:off x="2441438" y="2073503"/>
-              <a:ext cx="0" cy="3649639"/>
+              <a:off x="887106" y="2202958"/>
+              <a:ext cx="7660515" cy="0"/>
             </a:xfrm>
             <a:custGeom>
               <a:avLst/>
               <a:pathLst>
-                <a:path w="0" h="3649639">
+                <a:path w="7660515" h="0">
                   <a:moveTo>
-                    <a:pt x="0" y="3649639"/>
+                    <a:pt x="0" y="0"/>
                   </a:moveTo>
                   <a:lnTo>
-                    <a:pt x="0" y="0"/>
-                  </a:lnTo>
-                  <a:lnTo>
-                    <a:pt x="0" y="0"/>
+                    <a:pt x="7660515" y="0"/>
+                  </a:lnTo>
+                  <a:lnTo>
+                    <a:pt x="7660515" y="0"/>
                   </a:lnTo>
                 </a:path>
               </a:pathLst>
@@ -2873,15 +2865,15 @@
           </p:nvSpPr>
           <p:spPr>
             <a:xfrm>
-              <a:off x="4593047" y="2073503"/>
-              <a:ext cx="0" cy="3649639"/>
+              <a:off x="2482050" y="2143092"/>
+              <a:ext cx="0" cy="1317069"/>
             </a:xfrm>
             <a:custGeom>
               <a:avLst/>
               <a:pathLst>
-                <a:path w="0" h="3649639">
+                <a:path w="0" h="1317069">
                   <a:moveTo>
-                    <a:pt x="0" y="3649639"/>
+                    <a:pt x="0" y="1317069"/>
                   </a:moveTo>
                   <a:lnTo>
                     <a:pt x="0" y="0"/>
@@ -2916,15 +2908,15 @@
           </p:nvSpPr>
           <p:spPr>
             <a:xfrm>
-              <a:off x="6744657" y="2073503"/>
-              <a:ext cx="0" cy="3649639"/>
+              <a:off x="4595266" y="2143092"/>
+              <a:ext cx="0" cy="1317069"/>
             </a:xfrm>
             <a:custGeom>
               <a:avLst/>
               <a:pathLst>
-                <a:path w="0" h="3649639">
+                <a:path w="0" h="1317069">
                   <a:moveTo>
-                    <a:pt x="0" y="3649639"/>
+                    <a:pt x="0" y="1317069"/>
                   </a:moveTo>
                   <a:lnTo>
                     <a:pt x="0" y="0"/>
@@ -2953,546 +2945,589 @@
         </p:sp>
         <p:sp>
           <p:nvSpPr>
-            <p:cNvPr id="20" name="pg20"/>
+            <p:cNvPr id="20" name="pl20"/>
             <p:cNvSpPr/>
             <p:nvPr/>
           </p:nvSpPr>
           <p:spPr>
             <a:xfrm>
-              <a:off x="1172049" y="2073503"/>
-              <a:ext cx="7090630" cy="3450954"/>
+              <a:off x="6708482" y="2143092"/>
+              <a:ext cx="0" cy="1317069"/>
             </a:xfrm>
             <a:custGeom>
               <a:avLst/>
               <a:pathLst>
-                <a:path w="7090630" h="3450954">
+                <a:path w="0" h="1317069">
                   <a:moveTo>
-                    <a:pt x="1783998" y="0"/>
+                    <a:pt x="0" y="1317069"/>
                   </a:moveTo>
                   <a:lnTo>
-                    <a:pt x="1790563" y="20630"/>
-                  </a:lnTo>
-                  <a:lnTo>
-                    <a:pt x="1862185" y="231976"/>
-                  </a:lnTo>
-                  <a:lnTo>
-                    <a:pt x="1933808" y="430424"/>
-                  </a:lnTo>
-                  <a:lnTo>
-                    <a:pt x="2005430" y="616761"/>
-                  </a:lnTo>
-                  <a:lnTo>
-                    <a:pt x="2077053" y="791726"/>
-                  </a:lnTo>
-                  <a:lnTo>
-                    <a:pt x="2148675" y="956014"/>
-                  </a:lnTo>
-                  <a:lnTo>
-                    <a:pt x="2220298" y="1110275"/>
-                  </a:lnTo>
-                  <a:lnTo>
-                    <a:pt x="2291920" y="1255123"/>
-                  </a:lnTo>
-                  <a:lnTo>
-                    <a:pt x="2363543" y="1391131"/>
-                  </a:lnTo>
-                  <a:lnTo>
-                    <a:pt x="2435165" y="1518838"/>
-                  </a:lnTo>
-                  <a:lnTo>
-                    <a:pt x="2506788" y="1638752"/>
-                  </a:lnTo>
-                  <a:lnTo>
-                    <a:pt x="2578410" y="1751347"/>
-                  </a:lnTo>
-                  <a:lnTo>
-                    <a:pt x="2650033" y="1857072"/>
-                  </a:lnTo>
-                  <a:lnTo>
-                    <a:pt x="2721655" y="1956344"/>
-                  </a:lnTo>
-                  <a:lnTo>
-                    <a:pt x="2793278" y="2049558"/>
-                  </a:lnTo>
-                  <a:lnTo>
-                    <a:pt x="2864901" y="2137083"/>
-                  </a:lnTo>
-                  <a:lnTo>
-                    <a:pt x="2936523" y="2219266"/>
-                  </a:lnTo>
-                  <a:lnTo>
-                    <a:pt x="3008146" y="2296435"/>
-                  </a:lnTo>
-                  <a:lnTo>
-                    <a:pt x="3079768" y="2368894"/>
-                  </a:lnTo>
-                  <a:lnTo>
-                    <a:pt x="3151391" y="2436930"/>
-                  </a:lnTo>
-                  <a:lnTo>
-                    <a:pt x="3223013" y="2500815"/>
-                  </a:lnTo>
-                  <a:lnTo>
-                    <a:pt x="3294636" y="2560801"/>
-                  </a:lnTo>
-                  <a:lnTo>
-                    <a:pt x="3366258" y="2617126"/>
-                  </a:lnTo>
-                  <a:lnTo>
-                    <a:pt x="3437881" y="2660622"/>
-                  </a:lnTo>
-                  <a:lnTo>
-                    <a:pt x="3509503" y="2681130"/>
-                  </a:lnTo>
-                  <a:lnTo>
-                    <a:pt x="3581126" y="2701128"/>
-                  </a:lnTo>
-                  <a:lnTo>
-                    <a:pt x="3652748" y="2720626"/>
-                  </a:lnTo>
-                  <a:lnTo>
-                    <a:pt x="3724371" y="2739640"/>
-                  </a:lnTo>
-                  <a:lnTo>
-                    <a:pt x="3795993" y="2758179"/>
-                  </a:lnTo>
-                  <a:lnTo>
-                    <a:pt x="3867616" y="2776257"/>
-                  </a:lnTo>
-                  <a:lnTo>
-                    <a:pt x="3939238" y="2793884"/>
-                  </a:lnTo>
-                  <a:lnTo>
-                    <a:pt x="4010861" y="2811072"/>
-                  </a:lnTo>
-                  <a:lnTo>
-                    <a:pt x="4082483" y="2827831"/>
-                  </a:lnTo>
-                  <a:lnTo>
-                    <a:pt x="4154106" y="2844173"/>
-                  </a:lnTo>
-                  <a:lnTo>
-                    <a:pt x="4225729" y="2860108"/>
-                  </a:lnTo>
-                  <a:lnTo>
-                    <a:pt x="4297351" y="2875646"/>
-                  </a:lnTo>
-                  <a:lnTo>
-                    <a:pt x="4368974" y="2890797"/>
-                  </a:lnTo>
-                  <a:lnTo>
-                    <a:pt x="4440596" y="2905570"/>
-                  </a:lnTo>
-                  <a:lnTo>
-                    <a:pt x="4512219" y="2919976"/>
-                  </a:lnTo>
-                  <a:lnTo>
-                    <a:pt x="4583841" y="2934022"/>
-                  </a:lnTo>
-                  <a:lnTo>
-                    <a:pt x="4655464" y="2947718"/>
-                  </a:lnTo>
-                  <a:lnTo>
-                    <a:pt x="4727086" y="2961073"/>
-                  </a:lnTo>
-                  <a:lnTo>
-                    <a:pt x="4798709" y="2974096"/>
-                  </a:lnTo>
-                  <a:lnTo>
-                    <a:pt x="4870331" y="2986794"/>
-                  </a:lnTo>
-                  <a:lnTo>
-                    <a:pt x="4941954" y="2999175"/>
-                  </a:lnTo>
-                  <a:lnTo>
-                    <a:pt x="5013576" y="3011248"/>
-                  </a:lnTo>
-                  <a:lnTo>
-                    <a:pt x="5085199" y="3023021"/>
-                  </a:lnTo>
-                  <a:lnTo>
-                    <a:pt x="5156821" y="3034500"/>
-                  </a:lnTo>
-                  <a:lnTo>
-                    <a:pt x="5228444" y="3045693"/>
-                  </a:lnTo>
-                  <a:lnTo>
-                    <a:pt x="5300066" y="3056607"/>
-                  </a:lnTo>
-                  <a:lnTo>
-                    <a:pt x="5371689" y="3067249"/>
-                  </a:lnTo>
-                  <a:lnTo>
-                    <a:pt x="5443311" y="3077626"/>
-                  </a:lnTo>
-                  <a:lnTo>
-                    <a:pt x="5514934" y="3087744"/>
-                  </a:lnTo>
-                  <a:lnTo>
-                    <a:pt x="5586557" y="3097611"/>
-                  </a:lnTo>
-                  <a:lnTo>
-                    <a:pt x="5658179" y="3107231"/>
-                  </a:lnTo>
-                  <a:lnTo>
-                    <a:pt x="5729802" y="3116612"/>
-                  </a:lnTo>
-                  <a:lnTo>
-                    <a:pt x="5801424" y="3125759"/>
-                  </a:lnTo>
-                  <a:lnTo>
-                    <a:pt x="5873047" y="3134679"/>
-                  </a:lnTo>
-                  <a:lnTo>
-                    <a:pt x="5944669" y="3143376"/>
-                  </a:lnTo>
-                  <a:lnTo>
-                    <a:pt x="6016292" y="3151856"/>
-                  </a:lnTo>
-                  <a:lnTo>
-                    <a:pt x="6087914" y="3160125"/>
-                  </a:lnTo>
-                  <a:lnTo>
-                    <a:pt x="6159537" y="3168188"/>
-                  </a:lnTo>
-                  <a:lnTo>
-                    <a:pt x="6231159" y="3176050"/>
-                  </a:lnTo>
-                  <a:lnTo>
-                    <a:pt x="6302782" y="3183716"/>
-                  </a:lnTo>
-                  <a:lnTo>
-                    <a:pt x="6374404" y="3191192"/>
-                  </a:lnTo>
-                  <a:lnTo>
-                    <a:pt x="6446027" y="3198481"/>
-                  </a:lnTo>
-                  <a:lnTo>
-                    <a:pt x="6517649" y="3205588"/>
-                  </a:lnTo>
-                  <a:lnTo>
-                    <a:pt x="6589272" y="3212518"/>
-                  </a:lnTo>
-                  <a:lnTo>
-                    <a:pt x="6660894" y="3219276"/>
-                  </a:lnTo>
-                  <a:lnTo>
-                    <a:pt x="6732517" y="3225865"/>
-                  </a:lnTo>
-                  <a:lnTo>
-                    <a:pt x="6804139" y="3232290"/>
-                  </a:lnTo>
-                  <a:lnTo>
-                    <a:pt x="6875762" y="3238555"/>
-                  </a:lnTo>
-                  <a:lnTo>
-                    <a:pt x="6947385" y="3244664"/>
-                  </a:lnTo>
-                  <a:lnTo>
-                    <a:pt x="7019007" y="3250621"/>
-                  </a:lnTo>
-                  <a:lnTo>
-                    <a:pt x="7090630" y="3256429"/>
-                  </a:lnTo>
-                  <a:lnTo>
-                    <a:pt x="7090630" y="3450954"/>
-                  </a:lnTo>
-                  <a:lnTo>
-                    <a:pt x="7019007" y="3448823"/>
-                  </a:lnTo>
-                  <a:lnTo>
-                    <a:pt x="6947385" y="3446553"/>
-                  </a:lnTo>
-                  <a:lnTo>
-                    <a:pt x="6875762" y="3444135"/>
-                  </a:lnTo>
-                  <a:lnTo>
-                    <a:pt x="6804139" y="3441561"/>
-                  </a:lnTo>
-                  <a:lnTo>
-                    <a:pt x="6732517" y="3438819"/>
-                  </a:lnTo>
-                  <a:lnTo>
-                    <a:pt x="6660894" y="3435899"/>
-                  </a:lnTo>
-                  <a:lnTo>
-                    <a:pt x="6589272" y="3432789"/>
-                  </a:lnTo>
-                  <a:lnTo>
-                    <a:pt x="6517649" y="3429477"/>
-                  </a:lnTo>
-                  <a:lnTo>
-                    <a:pt x="6446027" y="3425950"/>
-                  </a:lnTo>
-                  <a:lnTo>
-                    <a:pt x="6374404" y="3422194"/>
-                  </a:lnTo>
-                  <a:lnTo>
-                    <a:pt x="6302782" y="3418193"/>
-                  </a:lnTo>
-                  <a:lnTo>
-                    <a:pt x="6231159" y="3413933"/>
-                  </a:lnTo>
-                  <a:lnTo>
-                    <a:pt x="6159537" y="3409395"/>
-                  </a:lnTo>
-                  <a:lnTo>
-                    <a:pt x="6087914" y="3404563"/>
-                  </a:lnTo>
-                  <a:lnTo>
-                    <a:pt x="6016292" y="3399416"/>
-                  </a:lnTo>
-                  <a:lnTo>
-                    <a:pt x="5944669" y="3393935"/>
-                  </a:lnTo>
-                  <a:lnTo>
-                    <a:pt x="5873047" y="3388098"/>
-                  </a:lnTo>
-                  <a:lnTo>
-                    <a:pt x="5801424" y="3381882"/>
-                  </a:lnTo>
-                  <a:lnTo>
-                    <a:pt x="5729802" y="3375261"/>
-                  </a:lnTo>
-                  <a:lnTo>
-                    <a:pt x="5658179" y="3368210"/>
-                  </a:lnTo>
-                  <a:lnTo>
-                    <a:pt x="5586557" y="3360701"/>
-                  </a:lnTo>
-                  <a:lnTo>
-                    <a:pt x="5514934" y="3352704"/>
-                  </a:lnTo>
-                  <a:lnTo>
-                    <a:pt x="5443311" y="3344187"/>
-                  </a:lnTo>
-                  <a:lnTo>
-                    <a:pt x="5371689" y="3335116"/>
-                  </a:lnTo>
-                  <a:lnTo>
-                    <a:pt x="5300066" y="3325456"/>
-                  </a:lnTo>
-                  <a:lnTo>
-                    <a:pt x="5228444" y="3315168"/>
-                  </a:lnTo>
-                  <a:lnTo>
-                    <a:pt x="5156821" y="3304212"/>
-                  </a:lnTo>
-                  <a:lnTo>
-                    <a:pt x="5085199" y="3292543"/>
-                  </a:lnTo>
-                  <a:lnTo>
-                    <a:pt x="5013576" y="3280116"/>
-                  </a:lnTo>
-                  <a:lnTo>
-                    <a:pt x="4941954" y="3266881"/>
-                  </a:lnTo>
-                  <a:lnTo>
-                    <a:pt x="4870331" y="3252786"/>
-                  </a:lnTo>
-                  <a:lnTo>
-                    <a:pt x="4798709" y="3237775"/>
-                  </a:lnTo>
-                  <a:lnTo>
-                    <a:pt x="4727086" y="3221788"/>
-                  </a:lnTo>
-                  <a:lnTo>
-                    <a:pt x="4655464" y="3204762"/>
-                  </a:lnTo>
-                  <a:lnTo>
-                    <a:pt x="4583841" y="3186630"/>
-                  </a:lnTo>
-                  <a:lnTo>
-                    <a:pt x="4512219" y="3167319"/>
-                  </a:lnTo>
-                  <a:lnTo>
-                    <a:pt x="4440596" y="3146753"/>
-                  </a:lnTo>
-                  <a:lnTo>
-                    <a:pt x="4368974" y="3124851"/>
-                  </a:lnTo>
-                  <a:lnTo>
-                    <a:pt x="4297351" y="3101525"/>
-                  </a:lnTo>
-                  <a:lnTo>
-                    <a:pt x="4225729" y="3076683"/>
-                  </a:lnTo>
-                  <a:lnTo>
-                    <a:pt x="4154106" y="3050226"/>
-                  </a:lnTo>
-                  <a:lnTo>
-                    <a:pt x="4082483" y="3022050"/>
-                  </a:lnTo>
-                  <a:lnTo>
-                    <a:pt x="4010861" y="2992042"/>
-                  </a:lnTo>
-                  <a:lnTo>
-                    <a:pt x="3939238" y="2960084"/>
-                  </a:lnTo>
-                  <a:lnTo>
-                    <a:pt x="3867616" y="2926049"/>
-                  </a:lnTo>
-                  <a:lnTo>
-                    <a:pt x="3795993" y="2889802"/>
-                  </a:lnTo>
-                  <a:lnTo>
-                    <a:pt x="3724371" y="2851199"/>
-                  </a:lnTo>
-                  <a:lnTo>
-                    <a:pt x="3652748" y="2810088"/>
-                  </a:lnTo>
-                  <a:lnTo>
-                    <a:pt x="3581126" y="2766304"/>
-                  </a:lnTo>
-                  <a:lnTo>
-                    <a:pt x="3509503" y="2719674"/>
-                  </a:lnTo>
-                  <a:lnTo>
-                    <a:pt x="3437881" y="2670014"/>
-                  </a:lnTo>
-                  <a:lnTo>
-                    <a:pt x="3366258" y="2639590"/>
-                  </a:lnTo>
-                  <a:lnTo>
-                    <a:pt x="3294636" y="2618021"/>
-                  </a:lnTo>
-                  <a:lnTo>
-                    <a:pt x="3223013" y="2595900"/>
-                  </a:lnTo>
-                  <a:lnTo>
-                    <a:pt x="3151391" y="2573214"/>
-                  </a:lnTo>
-                  <a:lnTo>
-                    <a:pt x="3079768" y="2549948"/>
-                  </a:lnTo>
-                  <a:lnTo>
-                    <a:pt x="3008146" y="2526088"/>
-                  </a:lnTo>
-                  <a:lnTo>
-                    <a:pt x="2936523" y="2501619"/>
-                  </a:lnTo>
-                  <a:lnTo>
-                    <a:pt x="2864901" y="2476524"/>
-                  </a:lnTo>
-                  <a:lnTo>
-                    <a:pt x="2793278" y="2450788"/>
-                  </a:lnTo>
-                  <a:lnTo>
-                    <a:pt x="2721655" y="2424394"/>
-                  </a:lnTo>
-                  <a:lnTo>
-                    <a:pt x="2650033" y="2397326"/>
-                  </a:lnTo>
-                  <a:lnTo>
-                    <a:pt x="2578410" y="2369566"/>
-                  </a:lnTo>
-                  <a:lnTo>
-                    <a:pt x="2506788" y="2341097"/>
-                  </a:lnTo>
-                  <a:lnTo>
-                    <a:pt x="2435165" y="2311900"/>
-                  </a:lnTo>
-                  <a:lnTo>
-                    <a:pt x="2363543" y="2281958"/>
-                  </a:lnTo>
-                  <a:lnTo>
-                    <a:pt x="2291920" y="2251250"/>
-                  </a:lnTo>
-                  <a:lnTo>
-                    <a:pt x="2220298" y="2219758"/>
-                  </a:lnTo>
-                  <a:lnTo>
-                    <a:pt x="2148675" y="2187461"/>
-                  </a:lnTo>
-                  <a:lnTo>
-                    <a:pt x="2077053" y="2154339"/>
-                  </a:lnTo>
-                  <a:lnTo>
-                    <a:pt x="2005430" y="2120370"/>
-                  </a:lnTo>
-                  <a:lnTo>
-                    <a:pt x="1933808" y="2085534"/>
-                  </a:lnTo>
-                  <a:lnTo>
-                    <a:pt x="1862185" y="2049807"/>
-                  </a:lnTo>
-                  <a:lnTo>
-                    <a:pt x="1790563" y="2013168"/>
-                  </a:lnTo>
-                  <a:lnTo>
-                    <a:pt x="1718940" y="1975592"/>
-                  </a:lnTo>
-                  <a:lnTo>
-                    <a:pt x="1647318" y="1937057"/>
-                  </a:lnTo>
-                  <a:lnTo>
-                    <a:pt x="1575695" y="1897536"/>
-                  </a:lnTo>
-                  <a:lnTo>
-                    <a:pt x="1504073" y="1857006"/>
-                  </a:lnTo>
-                  <a:lnTo>
-                    <a:pt x="1432450" y="1815440"/>
-                  </a:lnTo>
-                  <a:lnTo>
-                    <a:pt x="1360827" y="1772812"/>
-                  </a:lnTo>
-                  <a:lnTo>
-                    <a:pt x="1289205" y="1729095"/>
-                  </a:lnTo>
-                  <a:lnTo>
-                    <a:pt x="1217582" y="1684261"/>
-                  </a:lnTo>
-                  <a:lnTo>
-                    <a:pt x="1145960" y="1638281"/>
-                  </a:lnTo>
-                  <a:lnTo>
-                    <a:pt x="1074337" y="1591127"/>
-                  </a:lnTo>
-                  <a:lnTo>
-                    <a:pt x="1002715" y="1542767"/>
-                  </a:lnTo>
-                  <a:lnTo>
-                    <a:pt x="931092" y="1493172"/>
-                  </a:lnTo>
-                  <a:lnTo>
-                    <a:pt x="859470" y="1442310"/>
-                  </a:lnTo>
-                  <a:lnTo>
-                    <a:pt x="787847" y="1390148"/>
-                  </a:lnTo>
-                  <a:lnTo>
-                    <a:pt x="716225" y="1336653"/>
-                  </a:lnTo>
-                  <a:lnTo>
-                    <a:pt x="644602" y="1281791"/>
-                  </a:lnTo>
-                  <a:lnTo>
-                    <a:pt x="572980" y="1225528"/>
-                  </a:lnTo>
-                  <a:lnTo>
-                    <a:pt x="501357" y="1167827"/>
-                  </a:lnTo>
-                  <a:lnTo>
-                    <a:pt x="429735" y="1108651"/>
-                  </a:lnTo>
-                  <a:lnTo>
-                    <a:pt x="358112" y="1047964"/>
-                  </a:lnTo>
-                  <a:lnTo>
-                    <a:pt x="286490" y="985726"/>
-                  </a:lnTo>
-                  <a:lnTo>
-                    <a:pt x="214867" y="921897"/>
-                  </a:lnTo>
-                  <a:lnTo>
-                    <a:pt x="143245" y="856438"/>
-                  </a:lnTo>
-                  <a:lnTo>
-                    <a:pt x="71622" y="789306"/>
-                  </a:lnTo>
-                  <a:lnTo>
-                    <a:pt x="0" y="720459"/>
+                    <a:pt x="0" y="0"/>
+                  </a:lnTo>
+                  <a:lnTo>
+                    <a:pt x="0" y="0"/>
+                  </a:lnTo>
+                </a:path>
+              </a:pathLst>
+            </a:custGeom>
+            <a:ln w="13550" cap="flat">
+              <a:solidFill>
+                <a:srgbClr val="EBEBEB">
+                  <a:alpha val="100000"/>
+                </a:srgbClr>
+              </a:solidFill>
+              <a:prstDash val="solid"/>
+              <a:round/>
+            </a:ln>
+          </p:spPr>
+          <p:txBody>
+            <a:bodyPr/>
+            <a:lstStyle/>
+            <a:p/>
+          </p:txBody>
+        </p:sp>
+        <p:sp>
+          <p:nvSpPr>
+            <p:cNvPr id="21" name="pg21"/>
+            <p:cNvSpPr/>
+            <p:nvPr/>
+          </p:nvSpPr>
+          <p:spPr>
+            <a:xfrm>
+              <a:off x="1235312" y="2143092"/>
+              <a:ext cx="6964104" cy="1245368"/>
+            </a:xfrm>
+            <a:custGeom>
+              <a:avLst/>
+              <a:pathLst>
+                <a:path w="6964104" h="1245368">
+                  <a:moveTo>
+                    <a:pt x="1752164" y="0"/>
+                  </a:moveTo>
+                  <a:lnTo>
+                    <a:pt x="1758612" y="7445"/>
+                  </a:lnTo>
+                  <a:lnTo>
+                    <a:pt x="1828956" y="83714"/>
+                  </a:lnTo>
+                  <a:lnTo>
+                    <a:pt x="1899301" y="155329"/>
+                  </a:lnTo>
+                  <a:lnTo>
+                    <a:pt x="1969645" y="222574"/>
+                  </a:lnTo>
+                  <a:lnTo>
+                    <a:pt x="2039990" y="285715"/>
+                  </a:lnTo>
+                  <a:lnTo>
+                    <a:pt x="2110334" y="345003"/>
+                  </a:lnTo>
+                  <a:lnTo>
+                    <a:pt x="2180679" y="400672"/>
+                  </a:lnTo>
+                  <a:lnTo>
+                    <a:pt x="2251023" y="452944"/>
+                  </a:lnTo>
+                  <a:lnTo>
+                    <a:pt x="2321368" y="502026"/>
+                  </a:lnTo>
+                  <a:lnTo>
+                    <a:pt x="2391712" y="548113"/>
+                  </a:lnTo>
+                  <a:lnTo>
+                    <a:pt x="2462057" y="591387"/>
+                  </a:lnTo>
+                  <a:lnTo>
+                    <a:pt x="2532401" y="632020"/>
+                  </a:lnTo>
+                  <a:lnTo>
+                    <a:pt x="2602746" y="670173"/>
+                  </a:lnTo>
+                  <a:lnTo>
+                    <a:pt x="2673090" y="705998"/>
+                  </a:lnTo>
+                  <a:lnTo>
+                    <a:pt x="2743435" y="739637"/>
+                  </a:lnTo>
+                  <a:lnTo>
+                    <a:pt x="2813779" y="771223"/>
+                  </a:lnTo>
+                  <a:lnTo>
+                    <a:pt x="2884124" y="800881"/>
+                  </a:lnTo>
+                  <a:lnTo>
+                    <a:pt x="2954468" y="828729"/>
+                  </a:lnTo>
+                  <a:lnTo>
+                    <a:pt x="3024813" y="854878"/>
+                  </a:lnTo>
+                  <a:lnTo>
+                    <a:pt x="3095157" y="879431"/>
+                  </a:lnTo>
+                  <a:lnTo>
+                    <a:pt x="3165502" y="902485"/>
+                  </a:lnTo>
+                  <a:lnTo>
+                    <a:pt x="3235846" y="924133"/>
+                  </a:lnTo>
+                  <a:lnTo>
+                    <a:pt x="3306191" y="944459"/>
+                  </a:lnTo>
+                  <a:lnTo>
+                    <a:pt x="3376535" y="960156"/>
+                  </a:lnTo>
+                  <a:lnTo>
+                    <a:pt x="3446880" y="967557"/>
+                  </a:lnTo>
+                  <a:lnTo>
+                    <a:pt x="3517224" y="974773"/>
+                  </a:lnTo>
+                  <a:lnTo>
+                    <a:pt x="3587569" y="981810"/>
+                  </a:lnTo>
+                  <a:lnTo>
+                    <a:pt x="3657913" y="988671"/>
+                  </a:lnTo>
+                  <a:lnTo>
+                    <a:pt x="3728257" y="995362"/>
+                  </a:lnTo>
+                  <a:lnTo>
+                    <a:pt x="3798602" y="1001885"/>
+                  </a:lnTo>
+                  <a:lnTo>
+                    <a:pt x="3868946" y="1008247"/>
+                  </a:lnTo>
+                  <a:lnTo>
+                    <a:pt x="3939291" y="1014449"/>
+                  </a:lnTo>
+                  <a:lnTo>
+                    <a:pt x="4009635" y="1020497"/>
+                  </a:lnTo>
+                  <a:lnTo>
+                    <a:pt x="4079980" y="1026395"/>
+                  </a:lnTo>
+                  <a:lnTo>
+                    <a:pt x="4150324" y="1032145"/>
+                  </a:lnTo>
+                  <a:lnTo>
+                    <a:pt x="4220669" y="1037753"/>
+                  </a:lnTo>
+                  <a:lnTo>
+                    <a:pt x="4291013" y="1043220"/>
+                  </a:lnTo>
+                  <a:lnTo>
+                    <a:pt x="4361358" y="1048552"/>
+                  </a:lnTo>
+                  <a:lnTo>
+                    <a:pt x="4431702" y="1053750"/>
+                  </a:lnTo>
+                  <a:lnTo>
+                    <a:pt x="4502047" y="1058819"/>
+                  </a:lnTo>
+                  <a:lnTo>
+                    <a:pt x="4572391" y="1063762"/>
+                  </a:lnTo>
+                  <a:lnTo>
+                    <a:pt x="4642736" y="1068581"/>
+                  </a:lnTo>
+                  <a:lnTo>
+                    <a:pt x="4713080" y="1073281"/>
+                  </a:lnTo>
+                  <a:lnTo>
+                    <a:pt x="4783425" y="1077863"/>
+                  </a:lnTo>
+                  <a:lnTo>
+                    <a:pt x="4853769" y="1082331"/>
+                  </a:lnTo>
+                  <a:lnTo>
+                    <a:pt x="4924114" y="1086688"/>
+                  </a:lnTo>
+                  <a:lnTo>
+                    <a:pt x="4994458" y="1090937"/>
+                  </a:lnTo>
+                  <a:lnTo>
+                    <a:pt x="5064803" y="1095079"/>
+                  </a:lnTo>
+                  <a:lnTo>
+                    <a:pt x="5135147" y="1099118"/>
+                  </a:lnTo>
+                  <a:lnTo>
+                    <a:pt x="5205492" y="1103057"/>
+                  </a:lnTo>
+                  <a:lnTo>
+                    <a:pt x="5275836" y="1106898"/>
+                  </a:lnTo>
+                  <a:lnTo>
+                    <a:pt x="5346181" y="1110642"/>
+                  </a:lnTo>
+                  <a:lnTo>
+                    <a:pt x="5416525" y="1114294"/>
+                  </a:lnTo>
+                  <a:lnTo>
+                    <a:pt x="5486870" y="1117855"/>
+                  </a:lnTo>
+                  <a:lnTo>
+                    <a:pt x="5557214" y="1121326"/>
+                  </a:lnTo>
+                  <a:lnTo>
+                    <a:pt x="5627559" y="1124712"/>
+                  </a:lnTo>
+                  <a:lnTo>
+                    <a:pt x="5697903" y="1128013"/>
+                  </a:lnTo>
+                  <a:lnTo>
+                    <a:pt x="5768248" y="1131231"/>
+                  </a:lnTo>
+                  <a:lnTo>
+                    <a:pt x="5838592" y="1134370"/>
+                  </a:lnTo>
+                  <a:lnTo>
+                    <a:pt x="5908937" y="1137430"/>
+                  </a:lnTo>
+                  <a:lnTo>
+                    <a:pt x="5979281" y="1140414"/>
+                  </a:lnTo>
+                  <a:lnTo>
+                    <a:pt x="6049626" y="1143324"/>
+                  </a:lnTo>
+                  <a:lnTo>
+                    <a:pt x="6119970" y="1146161"/>
+                  </a:lnTo>
+                  <a:lnTo>
+                    <a:pt x="6190315" y="1148928"/>
+                  </a:lnTo>
+                  <a:lnTo>
+                    <a:pt x="6260659" y="1151626"/>
+                  </a:lnTo>
+                  <a:lnTo>
+                    <a:pt x="6331004" y="1154256"/>
+                  </a:lnTo>
+                  <a:lnTo>
+                    <a:pt x="6401348" y="1156821"/>
+                  </a:lnTo>
+                  <a:lnTo>
+                    <a:pt x="6471693" y="1159322"/>
+                  </a:lnTo>
+                  <a:lnTo>
+                    <a:pt x="6542037" y="1161761"/>
+                  </a:lnTo>
+                  <a:lnTo>
+                    <a:pt x="6612382" y="1164139"/>
+                  </a:lnTo>
+                  <a:lnTo>
+                    <a:pt x="6682726" y="1166457"/>
+                  </a:lnTo>
+                  <a:lnTo>
+                    <a:pt x="6753071" y="1168718"/>
+                  </a:lnTo>
+                  <a:lnTo>
+                    <a:pt x="6823415" y="1170923"/>
+                  </a:lnTo>
+                  <a:lnTo>
+                    <a:pt x="6893760" y="1173072"/>
+                  </a:lnTo>
+                  <a:lnTo>
+                    <a:pt x="6964104" y="1175168"/>
+                  </a:lnTo>
+                  <a:lnTo>
+                    <a:pt x="6964104" y="1245368"/>
+                  </a:lnTo>
+                  <a:lnTo>
+                    <a:pt x="6893760" y="1244599"/>
+                  </a:lnTo>
+                  <a:lnTo>
+                    <a:pt x="6823415" y="1243779"/>
+                  </a:lnTo>
+                  <a:lnTo>
+                    <a:pt x="6753071" y="1242907"/>
+                  </a:lnTo>
+                  <a:lnTo>
+                    <a:pt x="6682726" y="1241978"/>
+                  </a:lnTo>
+                  <a:lnTo>
+                    <a:pt x="6612382" y="1240989"/>
+                  </a:lnTo>
+                  <a:lnTo>
+                    <a:pt x="6542037" y="1239935"/>
+                  </a:lnTo>
+                  <a:lnTo>
+                    <a:pt x="6471693" y="1238813"/>
+                  </a:lnTo>
+                  <a:lnTo>
+                    <a:pt x="6401348" y="1237617"/>
+                  </a:lnTo>
+                  <a:lnTo>
+                    <a:pt x="6331004" y="1236345"/>
+                  </a:lnTo>
+                  <a:lnTo>
+                    <a:pt x="6260659" y="1234989"/>
+                  </a:lnTo>
+                  <a:lnTo>
+                    <a:pt x="6190315" y="1233545"/>
+                  </a:lnTo>
+                  <a:lnTo>
+                    <a:pt x="6119970" y="1232008"/>
+                  </a:lnTo>
+                  <a:lnTo>
+                    <a:pt x="6049626" y="1230370"/>
+                  </a:lnTo>
+                  <a:lnTo>
+                    <a:pt x="5979281" y="1228626"/>
+                  </a:lnTo>
+                  <a:lnTo>
+                    <a:pt x="5908937" y="1226769"/>
+                  </a:lnTo>
+                  <a:lnTo>
+                    <a:pt x="5838592" y="1224791"/>
+                  </a:lnTo>
+                  <a:lnTo>
+                    <a:pt x="5768248" y="1222685"/>
+                  </a:lnTo>
+                  <a:lnTo>
+                    <a:pt x="5697903" y="1220441"/>
+                  </a:lnTo>
+                  <a:lnTo>
+                    <a:pt x="5627559" y="1218052"/>
+                  </a:lnTo>
+                  <a:lnTo>
+                    <a:pt x="5557214" y="1215507"/>
+                  </a:lnTo>
+                  <a:lnTo>
+                    <a:pt x="5486870" y="1212798"/>
+                  </a:lnTo>
+                  <a:lnTo>
+                    <a:pt x="5416525" y="1209912"/>
+                  </a:lnTo>
+                  <a:lnTo>
+                    <a:pt x="5346181" y="1206838"/>
+                  </a:lnTo>
+                  <a:lnTo>
+                    <a:pt x="5275836" y="1203565"/>
+                  </a:lnTo>
+                  <a:lnTo>
+                    <a:pt x="5205492" y="1200079"/>
+                  </a:lnTo>
+                  <a:lnTo>
+                    <a:pt x="5135147" y="1196366"/>
+                  </a:lnTo>
+                  <a:lnTo>
+                    <a:pt x="5064803" y="1192412"/>
+                  </a:lnTo>
+                  <a:lnTo>
+                    <a:pt x="4994458" y="1188201"/>
+                  </a:lnTo>
+                  <a:lnTo>
+                    <a:pt x="4924114" y="1183716"/>
+                  </a:lnTo>
+                  <a:lnTo>
+                    <a:pt x="4853769" y="1178940"/>
+                  </a:lnTo>
+                  <a:lnTo>
+                    <a:pt x="4783425" y="1173854"/>
+                  </a:lnTo>
+                  <a:lnTo>
+                    <a:pt x="4713080" y="1168436"/>
+                  </a:lnTo>
+                  <a:lnTo>
+                    <a:pt x="4642736" y="1162667"/>
+                  </a:lnTo>
+                  <a:lnTo>
+                    <a:pt x="4572391" y="1156523"/>
+                  </a:lnTo>
+                  <a:lnTo>
+                    <a:pt x="4502047" y="1149980"/>
+                  </a:lnTo>
+                  <a:lnTo>
+                    <a:pt x="4431702" y="1143011"/>
+                  </a:lnTo>
+                  <a:lnTo>
+                    <a:pt x="4361358" y="1135589"/>
+                  </a:lnTo>
+                  <a:lnTo>
+                    <a:pt x="4291013" y="1127685"/>
+                  </a:lnTo>
+                  <a:lnTo>
+                    <a:pt x="4220669" y="1119267"/>
+                  </a:lnTo>
+                  <a:lnTo>
+                    <a:pt x="4150324" y="1110302"/>
+                  </a:lnTo>
+                  <a:lnTo>
+                    <a:pt x="4079980" y="1100754"/>
+                  </a:lnTo>
+                  <a:lnTo>
+                    <a:pt x="4009635" y="1090586"/>
+                  </a:lnTo>
+                  <a:lnTo>
+                    <a:pt x="3939291" y="1079757"/>
+                  </a:lnTo>
+                  <a:lnTo>
+                    <a:pt x="3868946" y="1068224"/>
+                  </a:lnTo>
+                  <a:lnTo>
+                    <a:pt x="3798602" y="1055942"/>
+                  </a:lnTo>
+                  <a:lnTo>
+                    <a:pt x="3728257" y="1042861"/>
+                  </a:lnTo>
+                  <a:lnTo>
+                    <a:pt x="3657913" y="1028930"/>
+                  </a:lnTo>
+                  <a:lnTo>
+                    <a:pt x="3587569" y="1014094"/>
+                  </a:lnTo>
+                  <a:lnTo>
+                    <a:pt x="3517224" y="998294"/>
+                  </a:lnTo>
+                  <a:lnTo>
+                    <a:pt x="3446880" y="981466"/>
+                  </a:lnTo>
+                  <a:lnTo>
+                    <a:pt x="3376535" y="963545"/>
+                  </a:lnTo>
+                  <a:lnTo>
+                    <a:pt x="3306191" y="952566"/>
+                  </a:lnTo>
+                  <a:lnTo>
+                    <a:pt x="3235846" y="944782"/>
+                  </a:lnTo>
+                  <a:lnTo>
+                    <a:pt x="3165502" y="936799"/>
+                  </a:lnTo>
+                  <a:lnTo>
+                    <a:pt x="3095157" y="928612"/>
+                  </a:lnTo>
+                  <a:lnTo>
+                    <a:pt x="3024813" y="920216"/>
+                  </a:lnTo>
+                  <a:lnTo>
+                    <a:pt x="2954468" y="911606"/>
+                  </a:lnTo>
+                  <a:lnTo>
+                    <a:pt x="2884124" y="902775"/>
+                  </a:lnTo>
+                  <a:lnTo>
+                    <a:pt x="2813779" y="893719"/>
+                  </a:lnTo>
+                  <a:lnTo>
+                    <a:pt x="2743435" y="884431"/>
+                  </a:lnTo>
+                  <a:lnTo>
+                    <a:pt x="2673090" y="874906"/>
+                  </a:lnTo>
+                  <a:lnTo>
+                    <a:pt x="2602746" y="865138"/>
+                  </a:lnTo>
+                  <a:lnTo>
+                    <a:pt x="2532401" y="855120"/>
+                  </a:lnTo>
+                  <a:lnTo>
+                    <a:pt x="2462057" y="844846"/>
+                  </a:lnTo>
+                  <a:lnTo>
+                    <a:pt x="2391712" y="834310"/>
+                  </a:lnTo>
+                  <a:lnTo>
+                    <a:pt x="2321368" y="823505"/>
+                  </a:lnTo>
+                  <a:lnTo>
+                    <a:pt x="2251023" y="812423"/>
+                  </a:lnTo>
+                  <a:lnTo>
+                    <a:pt x="2180679" y="801058"/>
+                  </a:lnTo>
+                  <a:lnTo>
+                    <a:pt x="2110334" y="789403"/>
+                  </a:lnTo>
+                  <a:lnTo>
+                    <a:pt x="2039990" y="777450"/>
+                  </a:lnTo>
+                  <a:lnTo>
+                    <a:pt x="1969645" y="765191"/>
+                  </a:lnTo>
+                  <a:lnTo>
+                    <a:pt x="1899301" y="752620"/>
+                  </a:lnTo>
+                  <a:lnTo>
+                    <a:pt x="1828956" y="739727"/>
+                  </a:lnTo>
+                  <a:lnTo>
+                    <a:pt x="1758612" y="726505"/>
+                  </a:lnTo>
+                  <a:lnTo>
+                    <a:pt x="1688267" y="712944"/>
+                  </a:lnTo>
+                  <a:lnTo>
+                    <a:pt x="1617923" y="699038"/>
+                  </a:lnTo>
+                  <a:lnTo>
+                    <a:pt x="1547578" y="684776"/>
+                  </a:lnTo>
+                  <a:lnTo>
+                    <a:pt x="1477234" y="670149"/>
+                  </a:lnTo>
+                  <a:lnTo>
+                    <a:pt x="1406889" y="655149"/>
+                  </a:lnTo>
+                  <a:lnTo>
+                    <a:pt x="1336545" y="639766"/>
+                  </a:lnTo>
+                  <a:lnTo>
+                    <a:pt x="1266200" y="623989"/>
+                  </a:lnTo>
+                  <a:lnTo>
+                    <a:pt x="1195856" y="607810"/>
+                  </a:lnTo>
+                  <a:lnTo>
+                    <a:pt x="1125511" y="591217"/>
+                  </a:lnTo>
+                  <a:lnTo>
+                    <a:pt x="1055167" y="574200"/>
+                  </a:lnTo>
+                  <a:lnTo>
+                    <a:pt x="984822" y="556748"/>
+                  </a:lnTo>
+                  <a:lnTo>
+                    <a:pt x="914478" y="538850"/>
+                  </a:lnTo>
+                  <a:lnTo>
+                    <a:pt x="844133" y="520495"/>
+                  </a:lnTo>
+                  <a:lnTo>
+                    <a:pt x="773789" y="501671"/>
+                  </a:lnTo>
+                  <a:lnTo>
+                    <a:pt x="703444" y="482366"/>
+                  </a:lnTo>
+                  <a:lnTo>
+                    <a:pt x="633100" y="462568"/>
+                  </a:lnTo>
+                  <a:lnTo>
+                    <a:pt x="562755" y="442264"/>
+                  </a:lnTo>
+                  <a:lnTo>
+                    <a:pt x="492411" y="421441"/>
+                  </a:lnTo>
+                  <a:lnTo>
+                    <a:pt x="422066" y="400086"/>
+                  </a:lnTo>
+                  <a:lnTo>
+                    <a:pt x="351722" y="378185"/>
+                  </a:lnTo>
+                  <a:lnTo>
+                    <a:pt x="281377" y="355725"/>
+                  </a:lnTo>
+                  <a:lnTo>
+                    <a:pt x="211033" y="332691"/>
+                  </a:lnTo>
+                  <a:lnTo>
+                    <a:pt x="140688" y="309068"/>
+                  </a:lnTo>
+                  <a:lnTo>
+                    <a:pt x="70344" y="284842"/>
+                  </a:lnTo>
+                  <a:lnTo>
+                    <a:pt x="0" y="259996"/>
                   </a:lnTo>
                   <a:close/>
                 </a:path>
@@ -3512,571 +3547,246 @@
         </p:sp>
         <p:sp>
           <p:nvSpPr>
-            <p:cNvPr id="21" name="pl21"/>
-            <p:cNvSpPr/>
-            <p:nvPr/>
-          </p:nvSpPr>
-          <p:spPr>
-            <a:xfrm>
-              <a:off x="2956047" y="2073503"/>
-              <a:ext cx="5306631" cy="3256429"/>
-            </a:xfrm>
-            <a:custGeom>
-              <a:avLst/>
-              <a:pathLst>
-                <a:path w="5306631" h="3256429">
-                  <a:moveTo>
-                    <a:pt x="0" y="0"/>
-                  </a:moveTo>
-                  <a:lnTo>
-                    <a:pt x="6564" y="20630"/>
-                  </a:lnTo>
-                  <a:lnTo>
-                    <a:pt x="78187" y="231976"/>
-                  </a:lnTo>
-                  <a:lnTo>
-                    <a:pt x="149809" y="430424"/>
-                  </a:lnTo>
-                  <a:lnTo>
-                    <a:pt x="221432" y="616761"/>
-                  </a:lnTo>
-                  <a:lnTo>
-                    <a:pt x="293054" y="791726"/>
-                  </a:lnTo>
-                  <a:lnTo>
-                    <a:pt x="364677" y="956014"/>
-                  </a:lnTo>
-                  <a:lnTo>
-                    <a:pt x="436299" y="1110275"/>
-                  </a:lnTo>
-                  <a:lnTo>
-                    <a:pt x="507922" y="1255123"/>
-                  </a:lnTo>
-                  <a:lnTo>
-                    <a:pt x="579544" y="1391131"/>
-                  </a:lnTo>
-                  <a:lnTo>
-                    <a:pt x="651167" y="1518838"/>
-                  </a:lnTo>
-                  <a:lnTo>
-                    <a:pt x="722789" y="1638752"/>
-                  </a:lnTo>
-                  <a:lnTo>
-                    <a:pt x="794412" y="1751347"/>
-                  </a:lnTo>
-                  <a:lnTo>
-                    <a:pt x="866035" y="1857072"/>
-                  </a:lnTo>
-                  <a:lnTo>
-                    <a:pt x="937657" y="1956344"/>
-                  </a:lnTo>
-                  <a:lnTo>
-                    <a:pt x="1009280" y="2049558"/>
-                  </a:lnTo>
-                  <a:lnTo>
-                    <a:pt x="1080902" y="2137083"/>
-                  </a:lnTo>
-                  <a:lnTo>
-                    <a:pt x="1152525" y="2219266"/>
-                  </a:lnTo>
-                  <a:lnTo>
-                    <a:pt x="1224147" y="2296435"/>
-                  </a:lnTo>
-                  <a:lnTo>
-                    <a:pt x="1295770" y="2368894"/>
-                  </a:lnTo>
-                  <a:lnTo>
-                    <a:pt x="1367392" y="2436930"/>
-                  </a:lnTo>
-                  <a:lnTo>
-                    <a:pt x="1439015" y="2500815"/>
-                  </a:lnTo>
-                  <a:lnTo>
-                    <a:pt x="1510637" y="2560801"/>
-                  </a:lnTo>
-                  <a:lnTo>
-                    <a:pt x="1582260" y="2617126"/>
-                  </a:lnTo>
-                  <a:lnTo>
-                    <a:pt x="1653882" y="2660622"/>
-                  </a:lnTo>
-                  <a:lnTo>
-                    <a:pt x="1725505" y="2681130"/>
-                  </a:lnTo>
-                  <a:lnTo>
-                    <a:pt x="1797127" y="2701128"/>
-                  </a:lnTo>
-                  <a:lnTo>
-                    <a:pt x="1868750" y="2720626"/>
-                  </a:lnTo>
-                  <a:lnTo>
-                    <a:pt x="1940372" y="2739640"/>
-                  </a:lnTo>
-                  <a:lnTo>
-                    <a:pt x="2011995" y="2758179"/>
-                  </a:lnTo>
-                  <a:lnTo>
-                    <a:pt x="2083617" y="2776257"/>
-                  </a:lnTo>
-                  <a:lnTo>
-                    <a:pt x="2155240" y="2793884"/>
-                  </a:lnTo>
-                  <a:lnTo>
-                    <a:pt x="2226863" y="2811072"/>
-                  </a:lnTo>
-                  <a:lnTo>
-                    <a:pt x="2298485" y="2827831"/>
-                  </a:lnTo>
-                  <a:lnTo>
-                    <a:pt x="2370108" y="2844173"/>
-                  </a:lnTo>
-                  <a:lnTo>
-                    <a:pt x="2441730" y="2860108"/>
-                  </a:lnTo>
-                  <a:lnTo>
-                    <a:pt x="2513353" y="2875646"/>
-                  </a:lnTo>
-                  <a:lnTo>
-                    <a:pt x="2584975" y="2890797"/>
-                  </a:lnTo>
-                  <a:lnTo>
-                    <a:pt x="2656598" y="2905570"/>
-                  </a:lnTo>
-                  <a:lnTo>
-                    <a:pt x="2728220" y="2919976"/>
-                  </a:lnTo>
-                  <a:lnTo>
-                    <a:pt x="2799843" y="2934022"/>
-                  </a:lnTo>
-                  <a:lnTo>
-                    <a:pt x="2871465" y="2947718"/>
-                  </a:lnTo>
-                  <a:lnTo>
-                    <a:pt x="2943088" y="2961073"/>
-                  </a:lnTo>
-                  <a:lnTo>
-                    <a:pt x="3014710" y="2974096"/>
-                  </a:lnTo>
-                  <a:lnTo>
-                    <a:pt x="3086333" y="2986794"/>
-                  </a:lnTo>
-                  <a:lnTo>
-                    <a:pt x="3157955" y="2999175"/>
-                  </a:lnTo>
-                  <a:lnTo>
-                    <a:pt x="3229578" y="3011248"/>
-                  </a:lnTo>
-                  <a:lnTo>
-                    <a:pt x="3301200" y="3023021"/>
-                  </a:lnTo>
-                  <a:lnTo>
-                    <a:pt x="3372823" y="3034500"/>
-                  </a:lnTo>
-                  <a:lnTo>
-                    <a:pt x="3444445" y="3045693"/>
-                  </a:lnTo>
-                  <a:lnTo>
-                    <a:pt x="3516068" y="3056607"/>
-                  </a:lnTo>
-                  <a:lnTo>
-                    <a:pt x="3587691" y="3067249"/>
-                  </a:lnTo>
-                  <a:lnTo>
-                    <a:pt x="3659313" y="3077626"/>
-                  </a:lnTo>
-                  <a:lnTo>
-                    <a:pt x="3730936" y="3087744"/>
-                  </a:lnTo>
-                  <a:lnTo>
-                    <a:pt x="3802558" y="3097611"/>
-                  </a:lnTo>
-                  <a:lnTo>
-                    <a:pt x="3874181" y="3107231"/>
-                  </a:lnTo>
-                  <a:lnTo>
-                    <a:pt x="3945803" y="3116612"/>
-                  </a:lnTo>
-                  <a:lnTo>
-                    <a:pt x="4017426" y="3125759"/>
-                  </a:lnTo>
-                  <a:lnTo>
-                    <a:pt x="4089048" y="3134679"/>
-                  </a:lnTo>
-                  <a:lnTo>
-                    <a:pt x="4160671" y="3143376"/>
-                  </a:lnTo>
-                  <a:lnTo>
-                    <a:pt x="4232293" y="3151856"/>
-                  </a:lnTo>
-                  <a:lnTo>
-                    <a:pt x="4303916" y="3160125"/>
-                  </a:lnTo>
-                  <a:lnTo>
-                    <a:pt x="4375538" y="3168188"/>
-                  </a:lnTo>
-                  <a:lnTo>
-                    <a:pt x="4447161" y="3176050"/>
-                  </a:lnTo>
-                  <a:lnTo>
-                    <a:pt x="4518783" y="3183716"/>
-                  </a:lnTo>
-                  <a:lnTo>
-                    <a:pt x="4590406" y="3191192"/>
-                  </a:lnTo>
-                  <a:lnTo>
-                    <a:pt x="4662028" y="3198481"/>
-                  </a:lnTo>
-                  <a:lnTo>
-                    <a:pt x="4733651" y="3205588"/>
-                  </a:lnTo>
-                  <a:lnTo>
-                    <a:pt x="4805273" y="3212518"/>
-                  </a:lnTo>
-                  <a:lnTo>
-                    <a:pt x="4876896" y="3219276"/>
-                  </a:lnTo>
-                  <a:lnTo>
-                    <a:pt x="4948519" y="3225865"/>
-                  </a:lnTo>
-                  <a:lnTo>
-                    <a:pt x="5020141" y="3232290"/>
-                  </a:lnTo>
-                  <a:lnTo>
-                    <a:pt x="5091764" y="3238555"/>
-                  </a:lnTo>
-                  <a:lnTo>
-                    <a:pt x="5163386" y="3244664"/>
-                  </a:lnTo>
-                  <a:lnTo>
-                    <a:pt x="5235009" y="3250621"/>
-                  </a:lnTo>
-                  <a:lnTo>
-                    <a:pt x="5306631" y="3256429"/>
-                  </a:lnTo>
-                </a:path>
-              </a:pathLst>
-            </a:custGeom>
-          </p:spPr>
-          <p:txBody>
-            <a:bodyPr/>
-            <a:lstStyle/>
-            <a:p/>
-          </p:txBody>
-        </p:sp>
-        <p:sp>
-          <p:nvSpPr>
             <p:cNvPr id="22" name="pl22"/>
             <p:cNvSpPr/>
             <p:nvPr/>
           </p:nvSpPr>
           <p:spPr>
             <a:xfrm>
-              <a:off x="1172049" y="2793962"/>
-              <a:ext cx="7090630" cy="2730495"/>
+              <a:off x="2987476" y="2143092"/>
+              <a:ext cx="5211939" cy="1175168"/>
             </a:xfrm>
             <a:custGeom>
               <a:avLst/>
               <a:pathLst>
-                <a:path w="7090630" h="2730495">
+                <a:path w="5211939" h="1175168">
                   <a:moveTo>
-                    <a:pt x="7090630" y="2730495"/>
+                    <a:pt x="0" y="0"/>
                   </a:moveTo>
                   <a:lnTo>
-                    <a:pt x="7019007" y="2728363"/>
-                  </a:lnTo>
-                  <a:lnTo>
-                    <a:pt x="6947385" y="2726094"/>
-                  </a:lnTo>
-                  <a:lnTo>
-                    <a:pt x="6875762" y="2723676"/>
-                  </a:lnTo>
-                  <a:lnTo>
-                    <a:pt x="6804139" y="2721102"/>
-                  </a:lnTo>
-                  <a:lnTo>
-                    <a:pt x="6732517" y="2718360"/>
-                  </a:lnTo>
-                  <a:lnTo>
-                    <a:pt x="6660894" y="2715440"/>
-                  </a:lnTo>
-                  <a:lnTo>
-                    <a:pt x="6589272" y="2712330"/>
-                  </a:lnTo>
-                  <a:lnTo>
-                    <a:pt x="6517649" y="2709018"/>
-                  </a:lnTo>
-                  <a:lnTo>
-                    <a:pt x="6446027" y="2705491"/>
-                  </a:lnTo>
-                  <a:lnTo>
-                    <a:pt x="6374404" y="2701735"/>
-                  </a:lnTo>
-                  <a:lnTo>
-                    <a:pt x="6302782" y="2697734"/>
-                  </a:lnTo>
-                  <a:lnTo>
-                    <a:pt x="6231159" y="2693474"/>
-                  </a:lnTo>
-                  <a:lnTo>
-                    <a:pt x="6159537" y="2688936"/>
-                  </a:lnTo>
-                  <a:lnTo>
-                    <a:pt x="6087914" y="2684104"/>
-                  </a:lnTo>
-                  <a:lnTo>
-                    <a:pt x="6016292" y="2678957"/>
-                  </a:lnTo>
-                  <a:lnTo>
-                    <a:pt x="5944669" y="2673476"/>
-                  </a:lnTo>
-                  <a:lnTo>
-                    <a:pt x="5873047" y="2667639"/>
-                  </a:lnTo>
-                  <a:lnTo>
-                    <a:pt x="5801424" y="2661422"/>
-                  </a:lnTo>
-                  <a:lnTo>
-                    <a:pt x="5729802" y="2654802"/>
-                  </a:lnTo>
-                  <a:lnTo>
-                    <a:pt x="5658179" y="2647751"/>
-                  </a:lnTo>
-                  <a:lnTo>
-                    <a:pt x="5586557" y="2640242"/>
-                  </a:lnTo>
-                  <a:lnTo>
-                    <a:pt x="5514934" y="2632245"/>
-                  </a:lnTo>
-                  <a:lnTo>
-                    <a:pt x="5443311" y="2623728"/>
-                  </a:lnTo>
-                  <a:lnTo>
-                    <a:pt x="5371689" y="2614657"/>
-                  </a:lnTo>
-                  <a:lnTo>
-                    <a:pt x="5300066" y="2604997"/>
-                  </a:lnTo>
-                  <a:lnTo>
-                    <a:pt x="5228444" y="2594709"/>
-                  </a:lnTo>
-                  <a:lnTo>
-                    <a:pt x="5156821" y="2583752"/>
-                  </a:lnTo>
-                  <a:lnTo>
-                    <a:pt x="5085199" y="2572084"/>
-                  </a:lnTo>
-                  <a:lnTo>
-                    <a:pt x="5013576" y="2559657"/>
-                  </a:lnTo>
-                  <a:lnTo>
-                    <a:pt x="4941954" y="2546422"/>
-                  </a:lnTo>
-                  <a:lnTo>
-                    <a:pt x="4870331" y="2532327"/>
-                  </a:lnTo>
-                  <a:lnTo>
-                    <a:pt x="4798709" y="2517316"/>
-                  </a:lnTo>
-                  <a:lnTo>
-                    <a:pt x="4727086" y="2501329"/>
-                  </a:lnTo>
-                  <a:lnTo>
-                    <a:pt x="4655464" y="2484303"/>
-                  </a:lnTo>
-                  <a:lnTo>
-                    <a:pt x="4583841" y="2466171"/>
-                  </a:lnTo>
-                  <a:lnTo>
-                    <a:pt x="4512219" y="2446860"/>
-                  </a:lnTo>
-                  <a:lnTo>
-                    <a:pt x="4440596" y="2426294"/>
-                  </a:lnTo>
-                  <a:lnTo>
-                    <a:pt x="4368974" y="2404392"/>
-                  </a:lnTo>
-                  <a:lnTo>
-                    <a:pt x="4297351" y="2381066"/>
-                  </a:lnTo>
-                  <a:lnTo>
-                    <a:pt x="4225729" y="2356224"/>
-                  </a:lnTo>
-                  <a:lnTo>
-                    <a:pt x="4154106" y="2329767"/>
-                  </a:lnTo>
-                  <a:lnTo>
-                    <a:pt x="4082483" y="2301591"/>
-                  </a:lnTo>
-                  <a:lnTo>
-                    <a:pt x="4010861" y="2271583"/>
-                  </a:lnTo>
-                  <a:lnTo>
-                    <a:pt x="3939238" y="2239625"/>
-                  </a:lnTo>
-                  <a:lnTo>
-                    <a:pt x="3867616" y="2205590"/>
-                  </a:lnTo>
-                  <a:lnTo>
-                    <a:pt x="3795993" y="2169343"/>
-                  </a:lnTo>
-                  <a:lnTo>
-                    <a:pt x="3724371" y="2130740"/>
-                  </a:lnTo>
-                  <a:lnTo>
-                    <a:pt x="3652748" y="2089629"/>
-                  </a:lnTo>
-                  <a:lnTo>
-                    <a:pt x="3581126" y="2045845"/>
-                  </a:lnTo>
-                  <a:lnTo>
-                    <a:pt x="3509503" y="1999215"/>
-                  </a:lnTo>
-                  <a:lnTo>
-                    <a:pt x="3437881" y="1949555"/>
-                  </a:lnTo>
-                  <a:lnTo>
-                    <a:pt x="3366258" y="1919131"/>
-                  </a:lnTo>
-                  <a:lnTo>
-                    <a:pt x="3294636" y="1897561"/>
-                  </a:lnTo>
-                  <a:lnTo>
-                    <a:pt x="3223013" y="1875441"/>
-                  </a:lnTo>
-                  <a:lnTo>
-                    <a:pt x="3151391" y="1852755"/>
-                  </a:lnTo>
-                  <a:lnTo>
-                    <a:pt x="3079768" y="1829489"/>
-                  </a:lnTo>
-                  <a:lnTo>
-                    <a:pt x="3008146" y="1805629"/>
-                  </a:lnTo>
-                  <a:lnTo>
-                    <a:pt x="2936523" y="1781160"/>
-                  </a:lnTo>
-                  <a:lnTo>
-                    <a:pt x="2864901" y="1756065"/>
-                  </a:lnTo>
-                  <a:lnTo>
-                    <a:pt x="2793278" y="1730329"/>
-                  </a:lnTo>
-                  <a:lnTo>
-                    <a:pt x="2721655" y="1703935"/>
-                  </a:lnTo>
-                  <a:lnTo>
-                    <a:pt x="2650033" y="1676867"/>
-                  </a:lnTo>
-                  <a:lnTo>
-                    <a:pt x="2578410" y="1649107"/>
-                  </a:lnTo>
-                  <a:lnTo>
-                    <a:pt x="2506788" y="1620638"/>
-                  </a:lnTo>
-                  <a:lnTo>
-                    <a:pt x="2435165" y="1591441"/>
-                  </a:lnTo>
-                  <a:lnTo>
-                    <a:pt x="2363543" y="1561499"/>
-                  </a:lnTo>
-                  <a:lnTo>
-                    <a:pt x="2291920" y="1530791"/>
-                  </a:lnTo>
-                  <a:lnTo>
-                    <a:pt x="2220298" y="1499299"/>
-                  </a:lnTo>
-                  <a:lnTo>
-                    <a:pt x="2148675" y="1467002"/>
-                  </a:lnTo>
-                  <a:lnTo>
-                    <a:pt x="2077053" y="1433880"/>
-                  </a:lnTo>
-                  <a:lnTo>
-                    <a:pt x="2005430" y="1399911"/>
-                  </a:lnTo>
-                  <a:lnTo>
-                    <a:pt x="1933808" y="1365075"/>
-                  </a:lnTo>
-                  <a:lnTo>
-                    <a:pt x="1862185" y="1329348"/>
-                  </a:lnTo>
-                  <a:lnTo>
-                    <a:pt x="1790563" y="1292709"/>
-                  </a:lnTo>
-                  <a:lnTo>
-                    <a:pt x="1718940" y="1255133"/>
-                  </a:lnTo>
-                  <a:lnTo>
-                    <a:pt x="1647318" y="1216597"/>
-                  </a:lnTo>
-                  <a:lnTo>
-                    <a:pt x="1575695" y="1177077"/>
-                  </a:lnTo>
-                  <a:lnTo>
-                    <a:pt x="1504073" y="1136547"/>
-                  </a:lnTo>
-                  <a:lnTo>
-                    <a:pt x="1432450" y="1094981"/>
-                  </a:lnTo>
-                  <a:lnTo>
-                    <a:pt x="1360827" y="1052353"/>
-                  </a:lnTo>
-                  <a:lnTo>
-                    <a:pt x="1289205" y="1008636"/>
-                  </a:lnTo>
-                  <a:lnTo>
-                    <a:pt x="1217582" y="963802"/>
-                  </a:lnTo>
-                  <a:lnTo>
-                    <a:pt x="1145960" y="917822"/>
-                  </a:lnTo>
-                  <a:lnTo>
-                    <a:pt x="1074337" y="870668"/>
-                  </a:lnTo>
-                  <a:lnTo>
-                    <a:pt x="1002715" y="822308"/>
-                  </a:lnTo>
-                  <a:lnTo>
-                    <a:pt x="931092" y="772713"/>
-                  </a:lnTo>
-                  <a:lnTo>
-                    <a:pt x="859470" y="721851"/>
-                  </a:lnTo>
-                  <a:lnTo>
-                    <a:pt x="787847" y="669689"/>
-                  </a:lnTo>
-                  <a:lnTo>
-                    <a:pt x="716225" y="616194"/>
-                  </a:lnTo>
-                  <a:lnTo>
-                    <a:pt x="644602" y="561332"/>
-                  </a:lnTo>
-                  <a:lnTo>
-                    <a:pt x="572980" y="505069"/>
-                  </a:lnTo>
-                  <a:lnTo>
-                    <a:pt x="501357" y="447368"/>
-                  </a:lnTo>
-                  <a:lnTo>
-                    <a:pt x="429735" y="388192"/>
-                  </a:lnTo>
-                  <a:lnTo>
-                    <a:pt x="358112" y="327505"/>
-                  </a:lnTo>
-                  <a:lnTo>
-                    <a:pt x="286490" y="265266"/>
-                  </a:lnTo>
-                  <a:lnTo>
-                    <a:pt x="214867" y="201438"/>
-                  </a:lnTo>
-                  <a:lnTo>
-                    <a:pt x="143245" y="135979"/>
-                  </a:lnTo>
-                  <a:lnTo>
-                    <a:pt x="71622" y="68847"/>
-                  </a:lnTo>
-                  <a:lnTo>
-                    <a:pt x="0" y="0"/>
+                    <a:pt x="6447" y="7445"/>
+                  </a:lnTo>
+                  <a:lnTo>
+                    <a:pt x="76792" y="83714"/>
+                  </a:lnTo>
+                  <a:lnTo>
+                    <a:pt x="147136" y="155329"/>
+                  </a:lnTo>
+                  <a:lnTo>
+                    <a:pt x="217481" y="222574"/>
+                  </a:lnTo>
+                  <a:lnTo>
+                    <a:pt x="287825" y="285715"/>
+                  </a:lnTo>
+                  <a:lnTo>
+                    <a:pt x="358170" y="345003"/>
+                  </a:lnTo>
+                  <a:lnTo>
+                    <a:pt x="428514" y="400672"/>
+                  </a:lnTo>
+                  <a:lnTo>
+                    <a:pt x="498859" y="452944"/>
+                  </a:lnTo>
+                  <a:lnTo>
+                    <a:pt x="569203" y="502026"/>
+                  </a:lnTo>
+                  <a:lnTo>
+                    <a:pt x="639548" y="548113"/>
+                  </a:lnTo>
+                  <a:lnTo>
+                    <a:pt x="709892" y="591387"/>
+                  </a:lnTo>
+                  <a:lnTo>
+                    <a:pt x="780236" y="632020"/>
+                  </a:lnTo>
+                  <a:lnTo>
+                    <a:pt x="850581" y="670173"/>
+                  </a:lnTo>
+                  <a:lnTo>
+                    <a:pt x="920925" y="705998"/>
+                  </a:lnTo>
+                  <a:lnTo>
+                    <a:pt x="991270" y="739637"/>
+                  </a:lnTo>
+                  <a:lnTo>
+                    <a:pt x="1061614" y="771223"/>
+                  </a:lnTo>
+                  <a:lnTo>
+                    <a:pt x="1131959" y="800881"/>
+                  </a:lnTo>
+                  <a:lnTo>
+                    <a:pt x="1202303" y="828729"/>
+                  </a:lnTo>
+                  <a:lnTo>
+                    <a:pt x="1272648" y="854878"/>
+                  </a:lnTo>
+                  <a:lnTo>
+                    <a:pt x="1342992" y="879431"/>
+                  </a:lnTo>
+                  <a:lnTo>
+                    <a:pt x="1413337" y="902485"/>
+                  </a:lnTo>
+                  <a:lnTo>
+                    <a:pt x="1483681" y="924133"/>
+                  </a:lnTo>
+                  <a:lnTo>
+                    <a:pt x="1554026" y="944459"/>
+                  </a:lnTo>
+                  <a:lnTo>
+                    <a:pt x="1624370" y="960156"/>
+                  </a:lnTo>
+                  <a:lnTo>
+                    <a:pt x="1694715" y="967557"/>
+                  </a:lnTo>
+                  <a:lnTo>
+                    <a:pt x="1765059" y="974773"/>
+                  </a:lnTo>
+                  <a:lnTo>
+                    <a:pt x="1835404" y="981810"/>
+                  </a:lnTo>
+                  <a:lnTo>
+                    <a:pt x="1905748" y="988671"/>
+                  </a:lnTo>
+                  <a:lnTo>
+                    <a:pt x="1976093" y="995362"/>
+                  </a:lnTo>
+                  <a:lnTo>
+                    <a:pt x="2046437" y="1001885"/>
+                  </a:lnTo>
+                  <a:lnTo>
+                    <a:pt x="2116782" y="1008247"/>
+                  </a:lnTo>
+                  <a:lnTo>
+                    <a:pt x="2187126" y="1014449"/>
+                  </a:lnTo>
+                  <a:lnTo>
+                    <a:pt x="2257471" y="1020497"/>
+                  </a:lnTo>
+                  <a:lnTo>
+                    <a:pt x="2327815" y="1026395"/>
+                  </a:lnTo>
+                  <a:lnTo>
+                    <a:pt x="2398160" y="1032145"/>
+                  </a:lnTo>
+                  <a:lnTo>
+                    <a:pt x="2468504" y="1037753"/>
+                  </a:lnTo>
+                  <a:lnTo>
+                    <a:pt x="2538849" y="1043220"/>
+                  </a:lnTo>
+                  <a:lnTo>
+                    <a:pt x="2609193" y="1048552"/>
+                  </a:lnTo>
+                  <a:lnTo>
+                    <a:pt x="2679538" y="1053750"/>
+                  </a:lnTo>
+                  <a:lnTo>
+                    <a:pt x="2749882" y="1058819"/>
+                  </a:lnTo>
+                  <a:lnTo>
+                    <a:pt x="2820227" y="1063762"/>
+                  </a:lnTo>
+                  <a:lnTo>
+                    <a:pt x="2890571" y="1068581"/>
+                  </a:lnTo>
+                  <a:lnTo>
+                    <a:pt x="2960916" y="1073281"/>
+                  </a:lnTo>
+                  <a:lnTo>
+                    <a:pt x="3031260" y="1077863"/>
+                  </a:lnTo>
+                  <a:lnTo>
+                    <a:pt x="3101605" y="1082331"/>
+                  </a:lnTo>
+                  <a:lnTo>
+                    <a:pt x="3171949" y="1086688"/>
+                  </a:lnTo>
+                  <a:lnTo>
+                    <a:pt x="3242294" y="1090937"/>
+                  </a:lnTo>
+                  <a:lnTo>
+                    <a:pt x="3312638" y="1095079"/>
+                  </a:lnTo>
+                  <a:lnTo>
+                    <a:pt x="3382983" y="1099118"/>
+                  </a:lnTo>
+                  <a:lnTo>
+                    <a:pt x="3453327" y="1103057"/>
+                  </a:lnTo>
+                  <a:lnTo>
+                    <a:pt x="3523672" y="1106898"/>
+                  </a:lnTo>
+                  <a:lnTo>
+                    <a:pt x="3594016" y="1110642"/>
+                  </a:lnTo>
+                  <a:lnTo>
+                    <a:pt x="3664361" y="1114294"/>
+                  </a:lnTo>
+                  <a:lnTo>
+                    <a:pt x="3734705" y="1117855"/>
+                  </a:lnTo>
+                  <a:lnTo>
+                    <a:pt x="3805050" y="1121326"/>
+                  </a:lnTo>
+                  <a:lnTo>
+                    <a:pt x="3875394" y="1124712"/>
+                  </a:lnTo>
+                  <a:lnTo>
+                    <a:pt x="3945739" y="1128013"/>
+                  </a:lnTo>
+                  <a:lnTo>
+                    <a:pt x="4016083" y="1131231"/>
+                  </a:lnTo>
+                  <a:lnTo>
+                    <a:pt x="4086428" y="1134370"/>
+                  </a:lnTo>
+                  <a:lnTo>
+                    <a:pt x="4156772" y="1137430"/>
+                  </a:lnTo>
+                  <a:lnTo>
+                    <a:pt x="4227117" y="1140414"/>
+                  </a:lnTo>
+                  <a:lnTo>
+                    <a:pt x="4297461" y="1143324"/>
+                  </a:lnTo>
+                  <a:lnTo>
+                    <a:pt x="4367806" y="1146161"/>
+                  </a:lnTo>
+                  <a:lnTo>
+                    <a:pt x="4438150" y="1148928"/>
+                  </a:lnTo>
+                  <a:lnTo>
+                    <a:pt x="4508494" y="1151626"/>
+                  </a:lnTo>
+                  <a:lnTo>
+                    <a:pt x="4578839" y="1154256"/>
+                  </a:lnTo>
+                  <a:lnTo>
+                    <a:pt x="4649183" y="1156821"/>
+                  </a:lnTo>
+                  <a:lnTo>
+                    <a:pt x="4719528" y="1159322"/>
+                  </a:lnTo>
+                  <a:lnTo>
+                    <a:pt x="4789872" y="1161761"/>
+                  </a:lnTo>
+                  <a:lnTo>
+                    <a:pt x="4860217" y="1164139"/>
+                  </a:lnTo>
+                  <a:lnTo>
+                    <a:pt x="4930561" y="1166457"/>
+                  </a:lnTo>
+                  <a:lnTo>
+                    <a:pt x="5000906" y="1168718"/>
+                  </a:lnTo>
+                  <a:lnTo>
+                    <a:pt x="5071250" y="1170923"/>
+                  </a:lnTo>
+                  <a:lnTo>
+                    <a:pt x="5141595" y="1173072"/>
+                  </a:lnTo>
+                  <a:lnTo>
+                    <a:pt x="5211939" y="1175168"/>
                   </a:lnTo>
                 </a:path>
               </a:pathLst>
@@ -4096,267 +3806,592 @@
           </p:nvSpPr>
           <p:spPr>
             <a:xfrm>
-              <a:off x="2257643" y="2073503"/>
-              <a:ext cx="6005035" cy="3397408"/>
+              <a:off x="1235312" y="2403088"/>
+              <a:ext cx="6964104" cy="985371"/>
             </a:xfrm>
             <a:custGeom>
               <a:avLst/>
               <a:pathLst>
-                <a:path w="6005035" h="3397408">
+                <a:path w="6964104" h="985371">
+                  <a:moveTo>
+                    <a:pt x="6964104" y="985371"/>
+                  </a:moveTo>
+                  <a:lnTo>
+                    <a:pt x="6893760" y="984602"/>
+                  </a:lnTo>
+                  <a:lnTo>
+                    <a:pt x="6823415" y="983783"/>
+                  </a:lnTo>
+                  <a:lnTo>
+                    <a:pt x="6753071" y="982910"/>
+                  </a:lnTo>
+                  <a:lnTo>
+                    <a:pt x="6682726" y="981981"/>
+                  </a:lnTo>
+                  <a:lnTo>
+                    <a:pt x="6612382" y="980992"/>
+                  </a:lnTo>
+                  <a:lnTo>
+                    <a:pt x="6542037" y="979938"/>
+                  </a:lnTo>
+                  <a:lnTo>
+                    <a:pt x="6471693" y="978816"/>
+                  </a:lnTo>
+                  <a:lnTo>
+                    <a:pt x="6401348" y="977621"/>
+                  </a:lnTo>
+                  <a:lnTo>
+                    <a:pt x="6331004" y="976348"/>
+                  </a:lnTo>
+                  <a:lnTo>
+                    <a:pt x="6260659" y="974992"/>
+                  </a:lnTo>
+                  <a:lnTo>
+                    <a:pt x="6190315" y="973548"/>
+                  </a:lnTo>
+                  <a:lnTo>
+                    <a:pt x="6119970" y="972011"/>
+                  </a:lnTo>
+                  <a:lnTo>
+                    <a:pt x="6049626" y="970373"/>
+                  </a:lnTo>
+                  <a:lnTo>
+                    <a:pt x="5979281" y="968630"/>
+                  </a:lnTo>
+                  <a:lnTo>
+                    <a:pt x="5908937" y="966772"/>
+                  </a:lnTo>
+                  <a:lnTo>
+                    <a:pt x="5838592" y="964794"/>
+                  </a:lnTo>
+                  <a:lnTo>
+                    <a:pt x="5768248" y="962688"/>
+                  </a:lnTo>
+                  <a:lnTo>
+                    <a:pt x="5697903" y="960444"/>
+                  </a:lnTo>
+                  <a:lnTo>
+                    <a:pt x="5627559" y="958055"/>
+                  </a:lnTo>
+                  <a:lnTo>
+                    <a:pt x="5557214" y="955511"/>
+                  </a:lnTo>
+                  <a:lnTo>
+                    <a:pt x="5486870" y="952801"/>
+                  </a:lnTo>
+                  <a:lnTo>
+                    <a:pt x="5416525" y="949915"/>
+                  </a:lnTo>
+                  <a:lnTo>
+                    <a:pt x="5346181" y="946841"/>
+                  </a:lnTo>
+                  <a:lnTo>
+                    <a:pt x="5275836" y="943568"/>
+                  </a:lnTo>
+                  <a:lnTo>
+                    <a:pt x="5205492" y="940082"/>
+                  </a:lnTo>
+                  <a:lnTo>
+                    <a:pt x="5135147" y="936369"/>
+                  </a:lnTo>
+                  <a:lnTo>
+                    <a:pt x="5064803" y="932415"/>
+                  </a:lnTo>
+                  <a:lnTo>
+                    <a:pt x="4994458" y="928204"/>
+                  </a:lnTo>
+                  <a:lnTo>
+                    <a:pt x="4924114" y="923720"/>
+                  </a:lnTo>
+                  <a:lnTo>
+                    <a:pt x="4853769" y="918943"/>
+                  </a:lnTo>
+                  <a:lnTo>
+                    <a:pt x="4783425" y="913857"/>
+                  </a:lnTo>
+                  <a:lnTo>
+                    <a:pt x="4713080" y="908440"/>
+                  </a:lnTo>
+                  <a:lnTo>
+                    <a:pt x="4642736" y="902670"/>
+                  </a:lnTo>
+                  <a:lnTo>
+                    <a:pt x="4572391" y="896526"/>
+                  </a:lnTo>
+                  <a:lnTo>
+                    <a:pt x="4502047" y="889983"/>
+                  </a:lnTo>
+                  <a:lnTo>
+                    <a:pt x="4431702" y="883014"/>
+                  </a:lnTo>
+                  <a:lnTo>
+                    <a:pt x="4361358" y="875592"/>
+                  </a:lnTo>
+                  <a:lnTo>
+                    <a:pt x="4291013" y="867688"/>
+                  </a:lnTo>
+                  <a:lnTo>
+                    <a:pt x="4220669" y="859270"/>
+                  </a:lnTo>
+                  <a:lnTo>
+                    <a:pt x="4150324" y="850305"/>
+                  </a:lnTo>
+                  <a:lnTo>
+                    <a:pt x="4079980" y="840758"/>
+                  </a:lnTo>
+                  <a:lnTo>
+                    <a:pt x="4009635" y="830590"/>
+                  </a:lnTo>
+                  <a:lnTo>
+                    <a:pt x="3939291" y="819761"/>
+                  </a:lnTo>
+                  <a:lnTo>
+                    <a:pt x="3868946" y="808228"/>
+                  </a:lnTo>
+                  <a:lnTo>
+                    <a:pt x="3798602" y="795945"/>
+                  </a:lnTo>
+                  <a:lnTo>
+                    <a:pt x="3728257" y="782865"/>
+                  </a:lnTo>
+                  <a:lnTo>
+                    <a:pt x="3657913" y="768934"/>
+                  </a:lnTo>
+                  <a:lnTo>
+                    <a:pt x="3587569" y="754097"/>
+                  </a:lnTo>
+                  <a:lnTo>
+                    <a:pt x="3517224" y="738297"/>
+                  </a:lnTo>
+                  <a:lnTo>
+                    <a:pt x="3446880" y="721469"/>
+                  </a:lnTo>
+                  <a:lnTo>
+                    <a:pt x="3376535" y="703548"/>
+                  </a:lnTo>
+                  <a:lnTo>
+                    <a:pt x="3306191" y="692569"/>
+                  </a:lnTo>
+                  <a:lnTo>
+                    <a:pt x="3235846" y="684785"/>
+                  </a:lnTo>
+                  <a:lnTo>
+                    <a:pt x="3165502" y="676802"/>
+                  </a:lnTo>
+                  <a:lnTo>
+                    <a:pt x="3095157" y="668615"/>
+                  </a:lnTo>
+                  <a:lnTo>
+                    <a:pt x="3024813" y="660219"/>
+                  </a:lnTo>
+                  <a:lnTo>
+                    <a:pt x="2954468" y="651609"/>
+                  </a:lnTo>
+                  <a:lnTo>
+                    <a:pt x="2884124" y="642778"/>
+                  </a:lnTo>
+                  <a:lnTo>
+                    <a:pt x="2813779" y="633722"/>
+                  </a:lnTo>
+                  <a:lnTo>
+                    <a:pt x="2743435" y="624435"/>
+                  </a:lnTo>
+                  <a:lnTo>
+                    <a:pt x="2673090" y="614910"/>
+                  </a:lnTo>
+                  <a:lnTo>
+                    <a:pt x="2602746" y="605141"/>
+                  </a:lnTo>
+                  <a:lnTo>
+                    <a:pt x="2532401" y="595124"/>
+                  </a:lnTo>
+                  <a:lnTo>
+                    <a:pt x="2462057" y="584850"/>
+                  </a:lnTo>
+                  <a:lnTo>
+                    <a:pt x="2391712" y="574313"/>
+                  </a:lnTo>
+                  <a:lnTo>
+                    <a:pt x="2321368" y="563508"/>
+                  </a:lnTo>
+                  <a:lnTo>
+                    <a:pt x="2251023" y="552426"/>
+                  </a:lnTo>
+                  <a:lnTo>
+                    <a:pt x="2180679" y="541061"/>
+                  </a:lnTo>
+                  <a:lnTo>
+                    <a:pt x="2110334" y="529406"/>
+                  </a:lnTo>
+                  <a:lnTo>
+                    <a:pt x="2039990" y="517453"/>
+                  </a:lnTo>
+                  <a:lnTo>
+                    <a:pt x="1969645" y="505195"/>
+                  </a:lnTo>
+                  <a:lnTo>
+                    <a:pt x="1899301" y="492623"/>
+                  </a:lnTo>
+                  <a:lnTo>
+                    <a:pt x="1828956" y="479730"/>
+                  </a:lnTo>
+                  <a:lnTo>
+                    <a:pt x="1758612" y="466508"/>
+                  </a:lnTo>
+                  <a:lnTo>
+                    <a:pt x="1688267" y="452948"/>
+                  </a:lnTo>
+                  <a:lnTo>
+                    <a:pt x="1617923" y="439041"/>
+                  </a:lnTo>
+                  <a:lnTo>
+                    <a:pt x="1547578" y="424779"/>
+                  </a:lnTo>
+                  <a:lnTo>
+                    <a:pt x="1477234" y="410153"/>
+                  </a:lnTo>
+                  <a:lnTo>
+                    <a:pt x="1406889" y="395153"/>
+                  </a:lnTo>
+                  <a:lnTo>
+                    <a:pt x="1336545" y="379769"/>
+                  </a:lnTo>
+                  <a:lnTo>
+                    <a:pt x="1266200" y="363993"/>
+                  </a:lnTo>
+                  <a:lnTo>
+                    <a:pt x="1195856" y="347813"/>
+                  </a:lnTo>
+                  <a:lnTo>
+                    <a:pt x="1125511" y="331220"/>
+                  </a:lnTo>
+                  <a:lnTo>
+                    <a:pt x="1055167" y="314203"/>
+                  </a:lnTo>
+                  <a:lnTo>
+                    <a:pt x="984822" y="296751"/>
+                  </a:lnTo>
+                  <a:lnTo>
+                    <a:pt x="914478" y="278854"/>
+                  </a:lnTo>
+                  <a:lnTo>
+                    <a:pt x="844133" y="260499"/>
+                  </a:lnTo>
+                  <a:lnTo>
+                    <a:pt x="773789" y="241675"/>
+                  </a:lnTo>
+                  <a:lnTo>
+                    <a:pt x="703444" y="222370"/>
+                  </a:lnTo>
+                  <a:lnTo>
+                    <a:pt x="633100" y="202571"/>
+                  </a:lnTo>
+                  <a:lnTo>
+                    <a:pt x="562755" y="182267"/>
+                  </a:lnTo>
+                  <a:lnTo>
+                    <a:pt x="492411" y="161444"/>
+                  </a:lnTo>
+                  <a:lnTo>
+                    <a:pt x="422066" y="140089"/>
+                  </a:lnTo>
+                  <a:lnTo>
+                    <a:pt x="351722" y="118188"/>
+                  </a:lnTo>
+                  <a:lnTo>
+                    <a:pt x="281377" y="95728"/>
+                  </a:lnTo>
+                  <a:lnTo>
+                    <a:pt x="211033" y="72694"/>
+                  </a:lnTo>
+                  <a:lnTo>
+                    <a:pt x="140688" y="49071"/>
+                  </a:lnTo>
+                  <a:lnTo>
+                    <a:pt x="70344" y="24845"/>
+                  </a:lnTo>
+                  <a:lnTo>
+                    <a:pt x="0" y="0"/>
+                  </a:lnTo>
+                </a:path>
+              </a:pathLst>
+            </a:custGeom>
+          </p:spPr>
+          <p:txBody>
+            <a:bodyPr/>
+            <a:lstStyle/>
+            <a:p/>
+          </p:txBody>
+        </p:sp>
+        <p:sp>
+          <p:nvSpPr>
+            <p:cNvPr id="24" name="pl24"/>
+            <p:cNvSpPr/>
+            <p:nvPr/>
+          </p:nvSpPr>
+          <p:spPr>
+            <a:xfrm>
+              <a:off x="2301534" y="2143092"/>
+              <a:ext cx="5897881" cy="1226044"/>
+            </a:xfrm>
+            <a:custGeom>
+              <a:avLst/>
+              <a:pathLst>
+                <a:path w="5897881" h="1226044">
                   <a:moveTo>
                     <a:pt x="0" y="0"/>
                   </a:moveTo>
                   <a:lnTo>
-                    <a:pt x="60366" y="127538"/>
-                  </a:lnTo>
-                  <a:lnTo>
-                    <a:pt x="131988" y="272331"/>
-                  </a:lnTo>
-                  <a:lnTo>
-                    <a:pt x="203611" y="410877"/>
-                  </a:lnTo>
-                  <a:lnTo>
-                    <a:pt x="275233" y="543445"/>
-                  </a:lnTo>
-                  <a:lnTo>
-                    <a:pt x="346856" y="670295"/>
-                  </a:lnTo>
-                  <a:lnTo>
-                    <a:pt x="418478" y="791672"/>
-                  </a:lnTo>
-                  <a:lnTo>
-                    <a:pt x="490101" y="907812"/>
-                  </a:lnTo>
-                  <a:lnTo>
-                    <a:pt x="561723" y="1018943"/>
-                  </a:lnTo>
-                  <a:lnTo>
-                    <a:pt x="633346" y="1125278"/>
-                  </a:lnTo>
-                  <a:lnTo>
-                    <a:pt x="704968" y="1227027"/>
-                  </a:lnTo>
-                  <a:lnTo>
-                    <a:pt x="776591" y="1324385"/>
-                  </a:lnTo>
-                  <a:lnTo>
-                    <a:pt x="848214" y="1417544"/>
-                  </a:lnTo>
-                  <a:lnTo>
-                    <a:pt x="919836" y="1506683"/>
-                  </a:lnTo>
-                  <a:lnTo>
-                    <a:pt x="991459" y="1591977"/>
-                  </a:lnTo>
-                  <a:lnTo>
-                    <a:pt x="1063081" y="1673591"/>
-                  </a:lnTo>
-                  <a:lnTo>
-                    <a:pt x="1134704" y="1751684"/>
-                  </a:lnTo>
-                  <a:lnTo>
-                    <a:pt x="1206326" y="1826408"/>
-                  </a:lnTo>
-                  <a:lnTo>
-                    <a:pt x="1277949" y="1897908"/>
-                  </a:lnTo>
-                  <a:lnTo>
-                    <a:pt x="1349571" y="1966324"/>
-                  </a:lnTo>
-                  <a:lnTo>
-                    <a:pt x="1421194" y="2031788"/>
-                  </a:lnTo>
-                  <a:lnTo>
-                    <a:pt x="1492816" y="2094428"/>
-                  </a:lnTo>
-                  <a:lnTo>
-                    <a:pt x="1564439" y="2154366"/>
-                  </a:lnTo>
-                  <a:lnTo>
-                    <a:pt x="1636061" y="2211717"/>
-                  </a:lnTo>
-                  <a:lnTo>
-                    <a:pt x="1707684" y="2266595"/>
-                  </a:lnTo>
-                  <a:lnTo>
-                    <a:pt x="1779306" y="2319105"/>
-                  </a:lnTo>
-                  <a:lnTo>
-                    <a:pt x="1850929" y="2369349"/>
-                  </a:lnTo>
-                  <a:lnTo>
-                    <a:pt x="1922551" y="2417426"/>
-                  </a:lnTo>
-                  <a:lnTo>
-                    <a:pt x="1994174" y="2463429"/>
-                  </a:lnTo>
-                  <a:lnTo>
-                    <a:pt x="2065796" y="2507447"/>
-                  </a:lnTo>
-                  <a:lnTo>
-                    <a:pt x="2137419" y="2549566"/>
-                  </a:lnTo>
-                  <a:lnTo>
-                    <a:pt x="2209042" y="2589869"/>
-                  </a:lnTo>
-                  <a:lnTo>
-                    <a:pt x="2280664" y="2628432"/>
-                  </a:lnTo>
-                  <a:lnTo>
-                    <a:pt x="2352287" y="2665332"/>
-                  </a:lnTo>
-                  <a:lnTo>
-                    <a:pt x="2423909" y="2700639"/>
-                  </a:lnTo>
-                  <a:lnTo>
-                    <a:pt x="2495532" y="2734424"/>
-                  </a:lnTo>
-                  <a:lnTo>
-                    <a:pt x="2567154" y="2766751"/>
-                  </a:lnTo>
-                  <a:lnTo>
-                    <a:pt x="2638777" y="2797683"/>
-                  </a:lnTo>
-                  <a:lnTo>
-                    <a:pt x="2710399" y="2827281"/>
-                  </a:lnTo>
-                  <a:lnTo>
-                    <a:pt x="2782022" y="2855602"/>
-                  </a:lnTo>
-                  <a:lnTo>
-                    <a:pt x="2853644" y="2882701"/>
-                  </a:lnTo>
-                  <a:lnTo>
-                    <a:pt x="2925267" y="2908632"/>
-                  </a:lnTo>
-                  <a:lnTo>
-                    <a:pt x="2996889" y="2933443"/>
-                  </a:lnTo>
-                  <a:lnTo>
-                    <a:pt x="3068512" y="2957184"/>
-                  </a:lnTo>
-                  <a:lnTo>
-                    <a:pt x="3140134" y="2979901"/>
-                  </a:lnTo>
-                  <a:lnTo>
-                    <a:pt x="3211757" y="3001637"/>
-                  </a:lnTo>
-                  <a:lnTo>
-                    <a:pt x="3283379" y="3022436"/>
-                  </a:lnTo>
-                  <a:lnTo>
-                    <a:pt x="3355002" y="3042338"/>
-                  </a:lnTo>
-                  <a:lnTo>
-                    <a:pt x="3426624" y="3061381"/>
-                  </a:lnTo>
-                  <a:lnTo>
-                    <a:pt x="3498247" y="3079603"/>
-                  </a:lnTo>
-                  <a:lnTo>
-                    <a:pt x="3569870" y="3097038"/>
-                  </a:lnTo>
-                  <a:lnTo>
-                    <a:pt x="3641492" y="3113721"/>
-                  </a:lnTo>
-                  <a:lnTo>
-                    <a:pt x="3713115" y="3129685"/>
-                  </a:lnTo>
-                  <a:lnTo>
-                    <a:pt x="3784737" y="3144960"/>
-                  </a:lnTo>
-                  <a:lnTo>
-                    <a:pt x="3856360" y="3159576"/>
-                  </a:lnTo>
-                  <a:lnTo>
-                    <a:pt x="3927982" y="3173561"/>
-                  </a:lnTo>
-                  <a:lnTo>
-                    <a:pt x="3999605" y="3186943"/>
-                  </a:lnTo>
-                  <a:lnTo>
-                    <a:pt x="4071227" y="3199747"/>
-                  </a:lnTo>
-                  <a:lnTo>
-                    <a:pt x="4142850" y="3212000"/>
-                  </a:lnTo>
-                  <a:lnTo>
-                    <a:pt x="4214472" y="3223723"/>
-                  </a:lnTo>
-                  <a:lnTo>
-                    <a:pt x="4286095" y="3234941"/>
-                  </a:lnTo>
-                  <a:lnTo>
-                    <a:pt x="4357717" y="3245675"/>
-                  </a:lnTo>
-                  <a:lnTo>
-                    <a:pt x="4429340" y="3255946"/>
-                  </a:lnTo>
-                  <a:lnTo>
-                    <a:pt x="4500962" y="3265773"/>
-                  </a:lnTo>
-                  <a:lnTo>
-                    <a:pt x="4572585" y="3275177"/>
-                  </a:lnTo>
-                  <a:lnTo>
-                    <a:pt x="4644207" y="3284175"/>
-                  </a:lnTo>
-                  <a:lnTo>
-                    <a:pt x="4715830" y="3292785"/>
-                  </a:lnTo>
-                  <a:lnTo>
-                    <a:pt x="4787452" y="3301023"/>
-                  </a:lnTo>
-                  <a:lnTo>
-                    <a:pt x="4859075" y="3308906"/>
-                  </a:lnTo>
-                  <a:lnTo>
-                    <a:pt x="4930698" y="3316449"/>
-                  </a:lnTo>
-                  <a:lnTo>
-                    <a:pt x="5002320" y="3323667"/>
-                  </a:lnTo>
-                  <a:lnTo>
-                    <a:pt x="5073943" y="3330573"/>
-                  </a:lnTo>
-                  <a:lnTo>
-                    <a:pt x="5145565" y="3337181"/>
-                  </a:lnTo>
-                  <a:lnTo>
-                    <a:pt x="5217188" y="3343504"/>
-                  </a:lnTo>
-                  <a:lnTo>
-                    <a:pt x="5288810" y="3349554"/>
-                  </a:lnTo>
-                  <a:lnTo>
-                    <a:pt x="5360433" y="3355344"/>
-                  </a:lnTo>
-                  <a:lnTo>
-                    <a:pt x="5432055" y="3360883"/>
-                  </a:lnTo>
-                  <a:lnTo>
-                    <a:pt x="5503678" y="3366184"/>
-                  </a:lnTo>
-                  <a:lnTo>
-                    <a:pt x="5575300" y="3371256"/>
-                  </a:lnTo>
-                  <a:lnTo>
-                    <a:pt x="5646923" y="3376109"/>
-                  </a:lnTo>
-                  <a:lnTo>
-                    <a:pt x="5718545" y="3380752"/>
-                  </a:lnTo>
-                  <a:lnTo>
-                    <a:pt x="5790168" y="3385196"/>
-                  </a:lnTo>
-                  <a:lnTo>
-                    <a:pt x="5861790" y="3389447"/>
-                  </a:lnTo>
-                  <a:lnTo>
-                    <a:pt x="5933413" y="3393515"/>
-                  </a:lnTo>
-                  <a:lnTo>
-                    <a:pt x="6005035" y="3397408"/>
+                    <a:pt x="59289" y="46025"/>
+                  </a:lnTo>
+                  <a:lnTo>
+                    <a:pt x="129633" y="98277"/>
+                  </a:lnTo>
+                  <a:lnTo>
+                    <a:pt x="199978" y="148275"/>
+                  </a:lnTo>
+                  <a:lnTo>
+                    <a:pt x="270322" y="196116"/>
+                  </a:lnTo>
+                  <a:lnTo>
+                    <a:pt x="340667" y="241893"/>
+                  </a:lnTo>
+                  <a:lnTo>
+                    <a:pt x="411011" y="285695"/>
+                  </a:lnTo>
+                  <a:lnTo>
+                    <a:pt x="481356" y="327608"/>
+                  </a:lnTo>
+                  <a:lnTo>
+                    <a:pt x="551700" y="367712"/>
+                  </a:lnTo>
+                  <a:lnTo>
+                    <a:pt x="622045" y="406086"/>
+                  </a:lnTo>
+                  <a:lnTo>
+                    <a:pt x="692389" y="442805"/>
+                  </a:lnTo>
+                  <a:lnTo>
+                    <a:pt x="762733" y="477939"/>
+                  </a:lnTo>
+                  <a:lnTo>
+                    <a:pt x="833078" y="511558"/>
+                  </a:lnTo>
+                  <a:lnTo>
+                    <a:pt x="903422" y="543726"/>
+                  </a:lnTo>
+                  <a:lnTo>
+                    <a:pt x="973767" y="574507"/>
+                  </a:lnTo>
+                  <a:lnTo>
+                    <a:pt x="1044111" y="603959"/>
+                  </a:lnTo>
+                  <a:lnTo>
+                    <a:pt x="1114456" y="632141"/>
+                  </a:lnTo>
+                  <a:lnTo>
+                    <a:pt x="1184800" y="659107"/>
+                  </a:lnTo>
+                  <a:lnTo>
+                    <a:pt x="1255145" y="684910"/>
+                  </a:lnTo>
+                  <a:lnTo>
+                    <a:pt x="1325489" y="709600"/>
+                  </a:lnTo>
+                  <a:lnTo>
+                    <a:pt x="1395834" y="733224"/>
+                  </a:lnTo>
+                  <a:lnTo>
+                    <a:pt x="1466178" y="755830"/>
+                  </a:lnTo>
+                  <a:lnTo>
+                    <a:pt x="1536523" y="777460"/>
+                  </a:lnTo>
+                  <a:lnTo>
+                    <a:pt x="1606867" y="798156"/>
+                  </a:lnTo>
+                  <a:lnTo>
+                    <a:pt x="1677212" y="817960"/>
+                  </a:lnTo>
+                  <a:lnTo>
+                    <a:pt x="1747556" y="836910"/>
+                  </a:lnTo>
+                  <a:lnTo>
+                    <a:pt x="1817901" y="855042"/>
+                  </a:lnTo>
+                  <a:lnTo>
+                    <a:pt x="1888245" y="872392"/>
+                  </a:lnTo>
+                  <a:lnTo>
+                    <a:pt x="1958590" y="888993"/>
+                  </a:lnTo>
+                  <a:lnTo>
+                    <a:pt x="2028934" y="904878"/>
+                  </a:lnTo>
+                  <a:lnTo>
+                    <a:pt x="2099279" y="920078"/>
+                  </a:lnTo>
+                  <a:lnTo>
+                    <a:pt x="2169623" y="934622"/>
+                  </a:lnTo>
+                  <a:lnTo>
+                    <a:pt x="2239968" y="948539"/>
+                  </a:lnTo>
+                  <a:lnTo>
+                    <a:pt x="2310312" y="961855"/>
+                  </a:lnTo>
+                  <a:lnTo>
+                    <a:pt x="2380657" y="974597"/>
+                  </a:lnTo>
+                  <a:lnTo>
+                    <a:pt x="2451001" y="986789"/>
+                  </a:lnTo>
+                  <a:lnTo>
+                    <a:pt x="2521346" y="998455"/>
+                  </a:lnTo>
+                  <a:lnTo>
+                    <a:pt x="2591690" y="1009618"/>
+                  </a:lnTo>
+                  <a:lnTo>
+                    <a:pt x="2662035" y="1020299"/>
+                  </a:lnTo>
+                  <a:lnTo>
+                    <a:pt x="2732379" y="1030519"/>
+                  </a:lnTo>
+                  <a:lnTo>
+                    <a:pt x="2802724" y="1040299"/>
+                  </a:lnTo>
+                  <a:lnTo>
+                    <a:pt x="2873068" y="1049656"/>
+                  </a:lnTo>
+                  <a:lnTo>
+                    <a:pt x="2943413" y="1058610"/>
+                  </a:lnTo>
+                  <a:lnTo>
+                    <a:pt x="3013757" y="1067178"/>
+                  </a:lnTo>
+                  <a:lnTo>
+                    <a:pt x="3084102" y="1075376"/>
+                  </a:lnTo>
+                  <a:lnTo>
+                    <a:pt x="3154446" y="1083220"/>
+                  </a:lnTo>
+                  <a:lnTo>
+                    <a:pt x="3224791" y="1090726"/>
+                  </a:lnTo>
+                  <a:lnTo>
+                    <a:pt x="3295135" y="1097908"/>
+                  </a:lnTo>
+                  <a:lnTo>
+                    <a:pt x="3365480" y="1104780"/>
+                  </a:lnTo>
+                  <a:lnTo>
+                    <a:pt x="3435824" y="1111356"/>
+                  </a:lnTo>
+                  <a:lnTo>
+                    <a:pt x="3506169" y="1117648"/>
+                  </a:lnTo>
+                  <a:lnTo>
+                    <a:pt x="3576513" y="1123668"/>
+                  </a:lnTo>
+                  <a:lnTo>
+                    <a:pt x="3646858" y="1129429"/>
+                  </a:lnTo>
+                  <a:lnTo>
+                    <a:pt x="3717202" y="1134942"/>
+                  </a:lnTo>
+                  <a:lnTo>
+                    <a:pt x="3787547" y="1140216"/>
+                  </a:lnTo>
+                  <a:lnTo>
+                    <a:pt x="3857891" y="1145263"/>
+                  </a:lnTo>
+                  <a:lnTo>
+                    <a:pt x="3928236" y="1150092"/>
+                  </a:lnTo>
+                  <a:lnTo>
+                    <a:pt x="3998580" y="1154713"/>
+                  </a:lnTo>
+                  <a:lnTo>
+                    <a:pt x="4068925" y="1159135"/>
+                  </a:lnTo>
+                  <a:lnTo>
+                    <a:pt x="4139269" y="1163366"/>
+                  </a:lnTo>
+                  <a:lnTo>
+                    <a:pt x="4209614" y="1167414"/>
+                  </a:lnTo>
+                  <a:lnTo>
+                    <a:pt x="4279958" y="1171287"/>
+                  </a:lnTo>
+                  <a:lnTo>
+                    <a:pt x="4350303" y="1174994"/>
+                  </a:lnTo>
+                  <a:lnTo>
+                    <a:pt x="4420647" y="1178540"/>
+                  </a:lnTo>
+                  <a:lnTo>
+                    <a:pt x="4490991" y="1181934"/>
+                  </a:lnTo>
+                  <a:lnTo>
+                    <a:pt x="4561336" y="1185181"/>
+                  </a:lnTo>
+                  <a:lnTo>
+                    <a:pt x="4631680" y="1188288"/>
+                  </a:lnTo>
+                  <a:lnTo>
+                    <a:pt x="4702025" y="1191261"/>
+                  </a:lnTo>
+                  <a:lnTo>
+                    <a:pt x="4772369" y="1194106"/>
+                  </a:lnTo>
+                  <a:lnTo>
+                    <a:pt x="4842714" y="1196828"/>
+                  </a:lnTo>
+                  <a:lnTo>
+                    <a:pt x="4913058" y="1199433"/>
+                  </a:lnTo>
+                  <a:lnTo>
+                    <a:pt x="4983403" y="1201925"/>
+                  </a:lnTo>
+                  <a:lnTo>
+                    <a:pt x="5053747" y="1204310"/>
+                  </a:lnTo>
+                  <a:lnTo>
+                    <a:pt x="5124092" y="1206592"/>
+                  </a:lnTo>
+                  <a:lnTo>
+                    <a:pt x="5194436" y="1208775"/>
+                  </a:lnTo>
+                  <a:lnTo>
+                    <a:pt x="5264781" y="1210864"/>
+                  </a:lnTo>
+                  <a:lnTo>
+                    <a:pt x="5335125" y="1212863"/>
+                  </a:lnTo>
+                  <a:lnTo>
+                    <a:pt x="5405470" y="1214776"/>
+                  </a:lnTo>
+                  <a:lnTo>
+                    <a:pt x="5475814" y="1216606"/>
+                  </a:lnTo>
+                  <a:lnTo>
+                    <a:pt x="5546159" y="1218358"/>
+                  </a:lnTo>
+                  <a:lnTo>
+                    <a:pt x="5616503" y="1220034"/>
+                  </a:lnTo>
+                  <a:lnTo>
+                    <a:pt x="5686848" y="1221637"/>
+                  </a:lnTo>
+                  <a:lnTo>
+                    <a:pt x="5757192" y="1223171"/>
+                  </a:lnTo>
+                  <a:lnTo>
+                    <a:pt x="5827537" y="1224640"/>
+                  </a:lnTo>
+                  <a:lnTo>
+                    <a:pt x="5897881" y="1226044"/>
                   </a:lnTo>
                 </a:path>
               </a:pathLst>
@@ -4379,27 +4414,27 @@
         </p:sp>
         <p:sp>
           <p:nvSpPr>
-            <p:cNvPr id="24" name="pl24"/>
+            <p:cNvPr id="25" name="pl25"/>
             <p:cNvSpPr/>
             <p:nvPr/>
           </p:nvSpPr>
           <p:spPr>
             <a:xfrm>
-              <a:off x="817517" y="4727786"/>
-              <a:ext cx="7799693" cy="0"/>
+              <a:off x="887106" y="3100960"/>
+              <a:ext cx="7660515" cy="0"/>
             </a:xfrm>
             <a:custGeom>
               <a:avLst/>
               <a:pathLst>
-                <a:path w="7799693" h="0">
+                <a:path w="7660515" h="0">
                   <a:moveTo>
                     <a:pt x="0" y="0"/>
                   </a:moveTo>
                   <a:lnTo>
-                    <a:pt x="7799693" y="0"/>
-                  </a:lnTo>
-                  <a:lnTo>
-                    <a:pt x="7799693" y="0"/>
+                    <a:pt x="7660515" y="0"/>
+                  </a:lnTo>
+                  <a:lnTo>
+                    <a:pt x="7660515" y="0"/>
                   </a:lnTo>
                 </a:path>
               </a:pathLst>
@@ -4422,21 +4457,21 @@
         </p:sp>
         <p:sp>
           <p:nvSpPr>
-            <p:cNvPr id="25" name="pl25"/>
+            <p:cNvPr id="26" name="pl26"/>
             <p:cNvSpPr/>
             <p:nvPr/>
           </p:nvSpPr>
           <p:spPr>
             <a:xfrm>
-              <a:off x="4588151" y="2073503"/>
-              <a:ext cx="0" cy="3649639"/>
+              <a:off x="4590457" y="2143092"/>
+              <a:ext cx="0" cy="1317069"/>
             </a:xfrm>
             <a:custGeom>
               <a:avLst/>
               <a:pathLst>
-                <a:path w="0" h="3649639">
+                <a:path w="0" h="1317069">
                   <a:moveTo>
-                    <a:pt x="0" y="3649639"/>
+                    <a:pt x="0" y="1317069"/>
                   </a:moveTo>
                   <a:lnTo>
                     <a:pt x="0" y="0"/>
@@ -4465,13 +4500,13 @@
         </p:sp>
         <p:sp>
           <p:nvSpPr>
-            <p:cNvPr id="26" name="tx26"/>
+            <p:cNvPr id="27" name="tx27"/>
             <p:cNvSpPr/>
             <p:nvPr/>
           </p:nvSpPr>
           <p:spPr>
             <a:xfrm>
-              <a:off x="692708" y="5517199"/>
+              <a:off x="762297" y="3360243"/>
               <a:ext cx="62179" cy="80101"/>
             </a:xfrm>
             <a:prstGeom prst="rect">
@@ -4511,13 +4546,13 @@
         </p:sp>
         <p:sp>
           <p:nvSpPr>
-            <p:cNvPr id="27" name="tx27"/>
+            <p:cNvPr id="28" name="tx28"/>
             <p:cNvSpPr/>
             <p:nvPr/>
           </p:nvSpPr>
           <p:spPr>
             <a:xfrm>
-              <a:off x="692708" y="4687735"/>
+              <a:off x="762297" y="3060909"/>
               <a:ext cx="62179" cy="80101"/>
             </a:xfrm>
             <a:prstGeom prst="rect">
@@ -4557,13 +4592,13 @@
         </p:sp>
         <p:sp>
           <p:nvSpPr>
-            <p:cNvPr id="28" name="tx28"/>
+            <p:cNvPr id="29" name="tx29"/>
             <p:cNvSpPr/>
             <p:nvPr/>
           </p:nvSpPr>
           <p:spPr>
             <a:xfrm>
-              <a:off x="692708" y="3858272"/>
+              <a:off x="762297" y="2761575"/>
               <a:ext cx="62179" cy="80101"/>
             </a:xfrm>
             <a:prstGeom prst="rect">
@@ -4603,13 +4638,13 @@
         </p:sp>
         <p:sp>
           <p:nvSpPr>
-            <p:cNvPr id="29" name="tx29"/>
+            <p:cNvPr id="30" name="tx30"/>
             <p:cNvSpPr/>
             <p:nvPr/>
           </p:nvSpPr>
           <p:spPr>
             <a:xfrm>
-              <a:off x="692708" y="3028808"/>
+              <a:off x="762297" y="2462242"/>
               <a:ext cx="62179" cy="80101"/>
             </a:xfrm>
             <a:prstGeom prst="rect">
@@ -4649,13 +4684,13 @@
         </p:sp>
         <p:sp>
           <p:nvSpPr>
-            <p:cNvPr id="30" name="tx30"/>
+            <p:cNvPr id="31" name="tx31"/>
             <p:cNvSpPr/>
             <p:nvPr/>
           </p:nvSpPr>
           <p:spPr>
             <a:xfrm>
-              <a:off x="692708" y="2199345"/>
+              <a:off x="762297" y="2162908"/>
               <a:ext cx="62179" cy="80101"/>
             </a:xfrm>
             <a:prstGeom prst="rect">
@@ -4695,13 +4730,13 @@
         </p:sp>
         <p:sp>
           <p:nvSpPr>
-            <p:cNvPr id="31" name="tx31"/>
+            <p:cNvPr id="32" name="tx32"/>
             <p:cNvSpPr/>
             <p:nvPr/>
           </p:nvSpPr>
           <p:spPr>
             <a:xfrm>
-              <a:off x="2360651" y="5785772"/>
+              <a:off x="2401262" y="3522791"/>
               <a:ext cx="161574" cy="80101"/>
             </a:xfrm>
             <a:prstGeom prst="rect">
@@ -4741,13 +4776,13 @@
         </p:sp>
         <p:sp>
           <p:nvSpPr>
-            <p:cNvPr id="32" name="tx32"/>
+            <p:cNvPr id="33" name="tx33"/>
             <p:cNvSpPr/>
             <p:nvPr/>
           </p:nvSpPr>
           <p:spPr>
             <a:xfrm>
-              <a:off x="4561958" y="5785772"/>
+              <a:off x="4564176" y="3522791"/>
               <a:ext cx="62179" cy="80101"/>
             </a:xfrm>
             <a:prstGeom prst="rect">
@@ -4787,13 +4822,13 @@
         </p:sp>
         <p:sp>
           <p:nvSpPr>
-            <p:cNvPr id="33" name="tx33"/>
+            <p:cNvPr id="34" name="tx34"/>
             <p:cNvSpPr/>
             <p:nvPr/>
           </p:nvSpPr>
           <p:spPr>
             <a:xfrm>
-              <a:off x="6682478" y="5785772"/>
+              <a:off x="6646302" y="3522791"/>
               <a:ext cx="124358" cy="80101"/>
             </a:xfrm>
             <a:prstGeom prst="rect">
@@ -4833,13 +4868,13 @@
         </p:sp>
         <p:sp>
           <p:nvSpPr>
-            <p:cNvPr id="34" name="tx34"/>
+            <p:cNvPr id="35" name="tx35"/>
             <p:cNvSpPr/>
             <p:nvPr/>
           </p:nvSpPr>
           <p:spPr>
             <a:xfrm>
-              <a:off x="2928340" y="5925448"/>
+              <a:off x="2928340" y="3662467"/>
               <a:ext cx="3578047" cy="100218"/>
             </a:xfrm>
             <a:prstGeom prst="rect">
@@ -4879,13 +4914,13 @@
         </p:sp>
         <p:sp>
           <p:nvSpPr>
-            <p:cNvPr id="35" name="tx35"/>
+            <p:cNvPr id="36" name="tx36"/>
             <p:cNvSpPr/>
             <p:nvPr/>
           </p:nvSpPr>
           <p:spPr>
             <a:xfrm rot="-5400000">
-              <a:off x="181100" y="3848213"/>
+              <a:off x="250689" y="2751517"/>
               <a:ext cx="791596" cy="100218"/>
             </a:xfrm>
             <a:prstGeom prst="rect">
@@ -4925,13 +4960,13 @@
         </p:sp>
         <p:sp>
           <p:nvSpPr>
-            <p:cNvPr id="36" name="tx36"/>
+            <p:cNvPr id="37" name="tx37"/>
             <p:cNvSpPr/>
             <p:nvPr/>
           </p:nvSpPr>
           <p:spPr>
             <a:xfrm>
-              <a:off x="817517" y="1896563"/>
+              <a:off x="887106" y="1966152"/>
               <a:ext cx="6867875" cy="82021"/>
             </a:xfrm>
             <a:prstGeom prst="rect">
@@ -4971,13 +5006,3514 @@
         </p:sp>
         <p:sp>
           <p:nvSpPr>
-            <p:cNvPr id="37" name="tx37"/>
+            <p:cNvPr id="38" name="tx38"/>
             <p:cNvSpPr/>
             <p:nvPr/>
           </p:nvSpPr>
           <p:spPr>
             <a:xfrm>
-              <a:off x="817517" y="1669789"/>
+              <a:off x="887106" y="1739378"/>
+              <a:ext cx="1768906" cy="120152"/>
+            </a:xfrm>
+            <a:prstGeom prst="rect">
+              <a:avLst/>
+            </a:prstGeom>
+            <a:noFill/>
+          </p:spPr>
+          <p:txBody>
+            <a:bodyPr lIns="0" rIns="0" tIns="0" bIns="0" anchorCtr="1" anchor="ctr" wrap="none"/>
+            <a:lstStyle/>
+            <a:p>
+              <a:pPr algn="l" marL="0" marR="0" indent="0">
+                <a:lnSpc>
+                  <a:spcPts val="1320"/>
+                </a:lnSpc>
+                <a:spcBef>
+                  <a:spcPts val="0"/>
+                </a:spcBef>
+                <a:spcAft>
+                  <a:spcPts val="0"/>
+                </a:spcAft>
+              </a:pPr>
+              <a:r>
+                <a:rPr sz="1320">
+                  <a:solidFill>
+                    <a:srgbClr val="000000">
+                      <a:alpha val="100000"/>
+                    </a:srgbClr>
+                  </a:solidFill>
+                  <a:latin typeface="Helvetica"/>
+                  <a:cs typeface="Helvetica"/>
+                </a:rPr>
+                <a:t>90-Day Death (Cox PH)</a:t>
+              </a:r>
+            </a:p>
+          </p:txBody>
+        </p:sp>
+        <p:sp>
+          <p:nvSpPr>
+            <p:cNvPr id="39" name="pl39"/>
+            <p:cNvSpPr/>
+            <p:nvPr/>
+          </p:nvSpPr>
+          <p:spPr>
+            <a:xfrm>
+              <a:off x="887106" y="5444019"/>
+              <a:ext cx="7660515" cy="0"/>
+            </a:xfrm>
+            <a:custGeom>
+              <a:avLst/>
+              <a:pathLst>
+                <a:path w="7660515" h="0">
+                  <a:moveTo>
+                    <a:pt x="0" y="0"/>
+                  </a:moveTo>
+                  <a:lnTo>
+                    <a:pt x="7660515" y="0"/>
+                  </a:lnTo>
+                  <a:lnTo>
+                    <a:pt x="7660515" y="0"/>
+                  </a:lnTo>
+                </a:path>
+              </a:pathLst>
+            </a:custGeom>
+            <a:ln w="6775" cap="flat">
+              <a:solidFill>
+                <a:srgbClr val="EBEBEB">
+                  <a:alpha val="100000"/>
+                </a:srgbClr>
+              </a:solidFill>
+              <a:prstDash val="solid"/>
+              <a:round/>
+            </a:ln>
+          </p:spPr>
+          <p:txBody>
+            <a:bodyPr/>
+            <a:lstStyle/>
+            <a:p/>
+          </p:txBody>
+        </p:sp>
+        <p:sp>
+          <p:nvSpPr>
+            <p:cNvPr id="40" name="pl40"/>
+            <p:cNvSpPr/>
+            <p:nvPr/>
+          </p:nvSpPr>
+          <p:spPr>
+            <a:xfrm>
+              <a:off x="887106" y="5144686"/>
+              <a:ext cx="7660515" cy="0"/>
+            </a:xfrm>
+            <a:custGeom>
+              <a:avLst/>
+              <a:pathLst>
+                <a:path w="7660515" h="0">
+                  <a:moveTo>
+                    <a:pt x="0" y="0"/>
+                  </a:moveTo>
+                  <a:lnTo>
+                    <a:pt x="7660515" y="0"/>
+                  </a:lnTo>
+                  <a:lnTo>
+                    <a:pt x="7660515" y="0"/>
+                  </a:lnTo>
+                </a:path>
+              </a:pathLst>
+            </a:custGeom>
+            <a:ln w="6775" cap="flat">
+              <a:solidFill>
+                <a:srgbClr val="EBEBEB">
+                  <a:alpha val="100000"/>
+                </a:srgbClr>
+              </a:solidFill>
+              <a:prstDash val="solid"/>
+              <a:round/>
+            </a:ln>
+          </p:spPr>
+          <p:txBody>
+            <a:bodyPr/>
+            <a:lstStyle/>
+            <a:p/>
+          </p:txBody>
+        </p:sp>
+        <p:sp>
+          <p:nvSpPr>
+            <p:cNvPr id="41" name="pl41"/>
+            <p:cNvSpPr/>
+            <p:nvPr/>
+          </p:nvSpPr>
+          <p:spPr>
+            <a:xfrm>
+              <a:off x="887106" y="4845352"/>
+              <a:ext cx="7660515" cy="0"/>
+            </a:xfrm>
+            <a:custGeom>
+              <a:avLst/>
+              <a:pathLst>
+                <a:path w="7660515" h="0">
+                  <a:moveTo>
+                    <a:pt x="0" y="0"/>
+                  </a:moveTo>
+                  <a:lnTo>
+                    <a:pt x="7660515" y="0"/>
+                  </a:lnTo>
+                  <a:lnTo>
+                    <a:pt x="7660515" y="0"/>
+                  </a:lnTo>
+                </a:path>
+              </a:pathLst>
+            </a:custGeom>
+            <a:ln w="6775" cap="flat">
+              <a:solidFill>
+                <a:srgbClr val="EBEBEB">
+                  <a:alpha val="100000"/>
+                </a:srgbClr>
+              </a:solidFill>
+              <a:prstDash val="solid"/>
+              <a:round/>
+            </a:ln>
+          </p:spPr>
+          <p:txBody>
+            <a:bodyPr/>
+            <a:lstStyle/>
+            <a:p/>
+          </p:txBody>
+        </p:sp>
+        <p:sp>
+          <p:nvSpPr>
+            <p:cNvPr id="42" name="pl42"/>
+            <p:cNvSpPr/>
+            <p:nvPr/>
+          </p:nvSpPr>
+          <p:spPr>
+            <a:xfrm>
+              <a:off x="887106" y="4546018"/>
+              <a:ext cx="7660515" cy="0"/>
+            </a:xfrm>
+            <a:custGeom>
+              <a:avLst/>
+              <a:pathLst>
+                <a:path w="7660515" h="0">
+                  <a:moveTo>
+                    <a:pt x="0" y="0"/>
+                  </a:moveTo>
+                  <a:lnTo>
+                    <a:pt x="7660515" y="0"/>
+                  </a:lnTo>
+                  <a:lnTo>
+                    <a:pt x="7660515" y="0"/>
+                  </a:lnTo>
+                </a:path>
+              </a:pathLst>
+            </a:custGeom>
+            <a:ln w="6775" cap="flat">
+              <a:solidFill>
+                <a:srgbClr val="EBEBEB">
+                  <a:alpha val="100000"/>
+                </a:srgbClr>
+              </a:solidFill>
+              <a:prstDash val="solid"/>
+              <a:round/>
+            </a:ln>
+          </p:spPr>
+          <p:txBody>
+            <a:bodyPr/>
+            <a:lstStyle/>
+            <a:p/>
+          </p:txBody>
+        </p:sp>
+        <p:sp>
+          <p:nvSpPr>
+            <p:cNvPr id="43" name="pl43"/>
+            <p:cNvSpPr/>
+            <p:nvPr/>
+          </p:nvSpPr>
+          <p:spPr>
+            <a:xfrm>
+              <a:off x="1636763" y="4336484"/>
+              <a:ext cx="0" cy="1317069"/>
+            </a:xfrm>
+            <a:custGeom>
+              <a:avLst/>
+              <a:pathLst>
+                <a:path w="0" h="1317069">
+                  <a:moveTo>
+                    <a:pt x="0" y="1317069"/>
+                  </a:moveTo>
+                  <a:lnTo>
+                    <a:pt x="0" y="0"/>
+                  </a:lnTo>
+                  <a:lnTo>
+                    <a:pt x="0" y="0"/>
+                  </a:lnTo>
+                </a:path>
+              </a:pathLst>
+            </a:custGeom>
+            <a:ln w="6775" cap="flat">
+              <a:solidFill>
+                <a:srgbClr val="EBEBEB">
+                  <a:alpha val="100000"/>
+                </a:srgbClr>
+              </a:solidFill>
+              <a:prstDash val="solid"/>
+              <a:round/>
+            </a:ln>
+          </p:spPr>
+          <p:txBody>
+            <a:bodyPr/>
+            <a:lstStyle/>
+            <a:p/>
+          </p:txBody>
+        </p:sp>
+        <p:sp>
+          <p:nvSpPr>
+            <p:cNvPr id="44" name="pl44"/>
+            <p:cNvSpPr/>
+            <p:nvPr/>
+          </p:nvSpPr>
+          <p:spPr>
+            <a:xfrm>
+              <a:off x="2482050" y="4336484"/>
+              <a:ext cx="0" cy="1317069"/>
+            </a:xfrm>
+            <a:custGeom>
+              <a:avLst/>
+              <a:pathLst>
+                <a:path w="0" h="1317069">
+                  <a:moveTo>
+                    <a:pt x="0" y="1317069"/>
+                  </a:moveTo>
+                  <a:lnTo>
+                    <a:pt x="0" y="0"/>
+                  </a:lnTo>
+                  <a:lnTo>
+                    <a:pt x="0" y="0"/>
+                  </a:lnTo>
+                </a:path>
+              </a:pathLst>
+            </a:custGeom>
+            <a:ln w="6775" cap="flat">
+              <a:solidFill>
+                <a:srgbClr val="EBEBEB">
+                  <a:alpha val="100000"/>
+                </a:srgbClr>
+              </a:solidFill>
+              <a:prstDash val="solid"/>
+              <a:round/>
+            </a:ln>
+          </p:spPr>
+          <p:txBody>
+            <a:bodyPr/>
+            <a:lstStyle/>
+            <a:p/>
+          </p:txBody>
+        </p:sp>
+        <p:sp>
+          <p:nvSpPr>
+            <p:cNvPr id="45" name="pl45"/>
+            <p:cNvSpPr/>
+            <p:nvPr/>
+          </p:nvSpPr>
+          <p:spPr>
+            <a:xfrm>
+              <a:off x="3327336" y="4336484"/>
+              <a:ext cx="0" cy="1317069"/>
+            </a:xfrm>
+            <a:custGeom>
+              <a:avLst/>
+              <a:pathLst>
+                <a:path w="0" h="1317069">
+                  <a:moveTo>
+                    <a:pt x="0" y="1317069"/>
+                  </a:moveTo>
+                  <a:lnTo>
+                    <a:pt x="0" y="0"/>
+                  </a:lnTo>
+                  <a:lnTo>
+                    <a:pt x="0" y="0"/>
+                  </a:lnTo>
+                </a:path>
+              </a:pathLst>
+            </a:custGeom>
+            <a:ln w="6775" cap="flat">
+              <a:solidFill>
+                <a:srgbClr val="EBEBEB">
+                  <a:alpha val="100000"/>
+                </a:srgbClr>
+              </a:solidFill>
+              <a:prstDash val="solid"/>
+              <a:round/>
+            </a:ln>
+          </p:spPr>
+          <p:txBody>
+            <a:bodyPr/>
+            <a:lstStyle/>
+            <a:p/>
+          </p:txBody>
+        </p:sp>
+        <p:sp>
+          <p:nvSpPr>
+            <p:cNvPr id="46" name="pl46"/>
+            <p:cNvSpPr/>
+            <p:nvPr/>
+          </p:nvSpPr>
+          <p:spPr>
+            <a:xfrm>
+              <a:off x="4172622" y="4336484"/>
+              <a:ext cx="0" cy="1317069"/>
+            </a:xfrm>
+            <a:custGeom>
+              <a:avLst/>
+              <a:pathLst>
+                <a:path w="0" h="1317069">
+                  <a:moveTo>
+                    <a:pt x="0" y="1317069"/>
+                  </a:moveTo>
+                  <a:lnTo>
+                    <a:pt x="0" y="0"/>
+                  </a:lnTo>
+                  <a:lnTo>
+                    <a:pt x="0" y="0"/>
+                  </a:lnTo>
+                </a:path>
+              </a:pathLst>
+            </a:custGeom>
+            <a:ln w="6775" cap="flat">
+              <a:solidFill>
+                <a:srgbClr val="EBEBEB">
+                  <a:alpha val="100000"/>
+                </a:srgbClr>
+              </a:solidFill>
+              <a:prstDash val="solid"/>
+              <a:round/>
+            </a:ln>
+          </p:spPr>
+          <p:txBody>
+            <a:bodyPr/>
+            <a:lstStyle/>
+            <a:p/>
+          </p:txBody>
+        </p:sp>
+        <p:sp>
+          <p:nvSpPr>
+            <p:cNvPr id="47" name="pl47"/>
+            <p:cNvSpPr/>
+            <p:nvPr/>
+          </p:nvSpPr>
+          <p:spPr>
+            <a:xfrm>
+              <a:off x="5017909" y="4336484"/>
+              <a:ext cx="0" cy="1317069"/>
+            </a:xfrm>
+            <a:custGeom>
+              <a:avLst/>
+              <a:pathLst>
+                <a:path w="0" h="1317069">
+                  <a:moveTo>
+                    <a:pt x="0" y="1317069"/>
+                  </a:moveTo>
+                  <a:lnTo>
+                    <a:pt x="0" y="0"/>
+                  </a:lnTo>
+                  <a:lnTo>
+                    <a:pt x="0" y="0"/>
+                  </a:lnTo>
+                </a:path>
+              </a:pathLst>
+            </a:custGeom>
+            <a:ln w="6775" cap="flat">
+              <a:solidFill>
+                <a:srgbClr val="EBEBEB">
+                  <a:alpha val="100000"/>
+                </a:srgbClr>
+              </a:solidFill>
+              <a:prstDash val="solid"/>
+              <a:round/>
+            </a:ln>
+          </p:spPr>
+          <p:txBody>
+            <a:bodyPr/>
+            <a:lstStyle/>
+            <a:p/>
+          </p:txBody>
+        </p:sp>
+        <p:sp>
+          <p:nvSpPr>
+            <p:cNvPr id="48" name="pl48"/>
+            <p:cNvSpPr/>
+            <p:nvPr/>
+          </p:nvSpPr>
+          <p:spPr>
+            <a:xfrm>
+              <a:off x="5863195" y="4336484"/>
+              <a:ext cx="0" cy="1317069"/>
+            </a:xfrm>
+            <a:custGeom>
+              <a:avLst/>
+              <a:pathLst>
+                <a:path w="0" h="1317069">
+                  <a:moveTo>
+                    <a:pt x="0" y="1317069"/>
+                  </a:moveTo>
+                  <a:lnTo>
+                    <a:pt x="0" y="0"/>
+                  </a:lnTo>
+                  <a:lnTo>
+                    <a:pt x="0" y="0"/>
+                  </a:lnTo>
+                </a:path>
+              </a:pathLst>
+            </a:custGeom>
+            <a:ln w="6775" cap="flat">
+              <a:solidFill>
+                <a:srgbClr val="EBEBEB">
+                  <a:alpha val="100000"/>
+                </a:srgbClr>
+              </a:solidFill>
+              <a:prstDash val="solid"/>
+              <a:round/>
+            </a:ln>
+          </p:spPr>
+          <p:txBody>
+            <a:bodyPr/>
+            <a:lstStyle/>
+            <a:p/>
+          </p:txBody>
+        </p:sp>
+        <p:sp>
+          <p:nvSpPr>
+            <p:cNvPr id="49" name="pl49"/>
+            <p:cNvSpPr/>
+            <p:nvPr/>
+          </p:nvSpPr>
+          <p:spPr>
+            <a:xfrm>
+              <a:off x="6708482" y="4336484"/>
+              <a:ext cx="0" cy="1317069"/>
+            </a:xfrm>
+            <a:custGeom>
+              <a:avLst/>
+              <a:pathLst>
+                <a:path w="0" h="1317069">
+                  <a:moveTo>
+                    <a:pt x="0" y="1317069"/>
+                  </a:moveTo>
+                  <a:lnTo>
+                    <a:pt x="0" y="0"/>
+                  </a:lnTo>
+                  <a:lnTo>
+                    <a:pt x="0" y="0"/>
+                  </a:lnTo>
+                </a:path>
+              </a:pathLst>
+            </a:custGeom>
+            <a:ln w="6775" cap="flat">
+              <a:solidFill>
+                <a:srgbClr val="EBEBEB">
+                  <a:alpha val="100000"/>
+                </a:srgbClr>
+              </a:solidFill>
+              <a:prstDash val="solid"/>
+              <a:round/>
+            </a:ln>
+          </p:spPr>
+          <p:txBody>
+            <a:bodyPr/>
+            <a:lstStyle/>
+            <a:p/>
+          </p:txBody>
+        </p:sp>
+        <p:sp>
+          <p:nvSpPr>
+            <p:cNvPr id="50" name="pl50"/>
+            <p:cNvSpPr/>
+            <p:nvPr/>
+          </p:nvSpPr>
+          <p:spPr>
+            <a:xfrm>
+              <a:off x="7553768" y="4336484"/>
+              <a:ext cx="0" cy="1317069"/>
+            </a:xfrm>
+            <a:custGeom>
+              <a:avLst/>
+              <a:pathLst>
+                <a:path w="0" h="1317069">
+                  <a:moveTo>
+                    <a:pt x="0" y="1317069"/>
+                  </a:moveTo>
+                  <a:lnTo>
+                    <a:pt x="0" y="0"/>
+                  </a:lnTo>
+                  <a:lnTo>
+                    <a:pt x="0" y="0"/>
+                  </a:lnTo>
+                </a:path>
+              </a:pathLst>
+            </a:custGeom>
+            <a:ln w="6775" cap="flat">
+              <a:solidFill>
+                <a:srgbClr val="EBEBEB">
+                  <a:alpha val="100000"/>
+                </a:srgbClr>
+              </a:solidFill>
+              <a:prstDash val="solid"/>
+              <a:round/>
+            </a:ln>
+          </p:spPr>
+          <p:txBody>
+            <a:bodyPr/>
+            <a:lstStyle/>
+            <a:p/>
+          </p:txBody>
+        </p:sp>
+        <p:sp>
+          <p:nvSpPr>
+            <p:cNvPr id="51" name="pl51"/>
+            <p:cNvSpPr/>
+            <p:nvPr/>
+          </p:nvSpPr>
+          <p:spPr>
+            <a:xfrm>
+              <a:off x="8399054" y="4336484"/>
+              <a:ext cx="0" cy="1317069"/>
+            </a:xfrm>
+            <a:custGeom>
+              <a:avLst/>
+              <a:pathLst>
+                <a:path w="0" h="1317069">
+                  <a:moveTo>
+                    <a:pt x="0" y="1317069"/>
+                  </a:moveTo>
+                  <a:lnTo>
+                    <a:pt x="0" y="0"/>
+                  </a:lnTo>
+                  <a:lnTo>
+                    <a:pt x="0" y="0"/>
+                  </a:lnTo>
+                </a:path>
+              </a:pathLst>
+            </a:custGeom>
+            <a:ln w="6775" cap="flat">
+              <a:solidFill>
+                <a:srgbClr val="EBEBEB">
+                  <a:alpha val="100000"/>
+                </a:srgbClr>
+              </a:solidFill>
+              <a:prstDash val="solid"/>
+              <a:round/>
+            </a:ln>
+          </p:spPr>
+          <p:txBody>
+            <a:bodyPr/>
+            <a:lstStyle/>
+            <a:p/>
+          </p:txBody>
+        </p:sp>
+        <p:sp>
+          <p:nvSpPr>
+            <p:cNvPr id="52" name="pl52"/>
+            <p:cNvSpPr/>
+            <p:nvPr/>
+          </p:nvSpPr>
+          <p:spPr>
+            <a:xfrm>
+              <a:off x="887106" y="5593686"/>
+              <a:ext cx="7660515" cy="0"/>
+            </a:xfrm>
+            <a:custGeom>
+              <a:avLst/>
+              <a:pathLst>
+                <a:path w="7660515" h="0">
+                  <a:moveTo>
+                    <a:pt x="0" y="0"/>
+                  </a:moveTo>
+                  <a:lnTo>
+                    <a:pt x="7660515" y="0"/>
+                  </a:lnTo>
+                  <a:lnTo>
+                    <a:pt x="7660515" y="0"/>
+                  </a:lnTo>
+                </a:path>
+              </a:pathLst>
+            </a:custGeom>
+            <a:ln w="13550" cap="flat">
+              <a:solidFill>
+                <a:srgbClr val="EBEBEB">
+                  <a:alpha val="100000"/>
+                </a:srgbClr>
+              </a:solidFill>
+              <a:prstDash val="solid"/>
+              <a:round/>
+            </a:ln>
+          </p:spPr>
+          <p:txBody>
+            <a:bodyPr/>
+            <a:lstStyle/>
+            <a:p/>
+          </p:txBody>
+        </p:sp>
+        <p:sp>
+          <p:nvSpPr>
+            <p:cNvPr id="53" name="pl53"/>
+            <p:cNvSpPr/>
+            <p:nvPr/>
+          </p:nvSpPr>
+          <p:spPr>
+            <a:xfrm>
+              <a:off x="887106" y="5294352"/>
+              <a:ext cx="7660515" cy="0"/>
+            </a:xfrm>
+            <a:custGeom>
+              <a:avLst/>
+              <a:pathLst>
+                <a:path w="7660515" h="0">
+                  <a:moveTo>
+                    <a:pt x="0" y="0"/>
+                  </a:moveTo>
+                  <a:lnTo>
+                    <a:pt x="7660515" y="0"/>
+                  </a:lnTo>
+                  <a:lnTo>
+                    <a:pt x="7660515" y="0"/>
+                  </a:lnTo>
+                </a:path>
+              </a:pathLst>
+            </a:custGeom>
+            <a:ln w="13550" cap="flat">
+              <a:solidFill>
+                <a:srgbClr val="EBEBEB">
+                  <a:alpha val="100000"/>
+                </a:srgbClr>
+              </a:solidFill>
+              <a:prstDash val="solid"/>
+              <a:round/>
+            </a:ln>
+          </p:spPr>
+          <p:txBody>
+            <a:bodyPr/>
+            <a:lstStyle/>
+            <a:p/>
+          </p:txBody>
+        </p:sp>
+        <p:sp>
+          <p:nvSpPr>
+            <p:cNvPr id="54" name="pl54"/>
+            <p:cNvSpPr/>
+            <p:nvPr/>
+          </p:nvSpPr>
+          <p:spPr>
+            <a:xfrm>
+              <a:off x="887106" y="4995019"/>
+              <a:ext cx="7660515" cy="0"/>
+            </a:xfrm>
+            <a:custGeom>
+              <a:avLst/>
+              <a:pathLst>
+                <a:path w="7660515" h="0">
+                  <a:moveTo>
+                    <a:pt x="0" y="0"/>
+                  </a:moveTo>
+                  <a:lnTo>
+                    <a:pt x="7660515" y="0"/>
+                  </a:lnTo>
+                  <a:lnTo>
+                    <a:pt x="7660515" y="0"/>
+                  </a:lnTo>
+                </a:path>
+              </a:pathLst>
+            </a:custGeom>
+            <a:ln w="13550" cap="flat">
+              <a:solidFill>
+                <a:srgbClr val="EBEBEB">
+                  <a:alpha val="100000"/>
+                </a:srgbClr>
+              </a:solidFill>
+              <a:prstDash val="solid"/>
+              <a:round/>
+            </a:ln>
+          </p:spPr>
+          <p:txBody>
+            <a:bodyPr/>
+            <a:lstStyle/>
+            <a:p/>
+          </p:txBody>
+        </p:sp>
+        <p:sp>
+          <p:nvSpPr>
+            <p:cNvPr id="55" name="pl55"/>
+            <p:cNvSpPr/>
+            <p:nvPr/>
+          </p:nvSpPr>
+          <p:spPr>
+            <a:xfrm>
+              <a:off x="887106" y="4695685"/>
+              <a:ext cx="7660515" cy="0"/>
+            </a:xfrm>
+            <a:custGeom>
+              <a:avLst/>
+              <a:pathLst>
+                <a:path w="7660515" h="0">
+                  <a:moveTo>
+                    <a:pt x="0" y="0"/>
+                  </a:moveTo>
+                  <a:lnTo>
+                    <a:pt x="7660515" y="0"/>
+                  </a:lnTo>
+                  <a:lnTo>
+                    <a:pt x="7660515" y="0"/>
+                  </a:lnTo>
+                </a:path>
+              </a:pathLst>
+            </a:custGeom>
+            <a:ln w="13550" cap="flat">
+              <a:solidFill>
+                <a:srgbClr val="EBEBEB">
+                  <a:alpha val="100000"/>
+                </a:srgbClr>
+              </a:solidFill>
+              <a:prstDash val="solid"/>
+              <a:round/>
+            </a:ln>
+          </p:spPr>
+          <p:txBody>
+            <a:bodyPr/>
+            <a:lstStyle/>
+            <a:p/>
+          </p:txBody>
+        </p:sp>
+        <p:sp>
+          <p:nvSpPr>
+            <p:cNvPr id="56" name="pl56"/>
+            <p:cNvSpPr/>
+            <p:nvPr/>
+          </p:nvSpPr>
+          <p:spPr>
+            <a:xfrm>
+              <a:off x="887106" y="4396351"/>
+              <a:ext cx="7660515" cy="0"/>
+            </a:xfrm>
+            <a:custGeom>
+              <a:avLst/>
+              <a:pathLst>
+                <a:path w="7660515" h="0">
+                  <a:moveTo>
+                    <a:pt x="0" y="0"/>
+                  </a:moveTo>
+                  <a:lnTo>
+                    <a:pt x="7660515" y="0"/>
+                  </a:lnTo>
+                  <a:lnTo>
+                    <a:pt x="7660515" y="0"/>
+                  </a:lnTo>
+                </a:path>
+              </a:pathLst>
+            </a:custGeom>
+            <a:ln w="13550" cap="flat">
+              <a:solidFill>
+                <a:srgbClr val="EBEBEB">
+                  <a:alpha val="100000"/>
+                </a:srgbClr>
+              </a:solidFill>
+              <a:prstDash val="solid"/>
+              <a:round/>
+            </a:ln>
+          </p:spPr>
+          <p:txBody>
+            <a:bodyPr/>
+            <a:lstStyle/>
+            <a:p/>
+          </p:txBody>
+        </p:sp>
+        <p:sp>
+          <p:nvSpPr>
+            <p:cNvPr id="57" name="pl57"/>
+            <p:cNvSpPr/>
+            <p:nvPr/>
+          </p:nvSpPr>
+          <p:spPr>
+            <a:xfrm>
+              <a:off x="1214120" y="4336484"/>
+              <a:ext cx="0" cy="1317069"/>
+            </a:xfrm>
+            <a:custGeom>
+              <a:avLst/>
+              <a:pathLst>
+                <a:path w="0" h="1317069">
+                  <a:moveTo>
+                    <a:pt x="0" y="1317069"/>
+                  </a:moveTo>
+                  <a:lnTo>
+                    <a:pt x="0" y="0"/>
+                  </a:lnTo>
+                  <a:lnTo>
+                    <a:pt x="0" y="0"/>
+                  </a:lnTo>
+                </a:path>
+              </a:pathLst>
+            </a:custGeom>
+            <a:ln w="13550" cap="flat">
+              <a:solidFill>
+                <a:srgbClr val="EBEBEB">
+                  <a:alpha val="100000"/>
+                </a:srgbClr>
+              </a:solidFill>
+              <a:prstDash val="solid"/>
+              <a:round/>
+            </a:ln>
+          </p:spPr>
+          <p:txBody>
+            <a:bodyPr/>
+            <a:lstStyle/>
+            <a:p/>
+          </p:txBody>
+        </p:sp>
+        <p:sp>
+          <p:nvSpPr>
+            <p:cNvPr id="58" name="pl58"/>
+            <p:cNvSpPr/>
+            <p:nvPr/>
+          </p:nvSpPr>
+          <p:spPr>
+            <a:xfrm>
+              <a:off x="2059406" y="4336484"/>
+              <a:ext cx="0" cy="1317069"/>
+            </a:xfrm>
+            <a:custGeom>
+              <a:avLst/>
+              <a:pathLst>
+                <a:path w="0" h="1317069">
+                  <a:moveTo>
+                    <a:pt x="0" y="1317069"/>
+                  </a:moveTo>
+                  <a:lnTo>
+                    <a:pt x="0" y="0"/>
+                  </a:lnTo>
+                  <a:lnTo>
+                    <a:pt x="0" y="0"/>
+                  </a:lnTo>
+                </a:path>
+              </a:pathLst>
+            </a:custGeom>
+            <a:ln w="13550" cap="flat">
+              <a:solidFill>
+                <a:srgbClr val="EBEBEB">
+                  <a:alpha val="100000"/>
+                </a:srgbClr>
+              </a:solidFill>
+              <a:prstDash val="solid"/>
+              <a:round/>
+            </a:ln>
+          </p:spPr>
+          <p:txBody>
+            <a:bodyPr/>
+            <a:lstStyle/>
+            <a:p/>
+          </p:txBody>
+        </p:sp>
+        <p:sp>
+          <p:nvSpPr>
+            <p:cNvPr id="59" name="pl59"/>
+            <p:cNvSpPr/>
+            <p:nvPr/>
+          </p:nvSpPr>
+          <p:spPr>
+            <a:xfrm>
+              <a:off x="2904693" y="4336484"/>
+              <a:ext cx="0" cy="1317069"/>
+            </a:xfrm>
+            <a:custGeom>
+              <a:avLst/>
+              <a:pathLst>
+                <a:path w="0" h="1317069">
+                  <a:moveTo>
+                    <a:pt x="0" y="1317069"/>
+                  </a:moveTo>
+                  <a:lnTo>
+                    <a:pt x="0" y="0"/>
+                  </a:lnTo>
+                  <a:lnTo>
+                    <a:pt x="0" y="0"/>
+                  </a:lnTo>
+                </a:path>
+              </a:pathLst>
+            </a:custGeom>
+            <a:ln w="13550" cap="flat">
+              <a:solidFill>
+                <a:srgbClr val="EBEBEB">
+                  <a:alpha val="100000"/>
+                </a:srgbClr>
+              </a:solidFill>
+              <a:prstDash val="solid"/>
+              <a:round/>
+            </a:ln>
+          </p:spPr>
+          <p:txBody>
+            <a:bodyPr/>
+            <a:lstStyle/>
+            <a:p/>
+          </p:txBody>
+        </p:sp>
+        <p:sp>
+          <p:nvSpPr>
+            <p:cNvPr id="60" name="pl60"/>
+            <p:cNvSpPr/>
+            <p:nvPr/>
+          </p:nvSpPr>
+          <p:spPr>
+            <a:xfrm>
+              <a:off x="3749979" y="4336484"/>
+              <a:ext cx="0" cy="1317069"/>
+            </a:xfrm>
+            <a:custGeom>
+              <a:avLst/>
+              <a:pathLst>
+                <a:path w="0" h="1317069">
+                  <a:moveTo>
+                    <a:pt x="0" y="1317069"/>
+                  </a:moveTo>
+                  <a:lnTo>
+                    <a:pt x="0" y="0"/>
+                  </a:lnTo>
+                  <a:lnTo>
+                    <a:pt x="0" y="0"/>
+                  </a:lnTo>
+                </a:path>
+              </a:pathLst>
+            </a:custGeom>
+            <a:ln w="13550" cap="flat">
+              <a:solidFill>
+                <a:srgbClr val="EBEBEB">
+                  <a:alpha val="100000"/>
+                </a:srgbClr>
+              </a:solidFill>
+              <a:prstDash val="solid"/>
+              <a:round/>
+            </a:ln>
+          </p:spPr>
+          <p:txBody>
+            <a:bodyPr/>
+            <a:lstStyle/>
+            <a:p/>
+          </p:txBody>
+        </p:sp>
+        <p:sp>
+          <p:nvSpPr>
+            <p:cNvPr id="61" name="pl61"/>
+            <p:cNvSpPr/>
+            <p:nvPr/>
+          </p:nvSpPr>
+          <p:spPr>
+            <a:xfrm>
+              <a:off x="4595266" y="4336484"/>
+              <a:ext cx="0" cy="1317069"/>
+            </a:xfrm>
+            <a:custGeom>
+              <a:avLst/>
+              <a:pathLst>
+                <a:path w="0" h="1317069">
+                  <a:moveTo>
+                    <a:pt x="0" y="1317069"/>
+                  </a:moveTo>
+                  <a:lnTo>
+                    <a:pt x="0" y="0"/>
+                  </a:lnTo>
+                  <a:lnTo>
+                    <a:pt x="0" y="0"/>
+                  </a:lnTo>
+                </a:path>
+              </a:pathLst>
+            </a:custGeom>
+            <a:ln w="13550" cap="flat">
+              <a:solidFill>
+                <a:srgbClr val="EBEBEB">
+                  <a:alpha val="100000"/>
+                </a:srgbClr>
+              </a:solidFill>
+              <a:prstDash val="solid"/>
+              <a:round/>
+            </a:ln>
+          </p:spPr>
+          <p:txBody>
+            <a:bodyPr/>
+            <a:lstStyle/>
+            <a:p/>
+          </p:txBody>
+        </p:sp>
+        <p:sp>
+          <p:nvSpPr>
+            <p:cNvPr id="62" name="pl62"/>
+            <p:cNvSpPr/>
+            <p:nvPr/>
+          </p:nvSpPr>
+          <p:spPr>
+            <a:xfrm>
+              <a:off x="5440552" y="4336484"/>
+              <a:ext cx="0" cy="1317069"/>
+            </a:xfrm>
+            <a:custGeom>
+              <a:avLst/>
+              <a:pathLst>
+                <a:path w="0" h="1317069">
+                  <a:moveTo>
+                    <a:pt x="0" y="1317069"/>
+                  </a:moveTo>
+                  <a:lnTo>
+                    <a:pt x="0" y="0"/>
+                  </a:lnTo>
+                  <a:lnTo>
+                    <a:pt x="0" y="0"/>
+                  </a:lnTo>
+                </a:path>
+              </a:pathLst>
+            </a:custGeom>
+            <a:ln w="13550" cap="flat">
+              <a:solidFill>
+                <a:srgbClr val="EBEBEB">
+                  <a:alpha val="100000"/>
+                </a:srgbClr>
+              </a:solidFill>
+              <a:prstDash val="solid"/>
+              <a:round/>
+            </a:ln>
+          </p:spPr>
+          <p:txBody>
+            <a:bodyPr/>
+            <a:lstStyle/>
+            <a:p/>
+          </p:txBody>
+        </p:sp>
+        <p:sp>
+          <p:nvSpPr>
+            <p:cNvPr id="63" name="pl63"/>
+            <p:cNvSpPr/>
+            <p:nvPr/>
+          </p:nvSpPr>
+          <p:spPr>
+            <a:xfrm>
+              <a:off x="6285838" y="4336484"/>
+              <a:ext cx="0" cy="1317069"/>
+            </a:xfrm>
+            <a:custGeom>
+              <a:avLst/>
+              <a:pathLst>
+                <a:path w="0" h="1317069">
+                  <a:moveTo>
+                    <a:pt x="0" y="1317069"/>
+                  </a:moveTo>
+                  <a:lnTo>
+                    <a:pt x="0" y="0"/>
+                  </a:lnTo>
+                  <a:lnTo>
+                    <a:pt x="0" y="0"/>
+                  </a:lnTo>
+                </a:path>
+              </a:pathLst>
+            </a:custGeom>
+            <a:ln w="13550" cap="flat">
+              <a:solidFill>
+                <a:srgbClr val="EBEBEB">
+                  <a:alpha val="100000"/>
+                </a:srgbClr>
+              </a:solidFill>
+              <a:prstDash val="solid"/>
+              <a:round/>
+            </a:ln>
+          </p:spPr>
+          <p:txBody>
+            <a:bodyPr/>
+            <a:lstStyle/>
+            <a:p/>
+          </p:txBody>
+        </p:sp>
+        <p:sp>
+          <p:nvSpPr>
+            <p:cNvPr id="64" name="pl64"/>
+            <p:cNvSpPr/>
+            <p:nvPr/>
+          </p:nvSpPr>
+          <p:spPr>
+            <a:xfrm>
+              <a:off x="7131125" y="4336484"/>
+              <a:ext cx="0" cy="1317069"/>
+            </a:xfrm>
+            <a:custGeom>
+              <a:avLst/>
+              <a:pathLst>
+                <a:path w="0" h="1317069">
+                  <a:moveTo>
+                    <a:pt x="0" y="1317069"/>
+                  </a:moveTo>
+                  <a:lnTo>
+                    <a:pt x="0" y="0"/>
+                  </a:lnTo>
+                  <a:lnTo>
+                    <a:pt x="0" y="0"/>
+                  </a:lnTo>
+                </a:path>
+              </a:pathLst>
+            </a:custGeom>
+            <a:ln w="13550" cap="flat">
+              <a:solidFill>
+                <a:srgbClr val="EBEBEB">
+                  <a:alpha val="100000"/>
+                </a:srgbClr>
+              </a:solidFill>
+              <a:prstDash val="solid"/>
+              <a:round/>
+            </a:ln>
+          </p:spPr>
+          <p:txBody>
+            <a:bodyPr/>
+            <a:lstStyle/>
+            <a:p/>
+          </p:txBody>
+        </p:sp>
+        <p:sp>
+          <p:nvSpPr>
+            <p:cNvPr id="65" name="pl65"/>
+            <p:cNvSpPr/>
+            <p:nvPr/>
+          </p:nvSpPr>
+          <p:spPr>
+            <a:xfrm>
+              <a:off x="7976411" y="4336484"/>
+              <a:ext cx="0" cy="1317069"/>
+            </a:xfrm>
+            <a:custGeom>
+              <a:avLst/>
+              <a:pathLst>
+                <a:path w="0" h="1317069">
+                  <a:moveTo>
+                    <a:pt x="0" y="1317069"/>
+                  </a:moveTo>
+                  <a:lnTo>
+                    <a:pt x="0" y="0"/>
+                  </a:lnTo>
+                  <a:lnTo>
+                    <a:pt x="0" y="0"/>
+                  </a:lnTo>
+                </a:path>
+              </a:pathLst>
+            </a:custGeom>
+            <a:ln w="13550" cap="flat">
+              <a:solidFill>
+                <a:srgbClr val="EBEBEB">
+                  <a:alpha val="100000"/>
+                </a:srgbClr>
+              </a:solidFill>
+              <a:prstDash val="solid"/>
+              <a:round/>
+            </a:ln>
+          </p:spPr>
+          <p:txBody>
+            <a:bodyPr/>
+            <a:lstStyle/>
+            <a:p/>
+          </p:txBody>
+        </p:sp>
+        <p:sp>
+          <p:nvSpPr>
+            <p:cNvPr id="66" name="pg66"/>
+            <p:cNvSpPr/>
+            <p:nvPr/>
+          </p:nvSpPr>
+          <p:spPr>
+            <a:xfrm>
+              <a:off x="1235312" y="4336484"/>
+              <a:ext cx="6964104" cy="1245368"/>
+            </a:xfrm>
+            <a:custGeom>
+              <a:avLst/>
+              <a:pathLst>
+                <a:path w="6964104" h="1245368">
+                  <a:moveTo>
+                    <a:pt x="1752164" y="0"/>
+                  </a:moveTo>
+                  <a:lnTo>
+                    <a:pt x="1758612" y="7445"/>
+                  </a:lnTo>
+                  <a:lnTo>
+                    <a:pt x="1828956" y="83714"/>
+                  </a:lnTo>
+                  <a:lnTo>
+                    <a:pt x="1899301" y="155329"/>
+                  </a:lnTo>
+                  <a:lnTo>
+                    <a:pt x="1969645" y="222574"/>
+                  </a:lnTo>
+                  <a:lnTo>
+                    <a:pt x="2039990" y="285715"/>
+                  </a:lnTo>
+                  <a:lnTo>
+                    <a:pt x="2110334" y="345003"/>
+                  </a:lnTo>
+                  <a:lnTo>
+                    <a:pt x="2180679" y="400672"/>
+                  </a:lnTo>
+                  <a:lnTo>
+                    <a:pt x="2251023" y="452944"/>
+                  </a:lnTo>
+                  <a:lnTo>
+                    <a:pt x="2321368" y="502026"/>
+                  </a:lnTo>
+                  <a:lnTo>
+                    <a:pt x="2391712" y="548113"/>
+                  </a:lnTo>
+                  <a:lnTo>
+                    <a:pt x="2462057" y="591387"/>
+                  </a:lnTo>
+                  <a:lnTo>
+                    <a:pt x="2532401" y="632020"/>
+                  </a:lnTo>
+                  <a:lnTo>
+                    <a:pt x="2602746" y="670173"/>
+                  </a:lnTo>
+                  <a:lnTo>
+                    <a:pt x="2673090" y="705998"/>
+                  </a:lnTo>
+                  <a:lnTo>
+                    <a:pt x="2743435" y="739637"/>
+                  </a:lnTo>
+                  <a:lnTo>
+                    <a:pt x="2813779" y="771223"/>
+                  </a:lnTo>
+                  <a:lnTo>
+                    <a:pt x="2884124" y="800881"/>
+                  </a:lnTo>
+                  <a:lnTo>
+                    <a:pt x="2954468" y="828729"/>
+                  </a:lnTo>
+                  <a:lnTo>
+                    <a:pt x="3024813" y="854878"/>
+                  </a:lnTo>
+                  <a:lnTo>
+                    <a:pt x="3095157" y="879431"/>
+                  </a:lnTo>
+                  <a:lnTo>
+                    <a:pt x="3165502" y="902485"/>
+                  </a:lnTo>
+                  <a:lnTo>
+                    <a:pt x="3235846" y="924133"/>
+                  </a:lnTo>
+                  <a:lnTo>
+                    <a:pt x="3306191" y="944459"/>
+                  </a:lnTo>
+                  <a:lnTo>
+                    <a:pt x="3376535" y="960156"/>
+                  </a:lnTo>
+                  <a:lnTo>
+                    <a:pt x="3446880" y="967557"/>
+                  </a:lnTo>
+                  <a:lnTo>
+                    <a:pt x="3517224" y="974773"/>
+                  </a:lnTo>
+                  <a:lnTo>
+                    <a:pt x="3587569" y="981810"/>
+                  </a:lnTo>
+                  <a:lnTo>
+                    <a:pt x="3657913" y="988671"/>
+                  </a:lnTo>
+                  <a:lnTo>
+                    <a:pt x="3728257" y="995362"/>
+                  </a:lnTo>
+                  <a:lnTo>
+                    <a:pt x="3798602" y="1001885"/>
+                  </a:lnTo>
+                  <a:lnTo>
+                    <a:pt x="3868946" y="1008247"/>
+                  </a:lnTo>
+                  <a:lnTo>
+                    <a:pt x="3939291" y="1014449"/>
+                  </a:lnTo>
+                  <a:lnTo>
+                    <a:pt x="4009635" y="1020497"/>
+                  </a:lnTo>
+                  <a:lnTo>
+                    <a:pt x="4079980" y="1026395"/>
+                  </a:lnTo>
+                  <a:lnTo>
+                    <a:pt x="4150324" y="1032145"/>
+                  </a:lnTo>
+                  <a:lnTo>
+                    <a:pt x="4220669" y="1037753"/>
+                  </a:lnTo>
+                  <a:lnTo>
+                    <a:pt x="4291013" y="1043220"/>
+                  </a:lnTo>
+                  <a:lnTo>
+                    <a:pt x="4361358" y="1048552"/>
+                  </a:lnTo>
+                  <a:lnTo>
+                    <a:pt x="4431702" y="1053750"/>
+                  </a:lnTo>
+                  <a:lnTo>
+                    <a:pt x="4502047" y="1058819"/>
+                  </a:lnTo>
+                  <a:lnTo>
+                    <a:pt x="4572391" y="1063762"/>
+                  </a:lnTo>
+                  <a:lnTo>
+                    <a:pt x="4642736" y="1068581"/>
+                  </a:lnTo>
+                  <a:lnTo>
+                    <a:pt x="4713080" y="1073281"/>
+                  </a:lnTo>
+                  <a:lnTo>
+                    <a:pt x="4783425" y="1077863"/>
+                  </a:lnTo>
+                  <a:lnTo>
+                    <a:pt x="4853769" y="1082331"/>
+                  </a:lnTo>
+                  <a:lnTo>
+                    <a:pt x="4924114" y="1086688"/>
+                  </a:lnTo>
+                  <a:lnTo>
+                    <a:pt x="4994458" y="1090937"/>
+                  </a:lnTo>
+                  <a:lnTo>
+                    <a:pt x="5064803" y="1095079"/>
+                  </a:lnTo>
+                  <a:lnTo>
+                    <a:pt x="5135147" y="1099118"/>
+                  </a:lnTo>
+                  <a:lnTo>
+                    <a:pt x="5205492" y="1103057"/>
+                  </a:lnTo>
+                  <a:lnTo>
+                    <a:pt x="5275836" y="1106898"/>
+                  </a:lnTo>
+                  <a:lnTo>
+                    <a:pt x="5346181" y="1110642"/>
+                  </a:lnTo>
+                  <a:lnTo>
+                    <a:pt x="5416525" y="1114294"/>
+                  </a:lnTo>
+                  <a:lnTo>
+                    <a:pt x="5486870" y="1117855"/>
+                  </a:lnTo>
+                  <a:lnTo>
+                    <a:pt x="5557214" y="1121326"/>
+                  </a:lnTo>
+                  <a:lnTo>
+                    <a:pt x="5627559" y="1124712"/>
+                  </a:lnTo>
+                  <a:lnTo>
+                    <a:pt x="5697903" y="1128013"/>
+                  </a:lnTo>
+                  <a:lnTo>
+                    <a:pt x="5768248" y="1131231"/>
+                  </a:lnTo>
+                  <a:lnTo>
+                    <a:pt x="5838592" y="1134370"/>
+                  </a:lnTo>
+                  <a:lnTo>
+                    <a:pt x="5908937" y="1137430"/>
+                  </a:lnTo>
+                  <a:lnTo>
+                    <a:pt x="5979281" y="1140414"/>
+                  </a:lnTo>
+                  <a:lnTo>
+                    <a:pt x="6049626" y="1143324"/>
+                  </a:lnTo>
+                  <a:lnTo>
+                    <a:pt x="6119970" y="1146161"/>
+                  </a:lnTo>
+                  <a:lnTo>
+                    <a:pt x="6190315" y="1148928"/>
+                  </a:lnTo>
+                  <a:lnTo>
+                    <a:pt x="6260659" y="1151626"/>
+                  </a:lnTo>
+                  <a:lnTo>
+                    <a:pt x="6331004" y="1154256"/>
+                  </a:lnTo>
+                  <a:lnTo>
+                    <a:pt x="6401348" y="1156821"/>
+                  </a:lnTo>
+                  <a:lnTo>
+                    <a:pt x="6471693" y="1159322"/>
+                  </a:lnTo>
+                  <a:lnTo>
+                    <a:pt x="6542037" y="1161761"/>
+                  </a:lnTo>
+                  <a:lnTo>
+                    <a:pt x="6612382" y="1164139"/>
+                  </a:lnTo>
+                  <a:lnTo>
+                    <a:pt x="6682726" y="1166457"/>
+                  </a:lnTo>
+                  <a:lnTo>
+                    <a:pt x="6753071" y="1168718"/>
+                  </a:lnTo>
+                  <a:lnTo>
+                    <a:pt x="6823415" y="1170923"/>
+                  </a:lnTo>
+                  <a:lnTo>
+                    <a:pt x="6893760" y="1173072"/>
+                  </a:lnTo>
+                  <a:lnTo>
+                    <a:pt x="6964104" y="1175168"/>
+                  </a:lnTo>
+                  <a:lnTo>
+                    <a:pt x="6964104" y="1245368"/>
+                  </a:lnTo>
+                  <a:lnTo>
+                    <a:pt x="6893760" y="1244599"/>
+                  </a:lnTo>
+                  <a:lnTo>
+                    <a:pt x="6823415" y="1243779"/>
+                  </a:lnTo>
+                  <a:lnTo>
+                    <a:pt x="6753071" y="1242907"/>
+                  </a:lnTo>
+                  <a:lnTo>
+                    <a:pt x="6682726" y="1241978"/>
+                  </a:lnTo>
+                  <a:lnTo>
+                    <a:pt x="6612382" y="1240989"/>
+                  </a:lnTo>
+                  <a:lnTo>
+                    <a:pt x="6542037" y="1239935"/>
+                  </a:lnTo>
+                  <a:lnTo>
+                    <a:pt x="6471693" y="1238813"/>
+                  </a:lnTo>
+                  <a:lnTo>
+                    <a:pt x="6401348" y="1237617"/>
+                  </a:lnTo>
+                  <a:lnTo>
+                    <a:pt x="6331004" y="1236345"/>
+                  </a:lnTo>
+                  <a:lnTo>
+                    <a:pt x="6260659" y="1234989"/>
+                  </a:lnTo>
+                  <a:lnTo>
+                    <a:pt x="6190315" y="1233545"/>
+                  </a:lnTo>
+                  <a:lnTo>
+                    <a:pt x="6119970" y="1232008"/>
+                  </a:lnTo>
+                  <a:lnTo>
+                    <a:pt x="6049626" y="1230370"/>
+                  </a:lnTo>
+                  <a:lnTo>
+                    <a:pt x="5979281" y="1228626"/>
+                  </a:lnTo>
+                  <a:lnTo>
+                    <a:pt x="5908937" y="1226769"/>
+                  </a:lnTo>
+                  <a:lnTo>
+                    <a:pt x="5838592" y="1224791"/>
+                  </a:lnTo>
+                  <a:lnTo>
+                    <a:pt x="5768248" y="1222685"/>
+                  </a:lnTo>
+                  <a:lnTo>
+                    <a:pt x="5697903" y="1220441"/>
+                  </a:lnTo>
+                  <a:lnTo>
+                    <a:pt x="5627559" y="1218052"/>
+                  </a:lnTo>
+                  <a:lnTo>
+                    <a:pt x="5557214" y="1215507"/>
+                  </a:lnTo>
+                  <a:lnTo>
+                    <a:pt x="5486870" y="1212798"/>
+                  </a:lnTo>
+                  <a:lnTo>
+                    <a:pt x="5416525" y="1209912"/>
+                  </a:lnTo>
+                  <a:lnTo>
+                    <a:pt x="5346181" y="1206838"/>
+                  </a:lnTo>
+                  <a:lnTo>
+                    <a:pt x="5275836" y="1203565"/>
+                  </a:lnTo>
+                  <a:lnTo>
+                    <a:pt x="5205492" y="1200079"/>
+                  </a:lnTo>
+                  <a:lnTo>
+                    <a:pt x="5135147" y="1196366"/>
+                  </a:lnTo>
+                  <a:lnTo>
+                    <a:pt x="5064803" y="1192412"/>
+                  </a:lnTo>
+                  <a:lnTo>
+                    <a:pt x="4994458" y="1188201"/>
+                  </a:lnTo>
+                  <a:lnTo>
+                    <a:pt x="4924114" y="1183716"/>
+                  </a:lnTo>
+                  <a:lnTo>
+                    <a:pt x="4853769" y="1178940"/>
+                  </a:lnTo>
+                  <a:lnTo>
+                    <a:pt x="4783425" y="1173854"/>
+                  </a:lnTo>
+                  <a:lnTo>
+                    <a:pt x="4713080" y="1168436"/>
+                  </a:lnTo>
+                  <a:lnTo>
+                    <a:pt x="4642736" y="1162667"/>
+                  </a:lnTo>
+                  <a:lnTo>
+                    <a:pt x="4572391" y="1156523"/>
+                  </a:lnTo>
+                  <a:lnTo>
+                    <a:pt x="4502047" y="1149980"/>
+                  </a:lnTo>
+                  <a:lnTo>
+                    <a:pt x="4431702" y="1143011"/>
+                  </a:lnTo>
+                  <a:lnTo>
+                    <a:pt x="4361358" y="1135589"/>
+                  </a:lnTo>
+                  <a:lnTo>
+                    <a:pt x="4291013" y="1127685"/>
+                  </a:lnTo>
+                  <a:lnTo>
+                    <a:pt x="4220669" y="1119267"/>
+                  </a:lnTo>
+                  <a:lnTo>
+                    <a:pt x="4150324" y="1110302"/>
+                  </a:lnTo>
+                  <a:lnTo>
+                    <a:pt x="4079980" y="1100754"/>
+                  </a:lnTo>
+                  <a:lnTo>
+                    <a:pt x="4009635" y="1090586"/>
+                  </a:lnTo>
+                  <a:lnTo>
+                    <a:pt x="3939291" y="1079757"/>
+                  </a:lnTo>
+                  <a:lnTo>
+                    <a:pt x="3868946" y="1068224"/>
+                  </a:lnTo>
+                  <a:lnTo>
+                    <a:pt x="3798602" y="1055942"/>
+                  </a:lnTo>
+                  <a:lnTo>
+                    <a:pt x="3728257" y="1042861"/>
+                  </a:lnTo>
+                  <a:lnTo>
+                    <a:pt x="3657913" y="1028930"/>
+                  </a:lnTo>
+                  <a:lnTo>
+                    <a:pt x="3587569" y="1014094"/>
+                  </a:lnTo>
+                  <a:lnTo>
+                    <a:pt x="3517224" y="998294"/>
+                  </a:lnTo>
+                  <a:lnTo>
+                    <a:pt x="3446880" y="981466"/>
+                  </a:lnTo>
+                  <a:lnTo>
+                    <a:pt x="3376535" y="963545"/>
+                  </a:lnTo>
+                  <a:lnTo>
+                    <a:pt x="3306191" y="952566"/>
+                  </a:lnTo>
+                  <a:lnTo>
+                    <a:pt x="3235846" y="944782"/>
+                  </a:lnTo>
+                  <a:lnTo>
+                    <a:pt x="3165502" y="936799"/>
+                  </a:lnTo>
+                  <a:lnTo>
+                    <a:pt x="3095157" y="928612"/>
+                  </a:lnTo>
+                  <a:lnTo>
+                    <a:pt x="3024813" y="920216"/>
+                  </a:lnTo>
+                  <a:lnTo>
+                    <a:pt x="2954468" y="911606"/>
+                  </a:lnTo>
+                  <a:lnTo>
+                    <a:pt x="2884124" y="902775"/>
+                  </a:lnTo>
+                  <a:lnTo>
+                    <a:pt x="2813779" y="893719"/>
+                  </a:lnTo>
+                  <a:lnTo>
+                    <a:pt x="2743435" y="884431"/>
+                  </a:lnTo>
+                  <a:lnTo>
+                    <a:pt x="2673090" y="874906"/>
+                  </a:lnTo>
+                  <a:lnTo>
+                    <a:pt x="2602746" y="865138"/>
+                  </a:lnTo>
+                  <a:lnTo>
+                    <a:pt x="2532401" y="855120"/>
+                  </a:lnTo>
+                  <a:lnTo>
+                    <a:pt x="2462057" y="844846"/>
+                  </a:lnTo>
+                  <a:lnTo>
+                    <a:pt x="2391712" y="834310"/>
+                  </a:lnTo>
+                  <a:lnTo>
+                    <a:pt x="2321368" y="823505"/>
+                  </a:lnTo>
+                  <a:lnTo>
+                    <a:pt x="2251023" y="812423"/>
+                  </a:lnTo>
+                  <a:lnTo>
+                    <a:pt x="2180679" y="801058"/>
+                  </a:lnTo>
+                  <a:lnTo>
+                    <a:pt x="2110334" y="789403"/>
+                  </a:lnTo>
+                  <a:lnTo>
+                    <a:pt x="2039990" y="777450"/>
+                  </a:lnTo>
+                  <a:lnTo>
+                    <a:pt x="1969645" y="765191"/>
+                  </a:lnTo>
+                  <a:lnTo>
+                    <a:pt x="1899301" y="752620"/>
+                  </a:lnTo>
+                  <a:lnTo>
+                    <a:pt x="1828956" y="739727"/>
+                  </a:lnTo>
+                  <a:lnTo>
+                    <a:pt x="1758612" y="726505"/>
+                  </a:lnTo>
+                  <a:lnTo>
+                    <a:pt x="1688267" y="712944"/>
+                  </a:lnTo>
+                  <a:lnTo>
+                    <a:pt x="1617923" y="699038"/>
+                  </a:lnTo>
+                  <a:lnTo>
+                    <a:pt x="1547578" y="684776"/>
+                  </a:lnTo>
+                  <a:lnTo>
+                    <a:pt x="1477234" y="670149"/>
+                  </a:lnTo>
+                  <a:lnTo>
+                    <a:pt x="1406889" y="655149"/>
+                  </a:lnTo>
+                  <a:lnTo>
+                    <a:pt x="1336545" y="639766"/>
+                  </a:lnTo>
+                  <a:lnTo>
+                    <a:pt x="1266200" y="623989"/>
+                  </a:lnTo>
+                  <a:lnTo>
+                    <a:pt x="1195856" y="607810"/>
+                  </a:lnTo>
+                  <a:lnTo>
+                    <a:pt x="1125511" y="591217"/>
+                  </a:lnTo>
+                  <a:lnTo>
+                    <a:pt x="1055167" y="574200"/>
+                  </a:lnTo>
+                  <a:lnTo>
+                    <a:pt x="984822" y="556748"/>
+                  </a:lnTo>
+                  <a:lnTo>
+                    <a:pt x="914478" y="538850"/>
+                  </a:lnTo>
+                  <a:lnTo>
+                    <a:pt x="844133" y="520495"/>
+                  </a:lnTo>
+                  <a:lnTo>
+                    <a:pt x="773789" y="501671"/>
+                  </a:lnTo>
+                  <a:lnTo>
+                    <a:pt x="703444" y="482366"/>
+                  </a:lnTo>
+                  <a:lnTo>
+                    <a:pt x="633100" y="462568"/>
+                  </a:lnTo>
+                  <a:lnTo>
+                    <a:pt x="562755" y="442264"/>
+                  </a:lnTo>
+                  <a:lnTo>
+                    <a:pt x="492411" y="421441"/>
+                  </a:lnTo>
+                  <a:lnTo>
+                    <a:pt x="422066" y="400086"/>
+                  </a:lnTo>
+                  <a:lnTo>
+                    <a:pt x="351722" y="378185"/>
+                  </a:lnTo>
+                  <a:lnTo>
+                    <a:pt x="281377" y="355725"/>
+                  </a:lnTo>
+                  <a:lnTo>
+                    <a:pt x="211033" y="332691"/>
+                  </a:lnTo>
+                  <a:lnTo>
+                    <a:pt x="140688" y="309068"/>
+                  </a:lnTo>
+                  <a:lnTo>
+                    <a:pt x="70344" y="284842"/>
+                  </a:lnTo>
+                  <a:lnTo>
+                    <a:pt x="0" y="259996"/>
+                  </a:lnTo>
+                  <a:close/>
+                </a:path>
+              </a:pathLst>
+            </a:custGeom>
+            <a:solidFill>
+              <a:srgbClr val="FF8C00">
+                <a:alpha val="20000"/>
+              </a:srgbClr>
+            </a:solidFill>
+          </p:spPr>
+          <p:txBody>
+            <a:bodyPr/>
+            <a:lstStyle/>
+            <a:p/>
+          </p:txBody>
+        </p:sp>
+        <p:sp>
+          <p:nvSpPr>
+            <p:cNvPr id="67" name="pl67"/>
+            <p:cNvSpPr/>
+            <p:nvPr/>
+          </p:nvSpPr>
+          <p:spPr>
+            <a:xfrm>
+              <a:off x="2987476" y="4336484"/>
+              <a:ext cx="5211939" cy="1175168"/>
+            </a:xfrm>
+            <a:custGeom>
+              <a:avLst/>
+              <a:pathLst>
+                <a:path w="5211939" h="1175168">
+                  <a:moveTo>
+                    <a:pt x="0" y="0"/>
+                  </a:moveTo>
+                  <a:lnTo>
+                    <a:pt x="6447" y="7445"/>
+                  </a:lnTo>
+                  <a:lnTo>
+                    <a:pt x="76792" y="83714"/>
+                  </a:lnTo>
+                  <a:lnTo>
+                    <a:pt x="147136" y="155329"/>
+                  </a:lnTo>
+                  <a:lnTo>
+                    <a:pt x="217481" y="222574"/>
+                  </a:lnTo>
+                  <a:lnTo>
+                    <a:pt x="287825" y="285715"/>
+                  </a:lnTo>
+                  <a:lnTo>
+                    <a:pt x="358170" y="345003"/>
+                  </a:lnTo>
+                  <a:lnTo>
+                    <a:pt x="428514" y="400672"/>
+                  </a:lnTo>
+                  <a:lnTo>
+                    <a:pt x="498859" y="452944"/>
+                  </a:lnTo>
+                  <a:lnTo>
+                    <a:pt x="569203" y="502026"/>
+                  </a:lnTo>
+                  <a:lnTo>
+                    <a:pt x="639548" y="548113"/>
+                  </a:lnTo>
+                  <a:lnTo>
+                    <a:pt x="709892" y="591387"/>
+                  </a:lnTo>
+                  <a:lnTo>
+                    <a:pt x="780236" y="632020"/>
+                  </a:lnTo>
+                  <a:lnTo>
+                    <a:pt x="850581" y="670173"/>
+                  </a:lnTo>
+                  <a:lnTo>
+                    <a:pt x="920925" y="705998"/>
+                  </a:lnTo>
+                  <a:lnTo>
+                    <a:pt x="991270" y="739637"/>
+                  </a:lnTo>
+                  <a:lnTo>
+                    <a:pt x="1061614" y="771223"/>
+                  </a:lnTo>
+                  <a:lnTo>
+                    <a:pt x="1131959" y="800881"/>
+                  </a:lnTo>
+                  <a:lnTo>
+                    <a:pt x="1202303" y="828729"/>
+                  </a:lnTo>
+                  <a:lnTo>
+                    <a:pt x="1272648" y="854878"/>
+                  </a:lnTo>
+                  <a:lnTo>
+                    <a:pt x="1342992" y="879431"/>
+                  </a:lnTo>
+                  <a:lnTo>
+                    <a:pt x="1413337" y="902485"/>
+                  </a:lnTo>
+                  <a:lnTo>
+                    <a:pt x="1483681" y="924133"/>
+                  </a:lnTo>
+                  <a:lnTo>
+                    <a:pt x="1554026" y="944459"/>
+                  </a:lnTo>
+                  <a:lnTo>
+                    <a:pt x="1624370" y="960156"/>
+                  </a:lnTo>
+                  <a:lnTo>
+                    <a:pt x="1694715" y="967557"/>
+                  </a:lnTo>
+                  <a:lnTo>
+                    <a:pt x="1765059" y="974773"/>
+                  </a:lnTo>
+                  <a:lnTo>
+                    <a:pt x="1835404" y="981810"/>
+                  </a:lnTo>
+                  <a:lnTo>
+                    <a:pt x="1905748" y="988671"/>
+                  </a:lnTo>
+                  <a:lnTo>
+                    <a:pt x="1976093" y="995362"/>
+                  </a:lnTo>
+                  <a:lnTo>
+                    <a:pt x="2046437" y="1001885"/>
+                  </a:lnTo>
+                  <a:lnTo>
+                    <a:pt x="2116782" y="1008247"/>
+                  </a:lnTo>
+                  <a:lnTo>
+                    <a:pt x="2187126" y="1014449"/>
+                  </a:lnTo>
+                  <a:lnTo>
+                    <a:pt x="2257471" y="1020497"/>
+                  </a:lnTo>
+                  <a:lnTo>
+                    <a:pt x="2327815" y="1026395"/>
+                  </a:lnTo>
+                  <a:lnTo>
+                    <a:pt x="2398160" y="1032145"/>
+                  </a:lnTo>
+                  <a:lnTo>
+                    <a:pt x="2468504" y="1037753"/>
+                  </a:lnTo>
+                  <a:lnTo>
+                    <a:pt x="2538849" y="1043220"/>
+                  </a:lnTo>
+                  <a:lnTo>
+                    <a:pt x="2609193" y="1048552"/>
+                  </a:lnTo>
+                  <a:lnTo>
+                    <a:pt x="2679538" y="1053750"/>
+                  </a:lnTo>
+                  <a:lnTo>
+                    <a:pt x="2749882" y="1058819"/>
+                  </a:lnTo>
+                  <a:lnTo>
+                    <a:pt x="2820227" y="1063762"/>
+                  </a:lnTo>
+                  <a:lnTo>
+                    <a:pt x="2890571" y="1068581"/>
+                  </a:lnTo>
+                  <a:lnTo>
+                    <a:pt x="2960916" y="1073281"/>
+                  </a:lnTo>
+                  <a:lnTo>
+                    <a:pt x="3031260" y="1077863"/>
+                  </a:lnTo>
+                  <a:lnTo>
+                    <a:pt x="3101605" y="1082331"/>
+                  </a:lnTo>
+                  <a:lnTo>
+                    <a:pt x="3171949" y="1086688"/>
+                  </a:lnTo>
+                  <a:lnTo>
+                    <a:pt x="3242294" y="1090937"/>
+                  </a:lnTo>
+                  <a:lnTo>
+                    <a:pt x="3312638" y="1095079"/>
+                  </a:lnTo>
+                  <a:lnTo>
+                    <a:pt x="3382983" y="1099118"/>
+                  </a:lnTo>
+                  <a:lnTo>
+                    <a:pt x="3453327" y="1103057"/>
+                  </a:lnTo>
+                  <a:lnTo>
+                    <a:pt x="3523672" y="1106898"/>
+                  </a:lnTo>
+                  <a:lnTo>
+                    <a:pt x="3594016" y="1110642"/>
+                  </a:lnTo>
+                  <a:lnTo>
+                    <a:pt x="3664361" y="1114294"/>
+                  </a:lnTo>
+                  <a:lnTo>
+                    <a:pt x="3734705" y="1117855"/>
+                  </a:lnTo>
+                  <a:lnTo>
+                    <a:pt x="3805050" y="1121326"/>
+                  </a:lnTo>
+                  <a:lnTo>
+                    <a:pt x="3875394" y="1124712"/>
+                  </a:lnTo>
+                  <a:lnTo>
+                    <a:pt x="3945739" y="1128013"/>
+                  </a:lnTo>
+                  <a:lnTo>
+                    <a:pt x="4016083" y="1131231"/>
+                  </a:lnTo>
+                  <a:lnTo>
+                    <a:pt x="4086428" y="1134370"/>
+                  </a:lnTo>
+                  <a:lnTo>
+                    <a:pt x="4156772" y="1137430"/>
+                  </a:lnTo>
+                  <a:lnTo>
+                    <a:pt x="4227117" y="1140414"/>
+                  </a:lnTo>
+                  <a:lnTo>
+                    <a:pt x="4297461" y="1143324"/>
+                  </a:lnTo>
+                  <a:lnTo>
+                    <a:pt x="4367806" y="1146161"/>
+                  </a:lnTo>
+                  <a:lnTo>
+                    <a:pt x="4438150" y="1148928"/>
+                  </a:lnTo>
+                  <a:lnTo>
+                    <a:pt x="4508494" y="1151626"/>
+                  </a:lnTo>
+                  <a:lnTo>
+                    <a:pt x="4578839" y="1154256"/>
+                  </a:lnTo>
+                  <a:lnTo>
+                    <a:pt x="4649183" y="1156821"/>
+                  </a:lnTo>
+                  <a:lnTo>
+                    <a:pt x="4719528" y="1159322"/>
+                  </a:lnTo>
+                  <a:lnTo>
+                    <a:pt x="4789872" y="1161761"/>
+                  </a:lnTo>
+                  <a:lnTo>
+                    <a:pt x="4860217" y="1164139"/>
+                  </a:lnTo>
+                  <a:lnTo>
+                    <a:pt x="4930561" y="1166457"/>
+                  </a:lnTo>
+                  <a:lnTo>
+                    <a:pt x="5000906" y="1168718"/>
+                  </a:lnTo>
+                  <a:lnTo>
+                    <a:pt x="5071250" y="1170923"/>
+                  </a:lnTo>
+                  <a:lnTo>
+                    <a:pt x="5141595" y="1173072"/>
+                  </a:lnTo>
+                  <a:lnTo>
+                    <a:pt x="5211939" y="1175168"/>
+                  </a:lnTo>
+                </a:path>
+              </a:pathLst>
+            </a:custGeom>
+          </p:spPr>
+          <p:txBody>
+            <a:bodyPr/>
+            <a:lstStyle/>
+            <a:p/>
+          </p:txBody>
+        </p:sp>
+        <p:sp>
+          <p:nvSpPr>
+            <p:cNvPr id="68" name="pl68"/>
+            <p:cNvSpPr/>
+            <p:nvPr/>
+          </p:nvSpPr>
+          <p:spPr>
+            <a:xfrm>
+              <a:off x="1235312" y="4596481"/>
+              <a:ext cx="6964104" cy="985371"/>
+            </a:xfrm>
+            <a:custGeom>
+              <a:avLst/>
+              <a:pathLst>
+                <a:path w="6964104" h="985371">
+                  <a:moveTo>
+                    <a:pt x="6964104" y="985371"/>
+                  </a:moveTo>
+                  <a:lnTo>
+                    <a:pt x="6893760" y="984602"/>
+                  </a:lnTo>
+                  <a:lnTo>
+                    <a:pt x="6823415" y="983783"/>
+                  </a:lnTo>
+                  <a:lnTo>
+                    <a:pt x="6753071" y="982910"/>
+                  </a:lnTo>
+                  <a:lnTo>
+                    <a:pt x="6682726" y="981981"/>
+                  </a:lnTo>
+                  <a:lnTo>
+                    <a:pt x="6612382" y="980992"/>
+                  </a:lnTo>
+                  <a:lnTo>
+                    <a:pt x="6542037" y="979938"/>
+                  </a:lnTo>
+                  <a:lnTo>
+                    <a:pt x="6471693" y="978816"/>
+                  </a:lnTo>
+                  <a:lnTo>
+                    <a:pt x="6401348" y="977621"/>
+                  </a:lnTo>
+                  <a:lnTo>
+                    <a:pt x="6331004" y="976348"/>
+                  </a:lnTo>
+                  <a:lnTo>
+                    <a:pt x="6260659" y="974992"/>
+                  </a:lnTo>
+                  <a:lnTo>
+                    <a:pt x="6190315" y="973548"/>
+                  </a:lnTo>
+                  <a:lnTo>
+                    <a:pt x="6119970" y="972011"/>
+                  </a:lnTo>
+                  <a:lnTo>
+                    <a:pt x="6049626" y="970373"/>
+                  </a:lnTo>
+                  <a:lnTo>
+                    <a:pt x="5979281" y="968630"/>
+                  </a:lnTo>
+                  <a:lnTo>
+                    <a:pt x="5908937" y="966772"/>
+                  </a:lnTo>
+                  <a:lnTo>
+                    <a:pt x="5838592" y="964794"/>
+                  </a:lnTo>
+                  <a:lnTo>
+                    <a:pt x="5768248" y="962688"/>
+                  </a:lnTo>
+                  <a:lnTo>
+                    <a:pt x="5697903" y="960444"/>
+                  </a:lnTo>
+                  <a:lnTo>
+                    <a:pt x="5627559" y="958055"/>
+                  </a:lnTo>
+                  <a:lnTo>
+                    <a:pt x="5557214" y="955511"/>
+                  </a:lnTo>
+                  <a:lnTo>
+                    <a:pt x="5486870" y="952801"/>
+                  </a:lnTo>
+                  <a:lnTo>
+                    <a:pt x="5416525" y="949915"/>
+                  </a:lnTo>
+                  <a:lnTo>
+                    <a:pt x="5346181" y="946841"/>
+                  </a:lnTo>
+                  <a:lnTo>
+                    <a:pt x="5275836" y="943568"/>
+                  </a:lnTo>
+                  <a:lnTo>
+                    <a:pt x="5205492" y="940082"/>
+                  </a:lnTo>
+                  <a:lnTo>
+                    <a:pt x="5135147" y="936369"/>
+                  </a:lnTo>
+                  <a:lnTo>
+                    <a:pt x="5064803" y="932415"/>
+                  </a:lnTo>
+                  <a:lnTo>
+                    <a:pt x="4994458" y="928204"/>
+                  </a:lnTo>
+                  <a:lnTo>
+                    <a:pt x="4924114" y="923720"/>
+                  </a:lnTo>
+                  <a:lnTo>
+                    <a:pt x="4853769" y="918943"/>
+                  </a:lnTo>
+                  <a:lnTo>
+                    <a:pt x="4783425" y="913857"/>
+                  </a:lnTo>
+                  <a:lnTo>
+                    <a:pt x="4713080" y="908440"/>
+                  </a:lnTo>
+                  <a:lnTo>
+                    <a:pt x="4642736" y="902670"/>
+                  </a:lnTo>
+                  <a:lnTo>
+                    <a:pt x="4572391" y="896526"/>
+                  </a:lnTo>
+                  <a:lnTo>
+                    <a:pt x="4502047" y="889983"/>
+                  </a:lnTo>
+                  <a:lnTo>
+                    <a:pt x="4431702" y="883014"/>
+                  </a:lnTo>
+                  <a:lnTo>
+                    <a:pt x="4361358" y="875592"/>
+                  </a:lnTo>
+                  <a:lnTo>
+                    <a:pt x="4291013" y="867688"/>
+                  </a:lnTo>
+                  <a:lnTo>
+                    <a:pt x="4220669" y="859270"/>
+                  </a:lnTo>
+                  <a:lnTo>
+                    <a:pt x="4150324" y="850305"/>
+                  </a:lnTo>
+                  <a:lnTo>
+                    <a:pt x="4079980" y="840758"/>
+                  </a:lnTo>
+                  <a:lnTo>
+                    <a:pt x="4009635" y="830590"/>
+                  </a:lnTo>
+                  <a:lnTo>
+                    <a:pt x="3939291" y="819761"/>
+                  </a:lnTo>
+                  <a:lnTo>
+                    <a:pt x="3868946" y="808228"/>
+                  </a:lnTo>
+                  <a:lnTo>
+                    <a:pt x="3798602" y="795945"/>
+                  </a:lnTo>
+                  <a:lnTo>
+                    <a:pt x="3728257" y="782865"/>
+                  </a:lnTo>
+                  <a:lnTo>
+                    <a:pt x="3657913" y="768934"/>
+                  </a:lnTo>
+                  <a:lnTo>
+                    <a:pt x="3587569" y="754097"/>
+                  </a:lnTo>
+                  <a:lnTo>
+                    <a:pt x="3517224" y="738297"/>
+                  </a:lnTo>
+                  <a:lnTo>
+                    <a:pt x="3446880" y="721469"/>
+                  </a:lnTo>
+                  <a:lnTo>
+                    <a:pt x="3376535" y="703548"/>
+                  </a:lnTo>
+                  <a:lnTo>
+                    <a:pt x="3306191" y="692569"/>
+                  </a:lnTo>
+                  <a:lnTo>
+                    <a:pt x="3235846" y="684785"/>
+                  </a:lnTo>
+                  <a:lnTo>
+                    <a:pt x="3165502" y="676802"/>
+                  </a:lnTo>
+                  <a:lnTo>
+                    <a:pt x="3095157" y="668615"/>
+                  </a:lnTo>
+                  <a:lnTo>
+                    <a:pt x="3024813" y="660219"/>
+                  </a:lnTo>
+                  <a:lnTo>
+                    <a:pt x="2954468" y="651609"/>
+                  </a:lnTo>
+                  <a:lnTo>
+                    <a:pt x="2884124" y="642778"/>
+                  </a:lnTo>
+                  <a:lnTo>
+                    <a:pt x="2813779" y="633722"/>
+                  </a:lnTo>
+                  <a:lnTo>
+                    <a:pt x="2743435" y="624435"/>
+                  </a:lnTo>
+                  <a:lnTo>
+                    <a:pt x="2673090" y="614910"/>
+                  </a:lnTo>
+                  <a:lnTo>
+                    <a:pt x="2602746" y="605141"/>
+                  </a:lnTo>
+                  <a:lnTo>
+                    <a:pt x="2532401" y="595124"/>
+                  </a:lnTo>
+                  <a:lnTo>
+                    <a:pt x="2462057" y="584850"/>
+                  </a:lnTo>
+                  <a:lnTo>
+                    <a:pt x="2391712" y="574313"/>
+                  </a:lnTo>
+                  <a:lnTo>
+                    <a:pt x="2321368" y="563508"/>
+                  </a:lnTo>
+                  <a:lnTo>
+                    <a:pt x="2251023" y="552426"/>
+                  </a:lnTo>
+                  <a:lnTo>
+                    <a:pt x="2180679" y="541061"/>
+                  </a:lnTo>
+                  <a:lnTo>
+                    <a:pt x="2110334" y="529406"/>
+                  </a:lnTo>
+                  <a:lnTo>
+                    <a:pt x="2039990" y="517453"/>
+                  </a:lnTo>
+                  <a:lnTo>
+                    <a:pt x="1969645" y="505195"/>
+                  </a:lnTo>
+                  <a:lnTo>
+                    <a:pt x="1899301" y="492623"/>
+                  </a:lnTo>
+                  <a:lnTo>
+                    <a:pt x="1828956" y="479730"/>
+                  </a:lnTo>
+                  <a:lnTo>
+                    <a:pt x="1758612" y="466508"/>
+                  </a:lnTo>
+                  <a:lnTo>
+                    <a:pt x="1688267" y="452948"/>
+                  </a:lnTo>
+                  <a:lnTo>
+                    <a:pt x="1617923" y="439041"/>
+                  </a:lnTo>
+                  <a:lnTo>
+                    <a:pt x="1547578" y="424779"/>
+                  </a:lnTo>
+                  <a:lnTo>
+                    <a:pt x="1477234" y="410153"/>
+                  </a:lnTo>
+                  <a:lnTo>
+                    <a:pt x="1406889" y="395153"/>
+                  </a:lnTo>
+                  <a:lnTo>
+                    <a:pt x="1336545" y="379769"/>
+                  </a:lnTo>
+                  <a:lnTo>
+                    <a:pt x="1266200" y="363993"/>
+                  </a:lnTo>
+                  <a:lnTo>
+                    <a:pt x="1195856" y="347813"/>
+                  </a:lnTo>
+                  <a:lnTo>
+                    <a:pt x="1125511" y="331220"/>
+                  </a:lnTo>
+                  <a:lnTo>
+                    <a:pt x="1055167" y="314203"/>
+                  </a:lnTo>
+                  <a:lnTo>
+                    <a:pt x="984822" y="296751"/>
+                  </a:lnTo>
+                  <a:lnTo>
+                    <a:pt x="914478" y="278854"/>
+                  </a:lnTo>
+                  <a:lnTo>
+                    <a:pt x="844133" y="260499"/>
+                  </a:lnTo>
+                  <a:lnTo>
+                    <a:pt x="773789" y="241675"/>
+                  </a:lnTo>
+                  <a:lnTo>
+                    <a:pt x="703444" y="222370"/>
+                  </a:lnTo>
+                  <a:lnTo>
+                    <a:pt x="633100" y="202571"/>
+                  </a:lnTo>
+                  <a:lnTo>
+                    <a:pt x="562755" y="182267"/>
+                  </a:lnTo>
+                  <a:lnTo>
+                    <a:pt x="492411" y="161444"/>
+                  </a:lnTo>
+                  <a:lnTo>
+                    <a:pt x="422066" y="140089"/>
+                  </a:lnTo>
+                  <a:lnTo>
+                    <a:pt x="351722" y="118188"/>
+                  </a:lnTo>
+                  <a:lnTo>
+                    <a:pt x="281377" y="95728"/>
+                  </a:lnTo>
+                  <a:lnTo>
+                    <a:pt x="211033" y="72694"/>
+                  </a:lnTo>
+                  <a:lnTo>
+                    <a:pt x="140688" y="49071"/>
+                  </a:lnTo>
+                  <a:lnTo>
+                    <a:pt x="70344" y="24845"/>
+                  </a:lnTo>
+                  <a:lnTo>
+                    <a:pt x="0" y="0"/>
+                  </a:lnTo>
+                </a:path>
+              </a:pathLst>
+            </a:custGeom>
+          </p:spPr>
+          <p:txBody>
+            <a:bodyPr/>
+            <a:lstStyle/>
+            <a:p/>
+          </p:txBody>
+        </p:sp>
+        <p:sp>
+          <p:nvSpPr>
+            <p:cNvPr id="69" name="pl69"/>
+            <p:cNvSpPr/>
+            <p:nvPr/>
+          </p:nvSpPr>
+          <p:spPr>
+            <a:xfrm>
+              <a:off x="2301534" y="4336484"/>
+              <a:ext cx="5897881" cy="1226044"/>
+            </a:xfrm>
+            <a:custGeom>
+              <a:avLst/>
+              <a:pathLst>
+                <a:path w="5897881" h="1226044">
+                  <a:moveTo>
+                    <a:pt x="0" y="0"/>
+                  </a:moveTo>
+                  <a:lnTo>
+                    <a:pt x="59289" y="46025"/>
+                  </a:lnTo>
+                  <a:lnTo>
+                    <a:pt x="129633" y="98277"/>
+                  </a:lnTo>
+                  <a:lnTo>
+                    <a:pt x="199978" y="148275"/>
+                  </a:lnTo>
+                  <a:lnTo>
+                    <a:pt x="270322" y="196116"/>
+                  </a:lnTo>
+                  <a:lnTo>
+                    <a:pt x="340667" y="241893"/>
+                  </a:lnTo>
+                  <a:lnTo>
+                    <a:pt x="411011" y="285695"/>
+                  </a:lnTo>
+                  <a:lnTo>
+                    <a:pt x="481356" y="327608"/>
+                  </a:lnTo>
+                  <a:lnTo>
+                    <a:pt x="551700" y="367712"/>
+                  </a:lnTo>
+                  <a:lnTo>
+                    <a:pt x="622045" y="406086"/>
+                  </a:lnTo>
+                  <a:lnTo>
+                    <a:pt x="692389" y="442805"/>
+                  </a:lnTo>
+                  <a:lnTo>
+                    <a:pt x="762733" y="477939"/>
+                  </a:lnTo>
+                  <a:lnTo>
+                    <a:pt x="833078" y="511558"/>
+                  </a:lnTo>
+                  <a:lnTo>
+                    <a:pt x="903422" y="543726"/>
+                  </a:lnTo>
+                  <a:lnTo>
+                    <a:pt x="973767" y="574507"/>
+                  </a:lnTo>
+                  <a:lnTo>
+                    <a:pt x="1044111" y="603959"/>
+                  </a:lnTo>
+                  <a:lnTo>
+                    <a:pt x="1114456" y="632141"/>
+                  </a:lnTo>
+                  <a:lnTo>
+                    <a:pt x="1184800" y="659107"/>
+                  </a:lnTo>
+                  <a:lnTo>
+                    <a:pt x="1255145" y="684910"/>
+                  </a:lnTo>
+                  <a:lnTo>
+                    <a:pt x="1325489" y="709600"/>
+                  </a:lnTo>
+                  <a:lnTo>
+                    <a:pt x="1395834" y="733224"/>
+                  </a:lnTo>
+                  <a:lnTo>
+                    <a:pt x="1466178" y="755830"/>
+                  </a:lnTo>
+                  <a:lnTo>
+                    <a:pt x="1536523" y="777460"/>
+                  </a:lnTo>
+                  <a:lnTo>
+                    <a:pt x="1606867" y="798156"/>
+                  </a:lnTo>
+                  <a:lnTo>
+                    <a:pt x="1677212" y="817960"/>
+                  </a:lnTo>
+                  <a:lnTo>
+                    <a:pt x="1747556" y="836910"/>
+                  </a:lnTo>
+                  <a:lnTo>
+                    <a:pt x="1817901" y="855042"/>
+                  </a:lnTo>
+                  <a:lnTo>
+                    <a:pt x="1888245" y="872392"/>
+                  </a:lnTo>
+                  <a:lnTo>
+                    <a:pt x="1958590" y="888993"/>
+                  </a:lnTo>
+                  <a:lnTo>
+                    <a:pt x="2028934" y="904878"/>
+                  </a:lnTo>
+                  <a:lnTo>
+                    <a:pt x="2099279" y="920078"/>
+                  </a:lnTo>
+                  <a:lnTo>
+                    <a:pt x="2169623" y="934622"/>
+                  </a:lnTo>
+                  <a:lnTo>
+                    <a:pt x="2239968" y="948539"/>
+                  </a:lnTo>
+                  <a:lnTo>
+                    <a:pt x="2310312" y="961855"/>
+                  </a:lnTo>
+                  <a:lnTo>
+                    <a:pt x="2380657" y="974597"/>
+                  </a:lnTo>
+                  <a:lnTo>
+                    <a:pt x="2451001" y="986789"/>
+                  </a:lnTo>
+                  <a:lnTo>
+                    <a:pt x="2521346" y="998455"/>
+                  </a:lnTo>
+                  <a:lnTo>
+                    <a:pt x="2591690" y="1009618"/>
+                  </a:lnTo>
+                  <a:lnTo>
+                    <a:pt x="2662035" y="1020299"/>
+                  </a:lnTo>
+                  <a:lnTo>
+                    <a:pt x="2732379" y="1030519"/>
+                  </a:lnTo>
+                  <a:lnTo>
+                    <a:pt x="2802724" y="1040299"/>
+                  </a:lnTo>
+                  <a:lnTo>
+                    <a:pt x="2873068" y="1049656"/>
+                  </a:lnTo>
+                  <a:lnTo>
+                    <a:pt x="2943413" y="1058610"/>
+                  </a:lnTo>
+                  <a:lnTo>
+                    <a:pt x="3013757" y="1067178"/>
+                  </a:lnTo>
+                  <a:lnTo>
+                    <a:pt x="3084102" y="1075376"/>
+                  </a:lnTo>
+                  <a:lnTo>
+                    <a:pt x="3154446" y="1083220"/>
+                  </a:lnTo>
+                  <a:lnTo>
+                    <a:pt x="3224791" y="1090726"/>
+                  </a:lnTo>
+                  <a:lnTo>
+                    <a:pt x="3295135" y="1097908"/>
+                  </a:lnTo>
+                  <a:lnTo>
+                    <a:pt x="3365480" y="1104780"/>
+                  </a:lnTo>
+                  <a:lnTo>
+                    <a:pt x="3435824" y="1111356"/>
+                  </a:lnTo>
+                  <a:lnTo>
+                    <a:pt x="3506169" y="1117648"/>
+                  </a:lnTo>
+                  <a:lnTo>
+                    <a:pt x="3576513" y="1123668"/>
+                  </a:lnTo>
+                  <a:lnTo>
+                    <a:pt x="3646858" y="1129429"/>
+                  </a:lnTo>
+                  <a:lnTo>
+                    <a:pt x="3717202" y="1134942"/>
+                  </a:lnTo>
+                  <a:lnTo>
+                    <a:pt x="3787547" y="1140216"/>
+                  </a:lnTo>
+                  <a:lnTo>
+                    <a:pt x="3857891" y="1145263"/>
+                  </a:lnTo>
+                  <a:lnTo>
+                    <a:pt x="3928236" y="1150092"/>
+                  </a:lnTo>
+                  <a:lnTo>
+                    <a:pt x="3998580" y="1154713"/>
+                  </a:lnTo>
+                  <a:lnTo>
+                    <a:pt x="4068925" y="1159135"/>
+                  </a:lnTo>
+                  <a:lnTo>
+                    <a:pt x="4139269" y="1163366"/>
+                  </a:lnTo>
+                  <a:lnTo>
+                    <a:pt x="4209614" y="1167414"/>
+                  </a:lnTo>
+                  <a:lnTo>
+                    <a:pt x="4279958" y="1171287"/>
+                  </a:lnTo>
+                  <a:lnTo>
+                    <a:pt x="4350303" y="1174994"/>
+                  </a:lnTo>
+                  <a:lnTo>
+                    <a:pt x="4420647" y="1178540"/>
+                  </a:lnTo>
+                  <a:lnTo>
+                    <a:pt x="4490991" y="1181934"/>
+                  </a:lnTo>
+                  <a:lnTo>
+                    <a:pt x="4561336" y="1185181"/>
+                  </a:lnTo>
+                  <a:lnTo>
+                    <a:pt x="4631680" y="1188288"/>
+                  </a:lnTo>
+                  <a:lnTo>
+                    <a:pt x="4702025" y="1191261"/>
+                  </a:lnTo>
+                  <a:lnTo>
+                    <a:pt x="4772369" y="1194106"/>
+                  </a:lnTo>
+                  <a:lnTo>
+                    <a:pt x="4842714" y="1196828"/>
+                  </a:lnTo>
+                  <a:lnTo>
+                    <a:pt x="4913058" y="1199433"/>
+                  </a:lnTo>
+                  <a:lnTo>
+                    <a:pt x="4983403" y="1201925"/>
+                  </a:lnTo>
+                  <a:lnTo>
+                    <a:pt x="5053747" y="1204310"/>
+                  </a:lnTo>
+                  <a:lnTo>
+                    <a:pt x="5124092" y="1206592"/>
+                  </a:lnTo>
+                  <a:lnTo>
+                    <a:pt x="5194436" y="1208775"/>
+                  </a:lnTo>
+                  <a:lnTo>
+                    <a:pt x="5264781" y="1210864"/>
+                  </a:lnTo>
+                  <a:lnTo>
+                    <a:pt x="5335125" y="1212863"/>
+                  </a:lnTo>
+                  <a:lnTo>
+                    <a:pt x="5405470" y="1214776"/>
+                  </a:lnTo>
+                  <a:lnTo>
+                    <a:pt x="5475814" y="1216606"/>
+                  </a:lnTo>
+                  <a:lnTo>
+                    <a:pt x="5546159" y="1218358"/>
+                  </a:lnTo>
+                  <a:lnTo>
+                    <a:pt x="5616503" y="1220034"/>
+                  </a:lnTo>
+                  <a:lnTo>
+                    <a:pt x="5686848" y="1221637"/>
+                  </a:lnTo>
+                  <a:lnTo>
+                    <a:pt x="5757192" y="1223171"/>
+                  </a:lnTo>
+                  <a:lnTo>
+                    <a:pt x="5827537" y="1224640"/>
+                  </a:lnTo>
+                  <a:lnTo>
+                    <a:pt x="5897881" y="1226044"/>
+                  </a:lnTo>
+                </a:path>
+              </a:pathLst>
+            </a:custGeom>
+            <a:ln w="27101" cap="flat">
+              <a:solidFill>
+                <a:srgbClr val="FF8C00">
+                  <a:alpha val="100000"/>
+                </a:srgbClr>
+              </a:solidFill>
+              <a:prstDash val="solid"/>
+              <a:round/>
+            </a:ln>
+          </p:spPr>
+          <p:txBody>
+            <a:bodyPr/>
+            <a:lstStyle/>
+            <a:p/>
+          </p:txBody>
+        </p:sp>
+        <p:sp>
+          <p:nvSpPr>
+            <p:cNvPr id="70" name="pl70"/>
+            <p:cNvSpPr/>
+            <p:nvPr/>
+          </p:nvSpPr>
+          <p:spPr>
+            <a:xfrm>
+              <a:off x="887106" y="5294352"/>
+              <a:ext cx="7660515" cy="0"/>
+            </a:xfrm>
+            <a:custGeom>
+              <a:avLst/>
+              <a:pathLst>
+                <a:path w="7660515" h="0">
+                  <a:moveTo>
+                    <a:pt x="0" y="0"/>
+                  </a:moveTo>
+                  <a:lnTo>
+                    <a:pt x="7660515" y="0"/>
+                  </a:lnTo>
+                  <a:lnTo>
+                    <a:pt x="7660515" y="0"/>
+                  </a:lnTo>
+                </a:path>
+              </a:pathLst>
+            </a:custGeom>
+            <a:ln w="13550" cap="flat">
+              <a:solidFill>
+                <a:srgbClr val="7F7F7F">
+                  <a:alpha val="100000"/>
+                </a:srgbClr>
+              </a:solidFill>
+              <a:prstDash val="dash"/>
+              <a:round/>
+            </a:ln>
+          </p:spPr>
+          <p:txBody>
+            <a:bodyPr/>
+            <a:lstStyle/>
+            <a:p/>
+          </p:txBody>
+        </p:sp>
+        <p:sp>
+          <p:nvSpPr>
+            <p:cNvPr id="71" name="pl71"/>
+            <p:cNvSpPr/>
+            <p:nvPr/>
+          </p:nvSpPr>
+          <p:spPr>
+            <a:xfrm>
+              <a:off x="4590457" y="4336484"/>
+              <a:ext cx="0" cy="1317069"/>
+            </a:xfrm>
+            <a:custGeom>
+              <a:avLst/>
+              <a:pathLst>
+                <a:path w="0" h="1317069">
+                  <a:moveTo>
+                    <a:pt x="0" y="1317069"/>
+                  </a:moveTo>
+                  <a:lnTo>
+                    <a:pt x="0" y="0"/>
+                  </a:lnTo>
+                  <a:lnTo>
+                    <a:pt x="0" y="0"/>
+                  </a:lnTo>
+                </a:path>
+              </a:pathLst>
+            </a:custGeom>
+            <a:ln w="13550" cap="flat">
+              <a:solidFill>
+                <a:srgbClr val="666666">
+                  <a:alpha val="100000"/>
+                </a:srgbClr>
+              </a:solidFill>
+              <a:prstDash val="dot"/>
+              <a:round/>
+            </a:ln>
+          </p:spPr>
+          <p:txBody>
+            <a:bodyPr/>
+            <a:lstStyle/>
+            <a:p/>
+          </p:txBody>
+        </p:sp>
+        <p:sp>
+          <p:nvSpPr>
+            <p:cNvPr id="72" name="tx72"/>
+            <p:cNvSpPr/>
+            <p:nvPr/>
+          </p:nvSpPr>
+          <p:spPr>
+            <a:xfrm>
+              <a:off x="762297" y="5553636"/>
+              <a:ext cx="62179" cy="80101"/>
+            </a:xfrm>
+            <a:prstGeom prst="rect">
+              <a:avLst/>
+            </a:prstGeom>
+            <a:noFill/>
+          </p:spPr>
+          <p:txBody>
+            <a:bodyPr lIns="0" rIns="0" tIns="0" bIns="0" anchorCtr="1" anchor="ctr" wrap="none"/>
+            <a:lstStyle/>
+            <a:p>
+              <a:pPr algn="l" marL="0" marR="0" indent="0">
+                <a:lnSpc>
+                  <a:spcPts val="880"/>
+                </a:lnSpc>
+                <a:spcBef>
+                  <a:spcPts val="0"/>
+                </a:spcBef>
+                <a:spcAft>
+                  <a:spcPts val="0"/>
+                </a:spcAft>
+              </a:pPr>
+              <a:r>
+                <a:rPr sz="880">
+                  <a:solidFill>
+                    <a:srgbClr val="4D4D4D">
+                      <a:alpha val="100000"/>
+                    </a:srgbClr>
+                  </a:solidFill>
+                  <a:latin typeface="Helvetica"/>
+                  <a:cs typeface="Helvetica"/>
+                </a:rPr>
+                <a:t>0</a:t>
+              </a:r>
+            </a:p>
+          </p:txBody>
+        </p:sp>
+        <p:sp>
+          <p:nvSpPr>
+            <p:cNvPr id="73" name="tx73"/>
+            <p:cNvSpPr/>
+            <p:nvPr/>
+          </p:nvSpPr>
+          <p:spPr>
+            <a:xfrm>
+              <a:off x="762297" y="5254302"/>
+              <a:ext cx="62179" cy="80101"/>
+            </a:xfrm>
+            <a:prstGeom prst="rect">
+              <a:avLst/>
+            </a:prstGeom>
+            <a:noFill/>
+          </p:spPr>
+          <p:txBody>
+            <a:bodyPr lIns="0" rIns="0" tIns="0" bIns="0" anchorCtr="1" anchor="ctr" wrap="none"/>
+            <a:lstStyle/>
+            <a:p>
+              <a:pPr algn="l" marL="0" marR="0" indent="0">
+                <a:lnSpc>
+                  <a:spcPts val="880"/>
+                </a:lnSpc>
+                <a:spcBef>
+                  <a:spcPts val="0"/>
+                </a:spcBef>
+                <a:spcAft>
+                  <a:spcPts val="0"/>
+                </a:spcAft>
+              </a:pPr>
+              <a:r>
+                <a:rPr sz="880">
+                  <a:solidFill>
+                    <a:srgbClr val="4D4D4D">
+                      <a:alpha val="100000"/>
+                    </a:srgbClr>
+                  </a:solidFill>
+                  <a:latin typeface="Helvetica"/>
+                  <a:cs typeface="Helvetica"/>
+                </a:rPr>
+                <a:t>1</a:t>
+              </a:r>
+            </a:p>
+          </p:txBody>
+        </p:sp>
+        <p:sp>
+          <p:nvSpPr>
+            <p:cNvPr id="74" name="tx74"/>
+            <p:cNvSpPr/>
+            <p:nvPr/>
+          </p:nvSpPr>
+          <p:spPr>
+            <a:xfrm>
+              <a:off x="762297" y="4954968"/>
+              <a:ext cx="62179" cy="80101"/>
+            </a:xfrm>
+            <a:prstGeom prst="rect">
+              <a:avLst/>
+            </a:prstGeom>
+            <a:noFill/>
+          </p:spPr>
+          <p:txBody>
+            <a:bodyPr lIns="0" rIns="0" tIns="0" bIns="0" anchorCtr="1" anchor="ctr" wrap="none"/>
+            <a:lstStyle/>
+            <a:p>
+              <a:pPr algn="l" marL="0" marR="0" indent="0">
+                <a:lnSpc>
+                  <a:spcPts val="880"/>
+                </a:lnSpc>
+                <a:spcBef>
+                  <a:spcPts val="0"/>
+                </a:spcBef>
+                <a:spcAft>
+                  <a:spcPts val="0"/>
+                </a:spcAft>
+              </a:pPr>
+              <a:r>
+                <a:rPr sz="880">
+                  <a:solidFill>
+                    <a:srgbClr val="4D4D4D">
+                      <a:alpha val="100000"/>
+                    </a:srgbClr>
+                  </a:solidFill>
+                  <a:latin typeface="Helvetica"/>
+                  <a:cs typeface="Helvetica"/>
+                </a:rPr>
+                <a:t>2</a:t>
+              </a:r>
+            </a:p>
+          </p:txBody>
+        </p:sp>
+        <p:sp>
+          <p:nvSpPr>
+            <p:cNvPr id="75" name="tx75"/>
+            <p:cNvSpPr/>
+            <p:nvPr/>
+          </p:nvSpPr>
+          <p:spPr>
+            <a:xfrm>
+              <a:off x="762297" y="4655634"/>
+              <a:ext cx="62179" cy="80101"/>
+            </a:xfrm>
+            <a:prstGeom prst="rect">
+              <a:avLst/>
+            </a:prstGeom>
+            <a:noFill/>
+          </p:spPr>
+          <p:txBody>
+            <a:bodyPr lIns="0" rIns="0" tIns="0" bIns="0" anchorCtr="1" anchor="ctr" wrap="none"/>
+            <a:lstStyle/>
+            <a:p>
+              <a:pPr algn="l" marL="0" marR="0" indent="0">
+                <a:lnSpc>
+                  <a:spcPts val="880"/>
+                </a:lnSpc>
+                <a:spcBef>
+                  <a:spcPts val="0"/>
+                </a:spcBef>
+                <a:spcAft>
+                  <a:spcPts val="0"/>
+                </a:spcAft>
+              </a:pPr>
+              <a:r>
+                <a:rPr sz="880">
+                  <a:solidFill>
+                    <a:srgbClr val="4D4D4D">
+                      <a:alpha val="100000"/>
+                    </a:srgbClr>
+                  </a:solidFill>
+                  <a:latin typeface="Helvetica"/>
+                  <a:cs typeface="Helvetica"/>
+                </a:rPr>
+                <a:t>3</a:t>
+              </a:r>
+            </a:p>
+          </p:txBody>
+        </p:sp>
+        <p:sp>
+          <p:nvSpPr>
+            <p:cNvPr id="76" name="tx76"/>
+            <p:cNvSpPr/>
+            <p:nvPr/>
+          </p:nvSpPr>
+          <p:spPr>
+            <a:xfrm>
+              <a:off x="762297" y="4356300"/>
+              <a:ext cx="62179" cy="80101"/>
+            </a:xfrm>
+            <a:prstGeom prst="rect">
+              <a:avLst/>
+            </a:prstGeom>
+            <a:noFill/>
+          </p:spPr>
+          <p:txBody>
+            <a:bodyPr lIns="0" rIns="0" tIns="0" bIns="0" anchorCtr="1" anchor="ctr" wrap="none"/>
+            <a:lstStyle/>
+            <a:p>
+              <a:pPr algn="l" marL="0" marR="0" indent="0">
+                <a:lnSpc>
+                  <a:spcPts val="880"/>
+                </a:lnSpc>
+                <a:spcBef>
+                  <a:spcPts val="0"/>
+                </a:spcBef>
+                <a:spcAft>
+                  <a:spcPts val="0"/>
+                </a:spcAft>
+              </a:pPr>
+              <a:r>
+                <a:rPr sz="880">
+                  <a:solidFill>
+                    <a:srgbClr val="4D4D4D">
+                      <a:alpha val="100000"/>
+                    </a:srgbClr>
+                  </a:solidFill>
+                  <a:latin typeface="Helvetica"/>
+                  <a:cs typeface="Helvetica"/>
+                </a:rPr>
+                <a:t>4</a:t>
+              </a:r>
+            </a:p>
+          </p:txBody>
+        </p:sp>
+        <p:sp>
+          <p:nvSpPr>
+            <p:cNvPr id="77" name="tx77"/>
+            <p:cNvSpPr/>
+            <p:nvPr/>
+          </p:nvSpPr>
+          <p:spPr>
+            <a:xfrm>
+              <a:off x="1133333" y="5716183"/>
+              <a:ext cx="161574" cy="80101"/>
+            </a:xfrm>
+            <a:prstGeom prst="rect">
+              <a:avLst/>
+            </a:prstGeom>
+            <a:noFill/>
+          </p:spPr>
+          <p:txBody>
+            <a:bodyPr lIns="0" rIns="0" tIns="0" bIns="0" anchorCtr="1" anchor="ctr" wrap="none"/>
+            <a:lstStyle/>
+            <a:p>
+              <a:pPr algn="l" marL="0" marR="0" indent="0">
+                <a:lnSpc>
+                  <a:spcPts val="880"/>
+                </a:lnSpc>
+                <a:spcBef>
+                  <a:spcPts val="0"/>
+                </a:spcBef>
+                <a:spcAft>
+                  <a:spcPts val="0"/>
+                </a:spcAft>
+              </a:pPr>
+              <a:r>
+                <a:rPr sz="880">
+                  <a:solidFill>
+                    <a:srgbClr val="4D4D4D">
+                      <a:alpha val="100000"/>
+                    </a:srgbClr>
+                  </a:solidFill>
+                  <a:latin typeface="Helvetica"/>
+                  <a:cs typeface="Helvetica"/>
+                </a:rPr>
+                <a:t>-40</a:t>
+              </a:r>
+            </a:p>
+          </p:txBody>
+        </p:sp>
+        <p:sp>
+          <p:nvSpPr>
+            <p:cNvPr id="78" name="tx78"/>
+            <p:cNvSpPr/>
+            <p:nvPr/>
+          </p:nvSpPr>
+          <p:spPr>
+            <a:xfrm>
+              <a:off x="1978619" y="5716183"/>
+              <a:ext cx="161574" cy="80101"/>
+            </a:xfrm>
+            <a:prstGeom prst="rect">
+              <a:avLst/>
+            </a:prstGeom>
+            <a:noFill/>
+          </p:spPr>
+          <p:txBody>
+            <a:bodyPr lIns="0" rIns="0" tIns="0" bIns="0" anchorCtr="1" anchor="ctr" wrap="none"/>
+            <a:lstStyle/>
+            <a:p>
+              <a:pPr algn="l" marL="0" marR="0" indent="0">
+                <a:lnSpc>
+                  <a:spcPts val="880"/>
+                </a:lnSpc>
+                <a:spcBef>
+                  <a:spcPts val="0"/>
+                </a:spcBef>
+                <a:spcAft>
+                  <a:spcPts val="0"/>
+                </a:spcAft>
+              </a:pPr>
+              <a:r>
+                <a:rPr sz="880">
+                  <a:solidFill>
+                    <a:srgbClr val="4D4D4D">
+                      <a:alpha val="100000"/>
+                    </a:srgbClr>
+                  </a:solidFill>
+                  <a:latin typeface="Helvetica"/>
+                  <a:cs typeface="Helvetica"/>
+                </a:rPr>
+                <a:t>-30</a:t>
+              </a:r>
+            </a:p>
+          </p:txBody>
+        </p:sp>
+        <p:sp>
+          <p:nvSpPr>
+            <p:cNvPr id="79" name="tx79"/>
+            <p:cNvSpPr/>
+            <p:nvPr/>
+          </p:nvSpPr>
+          <p:spPr>
+            <a:xfrm>
+              <a:off x="2823906" y="5716183"/>
+              <a:ext cx="161574" cy="80101"/>
+            </a:xfrm>
+            <a:prstGeom prst="rect">
+              <a:avLst/>
+            </a:prstGeom>
+            <a:noFill/>
+          </p:spPr>
+          <p:txBody>
+            <a:bodyPr lIns="0" rIns="0" tIns="0" bIns="0" anchorCtr="1" anchor="ctr" wrap="none"/>
+            <a:lstStyle/>
+            <a:p>
+              <a:pPr algn="l" marL="0" marR="0" indent="0">
+                <a:lnSpc>
+                  <a:spcPts val="880"/>
+                </a:lnSpc>
+                <a:spcBef>
+                  <a:spcPts val="0"/>
+                </a:spcBef>
+                <a:spcAft>
+                  <a:spcPts val="0"/>
+                </a:spcAft>
+              </a:pPr>
+              <a:r>
+                <a:rPr sz="880">
+                  <a:solidFill>
+                    <a:srgbClr val="4D4D4D">
+                      <a:alpha val="100000"/>
+                    </a:srgbClr>
+                  </a:solidFill>
+                  <a:latin typeface="Helvetica"/>
+                  <a:cs typeface="Helvetica"/>
+                </a:rPr>
+                <a:t>-20</a:t>
+              </a:r>
+            </a:p>
+          </p:txBody>
+        </p:sp>
+        <p:sp>
+          <p:nvSpPr>
+            <p:cNvPr id="80" name="tx80"/>
+            <p:cNvSpPr/>
+            <p:nvPr/>
+          </p:nvSpPr>
+          <p:spPr>
+            <a:xfrm>
+              <a:off x="3669192" y="5716183"/>
+              <a:ext cx="161574" cy="80101"/>
+            </a:xfrm>
+            <a:prstGeom prst="rect">
+              <a:avLst/>
+            </a:prstGeom>
+            <a:noFill/>
+          </p:spPr>
+          <p:txBody>
+            <a:bodyPr lIns="0" rIns="0" tIns="0" bIns="0" anchorCtr="1" anchor="ctr" wrap="none"/>
+            <a:lstStyle/>
+            <a:p>
+              <a:pPr algn="l" marL="0" marR="0" indent="0">
+                <a:lnSpc>
+                  <a:spcPts val="880"/>
+                </a:lnSpc>
+                <a:spcBef>
+                  <a:spcPts val="0"/>
+                </a:spcBef>
+                <a:spcAft>
+                  <a:spcPts val="0"/>
+                </a:spcAft>
+              </a:pPr>
+              <a:r>
+                <a:rPr sz="880">
+                  <a:solidFill>
+                    <a:srgbClr val="4D4D4D">
+                      <a:alpha val="100000"/>
+                    </a:srgbClr>
+                  </a:solidFill>
+                  <a:latin typeface="Helvetica"/>
+                  <a:cs typeface="Helvetica"/>
+                </a:rPr>
+                <a:t>-10</a:t>
+              </a:r>
+            </a:p>
+          </p:txBody>
+        </p:sp>
+        <p:sp>
+          <p:nvSpPr>
+            <p:cNvPr id="81" name="tx81"/>
+            <p:cNvSpPr/>
+            <p:nvPr/>
+          </p:nvSpPr>
+          <p:spPr>
+            <a:xfrm>
+              <a:off x="4564176" y="5716183"/>
+              <a:ext cx="62179" cy="80101"/>
+            </a:xfrm>
+            <a:prstGeom prst="rect">
+              <a:avLst/>
+            </a:prstGeom>
+            <a:noFill/>
+          </p:spPr>
+          <p:txBody>
+            <a:bodyPr lIns="0" rIns="0" tIns="0" bIns="0" anchorCtr="1" anchor="ctr" wrap="none"/>
+            <a:lstStyle/>
+            <a:p>
+              <a:pPr algn="l" marL="0" marR="0" indent="0">
+                <a:lnSpc>
+                  <a:spcPts val="880"/>
+                </a:lnSpc>
+                <a:spcBef>
+                  <a:spcPts val="0"/>
+                </a:spcBef>
+                <a:spcAft>
+                  <a:spcPts val="0"/>
+                </a:spcAft>
+              </a:pPr>
+              <a:r>
+                <a:rPr sz="880">
+                  <a:solidFill>
+                    <a:srgbClr val="4D4D4D">
+                      <a:alpha val="100000"/>
+                    </a:srgbClr>
+                  </a:solidFill>
+                  <a:latin typeface="Helvetica"/>
+                  <a:cs typeface="Helvetica"/>
+                </a:rPr>
+                <a:t>0</a:t>
+              </a:r>
+            </a:p>
+          </p:txBody>
+        </p:sp>
+        <p:sp>
+          <p:nvSpPr>
+            <p:cNvPr id="82" name="tx82"/>
+            <p:cNvSpPr/>
+            <p:nvPr/>
+          </p:nvSpPr>
+          <p:spPr>
+            <a:xfrm>
+              <a:off x="5378373" y="5716183"/>
+              <a:ext cx="124358" cy="80101"/>
+            </a:xfrm>
+            <a:prstGeom prst="rect">
+              <a:avLst/>
+            </a:prstGeom>
+            <a:noFill/>
+          </p:spPr>
+          <p:txBody>
+            <a:bodyPr lIns="0" rIns="0" tIns="0" bIns="0" anchorCtr="1" anchor="ctr" wrap="none"/>
+            <a:lstStyle/>
+            <a:p>
+              <a:pPr algn="l" marL="0" marR="0" indent="0">
+                <a:lnSpc>
+                  <a:spcPts val="880"/>
+                </a:lnSpc>
+                <a:spcBef>
+                  <a:spcPts val="0"/>
+                </a:spcBef>
+                <a:spcAft>
+                  <a:spcPts val="0"/>
+                </a:spcAft>
+              </a:pPr>
+              <a:r>
+                <a:rPr sz="880">
+                  <a:solidFill>
+                    <a:srgbClr val="4D4D4D">
+                      <a:alpha val="100000"/>
+                    </a:srgbClr>
+                  </a:solidFill>
+                  <a:latin typeface="Helvetica"/>
+                  <a:cs typeface="Helvetica"/>
+                </a:rPr>
+                <a:t>10</a:t>
+              </a:r>
+            </a:p>
+          </p:txBody>
+        </p:sp>
+        <p:sp>
+          <p:nvSpPr>
+            <p:cNvPr id="83" name="tx83"/>
+            <p:cNvSpPr/>
+            <p:nvPr/>
+          </p:nvSpPr>
+          <p:spPr>
+            <a:xfrm>
+              <a:off x="6223659" y="5716183"/>
+              <a:ext cx="124358" cy="80101"/>
+            </a:xfrm>
+            <a:prstGeom prst="rect">
+              <a:avLst/>
+            </a:prstGeom>
+            <a:noFill/>
+          </p:spPr>
+          <p:txBody>
+            <a:bodyPr lIns="0" rIns="0" tIns="0" bIns="0" anchorCtr="1" anchor="ctr" wrap="none"/>
+            <a:lstStyle/>
+            <a:p>
+              <a:pPr algn="l" marL="0" marR="0" indent="0">
+                <a:lnSpc>
+                  <a:spcPts val="880"/>
+                </a:lnSpc>
+                <a:spcBef>
+                  <a:spcPts val="0"/>
+                </a:spcBef>
+                <a:spcAft>
+                  <a:spcPts val="0"/>
+                </a:spcAft>
+              </a:pPr>
+              <a:r>
+                <a:rPr sz="880">
+                  <a:solidFill>
+                    <a:srgbClr val="4D4D4D">
+                      <a:alpha val="100000"/>
+                    </a:srgbClr>
+                  </a:solidFill>
+                  <a:latin typeface="Helvetica"/>
+                  <a:cs typeface="Helvetica"/>
+                </a:rPr>
+                <a:t>20</a:t>
+              </a:r>
+            </a:p>
+          </p:txBody>
+        </p:sp>
+        <p:sp>
+          <p:nvSpPr>
+            <p:cNvPr id="84" name="tx84"/>
+            <p:cNvSpPr/>
+            <p:nvPr/>
+          </p:nvSpPr>
+          <p:spPr>
+            <a:xfrm>
+              <a:off x="7068946" y="5716183"/>
+              <a:ext cx="124358" cy="80101"/>
+            </a:xfrm>
+            <a:prstGeom prst="rect">
+              <a:avLst/>
+            </a:prstGeom>
+            <a:noFill/>
+          </p:spPr>
+          <p:txBody>
+            <a:bodyPr lIns="0" rIns="0" tIns="0" bIns="0" anchorCtr="1" anchor="ctr" wrap="none"/>
+            <a:lstStyle/>
+            <a:p>
+              <a:pPr algn="l" marL="0" marR="0" indent="0">
+                <a:lnSpc>
+                  <a:spcPts val="880"/>
+                </a:lnSpc>
+                <a:spcBef>
+                  <a:spcPts val="0"/>
+                </a:spcBef>
+                <a:spcAft>
+                  <a:spcPts val="0"/>
+                </a:spcAft>
+              </a:pPr>
+              <a:r>
+                <a:rPr sz="880">
+                  <a:solidFill>
+                    <a:srgbClr val="4D4D4D">
+                      <a:alpha val="100000"/>
+                    </a:srgbClr>
+                  </a:solidFill>
+                  <a:latin typeface="Helvetica"/>
+                  <a:cs typeface="Helvetica"/>
+                </a:rPr>
+                <a:t>30</a:t>
+              </a:r>
+            </a:p>
+          </p:txBody>
+        </p:sp>
+        <p:sp>
+          <p:nvSpPr>
+            <p:cNvPr id="85" name="tx85"/>
+            <p:cNvSpPr/>
+            <p:nvPr/>
+          </p:nvSpPr>
+          <p:spPr>
+            <a:xfrm>
+              <a:off x="7914232" y="5716183"/>
+              <a:ext cx="124358" cy="80101"/>
+            </a:xfrm>
+            <a:prstGeom prst="rect">
+              <a:avLst/>
+            </a:prstGeom>
+            <a:noFill/>
+          </p:spPr>
+          <p:txBody>
+            <a:bodyPr lIns="0" rIns="0" tIns="0" bIns="0" anchorCtr="1" anchor="ctr" wrap="none"/>
+            <a:lstStyle/>
+            <a:p>
+              <a:pPr algn="l" marL="0" marR="0" indent="0">
+                <a:lnSpc>
+                  <a:spcPts val="880"/>
+                </a:lnSpc>
+                <a:spcBef>
+                  <a:spcPts val="0"/>
+                </a:spcBef>
+                <a:spcAft>
+                  <a:spcPts val="0"/>
+                </a:spcAft>
+              </a:pPr>
+              <a:r>
+                <a:rPr sz="880">
+                  <a:solidFill>
+                    <a:srgbClr val="4D4D4D">
+                      <a:alpha val="100000"/>
+                    </a:srgbClr>
+                  </a:solidFill>
+                  <a:latin typeface="Helvetica"/>
+                  <a:cs typeface="Helvetica"/>
+                </a:rPr>
+                <a:t>40</a:t>
+              </a:r>
+            </a:p>
+          </p:txBody>
+        </p:sp>
+        <p:sp>
+          <p:nvSpPr>
+            <p:cNvPr id="86" name="tx86"/>
+            <p:cNvSpPr/>
+            <p:nvPr/>
+          </p:nvSpPr>
+          <p:spPr>
+            <a:xfrm>
+              <a:off x="2928340" y="5855859"/>
+              <a:ext cx="3578047" cy="100218"/>
+            </a:xfrm>
+            <a:prstGeom prst="rect">
+              <a:avLst/>
+            </a:prstGeom>
+            <a:noFill/>
+          </p:spPr>
+          <p:txBody>
+            <a:bodyPr lIns="0" rIns="0" tIns="0" bIns="0" anchorCtr="1" anchor="ctr" wrap="none"/>
+            <a:lstStyle/>
+            <a:p>
+              <a:pPr algn="l" marL="0" marR="0" indent="0">
+                <a:lnSpc>
+                  <a:spcPts val="1100"/>
+                </a:lnSpc>
+                <a:spcBef>
+                  <a:spcPts val="0"/>
+                </a:spcBef>
+                <a:spcAft>
+                  <a:spcPts val="0"/>
+                </a:spcAft>
+              </a:pPr>
+              <a:r>
+                <a:rPr sz="1100">
+                  <a:solidFill>
+                    <a:srgbClr val="000000">
+                      <a:alpha val="100000"/>
+                    </a:srgbClr>
+                  </a:solidFill>
+                  <a:latin typeface="Helvetica"/>
+                  <a:cs typeface="Helvetica"/>
+                </a:rPr>
+                <a:t>eGFR difference (%): 100 × (CKD-EPI Cr-Cys − CG) / CG</a:t>
+              </a:r>
+            </a:p>
+          </p:txBody>
+        </p:sp>
+        <p:sp>
+          <p:nvSpPr>
+            <p:cNvPr id="87" name="tx87"/>
+            <p:cNvSpPr/>
+            <p:nvPr/>
+          </p:nvSpPr>
+          <p:spPr>
+            <a:xfrm rot="-5400000">
+              <a:off x="250689" y="4944909"/>
+              <a:ext cx="791596" cy="100218"/>
+            </a:xfrm>
+            <a:prstGeom prst="rect">
+              <a:avLst/>
+            </a:prstGeom>
+            <a:noFill/>
+          </p:spPr>
+          <p:txBody>
+            <a:bodyPr lIns="0" rIns="0" tIns="0" bIns="0" anchorCtr="1" anchor="ctr" wrap="none"/>
+            <a:lstStyle/>
+            <a:p>
+              <a:pPr algn="l" marL="0" marR="0" indent="0">
+                <a:lnSpc>
+                  <a:spcPts val="1100"/>
+                </a:lnSpc>
+                <a:spcBef>
+                  <a:spcPts val="0"/>
+                </a:spcBef>
+                <a:spcAft>
+                  <a:spcPts val="0"/>
+                </a:spcAft>
+              </a:pPr>
+              <a:r>
+                <a:rPr sz="1100">
+                  <a:solidFill>
+                    <a:srgbClr val="000000">
+                      <a:alpha val="100000"/>
+                    </a:srgbClr>
+                  </a:solidFill>
+                  <a:latin typeface="Helvetica"/>
+                  <a:cs typeface="Helvetica"/>
+                </a:rPr>
+                <a:t>HR (95% CI)</a:t>
+              </a:r>
+            </a:p>
+          </p:txBody>
+        </p:sp>
+        <p:sp>
+          <p:nvSpPr>
+            <p:cNvPr id="88" name="tx88"/>
+            <p:cNvSpPr/>
+            <p:nvPr/>
+          </p:nvSpPr>
+          <p:spPr>
+            <a:xfrm>
+              <a:off x="887106" y="4159544"/>
+              <a:ext cx="6867875" cy="82021"/>
+            </a:xfrm>
+            <a:prstGeom prst="rect">
+              <a:avLst/>
+            </a:prstGeom>
+            <a:noFill/>
+          </p:spPr>
+          <p:txBody>
+            <a:bodyPr lIns="0" rIns="0" tIns="0" bIns="0" anchorCtr="1" anchor="ctr" wrap="none"/>
+            <a:lstStyle/>
+            <a:p>
+              <a:pPr algn="l" marL="0" marR="0" indent="0">
+                <a:lnSpc>
+                  <a:spcPts val="900"/>
+                </a:lnSpc>
+                <a:spcBef>
+                  <a:spcPts val="0"/>
+                </a:spcBef>
+                <a:spcAft>
+                  <a:spcPts val="0"/>
+                </a:spcAft>
+              </a:pPr>
+              <a:r>
+                <a:rPr sz="900">
+                  <a:solidFill>
+                    <a:srgbClr val="404040">
+                      <a:alpha val="100000"/>
+                    </a:srgbClr>
+                  </a:solidFill>
+                  <a:latin typeface="Helvetica"/>
+                  <a:cs typeface="Helvetica"/>
+                </a:rPr>
+                <a:t>HR per 10 % decline: 1.70 (1.35-2.13), p_Bonf = &lt;0.001 (n = 6)  |  per IQR decline (Δ = 29.3 %): 4.72 (2.43-9.16)  |  IQR: [-14.6, 14.7] %</a:t>
+              </a:r>
+            </a:p>
+          </p:txBody>
+        </p:sp>
+        <p:sp>
+          <p:nvSpPr>
+            <p:cNvPr id="89" name="tx89"/>
+            <p:cNvSpPr/>
+            <p:nvPr/>
+          </p:nvSpPr>
+          <p:spPr>
+            <a:xfrm>
+              <a:off x="887106" y="3932770"/>
               <a:ext cx="1768906" cy="120152"/>
             </a:xfrm>
             <a:prstGeom prst="rect">
